--- a/examples/pptx/immersion-2-3-making-it-demoable.pptx
+++ b/examples/pptx/immersion-2-3-making-it-demoable.pptx
@@ -551,7 +551,7 @@
           <a:lstStyle/>
           <a:p>
             <a:r>
-              <a:t>Last session of Day 2. They have a pipeline that runs; nobody outside the team can use it. This hour closes that gap and hands Day 3 something to attack.</a:t>
+              <a:t>This is session 2.3, Making It Demoable. You have a pipeline that runs; right now nobody outside your team can use it.</a:t>
             </a:r>
           </a:p>
         </p:txBody>
@@ -621,7 +621,7 @@
           <a:lstStyle/>
           <a:p>
             <a:r>
-              <a:t>Define it by its job rather than its technology. If a person needs you on a call to get a result, you do not have a front end yet, however much HTML exists.</a:t>
+              <a:t>A front end is the part that works without you in the room. If somebody needs you on a call to get a result, you do not have one yet.</a:t>
             </a:r>
           </a:p>
         </p:txBody>
@@ -691,7 +691,7 @@
           <a:lstStyle/>
           <a:p>
             <a:r>
-              <a:t>Four needs, in the order they hit. Most prototypes fail the first — the page opens and there is no sentence saying what the thing is for. That sentence is the cheapest fix available today.</a:t>
+              <a:t>A stranger needs four things, in this order: to know what this thing does, something obvious to click, a result they can read, and no instructions from you.</a:t>
             </a:r>
           </a:p>
         </p:txBody>
@@ -761,7 +761,7 @@
           <a:lstStyle/>
           <a:p>
             <a:r>
-              <a:t>Both are named in the syllabus and both are legitimate. Push the room toward the left column unless a team has a specific reason — the time saved goes into the script and the caveats, which are worth more.</a:t>
+              <a:t>Two honest options. A Claude Artifact takes minutes, comes with a shareable link, and is good enough to be judged. A page you host gives more control, takes more time, and is yours after the week.</a:t>
             </a:r>
           </a:p>
         </p:txBody>
@@ -831,7 +831,7 @@
           <a:lstStyle/>
           <a:p>
             <a:r>
-              <a:t>The trade in three rows. Control is the only column the hosted page wins, and control is worth very little in a demo that lasts three minutes and then never runs again.</a:t>
+              <a:t>Artifact versus hosted page, in three rows. Minutes to live against an hour or more. Limited control against total control. Low demo risk against risk you manage yourself.</a:t>
             </a:r>
           </a:p>
         </p:txBody>
@@ -901,7 +901,7 @@
           <a:lstStyle/>
           <a:p>
             <a:r>
-              <a:t>Say what it removes: no repo, no build step, no hosting decision. For a team whose interesting work is in the pipeline rather than the interface, that is the whole problem solved.</a:t>
+              <a:t>A Claude Artifact is a working page Claude builds and hosts for you — no repo, no build step, no hosting decision.</a:t>
             </a:r>
           </a:p>
         </p:txBody>
@@ -971,7 +971,7 @@
           <a:lstStyle/>
           <a:p>
             <a:r>
-              <a:t>Step two prevents the classic failure of a beautiful layout that breaks the moment real output arrives. Give it the actual JSON from this morning, not a description of the shape.</a:t>
+              <a:t>Three steps either way. Describe the one screen: input, button, result, nothing else. Paste in a real result so the layout fits actual output. Then drive it yourself cold, in a new tab, with no context.</a:t>
             </a:r>
           </a:p>
         </p:txBody>
@@ -1041,7 +1041,7 @@
           <a:lstStyle/>
           <a:p>
             <a:r>
-              <a:t>Five lines that produce something usable on the first try. The fourth line is the one people leave out, and it is the reason their first attempt looks wrong.</a:t>
+              <a:t>Here is the ask. One page, a box to paste into, a Run button, the result below — and this exact output as the example. Plain and readable, no styling flourish.</a:t>
             </a:r>
           </a:p>
         </p:txBody>
@@ -1111,7 +1111,7 @@
           <a:lstStyle/>
           <a:p>
             <a:r>
-              <a:t>Four elements, and the second is the highest-leverage. A pre-filled example means a stranger gets a result on their first click instead of staring at an empty box wondering what to type.</a:t>
+              <a:t>Four things on the page: one sentence saying what it does, an example input already filled in, the result readable as text, and a line saying what is faked.</a:t>
             </a:r>
           </a:p>
         </p:txBody>
@@ -1181,7 +1181,7 @@
           <a:lstStyle/>
           <a:p>
             <a:r>
-              <a:t>Same ban list logic as 2.2. Each of these is real work that no one evaluating a two-day prototype will credit you for, and each is an hour you do not have.</a:t>
+              <a:t>Leave out accounts and sign-in, settings and options, a second page of any kind, and anything you would end up styling twice.</a:t>
             </a:r>
           </a:p>
         </p:txBody>
@@ -1251,7 +1251,7 @@
           <a:lstStyle/>
           <a:p>
             <a:r>
-              <a:t>The third is the only error handling allowed today, and it is one line: when something fails, say so on the page. A silent blank screen is what makes a demo look broken rather than limited.</a:t>
+              <a:t>Three tests of drivable. One click to a result, from landing on the page with nothing typed. Obvious what happened, so the output reads without you explaining it. And it survives a bad input by saying something rather than showing nothing.</a:t>
             </a:r>
           </a:p>
         </p:txBody>
@@ -1321,7 +1321,7 @@
           <a:lstStyle/>
           <a:p>
             <a:r>
-              <a:t>The deliverable in one line: a link they can send to someone who is not in this room. Everything else this hour — the script, the caveats — hangs off that link existing.</a:t>
+              <a:t>Fifty minutes, and you leave with a link you can send to somebody who is not in this room.</a:t>
             </a:r>
           </a:p>
         </p:txBody>
@@ -1391,7 +1391,7 @@
           <a:lstStyle/>
           <a:p>
             <a:r>
-              <a:t>Four failure modes, all found by watching one person use it. Do not help them. The urge to reach over and click is exactly the information you came for.</a:t>
+              <a:t>Four things to watch for: an empty box with no hint, a result that needs your voice to make sense, a spinner that never finishes, and output only you can read.</a:t>
             </a:r>
           </a:p>
         </p:txBody>
@@ -1461,7 +1461,7 @@
           <a:lstStyle/>
           <a:p>
             <a:r>
-              <a:t>Second objective. Short, mechanical, and non-negotiable. The syllabus is explicit that the demo must not depend on your laptop staying open, and there is a reason it is written that way.</a:t>
+              <a:t>Second objective: getting it off your laptop, which the syllabus is explicit about.</a:t>
             </a:r>
           </a:p>
         </p:txBody>
@@ -1531,7 +1531,7 @@
           <a:lstStyle/>
           <a:p>
             <a:r>
-              <a:t>Ask it plainly. Every failed demo anyone in the room has seen was a local thing that stopped being reachable. A public URL removes the entire category for the price of ten minutes.</a:t>
+              <a:t>What if the wifi drops? Every failed demo any of us has seen was a local thing that stopped being reachable.</a:t>
             </a:r>
           </a:p>
         </p:txBody>
@@ -1601,7 +1601,7 @@
           <a:lstStyle/>
           <a:p>
             <a:r>
-              <a:t>Four reasons, and the fourth is specific to this week. Day 3's red team needs to reach the thing without you present; a localhost demo cannot be attacked, which sounds good and is not.</a:t>
+              <a:t>Localhost is not a demo. It dies when your laptop sleeps, nobody can open it later, you cannot send it to anyone, and tomorrow's red team cannot test it.</a:t>
             </a:r>
           </a:p>
         </p:txBody>
@@ -1671,7 +1671,7 @@
           <a:lstStyle/>
           <a:p>
             <a:r>
-              <a:t>Both named in the syllabus. Pages if the front end is a static file and the repo already exists; Cloudflare if something has to run server-side. Do not let this choice take more than two minutes.</a:t>
+              <a:t>Two ways to ship. GitHub Pages is already where your code is, a commit is a deploy, and it serves static pages only. Cloudflare handles more than static and is fast to set up, but it is another account to make.</a:t>
             </a:r>
           </a:p>
         </p:txBody>
@@ -1741,7 +1741,7 @@
           <a:lstStyle/>
           <a:p>
             <a:r>
-              <a:t>Three steps, under five minutes. The waiting in step three catches people out — they check immediately, see a 404, and assume it failed. Tell them to wait.</a:t>
+              <a:t>Three steps with Pages. Put the page in the repo, as index dot html at the root or in docs. Turn Pages on in settings and pick the branch. Then wait — the first build takes a minute or two — and open the URL.</a:t>
             </a:r>
           </a:p>
         </p:txBody>
@@ -1811,7 +1811,7 @@
           <a:lstStyle/>
           <a:p>
             <a:r>
-              <a:t>Five lines. Note the last is a click, not a command — the one manual step today that is genuinely unavoidable, and it only ever happens once per repo.</a:t>
+              <a:t>Five lines from repo to public URL: copy the page into docs, add it, commit, push, then turn Pages on in settings. That last one is a click rather than a command, and it happens once per repo.</a:t>
             </a:r>
           </a:p>
         </p:txBody>
@@ -1881,7 +1881,7 @@
           <a:lstStyle/>
           <a:p>
             <a:r>
-              <a:t>Four things that work on a laptop and not on the internet. Each is found in seconds by opening the public URL in a private window, which is the very next slide.</a:t>
+              <a:t>Four things that work on a laptop and not on the internet: paths that only exist locally, a key that was in your shell, a file you never committed, and anything reading your disk.</a:t>
             </a:r>
           </a:p>
         </p:txBody>
@@ -1951,7 +1951,7 @@
           <a:lstStyle/>
           <a:p>
             <a:r>
-              <a:t>Thirty seconds that prevent a genuinely bad week. Remind them a public repo is public forever, including its history — deleting a key in a later commit does not remove it.</a:t>
+              <a:t>Thirty seconds before you share it. No API keys in the page, no keys anywhere in the repo history, nothing private in the fixture, and nothing you cannot show. A public repo is public forever, history included.</a:t>
             </a:r>
           </a:p>
         </p:txBody>
@@ -2021,7 +2021,7 @@
           <a:lstStyle/>
           <a:p>
             <a:r>
-              <a:t>The single most valuable ten minutes of the session. Nearly every team finds at least one break here, and every one of those breaks would otherwise have surfaced in front of an audience.</a:t>
+              <a:t>Three steps, and this is the most valuable ten minutes of the session. Open a private window — no logins, no cache, no extensions. Do nothing but click, typing nothing you have not pre-filled. Then try it on a phone, because half the people you send it to will.</a:t>
             </a:r>
           </a:p>
         </p:txBody>
@@ -2091,7 +2091,7 @@
           <a:lstStyle/>
           <a:p>
             <a:r>
-              <a:t>Three syllabus objectives across four moves. The fourth feels optional and is not: an undocumented fake is the single easiest thing for tomorrow's red team to find.</a:t>
+              <a:t>Four things this session. We wrap it so a stranger can drive it, ship it to a public URL, write a three-minute script, and document what is faked.</a:t>
             </a:r>
           </a:p>
         </p:txBody>
@@ -2161,7 +2161,7 @@
           <a:lstStyle/>
           <a:p>
             <a:r>
-              <a:t>Read this at 11:20 regardless. The order of sacrifice matters: the front end is the most expendable thing in this session, and the caveat list is the least, which is the opposite of what teams assume.</a:t>
+              <a:t>If you are behind: ship what exists, because an ugly live page beats a good local one. Drop the front end if you must — a page showing one saved result still counts. But never drop the caveats; five honest lines take two minutes.</a:t>
             </a:r>
           </a:p>
         </p:txBody>
@@ -2231,7 +2231,7 @@
           <a:lstStyle/>
           <a:p>
             <a:r>
-              <a:t>Four checks, all binary. Run them as a team out loud. The third is the one the syllabus actually asks for, and the easiest to verify — close the lid and have someone else try.</a:t>
+              <a:t>Four checks, all binary. Private window: it loads and runs. Phone: you can read the output. Laptop closed: a teammate can still open it. No secrets: nothing in the page or the repo.</a:t>
             </a:r>
           </a:p>
         </p:txBody>
@@ -2301,7 +2301,7 @@
           <a:lstStyle/>
           <a:p>
             <a:r>
-              <a:t>The line to repeat when a team says their local version is basically the same thing. It is not the same thing, and the difference shows up at the worst possible moment.</a:t>
+              <a:t>Needs your laptop? Not shipped. A local version is not basically the same thing.</a:t>
             </a:r>
           </a:p>
         </p:txBody>
@@ -2371,7 +2371,7 @@
           <a:lstStyle/>
           <a:p>
             <a:r>
-              <a:t>Third objective, and the part that separates teams tomorrow. A working demo badly narrated loses to a modest demo explained well, every time.</a:t>
+              <a:t>Third objective, and this is what separates teams tomorrow: the script and the caveats.</a:t>
             </a:r>
           </a:p>
         </p:txBody>
@@ -2441,7 +2441,7 @@
           <a:lstStyle/>
           <a:p>
             <a:r>
-              <a:t>Insist on written. Teams believe they will improvise fine and then spend ninety seconds explaining their architecture to people who wanted to see it work.</a:t>
+              <a:t>A demo script is the three minutes, written down word for word. Written, because improvising turns into ninety seconds of architecture nobody asked for.</a:t>
             </a:r>
           </a:p>
         </p:txBody>
@@ -2511,7 +2511,7 @@
           <a:lstStyle/>
           <a:p>
             <a:r>
-              <a:t>A structure that works. The largest block is the demo itself, and the word to stress is silence — narrating every click is what eats the time and undercuts the thing running.</a:t>
+              <a:t>Here is a structure that works. Thirty seconds on the problem, concretely. Ninety seconds driving it live, in silence. Thirty seconds on what is real and what is not. Thirty seconds on what you would build next.</a:t>
             </a:r>
           </a:p>
         </p:txBody>
@@ -2581,7 +2581,7 @@
           <a:lstStyle/>
           <a:p>
             <a:r>
-              <a:t>The opening they will be tempted to make longest. It is the shortest. Everything they learned in 1.1 about a precise problem statement pays out right here, in three sentences.</a:t>
+              <a:t>The first thirty seconds: name who has the problem, say what it costs them today, one sentence with no background — then stop and show it.</a:t>
             </a:r>
           </a:p>
         </p:txBody>
@@ -2651,7 +2651,7 @@
           <a:lstStyle/>
           <a:p>
             <a:r>
-              <a:t>Four phrases that lose the room. The second and third are apologies nobody asked for; the fourth is a team talking themselves down in public. State limits as facts instead — that is what the caveat list is for.</a:t>
+              <a:t>Four phrases that lose the room. “Let me explain the architecture.” “Normally this works.” “We ran out of time to.” And “it is basically just a wrapper.”</a:t>
             </a:r>
           </a:p>
         </p:txBody>
@@ -2721,7 +2721,7 @@
           <a:lstStyle/>
           <a:p>
             <a:r>
-              <a:t>Twenty minutes of rehearsal beats another twenty of building at this stage. Step two is the one that finds the parts only muscle memory was holding together.</a:t>
+              <a:t>Three steps. Time it out loud, because silently in your head is always shorter. Have someone else drive, since the builder's hands hide the rough edges. Then cut until it fits — three minutes means three minutes.</a:t>
             </a:r>
           </a:p>
         </p:txBody>
@@ -2791,7 +2791,7 @@
           <a:lstStyle/>
           <a:p>
             <a:r>
-              <a:t>Introduce it as an asset, not a confession. A written caveat list is the difference between a team that knows its own system and one that is about to be surprised by it in public.</a:t>
+              <a:t>A caveat list is everything stubbed, faked, or known to break. It is an asset rather than a confession.</a:t>
             </a:r>
           </a:p>
         </p:txBody>
@@ -2861,7 +2861,7 @@
           <a:lstStyle/>
           <a:p>
             <a:r>
-              <a:t>The question 2.2 ended on, now the one to answer. Make them picture a specific stranger — a friend, a recruiter — opening a link with no explanation from them at all.</a:t>
+              <a:t>Could a stranger drive it? Picture a specific one — a friend, a recruiter — opening a link with no explanation from you at all.</a:t>
             </a:r>
           </a:p>
         </p:txBody>
@@ -2931,7 +2931,7 @@
           <a:lstStyle/>
           <a:p>
             <a:r>
-              <a:t>Four categories. The last catches the things nobody thinks to write down — the path that worked the one time it was run, which is not the same as working.</a:t>
+              <a:t>Four categories go on it: every step you stubbed, every hardcoded value, inputs you know it fails on, and anything only tested once.</a:t>
             </a:r>
           </a:p>
         </p:txBody>
@@ -3001,7 +3001,7 @@
           <a:lstStyle/>
           <a:p>
             <a:r>
-              <a:t>A format, not content. Two columns is enough. Anyone reading this table knows exactly where the system is soft, which is precisely what you want before tomorrow rather than during it.</a:t>
+              <a:t>Two columns is enough. Login: stubbed, one user. PDF parsing: one file only. Retrieval: faked, four docs. Long inputs: known to break.</a:t>
             </a:r>
           </a:p>
         </p:txBody>
@@ -3071,7 +3071,7 @@
           <a:lstStyle/>
           <a:p>
             <a:r>
-              <a:t>Five lines, committed next to the code. In the repo rather than in a document, because that is where tomorrow's red team will look and where it cannot be quietly forgotten.</a:t>
+              <a:t>Five lines, committed next to the code as CAVEATS dot md — in the repo rather than a document, because that is where tomorrow's red team will look.</a:t>
             </a:r>
           </a:p>
         </p:txBody>
@@ -3141,7 +3141,7 @@
           <a:lstStyle/>
           <a:p>
             <a:r>
-              <a:t>Two days of work, seven entries. Point at CAVEATS.md sitting beside the code as an equal — that placement is the argument, and it is the file tomorrow's red team opens first.</a:t>
+              <a:t>Two days of work, seven entries. Notice CAVEATS.md sitting beside the code as an equal.</a:t>
             </a:r>
           </a:p>
         </p:txBody>
@@ -3211,7 +3211,7 @@
           <a:lstStyle/>
           <a:p>
             <a:r>
-              <a:t>The core argument for honesty, and it is tactical rather than moral. A named limit is a scoping decision; the same limit discovered by someone else is a failure. Same fact, opposite outcome.</a:t>
+              <a:t>Hiding a limit means they find it anyway, it looks like a mistake, and you lose the room. Naming it means you look in control, it reads as a decision, and the question moves on. Same fact, opposite outcome.</a:t>
             </a:r>
           </a:p>
         </p:txBody>
@@ -3281,7 +3281,7 @@
           <a:lstStyle/>
           <a:p>
             <a:r>
-              <a:t>Preview tomorrow so tonight's work is aimed. All three are cheap to defend against today and expensive to explain away tomorrow, which is the whole argument for this session.</a:t>
+              <a:t>Three things Day 3 will attack. The undocumented fake — anything real- looking that is not on your list. The single input, because the second thing they try will not be yours. And the dead link, a URL that only ever worked on your machine.</a:t>
             </a:r>
           </a:p>
         </p:txBody>
@@ -3351,7 +3351,7 @@
           <a:lstStyle/>
           <a:p>
             <a:r>
-              <a:t>The exit checklist and the end of Day 2. Four lines, all binary. A team that ticks all four has genuinely finished the build phase of the week.</a:t>
+              <a:t>You are leaving with a URL a stranger can open, that works with your laptop shut, a three-minute script you have rehearsed, and CAVEATS dot md committed.</a:t>
             </a:r>
           </a:p>
         </p:txBody>
@@ -3421,7 +3421,7 @@
           <a:lstStyle/>
           <a:p>
             <a:r>
-              <a:t>Four answers into the repo before Day 2 ends. The last is the one to sleep on — teams usually know it, and writing it down is how it gets fixed rather than discovered.</a:t>
+              <a:t>Four answers into the repo before Day 2 ends: the public URL, who drives the demo, your biggest caveat, and what is most likely to break.</a:t>
             </a:r>
           </a:p>
         </p:txBody>
@@ -3491,7 +3491,7 @@
           <a:lstStyle/>
           <a:p>
             <a:r>
-              <a:t>Optional, and worth more than any code they could write. One real person failing to use the thing tells them more than the whole team looking at it again, and every fix it produces is aimed at something real.</a:t>
+              <a:t>Optional tonight, and worth more than any code: send the link to one stranger, watch where they get stuck, fix only what stopped them, and add what broke to the caveats.</a:t>
             </a:r>
           </a:p>
         </p:txBody>
@@ -3561,7 +3561,7 @@
           <a:lstStyle/>
           <a:p>
             <a:r>
-              <a:t>Close by turning them around. Asking a team where their own system is weakest is the most efficient preparation for tomorrow, and the answer is always immediate.</a:t>
+              <a:t>Last question of the day: what would you attack? You already know where your own system is weakest.</a:t>
             </a:r>
           </a:p>
         </p:txBody>
@@ -3631,7 +3631,7 @@
           <a:lstStyle/>
           <a:p>
             <a:r>
-              <a:t>The bridge. Yesterday's and this morning's work produced something that works in your hands. A demo is the same thing working in somebody else's, which is a different and smaller problem than it feels.</a:t>
+              <a:t>This morning's work runs in your hands. A demo is the same thing running in somebody else's, which is a different and smaller problem than it feels.</a:t>
             </a:r>
           </a:p>
         </p:txBody>
@@ -3701,7 +3701,7 @@
           <a:lstStyle/>
           <a:p>
             <a:r>
-              <a:t>Set up Day 3 and end the day here. The mindset flips overnight from building to breaking, and the caveat list they just wrote is what they arrive with.</a:t>
+              <a:t>Tomorrow the mindset flips. You design an attack rather than a feature, another team red-teams yours, agents probe it rather than just people — and you bring the caveat list with you.</a:t>
             </a:r>
           </a:p>
         </p:txBody>
@@ -3771,7 +3771,7 @@
           <a:lstStyle/>
           <a:p>
             <a:r>
-              <a:t>The shape of the hour. Note that three of the four are not code. The build is already done; this session is about making the build legible to someone who was not here.</a:t>
+              <a:t>Four moves: wrap it in a front end however plain, ship it to a URL off your machine, script three minutes and rehearse them, and write down what is fake.</a:t>
             </a:r>
           </a:p>
         </p:txBody>
@@ -3841,7 +3841,7 @@
           <a:lstStyle/>
           <a:p>
             <a:r>
-              <a:t>Put the clock up. 11:20 is the hard gate — a team without a URL by then should stop improving the front end and ship whatever exists, because the remaining three deliverables all assume a link.</a:t>
+              <a:t>The hour runs in four blocks. Wrap it by 11:20, ship it, script it at 11:35, and write the caveats at 11:45. If you have no URL by 11:20, ship whatever exists — the rest of the hour assumes a link.</a:t>
             </a:r>
           </a:p>
         </p:txBody>
@@ -3911,7 +3911,7 @@
           <a:lstStyle/>
           <a:p>
             <a:r>
-              <a:t>The line for the whole session. Until there is a URL, everything they have is something they can describe. Day 3 does not attack descriptions, and neither do investors.</a:t>
+              <a:t>A demo nobody can open is a story. Until there is a URL, everything you have is something you can describe.</a:t>
             </a:r>
           </a:p>
         </p:txBody>
@@ -3981,7 +3981,7 @@
           <a:lstStyle/>
           <a:p>
             <a:r>
-              <a:t>First objective. The bar is low on purpose: not beautiful, not responsive, not accessible — drivable. One input, one button, one output that appears without help.</a:t>
+              <a:t>First objective, and the bar is deliberately low: not beautiful, not responsive — drivable.</a:t>
             </a:r>
           </a:p>
         </p:txBody>

--- a/examples/pptx/immersion-2-3-making-it-demoable.pptx
+++ b/examples/pptx/immersion-2-3-making-it-demoable.pptx
@@ -65,6 +65,7 @@
     <p:sldId id="313" r:id="rId65"/>
     <p:sldId id="314" r:id="rId66"/>
     <p:sldId id="315" r:id="rId67"/>
+    <p:sldId id="316" r:id="rId68"/>
   </p:sldIdLst>
   <p:sldSz cx="12192000" cy="6858000" type="screen16x9"/>
   <p:notesSz cx="6858000" cy="9144000"/>
@@ -2661,7 +2662,7 @@
           <a:lstStyle/>
           <a:p>
             <a:r>
-              <a:t>The two halves split cleanly. Pages or Cloudflare serves the page; Supabase remembers what happened and handles sign-in. Both are free at the size a prototype runs at.</a:t>
+              <a:t>GitHub Secrets keeps a key out of your repository and your git history, but not out of the page — if a build step inlines the value into the JavaScript you ship, anyone can read it. A key only stays private inside something that runs on a server, like an Action, a Worker, or an edge function.</a:t>
             </a:r>
           </a:p>
         </p:txBody>
@@ -2731,7 +2732,7 @@
           <a:lstStyle/>
           <a:p>
             <a:r>
-              <a:t>Skip all of this if your demo only reads, if nothing needs to outlive the browser tab, or if one saved result would do. A backend is a step like any other, and stubbing it is a legitimate answer.</a:t>
+              <a:t>The two halves split cleanly. Pages or Cloudflare serves the page; Supabase remembers what happened and handles sign-in. Both are free at the size a prototype runs at.</a:t>
             </a:r>
           </a:p>
         </p:txBody>
@@ -2801,7 +2802,7 @@
           <a:lstStyle/>
           <a:p>
             <a:r>
-              <a:t>Three steps, and this is the most valuable ten minutes of the session. Open a private window — no logins, no cache, no extensions. Do nothing but click, typing nothing you have not pre-filled. Then try it on a phone, because half the people you send it to will.</a:t>
+              <a:t>Skip all of this if your demo only reads, if nothing needs to outlive the browser tab, or if one saved result would do. A backend is a step like any other, and stubbing it is a legitimate answer.</a:t>
             </a:r>
           </a:p>
         </p:txBody>
@@ -2941,7 +2942,7 @@
           <a:lstStyle/>
           <a:p>
             <a:r>
-              <a:t>If you are behind: ship what exists, because an ugly live page beats a good local one. Drop the front end if you must — a page showing one saved result still counts. But never drop the caveats; five honest lines take two minutes.</a:t>
+              <a:t>Three steps, and this is the most valuable ten minutes of the session. Open a private window — no logins, no cache, no extensions. Do nothing but click, typing nothing you have not pre-filled. Then try it on a phone, because half the people you send it to will.</a:t>
             </a:r>
           </a:p>
         </p:txBody>
@@ -3011,7 +3012,7 @@
           <a:lstStyle/>
           <a:p>
             <a:r>
-              <a:t>Four checks, all binary. Private window: it loads and runs. Phone: you can read the output. Laptop closed: a teammate can still open it. No secrets: nothing in the page or the repo.</a:t>
+              <a:t>If you are behind: ship what exists, because an ugly live page beats a good local one. Drop the front end if you must — a page showing one saved result still counts. But never drop the caveats; five honest lines take two minutes.</a:t>
             </a:r>
           </a:p>
         </p:txBody>
@@ -3081,7 +3082,7 @@
           <a:lstStyle/>
           <a:p>
             <a:r>
-              <a:t>Needs your laptop? Not shipped. A local version is not basically the same thing.</a:t>
+              <a:t>Four checks, all binary. Private window: it loads and runs. Phone: you can read the output. Laptop closed: a teammate can still open it. No secrets: nothing in the page or the repo.</a:t>
             </a:r>
           </a:p>
         </p:txBody>
@@ -3151,7 +3152,7 @@
           <a:lstStyle/>
           <a:p>
             <a:r>
-              <a:t>Third objective, and this is what separates teams tomorrow: the script and the caveats.</a:t>
+              <a:t>Needs your laptop? Not shipped. A local version is not basically the same thing.</a:t>
             </a:r>
           </a:p>
         </p:txBody>
@@ -3221,7 +3222,7 @@
           <a:lstStyle/>
           <a:p>
             <a:r>
-              <a:t>A demo script is the three minutes, written down word for word. Written, because improvising turns into ninety seconds of architecture nobody asked for.</a:t>
+              <a:t>Third objective, and this is what separates teams tomorrow: the script and the caveats.</a:t>
             </a:r>
           </a:p>
         </p:txBody>
@@ -3291,7 +3292,7 @@
           <a:lstStyle/>
           <a:p>
             <a:r>
-              <a:t>Here is a structure that works. Thirty seconds on the problem, concretely. Ninety seconds driving it live, in silence. Thirty seconds on what is real and what is not. Thirty seconds on what you would build next.</a:t>
+              <a:t>A demo script is the three minutes, written down word for word. Written, because improvising turns into ninety seconds of architecture nobody asked for.</a:t>
             </a:r>
           </a:p>
         </p:txBody>
@@ -3361,7 +3362,7 @@
           <a:lstStyle/>
           <a:p>
             <a:r>
-              <a:t>The first thirty seconds: name who has the problem, say what it costs them today, one sentence with no background — then stop and show it.</a:t>
+              <a:t>Here is a structure that works. Thirty seconds on the problem, concretely. Ninety seconds driving it live, in silence. Thirty seconds on what is real and what is not. Thirty seconds on what you would build next.</a:t>
             </a:r>
           </a:p>
         </p:txBody>
@@ -3431,7 +3432,7 @@
           <a:lstStyle/>
           <a:p>
             <a:r>
-              <a:t>Four phrases that lose the room. “Let me explain the architecture.” “Normally this works.” “We ran out of time to.” And “it is basically just a wrapper.”</a:t>
+              <a:t>The first thirty seconds: name who has the problem, say what it costs them today, one sentence with no background — then stop and show it.</a:t>
             </a:r>
           </a:p>
         </p:txBody>
@@ -3501,7 +3502,7 @@
           <a:lstStyle/>
           <a:p>
             <a:r>
-              <a:t>Three steps. Time it out loud, because silently in your head is always shorter. Have someone else drive, since the builder's hands hide the rough edges. Then cut until it fits — three minutes means three minutes.</a:t>
+              <a:t>Four phrases that lose the room. “Let me explain the architecture.” “Normally this works.” “We ran out of time to.” And “it is basically just a wrapper.”</a:t>
             </a:r>
           </a:p>
         </p:txBody>
@@ -3571,7 +3572,7 @@
           <a:lstStyle/>
           <a:p>
             <a:r>
-              <a:t>A caveat list is everything stubbed, faked, or known to break. It is an asset rather than a confession.</a:t>
+              <a:t>Three steps. Time it out loud, because silently in your head is always shorter. Have someone else drive, since the builder's hands hide the rough edges. Then cut until it fits — three minutes means three minutes.</a:t>
             </a:r>
           </a:p>
         </p:txBody>
@@ -3711,7 +3712,7 @@
           <a:lstStyle/>
           <a:p>
             <a:r>
-              <a:t>Four categories go on it: every step you stubbed, every hardcoded value, inputs you know it fails on, and anything only tested once.</a:t>
+              <a:t>A caveat list is everything stubbed, faked, or known to break. It is an asset rather than a confession.</a:t>
             </a:r>
           </a:p>
         </p:txBody>
@@ -3781,7 +3782,7 @@
           <a:lstStyle/>
           <a:p>
             <a:r>
-              <a:t>Two columns is enough. Login: stubbed, one user. PDF parsing: one file only. Retrieval: faked, four docs. Long inputs: known to break.</a:t>
+              <a:t>Four categories go on it: every step you stubbed, every hardcoded value, inputs you know it fails on, and anything only tested once.</a:t>
             </a:r>
           </a:p>
         </p:txBody>
@@ -3851,7 +3852,7 @@
           <a:lstStyle/>
           <a:p>
             <a:r>
-              <a:t>Five lines, committed next to the code as CAVEATS dot md — in the repo rather than a document, because that is where tomorrow's red team will look.</a:t>
+              <a:t>Two columns is enough. Login: stubbed, one user. PDF parsing: one file only. Retrieval: faked, four docs. Long inputs: known to break.</a:t>
             </a:r>
           </a:p>
         </p:txBody>
@@ -3921,7 +3922,7 @@
           <a:lstStyle/>
           <a:p>
             <a:r>
-              <a:t>Two days of work, seven entries. Notice CAVEATS.md sitting beside the code as an equal.</a:t>
+              <a:t>Five lines, committed next to the code as CAVEATS dot md — in the repo rather than a document, because that is where tomorrow's red team will look.</a:t>
             </a:r>
           </a:p>
         </p:txBody>
@@ -3991,7 +3992,7 @@
           <a:lstStyle/>
           <a:p>
             <a:r>
-              <a:t>Hiding a limit means they find it anyway, it looks like a mistake, and you lose the room. Naming it means you look in control, it reads as a decision, and the question moves on. Same fact, opposite outcome.</a:t>
+              <a:t>Two days of work, seven entries. Notice CAVEATS.md sitting beside the code as an equal.</a:t>
             </a:r>
           </a:p>
         </p:txBody>
@@ -4061,7 +4062,7 @@
           <a:lstStyle/>
           <a:p>
             <a:r>
-              <a:t>Three things Day 3 will attack. The undocumented fake — anything real- looking that is not on your list. The single input, because the second thing they try will not be yours. And the dead link, a URL that only ever worked on your machine.</a:t>
+              <a:t>Hiding a limit means they find it anyway, it looks like a mistake, and you lose the room. Naming it means you look in control, it reads as a decision, and the question moves on. Same fact, opposite outcome.</a:t>
             </a:r>
           </a:p>
         </p:txBody>
@@ -4131,7 +4132,7 @@
           <a:lstStyle/>
           <a:p>
             <a:r>
-              <a:t>You are leaving with a URL a stranger can open, that works with your laptop shut, a three-minute script you have rehearsed, and CAVEATS dot md committed.</a:t>
+              <a:t>Three things Day 3 will attack. The undocumented fake — anything real- looking that is not on your list. The single input, because the second thing they try will not be yours. And the dead link, a URL that only ever worked on your machine.</a:t>
             </a:r>
           </a:p>
         </p:txBody>
@@ -4201,7 +4202,7 @@
           <a:lstStyle/>
           <a:p>
             <a:r>
-              <a:t>Four answers into the repo before Day 2 ends: the public URL, who drives the demo, your biggest caveat, and what is most likely to break.</a:t>
+              <a:t>You are leaving with a URL a stranger can open, that works with your laptop shut, a three-minute script you have rehearsed, and CAVEATS dot md committed.</a:t>
             </a:r>
           </a:p>
         </p:txBody>
@@ -4271,7 +4272,7 @@
           <a:lstStyle/>
           <a:p>
             <a:r>
-              <a:t>Optional tonight, and worth more than any code: send the link to one stranger, watch where they get stuck, fix only what stopped them, and add what broke to the caveats.</a:t>
+              <a:t>Four answers into the repo before Day 2 ends: the public URL, who drives the demo, your biggest caveat, and what is most likely to break.</a:t>
             </a:r>
           </a:p>
         </p:txBody>
@@ -4341,7 +4342,7 @@
           <a:lstStyle/>
           <a:p>
             <a:r>
-              <a:t>Last question of the day: what would you attack? You already know where your own system is weakest.</a:t>
+              <a:t>Optional tonight, and worth more than any code: send the link to one stranger, watch where they get stuck, fix only what stopped them, and add what broke to the caveats.</a:t>
             </a:r>
           </a:p>
         </p:txBody>
@@ -4437,6 +4438,76 @@
 </file>
 
 <file path=ppt/notesSlides/notesSlide60.xml><?xml version="1.0" encoding="utf-8"?>
+<p:notes xmlns:a="http://schemas.openxmlformats.org/drawingml/2006/main" xmlns:p="http://schemas.openxmlformats.org/presentationml/2006/main" xmlns:r="http://schemas.openxmlformats.org/officeDocument/2006/relationships">
+  <p:cSld>
+    <p:spTree>
+      <p:nvGrpSpPr>
+        <p:cNvPr id="1" name=""/>
+        <p:cNvGrpSpPr/>
+        <p:nvPr/>
+      </p:nvGrpSpPr>
+      <p:grpSpPr>
+        <a:xfrm>
+          <a:off x="0" y="0"/>
+          <a:ext cx="0" cy="0"/>
+          <a:chOff x="0" y="0"/>
+          <a:chExt cx="0" cy="0"/>
+        </a:xfrm>
+      </p:grpSpPr>
+      <p:sp>
+        <p:nvSpPr>
+          <p:cNvPr id="2" name="Slide Image Placeholder 1"/>
+          <p:cNvSpPr>
+            <a:spLocks noGrp="1"/>
+          </p:cNvSpPr>
+          <p:nvPr>
+            <p:ph type="sldImg" idx="2"/>
+          </p:nvPr>
+        </p:nvSpPr>
+        <p:spPr/>
+      </p:sp>
+      <p:sp>
+        <p:nvSpPr>
+          <p:cNvPr id="3" name="Notes Placeholder 2"/>
+          <p:cNvSpPr>
+            <a:spLocks noGrp="1"/>
+          </p:cNvSpPr>
+          <p:nvPr>
+            <p:ph type="body" idx="3" sz="quarter"/>
+          </p:nvPr>
+        </p:nvSpPr>
+        <p:spPr/>
+        <p:txBody>
+          <a:bodyPr/>
+          <a:lstStyle/>
+          <a:p>
+            <a:r>
+              <a:t>Last question of the day: what would you attack? You already know where your own system is weakest.</a:t>
+            </a:r>
+          </a:p>
+        </p:txBody>
+      </p:sp>
+      <p:sp>
+        <p:nvSpPr>
+          <p:cNvPr id="4" name="Slide Number Placeholder 3"/>
+          <p:cNvSpPr>
+            <a:spLocks noGrp="1"/>
+          </p:cNvSpPr>
+          <p:nvPr>
+            <p:ph type="sldNum" idx="5" sz="quarter"/>
+          </p:nvPr>
+        </p:nvSpPr>
+        <p:spPr/>
+      </p:sp>
+    </p:spTree>
+  </p:cSld>
+  <p:clrMapOvr>
+    <a:masterClrMapping/>
+  </p:clrMapOvr>
+</p:notes>
+</file>
+
+<file path=ppt/notesSlides/notesSlide61.xml><?xml version="1.0" encoding="utf-8"?>
 <p:notes xmlns:a="http://schemas.openxmlformats.org/drawingml/2006/main" xmlns:p="http://schemas.openxmlformats.org/presentationml/2006/main" xmlns:r="http://schemas.openxmlformats.org/officeDocument/2006/relationships">
   <p:cSld>
     <p:spTree>
@@ -29889,7 +29960,7 @@
         <p:spPr>
           <a:xfrm>
             <a:off x="457200" y="457200"/>
-            <a:ext cx="11277600" cy="768096"/>
+            <a:ext cx="11734800" cy="768096"/>
           </a:xfrm>
           <a:prstGeom prst="rect">
             <a:avLst/>
@@ -29910,7 +29981,7 @@
                 </a:solidFill>
                 <a:latin typeface="Arial"/>
               </a:rPr>
-              <a:t>Which Half Does What</a:t>
+              <a:t>Secrets Are Not Secret in a Page</a:t>
             </a:r>
           </a:p>
         </p:txBody>
@@ -29923,29 +29994,29 @@
         </p:nvSpPr>
         <p:spPr>
           <a:xfrm>
-            <a:off x="457200" y="1499616"/>
-            <a:ext cx="3822268" cy="518159"/>
-          </a:xfrm>
-          <a:prstGeom prst="rect">
-            <a:avLst/>
-          </a:prstGeom>
-          <a:noFill/>
-        </p:spPr>
-        <p:txBody>
-          <a:bodyPr wrap="none" lIns="0" rIns="0">
-            <a:noAutofit/>
-          </a:bodyPr>
-          <a:lstStyle/>
-          <a:p>
-            <a:pPr algn="l"/>
-            <a:r>
-              <a:rPr sz="3400" b="1" i="0">
-                <a:solidFill>
-                  <a:srgbClr val="123A6B"/>
-                </a:solidFill>
-                <a:latin typeface="Arial"/>
-              </a:rPr>
-              <a:t>Job</a:t>
+            <a:off x="457200" y="1908050"/>
+            <a:ext cx="11277600" cy="518159"/>
+          </a:xfrm>
+          <a:prstGeom prst="rect">
+            <a:avLst/>
+          </a:prstGeom>
+          <a:noFill/>
+        </p:spPr>
+        <p:txBody>
+          <a:bodyPr wrap="none" lIns="0" rIns="0">
+            <a:noAutofit/>
+          </a:bodyPr>
+          <a:lstStyle/>
+          <a:p>
+            <a:pPr algn="l"/>
+            <a:r>
+              <a:rPr sz="3400" b="0" i="0">
+                <a:solidFill>
+                  <a:srgbClr val="0A2240"/>
+                </a:solidFill>
+                <a:latin typeface="Arial"/>
+              </a:rPr>
+              <a:t>Secrets keep it out of the repo</a:t>
             </a:r>
           </a:p>
         </p:txBody>
@@ -29958,74 +30029,65 @@
         </p:nvSpPr>
         <p:spPr>
           <a:xfrm>
-            <a:off x="4828108" y="1499616"/>
-            <a:ext cx="4182172" cy="518159"/>
-          </a:xfrm>
-          <a:prstGeom prst="rect">
-            <a:avLst/>
-          </a:prstGeom>
-          <a:noFill/>
-        </p:spPr>
-        <p:txBody>
-          <a:bodyPr wrap="none" lIns="0" rIns="0">
-            <a:noAutofit/>
-          </a:bodyPr>
-          <a:lstStyle/>
-          <a:p>
-            <a:pPr algn="l"/>
-            <a:r>
-              <a:rPr sz="3400" b="1" i="0">
-                <a:solidFill>
-                  <a:srgbClr val="123A6B"/>
-                </a:solidFill>
-                <a:latin typeface="Arial"/>
-              </a:rPr>
-              <a:t>Which half</a:t>
-            </a:r>
-          </a:p>
-        </p:txBody>
-      </p:sp>
-      <p:sp>
-        <p:nvSpPr>
-          <p:cNvPr id="5" name="Rectangle 4"/>
-          <p:cNvSpPr/>
-          <p:nvPr/>
-        </p:nvSpPr>
-        <p:spPr>
-          <a:xfrm>
-            <a:off x="457200" y="2072639"/>
-            <a:ext cx="8553080" cy="54864"/>
-          </a:xfrm>
-          <a:prstGeom prst="rect">
-            <a:avLst/>
-          </a:prstGeom>
-          <a:solidFill>
-            <a:srgbClr val="0072CE"/>
-          </a:solidFill>
-          <a:ln>
-            <a:noFill/>
-          </a:ln>
-          <a:effectLst/>
-        </p:spPr>
-        <p:style>
-          <a:lnRef idx="1">
-            <a:schemeClr val="accent1"/>
-          </a:lnRef>
-          <a:fillRef idx="3">
-            <a:schemeClr val="accent1"/>
-          </a:fillRef>
-          <a:effectRef idx="2">
-            <a:schemeClr val="accent1"/>
-          </a:effectRef>
-          <a:fontRef idx="minor">
-            <a:schemeClr val="lt1"/>
-          </a:fontRef>
-        </p:style>
-        <p:txBody>
-          <a:bodyPr rtlCol="0" anchor="ctr"/>
-          <a:lstStyle/>
-          <a:p>
-            <a:pPr algn="ctr"/>
+            <a:off x="457200" y="2883409"/>
+            <a:ext cx="11277600" cy="518159"/>
+          </a:xfrm>
+          <a:prstGeom prst="rect">
+            <a:avLst/>
+          </a:prstGeom>
+          <a:noFill/>
+        </p:spPr>
+        <p:txBody>
+          <a:bodyPr wrap="none" lIns="0" rIns="0">
+            <a:noAutofit/>
+          </a:bodyPr>
+          <a:lstStyle/>
+          <a:p>
+            <a:pPr algn="l"/>
+            <a:r>
+              <a:rPr sz="3400" b="0" i="0">
+                <a:solidFill>
+                  <a:srgbClr val="0A2240"/>
+                </a:solidFill>
+                <a:latin typeface="Arial"/>
+              </a:rPr>
+              <a:t>They do not keep it out of the page</a:t>
+            </a:r>
+          </a:p>
+        </p:txBody>
+      </p:sp>
+      <p:sp>
+        <p:nvSpPr>
+          <p:cNvPr id="5" name="TextBox 4"/>
+          <p:cNvSpPr txBox="1"/>
+          <p:nvPr/>
+        </p:nvSpPr>
+        <p:spPr>
+          <a:xfrm>
+            <a:off x="457200" y="3858768"/>
+            <a:ext cx="11277600" cy="518159"/>
+          </a:xfrm>
+          <a:prstGeom prst="rect">
+            <a:avLst/>
+          </a:prstGeom>
+          <a:noFill/>
+        </p:spPr>
+        <p:txBody>
+          <a:bodyPr wrap="none" lIns="0" rIns="0">
+            <a:noAutofit/>
+          </a:bodyPr>
+          <a:lstStyle/>
+          <a:p>
+            <a:pPr algn="l"/>
+            <a:r>
+              <a:rPr sz="3400" b="0" i="0">
+                <a:solidFill>
+                  <a:srgbClr val="0A2240"/>
+                </a:solidFill>
+                <a:latin typeface="Arial"/>
+              </a:rPr>
+              <a:t>A build that inlines it publishes it</a:t>
+            </a:r>
           </a:p>
         </p:txBody>
       </p:sp>
@@ -30037,8 +30099,8 @@
         </p:nvSpPr>
         <p:spPr>
           <a:xfrm>
-            <a:off x="457200" y="2401823"/>
-            <a:ext cx="5214361" cy="633984"/>
+            <a:off x="457200" y="4834127"/>
+            <a:ext cx="11734800" cy="518159"/>
           </a:xfrm>
           <a:prstGeom prst="rect">
             <a:avLst/>
@@ -30059,7 +30121,7 @@
                 </a:solidFill>
                 <a:latin typeface="Arial"/>
               </a:rPr>
-              <a:t>Serves the page</a:t>
+              <a:t>Only server-side code keeps it private</a:t>
             </a:r>
           </a:p>
         </p:txBody>
@@ -30067,251 +30129,6 @@
       <p:sp>
         <p:nvSpPr>
           <p:cNvPr id="7" name="TextBox 6"/>
-          <p:cNvSpPr txBox="1"/>
-          <p:nvPr/>
-        </p:nvSpPr>
-        <p:spPr>
-          <a:xfrm>
-            <a:off x="4828108" y="2401823"/>
-            <a:ext cx="6289139" cy="633984"/>
-          </a:xfrm>
-          <a:prstGeom prst="rect">
-            <a:avLst/>
-          </a:prstGeom>
-          <a:noFill/>
-        </p:spPr>
-        <p:txBody>
-          <a:bodyPr wrap="none" lIns="0" rIns="0">
-            <a:noAutofit/>
-          </a:bodyPr>
-          <a:lstStyle/>
-          <a:p>
-            <a:pPr algn="l"/>
-            <a:r>
-              <a:rPr sz="3400" b="0" i="0">
-                <a:solidFill>
-                  <a:srgbClr val="0A2240"/>
-                </a:solidFill>
-                <a:latin typeface="Arial"/>
-              </a:rPr>
-              <a:t>Pages or Cloudflare</a:t>
-            </a:r>
-          </a:p>
-        </p:txBody>
-      </p:sp>
-      <p:sp>
-        <p:nvSpPr>
-          <p:cNvPr id="8" name="TextBox 7"/>
-          <p:cNvSpPr txBox="1"/>
-          <p:nvPr/>
-        </p:nvSpPr>
-        <p:spPr>
-          <a:xfrm>
-            <a:off x="457200" y="3310127"/>
-            <a:ext cx="5635366" cy="633984"/>
-          </a:xfrm>
-          <a:prstGeom prst="rect">
-            <a:avLst/>
-          </a:prstGeom>
-          <a:noFill/>
-        </p:spPr>
-        <p:txBody>
-          <a:bodyPr wrap="none" lIns="0" rIns="0">
-            <a:noAutofit/>
-          </a:bodyPr>
-          <a:lstStyle/>
-          <a:p>
-            <a:pPr algn="l"/>
-            <a:r>
-              <a:rPr sz="3400" b="0" i="0">
-                <a:solidFill>
-                  <a:srgbClr val="0A2240"/>
-                </a:solidFill>
-                <a:latin typeface="Arial"/>
-              </a:rPr>
-              <a:t>Remembers input</a:t>
-            </a:r>
-          </a:p>
-        </p:txBody>
-      </p:sp>
-      <p:sp>
-        <p:nvSpPr>
-          <p:cNvPr id="9" name="TextBox 8"/>
-          <p:cNvSpPr txBox="1"/>
-          <p:nvPr/>
-        </p:nvSpPr>
-        <p:spPr>
-          <a:xfrm>
-            <a:off x="4828108" y="3310127"/>
-            <a:ext cx="4182172" cy="633984"/>
-          </a:xfrm>
-          <a:prstGeom prst="rect">
-            <a:avLst/>
-          </a:prstGeom>
-          <a:noFill/>
-        </p:spPr>
-        <p:txBody>
-          <a:bodyPr wrap="none" lIns="0" rIns="0">
-            <a:noAutofit/>
-          </a:bodyPr>
-          <a:lstStyle/>
-          <a:p>
-            <a:pPr algn="l"/>
-            <a:r>
-              <a:rPr sz="3400" b="0" i="0">
-                <a:solidFill>
-                  <a:srgbClr val="0A2240"/>
-                </a:solidFill>
-                <a:latin typeface="Arial"/>
-              </a:rPr>
-              <a:t>Supabase</a:t>
-            </a:r>
-          </a:p>
-        </p:txBody>
-      </p:sp>
-      <p:sp>
-        <p:nvSpPr>
-          <p:cNvPr id="10" name="TextBox 9"/>
-          <p:cNvSpPr txBox="1"/>
-          <p:nvPr/>
-        </p:nvSpPr>
-        <p:spPr>
-          <a:xfrm>
-            <a:off x="457200" y="4218431"/>
-            <a:ext cx="4944824" cy="633984"/>
-          </a:xfrm>
-          <a:prstGeom prst="rect">
-            <a:avLst/>
-          </a:prstGeom>
-          <a:noFill/>
-        </p:spPr>
-        <p:txBody>
-          <a:bodyPr wrap="none" lIns="0" rIns="0">
-            <a:noAutofit/>
-          </a:bodyPr>
-          <a:lstStyle/>
-          <a:p>
-            <a:pPr algn="l"/>
-            <a:r>
-              <a:rPr sz="3400" b="0" i="0">
-                <a:solidFill>
-                  <a:srgbClr val="0A2240"/>
-                </a:solidFill>
-                <a:latin typeface="Arial"/>
-              </a:rPr>
-              <a:t>Handles sign-in</a:t>
-            </a:r>
-          </a:p>
-        </p:txBody>
-      </p:sp>
-      <p:sp>
-        <p:nvSpPr>
-          <p:cNvPr id="11" name="TextBox 10"/>
-          <p:cNvSpPr txBox="1"/>
-          <p:nvPr/>
-        </p:nvSpPr>
-        <p:spPr>
-          <a:xfrm>
-            <a:off x="4828108" y="4218431"/>
-            <a:ext cx="4182172" cy="633984"/>
-          </a:xfrm>
-          <a:prstGeom prst="rect">
-            <a:avLst/>
-          </a:prstGeom>
-          <a:noFill/>
-        </p:spPr>
-        <p:txBody>
-          <a:bodyPr wrap="none" lIns="0" rIns="0">
-            <a:noAutofit/>
-          </a:bodyPr>
-          <a:lstStyle/>
-          <a:p>
-            <a:pPr algn="l"/>
-            <a:r>
-              <a:rPr sz="3400" b="0" i="0">
-                <a:solidFill>
-                  <a:srgbClr val="0A2240"/>
-                </a:solidFill>
-                <a:latin typeface="Arial"/>
-              </a:rPr>
-              <a:t>Supabase</a:t>
-            </a:r>
-          </a:p>
-        </p:txBody>
-      </p:sp>
-      <p:sp>
-        <p:nvSpPr>
-          <p:cNvPr id="12" name="TextBox 11"/>
-          <p:cNvSpPr txBox="1"/>
-          <p:nvPr/>
-        </p:nvSpPr>
-        <p:spPr>
-          <a:xfrm>
-            <a:off x="457200" y="5126735"/>
-            <a:ext cx="5713292" cy="633984"/>
-          </a:xfrm>
-          <a:prstGeom prst="rect">
-            <a:avLst/>
-          </a:prstGeom>
-          <a:noFill/>
-        </p:spPr>
-        <p:txBody>
-          <a:bodyPr wrap="none" lIns="0" rIns="0">
-            <a:noAutofit/>
-          </a:bodyPr>
-          <a:lstStyle/>
-          <a:p>
-            <a:pPr algn="l"/>
-            <a:r>
-              <a:rPr sz="3400" b="0" i="0">
-                <a:solidFill>
-                  <a:srgbClr val="0A2240"/>
-                </a:solidFill>
-                <a:latin typeface="Arial"/>
-              </a:rPr>
-              <a:t>Costs you nothing</a:t>
-            </a:r>
-          </a:p>
-        </p:txBody>
-      </p:sp>
-      <p:sp>
-        <p:nvSpPr>
-          <p:cNvPr id="13" name="TextBox 12"/>
-          <p:cNvSpPr txBox="1"/>
-          <p:nvPr/>
-        </p:nvSpPr>
-        <p:spPr>
-          <a:xfrm>
-            <a:off x="4828108" y="5126735"/>
-            <a:ext cx="4182172" cy="633984"/>
-          </a:xfrm>
-          <a:prstGeom prst="rect">
-            <a:avLst/>
-          </a:prstGeom>
-          <a:noFill/>
-        </p:spPr>
-        <p:txBody>
-          <a:bodyPr wrap="none" lIns="0" rIns="0">
-            <a:noAutofit/>
-          </a:bodyPr>
-          <a:lstStyle/>
-          <a:p>
-            <a:pPr algn="l"/>
-            <a:r>
-              <a:rPr sz="3400" b="0" i="0">
-                <a:solidFill>
-                  <a:srgbClr val="0A2240"/>
-                </a:solidFill>
-                <a:latin typeface="Arial"/>
-              </a:rPr>
-              <a:t>Both</a:t>
-            </a:r>
-          </a:p>
-        </p:txBody>
-      </p:sp>
-      <p:sp>
-        <p:nvSpPr>
-          <p:cNvPr id="14" name="TextBox 13"/>
           <p:cNvSpPr/>
           <p:nvPr>
             <p:ph type="sldNum" idx="12"/>
@@ -30402,7 +30219,7 @@
                 </a:solidFill>
                 <a:latin typeface="Arial"/>
               </a:rPr>
-              <a:t>When Not to Bother</a:t>
+              <a:t>Which Half Does What</a:t>
             </a:r>
           </a:p>
         </p:txBody>
@@ -30415,29 +30232,29 @@
         </p:nvSpPr>
         <p:spPr>
           <a:xfrm>
-            <a:off x="457200" y="1908050"/>
-            <a:ext cx="11277600" cy="518159"/>
-          </a:xfrm>
-          <a:prstGeom prst="rect">
-            <a:avLst/>
-          </a:prstGeom>
-          <a:noFill/>
-        </p:spPr>
-        <p:txBody>
-          <a:bodyPr wrap="none" lIns="0" rIns="0">
-            <a:noAutofit/>
-          </a:bodyPr>
-          <a:lstStyle/>
-          <a:p>
-            <a:pPr algn="l"/>
-            <a:r>
-              <a:rPr sz="3400" b="0" i="0">
-                <a:solidFill>
-                  <a:srgbClr val="0A2240"/>
-                </a:solidFill>
-                <a:latin typeface="Arial"/>
-              </a:rPr>
-              <a:t>Your demo only ever reads</a:t>
+            <a:off x="457200" y="1499616"/>
+            <a:ext cx="3822268" cy="518159"/>
+          </a:xfrm>
+          <a:prstGeom prst="rect">
+            <a:avLst/>
+          </a:prstGeom>
+          <a:noFill/>
+        </p:spPr>
+        <p:txBody>
+          <a:bodyPr wrap="none" lIns="0" rIns="0">
+            <a:noAutofit/>
+          </a:bodyPr>
+          <a:lstStyle/>
+          <a:p>
+            <a:pPr algn="l"/>
+            <a:r>
+              <a:rPr sz="3400" b="1" i="0">
+                <a:solidFill>
+                  <a:srgbClr val="123A6B"/>
+                </a:solidFill>
+                <a:latin typeface="Arial"/>
+              </a:rPr>
+              <a:t>Job</a:t>
             </a:r>
           </a:p>
         </p:txBody>
@@ -30450,65 +30267,74 @@
         </p:nvSpPr>
         <p:spPr>
           <a:xfrm>
-            <a:off x="457200" y="2883409"/>
-            <a:ext cx="11277600" cy="518159"/>
-          </a:xfrm>
-          <a:prstGeom prst="rect">
-            <a:avLst/>
-          </a:prstGeom>
-          <a:noFill/>
-        </p:spPr>
-        <p:txBody>
-          <a:bodyPr wrap="none" lIns="0" rIns="0">
-            <a:noAutofit/>
-          </a:bodyPr>
-          <a:lstStyle/>
-          <a:p>
-            <a:pPr algn="l"/>
-            <a:r>
-              <a:rPr sz="3400" b="0" i="0">
-                <a:solidFill>
-                  <a:srgbClr val="0A2240"/>
-                </a:solidFill>
-                <a:latin typeface="Arial"/>
-              </a:rPr>
-              <a:t>Nothing needs to outlive the tab</a:t>
-            </a:r>
-          </a:p>
-        </p:txBody>
-      </p:sp>
-      <p:sp>
-        <p:nvSpPr>
-          <p:cNvPr id="5" name="TextBox 4"/>
-          <p:cNvSpPr txBox="1"/>
-          <p:nvPr/>
-        </p:nvSpPr>
-        <p:spPr>
-          <a:xfrm>
-            <a:off x="457200" y="3858768"/>
-            <a:ext cx="11277600" cy="518159"/>
-          </a:xfrm>
-          <a:prstGeom prst="rect">
-            <a:avLst/>
-          </a:prstGeom>
-          <a:noFill/>
-        </p:spPr>
-        <p:txBody>
-          <a:bodyPr wrap="none" lIns="0" rIns="0">
-            <a:noAutofit/>
-          </a:bodyPr>
-          <a:lstStyle/>
-          <a:p>
-            <a:pPr algn="l"/>
-            <a:r>
-              <a:rPr sz="3400" b="0" i="0">
-                <a:solidFill>
-                  <a:srgbClr val="0A2240"/>
-                </a:solidFill>
-                <a:latin typeface="Arial"/>
-              </a:rPr>
-              <a:t>One saved result would do</a:t>
-            </a:r>
+            <a:off x="4828108" y="1499616"/>
+            <a:ext cx="4182172" cy="518159"/>
+          </a:xfrm>
+          <a:prstGeom prst="rect">
+            <a:avLst/>
+          </a:prstGeom>
+          <a:noFill/>
+        </p:spPr>
+        <p:txBody>
+          <a:bodyPr wrap="none" lIns="0" rIns="0">
+            <a:noAutofit/>
+          </a:bodyPr>
+          <a:lstStyle/>
+          <a:p>
+            <a:pPr algn="l"/>
+            <a:r>
+              <a:rPr sz="3400" b="1" i="0">
+                <a:solidFill>
+                  <a:srgbClr val="123A6B"/>
+                </a:solidFill>
+                <a:latin typeface="Arial"/>
+              </a:rPr>
+              <a:t>Which half</a:t>
+            </a:r>
+          </a:p>
+        </p:txBody>
+      </p:sp>
+      <p:sp>
+        <p:nvSpPr>
+          <p:cNvPr id="5" name="Rectangle 4"/>
+          <p:cNvSpPr/>
+          <p:nvPr/>
+        </p:nvSpPr>
+        <p:spPr>
+          <a:xfrm>
+            <a:off x="457200" y="2072639"/>
+            <a:ext cx="8553080" cy="54864"/>
+          </a:xfrm>
+          <a:prstGeom prst="rect">
+            <a:avLst/>
+          </a:prstGeom>
+          <a:solidFill>
+            <a:srgbClr val="0072CE"/>
+          </a:solidFill>
+          <a:ln>
+            <a:noFill/>
+          </a:ln>
+          <a:effectLst/>
+        </p:spPr>
+        <p:style>
+          <a:lnRef idx="1">
+            <a:schemeClr val="accent1"/>
+          </a:lnRef>
+          <a:fillRef idx="3">
+            <a:schemeClr val="accent1"/>
+          </a:fillRef>
+          <a:effectRef idx="2">
+            <a:schemeClr val="accent1"/>
+          </a:effectRef>
+          <a:fontRef idx="minor">
+            <a:schemeClr val="lt1"/>
+          </a:fontRef>
+        </p:style>
+        <p:txBody>
+          <a:bodyPr rtlCol="0" anchor="ctr"/>
+          <a:lstStyle/>
+          <a:p>
+            <a:pPr algn="ctr"/>
           </a:p>
         </p:txBody>
       </p:sp>
@@ -30520,8 +30346,8 @@
         </p:nvSpPr>
         <p:spPr>
           <a:xfrm>
-            <a:off x="457200" y="4834127"/>
-            <a:ext cx="11277600" cy="518159"/>
+            <a:off x="457200" y="2401823"/>
+            <a:ext cx="5214361" cy="633984"/>
           </a:xfrm>
           <a:prstGeom prst="rect">
             <a:avLst/>
@@ -30542,7 +30368,7 @@
                 </a:solidFill>
                 <a:latin typeface="Arial"/>
               </a:rPr>
-              <a:t>Then stub it, like anything else</a:t>
+              <a:t>Serves the page</a:t>
             </a:r>
           </a:p>
         </p:txBody>
@@ -30550,6 +30376,251 @@
       <p:sp>
         <p:nvSpPr>
           <p:cNvPr id="7" name="TextBox 6"/>
+          <p:cNvSpPr txBox="1"/>
+          <p:nvPr/>
+        </p:nvSpPr>
+        <p:spPr>
+          <a:xfrm>
+            <a:off x="4828108" y="2401823"/>
+            <a:ext cx="6289139" cy="633984"/>
+          </a:xfrm>
+          <a:prstGeom prst="rect">
+            <a:avLst/>
+          </a:prstGeom>
+          <a:noFill/>
+        </p:spPr>
+        <p:txBody>
+          <a:bodyPr wrap="none" lIns="0" rIns="0">
+            <a:noAutofit/>
+          </a:bodyPr>
+          <a:lstStyle/>
+          <a:p>
+            <a:pPr algn="l"/>
+            <a:r>
+              <a:rPr sz="3400" b="0" i="0">
+                <a:solidFill>
+                  <a:srgbClr val="0A2240"/>
+                </a:solidFill>
+                <a:latin typeface="Arial"/>
+              </a:rPr>
+              <a:t>Pages or Cloudflare</a:t>
+            </a:r>
+          </a:p>
+        </p:txBody>
+      </p:sp>
+      <p:sp>
+        <p:nvSpPr>
+          <p:cNvPr id="8" name="TextBox 7"/>
+          <p:cNvSpPr txBox="1"/>
+          <p:nvPr/>
+        </p:nvSpPr>
+        <p:spPr>
+          <a:xfrm>
+            <a:off x="457200" y="3310127"/>
+            <a:ext cx="5635366" cy="633984"/>
+          </a:xfrm>
+          <a:prstGeom prst="rect">
+            <a:avLst/>
+          </a:prstGeom>
+          <a:noFill/>
+        </p:spPr>
+        <p:txBody>
+          <a:bodyPr wrap="none" lIns="0" rIns="0">
+            <a:noAutofit/>
+          </a:bodyPr>
+          <a:lstStyle/>
+          <a:p>
+            <a:pPr algn="l"/>
+            <a:r>
+              <a:rPr sz="3400" b="0" i="0">
+                <a:solidFill>
+                  <a:srgbClr val="0A2240"/>
+                </a:solidFill>
+                <a:latin typeface="Arial"/>
+              </a:rPr>
+              <a:t>Remembers input</a:t>
+            </a:r>
+          </a:p>
+        </p:txBody>
+      </p:sp>
+      <p:sp>
+        <p:nvSpPr>
+          <p:cNvPr id="9" name="TextBox 8"/>
+          <p:cNvSpPr txBox="1"/>
+          <p:nvPr/>
+        </p:nvSpPr>
+        <p:spPr>
+          <a:xfrm>
+            <a:off x="4828108" y="3310127"/>
+            <a:ext cx="4182172" cy="633984"/>
+          </a:xfrm>
+          <a:prstGeom prst="rect">
+            <a:avLst/>
+          </a:prstGeom>
+          <a:noFill/>
+        </p:spPr>
+        <p:txBody>
+          <a:bodyPr wrap="none" lIns="0" rIns="0">
+            <a:noAutofit/>
+          </a:bodyPr>
+          <a:lstStyle/>
+          <a:p>
+            <a:pPr algn="l"/>
+            <a:r>
+              <a:rPr sz="3400" b="0" i="0">
+                <a:solidFill>
+                  <a:srgbClr val="0A2240"/>
+                </a:solidFill>
+                <a:latin typeface="Arial"/>
+              </a:rPr>
+              <a:t>Supabase</a:t>
+            </a:r>
+          </a:p>
+        </p:txBody>
+      </p:sp>
+      <p:sp>
+        <p:nvSpPr>
+          <p:cNvPr id="10" name="TextBox 9"/>
+          <p:cNvSpPr txBox="1"/>
+          <p:nvPr/>
+        </p:nvSpPr>
+        <p:spPr>
+          <a:xfrm>
+            <a:off x="457200" y="4218431"/>
+            <a:ext cx="4944824" cy="633984"/>
+          </a:xfrm>
+          <a:prstGeom prst="rect">
+            <a:avLst/>
+          </a:prstGeom>
+          <a:noFill/>
+        </p:spPr>
+        <p:txBody>
+          <a:bodyPr wrap="none" lIns="0" rIns="0">
+            <a:noAutofit/>
+          </a:bodyPr>
+          <a:lstStyle/>
+          <a:p>
+            <a:pPr algn="l"/>
+            <a:r>
+              <a:rPr sz="3400" b="0" i="0">
+                <a:solidFill>
+                  <a:srgbClr val="0A2240"/>
+                </a:solidFill>
+                <a:latin typeface="Arial"/>
+              </a:rPr>
+              <a:t>Handles sign-in</a:t>
+            </a:r>
+          </a:p>
+        </p:txBody>
+      </p:sp>
+      <p:sp>
+        <p:nvSpPr>
+          <p:cNvPr id="11" name="TextBox 10"/>
+          <p:cNvSpPr txBox="1"/>
+          <p:nvPr/>
+        </p:nvSpPr>
+        <p:spPr>
+          <a:xfrm>
+            <a:off x="4828108" y="4218431"/>
+            <a:ext cx="4182172" cy="633984"/>
+          </a:xfrm>
+          <a:prstGeom prst="rect">
+            <a:avLst/>
+          </a:prstGeom>
+          <a:noFill/>
+        </p:spPr>
+        <p:txBody>
+          <a:bodyPr wrap="none" lIns="0" rIns="0">
+            <a:noAutofit/>
+          </a:bodyPr>
+          <a:lstStyle/>
+          <a:p>
+            <a:pPr algn="l"/>
+            <a:r>
+              <a:rPr sz="3400" b="0" i="0">
+                <a:solidFill>
+                  <a:srgbClr val="0A2240"/>
+                </a:solidFill>
+                <a:latin typeface="Arial"/>
+              </a:rPr>
+              <a:t>Supabase</a:t>
+            </a:r>
+          </a:p>
+        </p:txBody>
+      </p:sp>
+      <p:sp>
+        <p:nvSpPr>
+          <p:cNvPr id="12" name="TextBox 11"/>
+          <p:cNvSpPr txBox="1"/>
+          <p:nvPr/>
+        </p:nvSpPr>
+        <p:spPr>
+          <a:xfrm>
+            <a:off x="457200" y="5126735"/>
+            <a:ext cx="5713292" cy="633984"/>
+          </a:xfrm>
+          <a:prstGeom prst="rect">
+            <a:avLst/>
+          </a:prstGeom>
+          <a:noFill/>
+        </p:spPr>
+        <p:txBody>
+          <a:bodyPr wrap="none" lIns="0" rIns="0">
+            <a:noAutofit/>
+          </a:bodyPr>
+          <a:lstStyle/>
+          <a:p>
+            <a:pPr algn="l"/>
+            <a:r>
+              <a:rPr sz="3400" b="0" i="0">
+                <a:solidFill>
+                  <a:srgbClr val="0A2240"/>
+                </a:solidFill>
+                <a:latin typeface="Arial"/>
+              </a:rPr>
+              <a:t>Costs you nothing</a:t>
+            </a:r>
+          </a:p>
+        </p:txBody>
+      </p:sp>
+      <p:sp>
+        <p:nvSpPr>
+          <p:cNvPr id="13" name="TextBox 12"/>
+          <p:cNvSpPr txBox="1"/>
+          <p:nvPr/>
+        </p:nvSpPr>
+        <p:spPr>
+          <a:xfrm>
+            <a:off x="4828108" y="5126735"/>
+            <a:ext cx="4182172" cy="633984"/>
+          </a:xfrm>
+          <a:prstGeom prst="rect">
+            <a:avLst/>
+          </a:prstGeom>
+          <a:noFill/>
+        </p:spPr>
+        <p:txBody>
+          <a:bodyPr wrap="none" lIns="0" rIns="0">
+            <a:noAutofit/>
+          </a:bodyPr>
+          <a:lstStyle/>
+          <a:p>
+            <a:pPr algn="l"/>
+            <a:r>
+              <a:rPr sz="3400" b="0" i="0">
+                <a:solidFill>
+                  <a:srgbClr val="0A2240"/>
+                </a:solidFill>
+                <a:latin typeface="Arial"/>
+              </a:rPr>
+              <a:t>Both</a:t>
+            </a:r>
+          </a:p>
+        </p:txBody>
+      </p:sp>
+      <p:sp>
+        <p:nvSpPr>
+          <p:cNvPr id="14" name="TextBox 13"/>
           <p:cNvSpPr/>
           <p:nvPr>
             <p:ph type="sldNum" idx="12"/>
@@ -30640,7 +30711,7 @@
                 </a:solidFill>
                 <a:latin typeface="Arial"/>
               </a:rPr>
-              <a:t>Test It Like a Stranger</a:t>
+              <a:t>When Not to Bother</a:t>
             </a:r>
           </a:p>
         </p:txBody>
@@ -30653,29 +30724,29 @@
         </p:nvSpPr>
         <p:spPr>
           <a:xfrm>
-            <a:off x="457200" y="1499616"/>
-            <a:ext cx="1132164" cy="640080"/>
-          </a:xfrm>
-          <a:prstGeom prst="rect">
-            <a:avLst/>
-          </a:prstGeom>
-          <a:noFill/>
-        </p:spPr>
-        <p:txBody>
-          <a:bodyPr wrap="none" lIns="0" rIns="0">
-            <a:noAutofit/>
-          </a:bodyPr>
-          <a:lstStyle/>
-          <a:p>
-            <a:pPr algn="l"/>
-            <a:r>
-              <a:rPr sz="4200" b="1" i="0">
-                <a:solidFill>
-                  <a:srgbClr val="123A6B"/>
-                </a:solidFill>
-                <a:latin typeface="Arial"/>
-              </a:rPr>
-              <a:t>01</a:t>
+            <a:off x="457200" y="1908050"/>
+            <a:ext cx="11277600" cy="518159"/>
+          </a:xfrm>
+          <a:prstGeom prst="rect">
+            <a:avLst/>
+          </a:prstGeom>
+          <a:noFill/>
+        </p:spPr>
+        <p:txBody>
+          <a:bodyPr wrap="none" lIns="0" rIns="0">
+            <a:noAutofit/>
+          </a:bodyPr>
+          <a:lstStyle/>
+          <a:p>
+            <a:pPr algn="l"/>
+            <a:r>
+              <a:rPr sz="3400" b="0" i="0">
+                <a:solidFill>
+                  <a:srgbClr val="0A2240"/>
+                </a:solidFill>
+                <a:latin typeface="Arial"/>
+              </a:rPr>
+              <a:t>Your demo only ever reads</a:t>
             </a:r>
           </a:p>
         </p:txBody>
@@ -30688,29 +30759,29 @@
         </p:nvSpPr>
         <p:spPr>
           <a:xfrm>
-            <a:off x="1461983" y="1499616"/>
-            <a:ext cx="10272817" cy="640080"/>
-          </a:xfrm>
-          <a:prstGeom prst="rect">
-            <a:avLst/>
-          </a:prstGeom>
-          <a:noFill/>
-        </p:spPr>
-        <p:txBody>
-          <a:bodyPr wrap="none" lIns="0" rIns="0">
-            <a:noAutofit/>
-          </a:bodyPr>
-          <a:lstStyle/>
-          <a:p>
-            <a:pPr algn="l"/>
-            <a:r>
-              <a:rPr sz="4200" b="1" i="0">
-                <a:solidFill>
-                  <a:srgbClr val="123A6B"/>
-                </a:solidFill>
-                <a:latin typeface="Arial"/>
-              </a:rPr>
-              <a:t>Open a private window</a:t>
+            <a:off x="457200" y="2883409"/>
+            <a:ext cx="11277600" cy="518159"/>
+          </a:xfrm>
+          <a:prstGeom prst="rect">
+            <a:avLst/>
+          </a:prstGeom>
+          <a:noFill/>
+        </p:spPr>
+        <p:txBody>
+          <a:bodyPr wrap="none" lIns="0" rIns="0">
+            <a:noAutofit/>
+          </a:bodyPr>
+          <a:lstStyle/>
+          <a:p>
+            <a:pPr algn="l"/>
+            <a:r>
+              <a:rPr sz="3400" b="0" i="0">
+                <a:solidFill>
+                  <a:srgbClr val="0A2240"/>
+                </a:solidFill>
+                <a:latin typeface="Arial"/>
+              </a:rPr>
+              <a:t>Nothing needs to outlive the tab</a:t>
             </a:r>
           </a:p>
         </p:txBody>
@@ -30723,8 +30794,8 @@
         </p:nvSpPr>
         <p:spPr>
           <a:xfrm>
-            <a:off x="1461983" y="2185416"/>
-            <a:ext cx="10730017" cy="551688"/>
+            <a:off x="457200" y="3858768"/>
+            <a:ext cx="11277600" cy="518159"/>
           </a:xfrm>
           <a:prstGeom prst="rect">
             <a:avLst/>
@@ -30745,7 +30816,7 @@
                 </a:solidFill>
                 <a:latin typeface="Arial"/>
               </a:rPr>
-              <a:t>No logins, no cache, no extensions</a:t>
+              <a:t>One saved result would do</a:t>
             </a:r>
           </a:p>
         </p:txBody>
@@ -30758,29 +30829,29 @@
         </p:nvSpPr>
         <p:spPr>
           <a:xfrm>
-            <a:off x="457200" y="3011424"/>
-            <a:ext cx="1132164" cy="640080"/>
-          </a:xfrm>
-          <a:prstGeom prst="rect">
-            <a:avLst/>
-          </a:prstGeom>
-          <a:noFill/>
-        </p:spPr>
-        <p:txBody>
-          <a:bodyPr wrap="none" lIns="0" rIns="0">
-            <a:noAutofit/>
-          </a:bodyPr>
-          <a:lstStyle/>
-          <a:p>
-            <a:pPr algn="l"/>
-            <a:r>
-              <a:rPr sz="4200" b="1" i="0">
-                <a:solidFill>
-                  <a:srgbClr val="123A6B"/>
-                </a:solidFill>
-                <a:latin typeface="Arial"/>
-              </a:rPr>
-              <a:t>02</a:t>
+            <a:off x="457200" y="4834127"/>
+            <a:ext cx="11277600" cy="518159"/>
+          </a:xfrm>
+          <a:prstGeom prst="rect">
+            <a:avLst/>
+          </a:prstGeom>
+          <a:noFill/>
+        </p:spPr>
+        <p:txBody>
+          <a:bodyPr wrap="none" lIns="0" rIns="0">
+            <a:noAutofit/>
+          </a:bodyPr>
+          <a:lstStyle/>
+          <a:p>
+            <a:pPr algn="l"/>
+            <a:r>
+              <a:rPr sz="3400" b="0" i="0">
+                <a:solidFill>
+                  <a:srgbClr val="0A2240"/>
+                </a:solidFill>
+                <a:latin typeface="Arial"/>
+              </a:rPr>
+              <a:t>Then stub it, like anything else</a:t>
             </a:r>
           </a:p>
         </p:txBody>
@@ -30788,181 +30859,6 @@
       <p:sp>
         <p:nvSpPr>
           <p:cNvPr id="7" name="TextBox 6"/>
-          <p:cNvSpPr txBox="1"/>
-          <p:nvPr/>
-        </p:nvSpPr>
-        <p:spPr>
-          <a:xfrm>
-            <a:off x="1461983" y="3011424"/>
-            <a:ext cx="10272817" cy="640080"/>
-          </a:xfrm>
-          <a:prstGeom prst="rect">
-            <a:avLst/>
-          </a:prstGeom>
-          <a:noFill/>
-        </p:spPr>
-        <p:txBody>
-          <a:bodyPr wrap="none" lIns="0" rIns="0">
-            <a:noAutofit/>
-          </a:bodyPr>
-          <a:lstStyle/>
-          <a:p>
-            <a:pPr algn="l"/>
-            <a:r>
-              <a:rPr sz="4200" b="1" i="0">
-                <a:solidFill>
-                  <a:srgbClr val="123A6B"/>
-                </a:solidFill>
-                <a:latin typeface="Arial"/>
-              </a:rPr>
-              <a:t>Do nothing but click</a:t>
-            </a:r>
-          </a:p>
-        </p:txBody>
-      </p:sp>
-      <p:sp>
-        <p:nvSpPr>
-          <p:cNvPr id="8" name="TextBox 7"/>
-          <p:cNvSpPr txBox="1"/>
-          <p:nvPr/>
-        </p:nvSpPr>
-        <p:spPr>
-          <a:xfrm>
-            <a:off x="1461983" y="3697224"/>
-            <a:ext cx="10730017" cy="551688"/>
-          </a:xfrm>
-          <a:prstGeom prst="rect">
-            <a:avLst/>
-          </a:prstGeom>
-          <a:noFill/>
-        </p:spPr>
-        <p:txBody>
-          <a:bodyPr wrap="none" lIns="0" rIns="0">
-            <a:noAutofit/>
-          </a:bodyPr>
-          <a:lstStyle/>
-          <a:p>
-            <a:pPr algn="l"/>
-            <a:r>
-              <a:rPr sz="3400" b="0" i="0">
-                <a:solidFill>
-                  <a:srgbClr val="0A2240"/>
-                </a:solidFill>
-                <a:latin typeface="Arial"/>
-              </a:rPr>
-              <a:t>Type nothing you have not pre-filled</a:t>
-            </a:r>
-          </a:p>
-        </p:txBody>
-      </p:sp>
-      <p:sp>
-        <p:nvSpPr>
-          <p:cNvPr id="9" name="TextBox 8"/>
-          <p:cNvSpPr txBox="1"/>
-          <p:nvPr/>
-        </p:nvSpPr>
-        <p:spPr>
-          <a:xfrm>
-            <a:off x="457200" y="4523232"/>
-            <a:ext cx="1132164" cy="640080"/>
-          </a:xfrm>
-          <a:prstGeom prst="rect">
-            <a:avLst/>
-          </a:prstGeom>
-          <a:noFill/>
-        </p:spPr>
-        <p:txBody>
-          <a:bodyPr wrap="none" lIns="0" rIns="0">
-            <a:noAutofit/>
-          </a:bodyPr>
-          <a:lstStyle/>
-          <a:p>
-            <a:pPr algn="l"/>
-            <a:r>
-              <a:rPr sz="4200" b="1" i="0">
-                <a:solidFill>
-                  <a:srgbClr val="123A6B"/>
-                </a:solidFill>
-                <a:latin typeface="Arial"/>
-              </a:rPr>
-              <a:t>03</a:t>
-            </a:r>
-          </a:p>
-        </p:txBody>
-      </p:sp>
-      <p:sp>
-        <p:nvSpPr>
-          <p:cNvPr id="10" name="TextBox 9"/>
-          <p:cNvSpPr txBox="1"/>
-          <p:nvPr/>
-        </p:nvSpPr>
-        <p:spPr>
-          <a:xfrm>
-            <a:off x="1461983" y="4523232"/>
-            <a:ext cx="10272817" cy="640080"/>
-          </a:xfrm>
-          <a:prstGeom prst="rect">
-            <a:avLst/>
-          </a:prstGeom>
-          <a:noFill/>
-        </p:spPr>
-        <p:txBody>
-          <a:bodyPr wrap="none" lIns="0" rIns="0">
-            <a:noAutofit/>
-          </a:bodyPr>
-          <a:lstStyle/>
-          <a:p>
-            <a:pPr algn="l"/>
-            <a:r>
-              <a:rPr sz="4200" b="1" i="0">
-                <a:solidFill>
-                  <a:srgbClr val="123A6B"/>
-                </a:solidFill>
-                <a:latin typeface="Arial"/>
-              </a:rPr>
-              <a:t>Then try it on a phone</a:t>
-            </a:r>
-          </a:p>
-        </p:txBody>
-      </p:sp>
-      <p:sp>
-        <p:nvSpPr>
-          <p:cNvPr id="11" name="TextBox 10"/>
-          <p:cNvSpPr txBox="1"/>
-          <p:nvPr/>
-        </p:nvSpPr>
-        <p:spPr>
-          <a:xfrm>
-            <a:off x="1461983" y="5209032"/>
-            <a:ext cx="10283289" cy="551688"/>
-          </a:xfrm>
-          <a:prstGeom prst="rect">
-            <a:avLst/>
-          </a:prstGeom>
-          <a:noFill/>
-        </p:spPr>
-        <p:txBody>
-          <a:bodyPr wrap="none" lIns="0" rIns="0">
-            <a:noAutofit/>
-          </a:bodyPr>
-          <a:lstStyle/>
-          <a:p>
-            <a:pPr algn="l"/>
-            <a:r>
-              <a:rPr sz="3400" b="0" i="0">
-                <a:solidFill>
-                  <a:srgbClr val="0A2240"/>
-                </a:solidFill>
-                <a:latin typeface="Arial"/>
-              </a:rPr>
-              <a:t>Half the people you send it to will</a:t>
-            </a:r>
-          </a:p>
-        </p:txBody>
-      </p:sp>
-      <p:sp>
-        <p:nvSpPr>
-          <p:cNvPr id="12" name="TextBox 11"/>
           <p:cNvSpPr/>
           <p:nvPr>
             <p:ph type="sldNum" idx="12"/>
@@ -31195,7 +31091,7 @@
                 </a:solidFill>
                 <a:latin typeface="Arial"/>
               </a:rPr>
-              <a:t>If You Are Behind</a:t>
+              <a:t>Test It Like a Stranger</a:t>
             </a:r>
           </a:p>
         </p:txBody>
@@ -31265,7 +31161,7 @@
                 </a:solidFill>
                 <a:latin typeface="Arial"/>
               </a:rPr>
-              <a:t>Ship what exists</a:t>
+              <a:t>Open a private window</a:t>
             </a:r>
           </a:p>
         </p:txBody>
@@ -31300,7 +31196,7 @@
                 </a:solidFill>
                 <a:latin typeface="Arial"/>
               </a:rPr>
-              <a:t>An ugly live page beats a good local one</a:t>
+              <a:t>No logins, no cache, no extensions</a:t>
             </a:r>
           </a:p>
         </p:txBody>
@@ -31370,7 +31266,7 @@
                 </a:solidFill>
                 <a:latin typeface="Arial"/>
               </a:rPr>
-              <a:t>Drop the front end</a:t>
+              <a:t>Do nothing but click</a:t>
             </a:r>
           </a:p>
         </p:txBody>
@@ -31405,7 +31301,7 @@
                 </a:solidFill>
                 <a:latin typeface="Arial"/>
               </a:rPr>
-              <a:t>A page showing one saved result still counts</a:t>
+              <a:t>Type nothing you have not pre-filled</a:t>
             </a:r>
           </a:p>
         </p:txBody>
@@ -31475,7 +31371,7 @@
                 </a:solidFill>
                 <a:latin typeface="Arial"/>
               </a:rPr>
-              <a:t>Never drop the caveats</a:t>
+              <a:t>Then try it on a phone</a:t>
             </a:r>
           </a:p>
         </p:txBody>
@@ -31489,7 +31385,7 @@
         <p:spPr>
           <a:xfrm>
             <a:off x="1461983" y="5209032"/>
-            <a:ext cx="10730017" cy="551688"/>
+            <a:ext cx="10283289" cy="551688"/>
           </a:xfrm>
           <a:prstGeom prst="rect">
             <a:avLst/>
@@ -31510,7 +31406,7 @@
                 </a:solidFill>
                 <a:latin typeface="Arial"/>
               </a:rPr>
-              <a:t>Five honest lines take two minutes</a:t>
+              <a:t>Half the people you send it to will</a:t>
             </a:r>
           </a:p>
         </p:txBody>
@@ -31608,7 +31504,7 @@
                 </a:solidFill>
                 <a:latin typeface="Arial"/>
               </a:rPr>
-              <a:t>The Ship Checklist</a:t>
+              <a:t>If You Are Behind</a:t>
             </a:r>
           </a:p>
         </p:txBody>
@@ -31622,28 +31518,28 @@
         <p:spPr>
           <a:xfrm>
             <a:off x="457200" y="1499616"/>
-            <a:ext cx="3269657" cy="518159"/>
-          </a:xfrm>
-          <a:prstGeom prst="rect">
-            <a:avLst/>
-          </a:prstGeom>
-          <a:noFill/>
-        </p:spPr>
-        <p:txBody>
-          <a:bodyPr wrap="none" lIns="0" rIns="0">
-            <a:noAutofit/>
-          </a:bodyPr>
-          <a:lstStyle/>
-          <a:p>
-            <a:pPr algn="l"/>
-            <a:r>
-              <a:rPr sz="3400" b="1" i="0">
+            <a:ext cx="1132164" cy="640080"/>
+          </a:xfrm>
+          <a:prstGeom prst="rect">
+            <a:avLst/>
+          </a:prstGeom>
+          <a:noFill/>
+        </p:spPr>
+        <p:txBody>
+          <a:bodyPr wrap="none" lIns="0" rIns="0">
+            <a:noAutofit/>
+          </a:bodyPr>
+          <a:lstStyle/>
+          <a:p>
+            <a:pPr algn="l"/>
+            <a:r>
+              <a:rPr sz="4200" b="1" i="0">
                 <a:solidFill>
                   <a:srgbClr val="123A6B"/>
                 </a:solidFill>
                 <a:latin typeface="Arial"/>
               </a:rPr>
-              <a:t>Check</a:t>
+              <a:t>01</a:t>
             </a:r>
           </a:p>
         </p:txBody>
@@ -31656,74 +31552,65 @@
         </p:nvSpPr>
         <p:spPr>
           <a:xfrm>
-            <a:off x="4275497" y="1499616"/>
-            <a:ext cx="4935503" cy="518159"/>
-          </a:xfrm>
-          <a:prstGeom prst="rect">
-            <a:avLst/>
-          </a:prstGeom>
-          <a:noFill/>
-        </p:spPr>
-        <p:txBody>
-          <a:bodyPr wrap="none" lIns="0" rIns="0">
-            <a:noAutofit/>
-          </a:bodyPr>
-          <a:lstStyle/>
-          <a:p>
-            <a:pPr algn="l"/>
-            <a:r>
-              <a:rPr sz="3400" b="1" i="0">
+            <a:off x="1461983" y="1499616"/>
+            <a:ext cx="10272817" cy="640080"/>
+          </a:xfrm>
+          <a:prstGeom prst="rect">
+            <a:avLst/>
+          </a:prstGeom>
+          <a:noFill/>
+        </p:spPr>
+        <p:txBody>
+          <a:bodyPr wrap="none" lIns="0" rIns="0">
+            <a:noAutofit/>
+          </a:bodyPr>
+          <a:lstStyle/>
+          <a:p>
+            <a:pPr algn="l"/>
+            <a:r>
+              <a:rPr sz="4200" b="1" i="0">
                 <a:solidFill>
                   <a:srgbClr val="123A6B"/>
                 </a:solidFill>
                 <a:latin typeface="Arial"/>
               </a:rPr>
-              <a:t>Pass means</a:t>
-            </a:r>
-          </a:p>
-        </p:txBody>
-      </p:sp>
-      <p:sp>
-        <p:nvSpPr>
-          <p:cNvPr id="5" name="Rectangle 4"/>
-          <p:cNvSpPr/>
-          <p:nvPr/>
-        </p:nvSpPr>
-        <p:spPr>
-          <a:xfrm>
-            <a:off x="457200" y="2072639"/>
-            <a:ext cx="8753800" cy="54864"/>
-          </a:xfrm>
-          <a:prstGeom prst="rect">
-            <a:avLst/>
-          </a:prstGeom>
-          <a:solidFill>
-            <a:srgbClr val="0072CE"/>
-          </a:solidFill>
-          <a:ln>
-            <a:noFill/>
-          </a:ln>
-          <a:effectLst/>
-        </p:spPr>
-        <p:style>
-          <a:lnRef idx="1">
-            <a:schemeClr val="accent1"/>
-          </a:lnRef>
-          <a:fillRef idx="3">
-            <a:schemeClr val="accent1"/>
-          </a:fillRef>
-          <a:effectRef idx="2">
-            <a:schemeClr val="accent1"/>
-          </a:effectRef>
-          <a:fontRef idx="minor">
-            <a:schemeClr val="lt1"/>
-          </a:fontRef>
-        </p:style>
-        <p:txBody>
-          <a:bodyPr rtlCol="0" anchor="ctr"/>
-          <a:lstStyle/>
-          <a:p>
-            <a:pPr algn="ctr"/>
+              <a:t>Ship what exists</a:t>
+            </a:r>
+          </a:p>
+        </p:txBody>
+      </p:sp>
+      <p:sp>
+        <p:nvSpPr>
+          <p:cNvPr id="5" name="TextBox 4"/>
+          <p:cNvSpPr txBox="1"/>
+          <p:nvPr/>
+        </p:nvSpPr>
+        <p:spPr>
+          <a:xfrm>
+            <a:off x="1461983" y="2185416"/>
+            <a:ext cx="10730017" cy="551688"/>
+          </a:xfrm>
+          <a:prstGeom prst="rect">
+            <a:avLst/>
+          </a:prstGeom>
+          <a:noFill/>
+        </p:spPr>
+        <p:txBody>
+          <a:bodyPr wrap="none" lIns="0" rIns="0">
+            <a:noAutofit/>
+          </a:bodyPr>
+          <a:lstStyle/>
+          <a:p>
+            <a:pPr algn="l"/>
+            <a:r>
+              <a:rPr sz="3400" b="0" i="0">
+                <a:solidFill>
+                  <a:srgbClr val="0A2240"/>
+                </a:solidFill>
+                <a:latin typeface="Arial"/>
+              </a:rPr>
+              <a:t>An ugly live page beats a good local one</a:t>
+            </a:r>
           </a:p>
         </p:txBody>
       </p:sp>
@@ -31735,29 +31622,29 @@
         </p:nvSpPr>
         <p:spPr>
           <a:xfrm>
-            <a:off x="457200" y="2401823"/>
-            <a:ext cx="4829115" cy="633984"/>
-          </a:xfrm>
-          <a:prstGeom prst="rect">
-            <a:avLst/>
-          </a:prstGeom>
-          <a:noFill/>
-        </p:spPr>
-        <p:txBody>
-          <a:bodyPr wrap="none" lIns="0" rIns="0">
-            <a:noAutofit/>
-          </a:bodyPr>
-          <a:lstStyle/>
-          <a:p>
-            <a:pPr algn="l"/>
-            <a:r>
-              <a:rPr sz="3400" b="0" i="0">
-                <a:solidFill>
-                  <a:srgbClr val="0A2240"/>
-                </a:solidFill>
-                <a:latin typeface="Arial"/>
-              </a:rPr>
-              <a:t>Private window</a:t>
+            <a:off x="457200" y="3011424"/>
+            <a:ext cx="1132164" cy="640080"/>
+          </a:xfrm>
+          <a:prstGeom prst="rect">
+            <a:avLst/>
+          </a:prstGeom>
+          <a:noFill/>
+        </p:spPr>
+        <p:txBody>
+          <a:bodyPr wrap="none" lIns="0" rIns="0">
+            <a:noAutofit/>
+          </a:bodyPr>
+          <a:lstStyle/>
+          <a:p>
+            <a:pPr algn="l"/>
+            <a:r>
+              <a:rPr sz="4200" b="1" i="0">
+                <a:solidFill>
+                  <a:srgbClr val="123A6B"/>
+                </a:solidFill>
+                <a:latin typeface="Arial"/>
+              </a:rPr>
+              <a:t>02</a:t>
             </a:r>
           </a:p>
         </p:txBody>
@@ -31770,29 +31657,29 @@
         </p:nvSpPr>
         <p:spPr>
           <a:xfrm>
-            <a:off x="4275497" y="2401823"/>
-            <a:ext cx="5290939" cy="633984"/>
-          </a:xfrm>
-          <a:prstGeom prst="rect">
-            <a:avLst/>
-          </a:prstGeom>
-          <a:noFill/>
-        </p:spPr>
-        <p:txBody>
-          <a:bodyPr wrap="none" lIns="0" rIns="0">
-            <a:noAutofit/>
-          </a:bodyPr>
-          <a:lstStyle/>
-          <a:p>
-            <a:pPr algn="l"/>
-            <a:r>
-              <a:rPr sz="3400" b="0" i="0">
-                <a:solidFill>
-                  <a:srgbClr val="0A2240"/>
-                </a:solidFill>
-                <a:latin typeface="Arial"/>
-              </a:rPr>
-              <a:t>It loads and runs</a:t>
+            <a:off x="1461983" y="3011424"/>
+            <a:ext cx="10272817" cy="640080"/>
+          </a:xfrm>
+          <a:prstGeom prst="rect">
+            <a:avLst/>
+          </a:prstGeom>
+          <a:noFill/>
+        </p:spPr>
+        <p:txBody>
+          <a:bodyPr wrap="none" lIns="0" rIns="0">
+            <a:noAutofit/>
+          </a:bodyPr>
+          <a:lstStyle/>
+          <a:p>
+            <a:pPr algn="l"/>
+            <a:r>
+              <a:rPr sz="4200" b="1" i="0">
+                <a:solidFill>
+                  <a:srgbClr val="123A6B"/>
+                </a:solidFill>
+                <a:latin typeface="Arial"/>
+              </a:rPr>
+              <a:t>Drop the front end</a:t>
             </a:r>
           </a:p>
         </p:txBody>
@@ -31805,8 +31692,8 @@
         </p:nvSpPr>
         <p:spPr>
           <a:xfrm>
-            <a:off x="457200" y="3310127"/>
-            <a:ext cx="3269657" cy="633984"/>
+            <a:off x="1461983" y="3697224"/>
+            <a:ext cx="10730017" cy="551688"/>
           </a:xfrm>
           <a:prstGeom prst="rect">
             <a:avLst/>
@@ -31827,7 +31714,7 @@
                 </a:solidFill>
                 <a:latin typeface="Arial"/>
               </a:rPr>
-              <a:t>Phone</a:t>
+              <a:t>A page showing one saved result still counts</a:t>
             </a:r>
           </a:p>
         </p:txBody>
@@ -31840,29 +31727,29 @@
         </p:nvSpPr>
         <p:spPr>
           <a:xfrm>
-            <a:off x="4275497" y="3310127"/>
-            <a:ext cx="7494468" cy="633984"/>
-          </a:xfrm>
-          <a:prstGeom prst="rect">
-            <a:avLst/>
-          </a:prstGeom>
-          <a:noFill/>
-        </p:spPr>
-        <p:txBody>
-          <a:bodyPr wrap="none" lIns="0" rIns="0">
-            <a:noAutofit/>
-          </a:bodyPr>
-          <a:lstStyle/>
-          <a:p>
-            <a:pPr algn="l"/>
-            <a:r>
-              <a:rPr sz="3400" b="0" i="0">
-                <a:solidFill>
-                  <a:srgbClr val="0A2240"/>
-                </a:solidFill>
-                <a:latin typeface="Arial"/>
-              </a:rPr>
-              <a:t>You can read the output</a:t>
+            <a:off x="457200" y="4523232"/>
+            <a:ext cx="1132164" cy="640080"/>
+          </a:xfrm>
+          <a:prstGeom prst="rect">
+            <a:avLst/>
+          </a:prstGeom>
+          <a:noFill/>
+        </p:spPr>
+        <p:txBody>
+          <a:bodyPr wrap="none" lIns="0" rIns="0">
+            <a:noAutofit/>
+          </a:bodyPr>
+          <a:lstStyle/>
+          <a:p>
+            <a:pPr algn="l"/>
+            <a:r>
+              <a:rPr sz="4200" b="1" i="0">
+                <a:solidFill>
+                  <a:srgbClr val="123A6B"/>
+                </a:solidFill>
+                <a:latin typeface="Arial"/>
+              </a:rPr>
+              <a:t>03</a:t>
             </a:r>
           </a:p>
         </p:txBody>
@@ -31875,29 +31762,29 @@
         </p:nvSpPr>
         <p:spPr>
           <a:xfrm>
-            <a:off x="457200" y="4218431"/>
-            <a:ext cx="4485025" cy="633984"/>
-          </a:xfrm>
-          <a:prstGeom prst="rect">
-            <a:avLst/>
-          </a:prstGeom>
-          <a:noFill/>
-        </p:spPr>
-        <p:txBody>
-          <a:bodyPr wrap="none" lIns="0" rIns="0">
-            <a:noAutofit/>
-          </a:bodyPr>
-          <a:lstStyle/>
-          <a:p>
-            <a:pPr algn="l"/>
-            <a:r>
-              <a:rPr sz="3400" b="0" i="0">
-                <a:solidFill>
-                  <a:srgbClr val="0A2240"/>
-                </a:solidFill>
-                <a:latin typeface="Arial"/>
-              </a:rPr>
-              <a:t>Laptop closed</a:t>
+            <a:off x="1461983" y="4523232"/>
+            <a:ext cx="10272817" cy="640080"/>
+          </a:xfrm>
+          <a:prstGeom prst="rect">
+            <a:avLst/>
+          </a:prstGeom>
+          <a:noFill/>
+        </p:spPr>
+        <p:txBody>
+          <a:bodyPr wrap="none" lIns="0" rIns="0">
+            <a:noAutofit/>
+          </a:bodyPr>
+          <a:lstStyle/>
+          <a:p>
+            <a:pPr algn="l"/>
+            <a:r>
+              <a:rPr sz="4200" b="1" i="0">
+                <a:solidFill>
+                  <a:srgbClr val="123A6B"/>
+                </a:solidFill>
+                <a:latin typeface="Arial"/>
+              </a:rPr>
+              <a:t>Never drop the caveats</a:t>
             </a:r>
           </a:p>
         </p:txBody>
@@ -31910,8 +31797,8 @@
         </p:nvSpPr>
         <p:spPr>
           <a:xfrm>
-            <a:off x="4275497" y="4218431"/>
-            <a:ext cx="7441505" cy="633984"/>
+            <a:off x="1461983" y="5209032"/>
+            <a:ext cx="10730017" cy="551688"/>
           </a:xfrm>
           <a:prstGeom prst="rect">
             <a:avLst/>
@@ -31932,7 +31819,7 @@
                 </a:solidFill>
                 <a:latin typeface="Arial"/>
               </a:rPr>
-              <a:t>A teammate can open it</a:t>
+              <a:t>Five honest lines take two minutes</a:t>
             </a:r>
           </a:p>
         </p:txBody>
@@ -31940,76 +31827,6 @@
       <p:sp>
         <p:nvSpPr>
           <p:cNvPr id="12" name="TextBox 11"/>
-          <p:cNvSpPr txBox="1"/>
-          <p:nvPr/>
-        </p:nvSpPr>
-        <p:spPr>
-          <a:xfrm>
-            <a:off x="457200" y="5126735"/>
-            <a:ext cx="3484800" cy="633984"/>
-          </a:xfrm>
-          <a:prstGeom prst="rect">
-            <a:avLst/>
-          </a:prstGeom>
-          <a:noFill/>
-        </p:spPr>
-        <p:txBody>
-          <a:bodyPr wrap="none" lIns="0" rIns="0">
-            <a:noAutofit/>
-          </a:bodyPr>
-          <a:lstStyle/>
-          <a:p>
-            <a:pPr algn="l"/>
-            <a:r>
-              <a:rPr sz="3400" b="0" i="0">
-                <a:solidFill>
-                  <a:srgbClr val="0A2240"/>
-                </a:solidFill>
-                <a:latin typeface="Arial"/>
-              </a:rPr>
-              <a:t>No secrets</a:t>
-            </a:r>
-          </a:p>
-        </p:txBody>
-      </p:sp>
-      <p:sp>
-        <p:nvSpPr>
-          <p:cNvPr id="13" name="TextBox 12"/>
-          <p:cNvSpPr txBox="1"/>
-          <p:nvPr/>
-        </p:nvSpPr>
-        <p:spPr>
-          <a:xfrm>
-            <a:off x="4275497" y="5126735"/>
-            <a:ext cx="7403723" cy="633984"/>
-          </a:xfrm>
-          <a:prstGeom prst="rect">
-            <a:avLst/>
-          </a:prstGeom>
-          <a:noFill/>
-        </p:spPr>
-        <p:txBody>
-          <a:bodyPr wrap="none" lIns="0" rIns="0">
-            <a:noAutofit/>
-          </a:bodyPr>
-          <a:lstStyle/>
-          <a:p>
-            <a:pPr algn="l"/>
-            <a:r>
-              <a:rPr sz="3400" b="0" i="0">
-                <a:solidFill>
-                  <a:srgbClr val="0A2240"/>
-                </a:solidFill>
-                <a:latin typeface="Arial"/>
-              </a:rPr>
-              <a:t>Nothing in page or repo</a:t>
-            </a:r>
-          </a:p>
-        </p:txBody>
-      </p:sp>
-      <p:sp>
-        <p:nvSpPr>
-          <p:cNvPr id="14" name="TextBox 13"/>
           <p:cNvSpPr/>
           <p:nvPr>
             <p:ph type="sldNum" idx="12"/>
@@ -32072,14 +31889,119 @@
       <p:grpSpPr/>
       <p:sp>
         <p:nvSpPr>
-          <p:cNvPr id="2" name="Rectangle 1"/>
+          <p:cNvPr id="2" name="TextBox 1"/>
+          <p:cNvSpPr txBox="1"/>
+          <p:nvPr/>
+        </p:nvSpPr>
+        <p:spPr>
+          <a:xfrm>
+            <a:off x="457200" y="457200"/>
+            <a:ext cx="11277600" cy="768096"/>
+          </a:xfrm>
+          <a:prstGeom prst="rect">
+            <a:avLst/>
+          </a:prstGeom>
+          <a:noFill/>
+        </p:spPr>
+        <p:txBody>
+          <a:bodyPr wrap="none" lIns="0" rIns="0">
+            <a:noAutofit/>
+          </a:bodyPr>
+          <a:lstStyle/>
+          <a:p>
+            <a:pPr algn="l"/>
+            <a:r>
+              <a:rPr sz="4200" b="1" i="0">
+                <a:solidFill>
+                  <a:srgbClr val="0072CE"/>
+                </a:solidFill>
+                <a:latin typeface="Arial"/>
+              </a:rPr>
+              <a:t>The Ship Checklist</a:t>
+            </a:r>
+          </a:p>
+        </p:txBody>
+      </p:sp>
+      <p:sp>
+        <p:nvSpPr>
+          <p:cNvPr id="3" name="TextBox 2"/>
+          <p:cNvSpPr txBox="1"/>
+          <p:nvPr/>
+        </p:nvSpPr>
+        <p:spPr>
+          <a:xfrm>
+            <a:off x="457200" y="1499616"/>
+            <a:ext cx="3269657" cy="518159"/>
+          </a:xfrm>
+          <a:prstGeom prst="rect">
+            <a:avLst/>
+          </a:prstGeom>
+          <a:noFill/>
+        </p:spPr>
+        <p:txBody>
+          <a:bodyPr wrap="none" lIns="0" rIns="0">
+            <a:noAutofit/>
+          </a:bodyPr>
+          <a:lstStyle/>
+          <a:p>
+            <a:pPr algn="l"/>
+            <a:r>
+              <a:rPr sz="3400" b="1" i="0">
+                <a:solidFill>
+                  <a:srgbClr val="123A6B"/>
+                </a:solidFill>
+                <a:latin typeface="Arial"/>
+              </a:rPr>
+              <a:t>Check</a:t>
+            </a:r>
+          </a:p>
+        </p:txBody>
+      </p:sp>
+      <p:sp>
+        <p:nvSpPr>
+          <p:cNvPr id="4" name="TextBox 3"/>
+          <p:cNvSpPr txBox="1"/>
+          <p:nvPr/>
+        </p:nvSpPr>
+        <p:spPr>
+          <a:xfrm>
+            <a:off x="4275497" y="1499616"/>
+            <a:ext cx="4935503" cy="518159"/>
+          </a:xfrm>
+          <a:prstGeom prst="rect">
+            <a:avLst/>
+          </a:prstGeom>
+          <a:noFill/>
+        </p:spPr>
+        <p:txBody>
+          <a:bodyPr wrap="none" lIns="0" rIns="0">
+            <a:noAutofit/>
+          </a:bodyPr>
+          <a:lstStyle/>
+          <a:p>
+            <a:pPr algn="l"/>
+            <a:r>
+              <a:rPr sz="3400" b="1" i="0">
+                <a:solidFill>
+                  <a:srgbClr val="123A6B"/>
+                </a:solidFill>
+                <a:latin typeface="Arial"/>
+              </a:rPr>
+              <a:t>Pass means</a:t>
+            </a:r>
+          </a:p>
+        </p:txBody>
+      </p:sp>
+      <p:sp>
+        <p:nvSpPr>
+          <p:cNvPr id="5" name="Rectangle 4"/>
           <p:cNvSpPr/>
           <p:nvPr/>
         </p:nvSpPr>
         <p:spPr>
           <a:xfrm>
-            <a:off x="457200" y="2621280"/>
-            <a:ext cx="128016" cy="1615440"/>
+            <a:off x="457200" y="2072639"/>
+            <a:ext cx="8753800" cy="54864"/>
           </a:xfrm>
           <a:prstGeom prst="rect">
             <a:avLst/>
@@ -32116,49 +32038,49 @@
       </p:sp>
       <p:sp>
         <p:nvSpPr>
-          <p:cNvPr id="3" name="TextBox 2"/>
+          <p:cNvPr id="6" name="TextBox 5"/>
           <p:cNvSpPr txBox="1"/>
           <p:nvPr/>
         </p:nvSpPr>
         <p:spPr>
           <a:xfrm>
-            <a:off x="996696" y="2621280"/>
-            <a:ext cx="11195304" cy="731520"/>
-          </a:xfrm>
-          <a:prstGeom prst="rect">
-            <a:avLst/>
-          </a:prstGeom>
-          <a:noFill/>
-        </p:spPr>
-        <p:txBody>
-          <a:bodyPr wrap="none" lIns="0" rIns="0">
-            <a:noAutofit/>
-          </a:bodyPr>
-          <a:lstStyle/>
-          <a:p>
-            <a:pPr algn="l"/>
-            <a:r>
-              <a:rPr sz="4200" b="1" i="0">
+            <a:off x="457200" y="2401823"/>
+            <a:ext cx="4829115" cy="633984"/>
+          </a:xfrm>
+          <a:prstGeom prst="rect">
+            <a:avLst/>
+          </a:prstGeom>
+          <a:noFill/>
+        </p:spPr>
+        <p:txBody>
+          <a:bodyPr wrap="none" lIns="0" rIns="0">
+            <a:noAutofit/>
+          </a:bodyPr>
+          <a:lstStyle/>
+          <a:p>
+            <a:pPr algn="l"/>
+            <a:r>
+              <a:rPr sz="3400" b="0" i="0">
                 <a:solidFill>
                   <a:srgbClr val="0A2240"/>
                 </a:solidFill>
                 <a:latin typeface="Arial"/>
               </a:rPr>
-              <a:t>"Needs your laptop? Not shipped."</a:t>
-            </a:r>
-          </a:p>
-        </p:txBody>
-      </p:sp>
-      <p:sp>
-        <p:nvSpPr>
-          <p:cNvPr id="4" name="TextBox 3"/>
+              <a:t>Private window</a:t>
+            </a:r>
+          </a:p>
+        </p:txBody>
+      </p:sp>
+      <p:sp>
+        <p:nvSpPr>
+          <p:cNvPr id="7" name="TextBox 6"/>
           <p:cNvSpPr txBox="1"/>
           <p:nvPr/>
         </p:nvSpPr>
         <p:spPr>
           <a:xfrm>
-            <a:off x="996696" y="3627120"/>
-            <a:ext cx="10738104" cy="609600"/>
+            <a:off x="4275497" y="2401823"/>
+            <a:ext cx="5290939" cy="633984"/>
           </a:xfrm>
           <a:prstGeom prst="rect">
             <a:avLst/>
@@ -32175,18 +32097,228 @@
             <a:r>
               <a:rPr sz="3400" b="0" i="0">
                 <a:solidFill>
-                  <a:srgbClr val="5B6B82"/>
-                </a:solidFill>
-                <a:latin typeface="Arial"/>
-              </a:rPr>
-              <a:t>- Objective two, restated</a:t>
-            </a:r>
-          </a:p>
-        </p:txBody>
-      </p:sp>
-      <p:sp>
-        <p:nvSpPr>
-          <p:cNvPr id="5" name="TextBox 4"/>
+                  <a:srgbClr val="0A2240"/>
+                </a:solidFill>
+                <a:latin typeface="Arial"/>
+              </a:rPr>
+              <a:t>It loads and runs</a:t>
+            </a:r>
+          </a:p>
+        </p:txBody>
+      </p:sp>
+      <p:sp>
+        <p:nvSpPr>
+          <p:cNvPr id="8" name="TextBox 7"/>
+          <p:cNvSpPr txBox="1"/>
+          <p:nvPr/>
+        </p:nvSpPr>
+        <p:spPr>
+          <a:xfrm>
+            <a:off x="457200" y="3310127"/>
+            <a:ext cx="3269657" cy="633984"/>
+          </a:xfrm>
+          <a:prstGeom prst="rect">
+            <a:avLst/>
+          </a:prstGeom>
+          <a:noFill/>
+        </p:spPr>
+        <p:txBody>
+          <a:bodyPr wrap="none" lIns="0" rIns="0">
+            <a:noAutofit/>
+          </a:bodyPr>
+          <a:lstStyle/>
+          <a:p>
+            <a:pPr algn="l"/>
+            <a:r>
+              <a:rPr sz="3400" b="0" i="0">
+                <a:solidFill>
+                  <a:srgbClr val="0A2240"/>
+                </a:solidFill>
+                <a:latin typeface="Arial"/>
+              </a:rPr>
+              <a:t>Phone</a:t>
+            </a:r>
+          </a:p>
+        </p:txBody>
+      </p:sp>
+      <p:sp>
+        <p:nvSpPr>
+          <p:cNvPr id="9" name="TextBox 8"/>
+          <p:cNvSpPr txBox="1"/>
+          <p:nvPr/>
+        </p:nvSpPr>
+        <p:spPr>
+          <a:xfrm>
+            <a:off x="4275497" y="3310127"/>
+            <a:ext cx="7494468" cy="633984"/>
+          </a:xfrm>
+          <a:prstGeom prst="rect">
+            <a:avLst/>
+          </a:prstGeom>
+          <a:noFill/>
+        </p:spPr>
+        <p:txBody>
+          <a:bodyPr wrap="none" lIns="0" rIns="0">
+            <a:noAutofit/>
+          </a:bodyPr>
+          <a:lstStyle/>
+          <a:p>
+            <a:pPr algn="l"/>
+            <a:r>
+              <a:rPr sz="3400" b="0" i="0">
+                <a:solidFill>
+                  <a:srgbClr val="0A2240"/>
+                </a:solidFill>
+                <a:latin typeface="Arial"/>
+              </a:rPr>
+              <a:t>You can read the output</a:t>
+            </a:r>
+          </a:p>
+        </p:txBody>
+      </p:sp>
+      <p:sp>
+        <p:nvSpPr>
+          <p:cNvPr id="10" name="TextBox 9"/>
+          <p:cNvSpPr txBox="1"/>
+          <p:nvPr/>
+        </p:nvSpPr>
+        <p:spPr>
+          <a:xfrm>
+            <a:off x="457200" y="4218431"/>
+            <a:ext cx="4485025" cy="633984"/>
+          </a:xfrm>
+          <a:prstGeom prst="rect">
+            <a:avLst/>
+          </a:prstGeom>
+          <a:noFill/>
+        </p:spPr>
+        <p:txBody>
+          <a:bodyPr wrap="none" lIns="0" rIns="0">
+            <a:noAutofit/>
+          </a:bodyPr>
+          <a:lstStyle/>
+          <a:p>
+            <a:pPr algn="l"/>
+            <a:r>
+              <a:rPr sz="3400" b="0" i="0">
+                <a:solidFill>
+                  <a:srgbClr val="0A2240"/>
+                </a:solidFill>
+                <a:latin typeface="Arial"/>
+              </a:rPr>
+              <a:t>Laptop closed</a:t>
+            </a:r>
+          </a:p>
+        </p:txBody>
+      </p:sp>
+      <p:sp>
+        <p:nvSpPr>
+          <p:cNvPr id="11" name="TextBox 10"/>
+          <p:cNvSpPr txBox="1"/>
+          <p:nvPr/>
+        </p:nvSpPr>
+        <p:spPr>
+          <a:xfrm>
+            <a:off x="4275497" y="4218431"/>
+            <a:ext cx="7441505" cy="633984"/>
+          </a:xfrm>
+          <a:prstGeom prst="rect">
+            <a:avLst/>
+          </a:prstGeom>
+          <a:noFill/>
+        </p:spPr>
+        <p:txBody>
+          <a:bodyPr wrap="none" lIns="0" rIns="0">
+            <a:noAutofit/>
+          </a:bodyPr>
+          <a:lstStyle/>
+          <a:p>
+            <a:pPr algn="l"/>
+            <a:r>
+              <a:rPr sz="3400" b="0" i="0">
+                <a:solidFill>
+                  <a:srgbClr val="0A2240"/>
+                </a:solidFill>
+                <a:latin typeface="Arial"/>
+              </a:rPr>
+              <a:t>A teammate can open it</a:t>
+            </a:r>
+          </a:p>
+        </p:txBody>
+      </p:sp>
+      <p:sp>
+        <p:nvSpPr>
+          <p:cNvPr id="12" name="TextBox 11"/>
+          <p:cNvSpPr txBox="1"/>
+          <p:nvPr/>
+        </p:nvSpPr>
+        <p:spPr>
+          <a:xfrm>
+            <a:off x="457200" y="5126735"/>
+            <a:ext cx="3484800" cy="633984"/>
+          </a:xfrm>
+          <a:prstGeom prst="rect">
+            <a:avLst/>
+          </a:prstGeom>
+          <a:noFill/>
+        </p:spPr>
+        <p:txBody>
+          <a:bodyPr wrap="none" lIns="0" rIns="0">
+            <a:noAutofit/>
+          </a:bodyPr>
+          <a:lstStyle/>
+          <a:p>
+            <a:pPr algn="l"/>
+            <a:r>
+              <a:rPr sz="3400" b="0" i="0">
+                <a:solidFill>
+                  <a:srgbClr val="0A2240"/>
+                </a:solidFill>
+                <a:latin typeface="Arial"/>
+              </a:rPr>
+              <a:t>No secrets</a:t>
+            </a:r>
+          </a:p>
+        </p:txBody>
+      </p:sp>
+      <p:sp>
+        <p:nvSpPr>
+          <p:cNvPr id="13" name="TextBox 12"/>
+          <p:cNvSpPr txBox="1"/>
+          <p:nvPr/>
+        </p:nvSpPr>
+        <p:spPr>
+          <a:xfrm>
+            <a:off x="4275497" y="5126735"/>
+            <a:ext cx="7403723" cy="633984"/>
+          </a:xfrm>
+          <a:prstGeom prst="rect">
+            <a:avLst/>
+          </a:prstGeom>
+          <a:noFill/>
+        </p:spPr>
+        <p:txBody>
+          <a:bodyPr wrap="none" lIns="0" rIns="0">
+            <a:noAutofit/>
+          </a:bodyPr>
+          <a:lstStyle/>
+          <a:p>
+            <a:pPr algn="l"/>
+            <a:r>
+              <a:rPr sz="3400" b="0" i="0">
+                <a:solidFill>
+                  <a:srgbClr val="0A2240"/>
+                </a:solidFill>
+                <a:latin typeface="Arial"/>
+              </a:rPr>
+              <a:t>Nothing in page or repo</a:t>
+            </a:r>
+          </a:p>
+        </p:txBody>
+      </p:sp>
+      <p:sp>
+        <p:nvSpPr>
+          <p:cNvPr id="14" name="TextBox 13"/>
           <p:cNvSpPr/>
           <p:nvPr>
             <p:ph type="sldNum" idx="12"/>
@@ -32255,8 +32387,8 @@
         </p:nvSpPr>
         <p:spPr>
           <a:xfrm>
-            <a:off x="457200" y="1783080"/>
-            <a:ext cx="128016" cy="2011680"/>
+            <a:off x="457200" y="2621280"/>
+            <a:ext cx="128016" cy="1615440"/>
           </a:xfrm>
           <a:prstGeom prst="rect">
             <a:avLst/>
@@ -32299,29 +32431,29 @@
         </p:nvSpPr>
         <p:spPr>
           <a:xfrm>
-            <a:off x="996696" y="1783080"/>
-            <a:ext cx="10738104" cy="1005840"/>
-          </a:xfrm>
-          <a:prstGeom prst="rect">
-            <a:avLst/>
-          </a:prstGeom>
-          <a:noFill/>
-        </p:spPr>
-        <p:txBody>
-          <a:bodyPr wrap="none" lIns="0" rIns="0">
-            <a:noAutofit/>
-          </a:bodyPr>
-          <a:lstStyle/>
-          <a:p>
-            <a:pPr algn="l"/>
-            <a:r>
-              <a:rPr sz="6000" b="1" i="0">
-                <a:solidFill>
-                  <a:srgbClr val="0072CE"/>
-                </a:solidFill>
-                <a:latin typeface="Arial"/>
-              </a:rPr>
-              <a:t>03</a:t>
+            <a:off x="996696" y="2621280"/>
+            <a:ext cx="11195304" cy="731520"/>
+          </a:xfrm>
+          <a:prstGeom prst="rect">
+            <a:avLst/>
+          </a:prstGeom>
+          <a:noFill/>
+        </p:spPr>
+        <p:txBody>
+          <a:bodyPr wrap="none" lIns="0" rIns="0">
+            <a:noAutofit/>
+          </a:bodyPr>
+          <a:lstStyle/>
+          <a:p>
+            <a:pPr algn="l"/>
+            <a:r>
+              <a:rPr sz="4200" b="1" i="0">
+                <a:solidFill>
+                  <a:srgbClr val="0A2240"/>
+                </a:solidFill>
+                <a:latin typeface="Arial"/>
+              </a:rPr>
+              <a:t>"Needs your laptop? Not shipped."</a:t>
             </a:r>
           </a:p>
         </p:txBody>
@@ -32334,29 +32466,29 @@
         </p:nvSpPr>
         <p:spPr>
           <a:xfrm>
-            <a:off x="996696" y="3063240"/>
-            <a:ext cx="10738104" cy="731520"/>
-          </a:xfrm>
-          <a:prstGeom prst="rect">
-            <a:avLst/>
-          </a:prstGeom>
-          <a:noFill/>
-        </p:spPr>
-        <p:txBody>
-          <a:bodyPr wrap="none" lIns="0" rIns="0">
-            <a:noAutofit/>
-          </a:bodyPr>
-          <a:lstStyle/>
-          <a:p>
-            <a:pPr algn="l"/>
-            <a:r>
-              <a:rPr sz="4200" b="1" i="0">
-                <a:solidFill>
-                  <a:srgbClr val="0072CE"/>
-                </a:solidFill>
-                <a:latin typeface="Arial"/>
-              </a:rPr>
-              <a:t>Script and Caveats</a:t>
+            <a:off x="996696" y="3627120"/>
+            <a:ext cx="10738104" cy="609600"/>
+          </a:xfrm>
+          <a:prstGeom prst="rect">
+            <a:avLst/>
+          </a:prstGeom>
+          <a:noFill/>
+        </p:spPr>
+        <p:txBody>
+          <a:bodyPr wrap="none" lIns="0" rIns="0">
+            <a:noAutofit/>
+          </a:bodyPr>
+          <a:lstStyle/>
+          <a:p>
+            <a:pPr algn="l"/>
+            <a:r>
+              <a:rPr sz="3400" b="0" i="0">
+                <a:solidFill>
+                  <a:srgbClr val="5B6B82"/>
+                </a:solidFill>
+                <a:latin typeface="Arial"/>
+              </a:rPr>
+              <a:t>- Objective two, restated</a:t>
             </a:r>
           </a:p>
         </p:txBody>
@@ -32432,8 +32564,8 @@
         </p:nvSpPr>
         <p:spPr>
           <a:xfrm>
-            <a:off x="457200" y="2484120"/>
-            <a:ext cx="128016" cy="1889760"/>
+            <a:off x="457200" y="1783080"/>
+            <a:ext cx="128016" cy="2011680"/>
           </a:xfrm>
           <a:prstGeom prst="rect">
             <a:avLst/>
@@ -32476,7 +32608,7 @@
         </p:nvSpPr>
         <p:spPr>
           <a:xfrm>
-            <a:off x="996696" y="2484120"/>
+            <a:off x="996696" y="1783080"/>
             <a:ext cx="10738104" cy="1005840"/>
           </a:xfrm>
           <a:prstGeom prst="rect">
@@ -32498,7 +32630,7 @@
                 </a:solidFill>
                 <a:latin typeface="Arial"/>
               </a:rPr>
-              <a:t>Demo script</a:t>
+              <a:t>03</a:t>
             </a:r>
           </a:p>
         </p:txBody>
@@ -32511,29 +32643,29 @@
         </p:nvSpPr>
         <p:spPr>
           <a:xfrm>
-            <a:off x="996696" y="3764280"/>
-            <a:ext cx="11195304" cy="609600"/>
-          </a:xfrm>
-          <a:prstGeom prst="rect">
-            <a:avLst/>
-          </a:prstGeom>
-          <a:noFill/>
-        </p:spPr>
-        <p:txBody>
-          <a:bodyPr wrap="none" lIns="0" rIns="0">
-            <a:noAutofit/>
-          </a:bodyPr>
-          <a:lstStyle/>
-          <a:p>
-            <a:pPr algn="l"/>
-            <a:r>
-              <a:rPr sz="3400" b="0" i="0">
-                <a:solidFill>
-                  <a:srgbClr val="0A2240"/>
-                </a:solidFill>
-                <a:latin typeface="Arial"/>
-              </a:rPr>
-              <a:t>The three minutes, written down word for word</a:t>
+            <a:off x="996696" y="3063240"/>
+            <a:ext cx="10738104" cy="731520"/>
+          </a:xfrm>
+          <a:prstGeom prst="rect">
+            <a:avLst/>
+          </a:prstGeom>
+          <a:noFill/>
+        </p:spPr>
+        <p:txBody>
+          <a:bodyPr wrap="none" lIns="0" rIns="0">
+            <a:noAutofit/>
+          </a:bodyPr>
+          <a:lstStyle/>
+          <a:p>
+            <a:pPr algn="l"/>
+            <a:r>
+              <a:rPr sz="4200" b="1" i="0">
+                <a:solidFill>
+                  <a:srgbClr val="0072CE"/>
+                </a:solidFill>
+                <a:latin typeface="Arial"/>
+              </a:rPr>
+              <a:t>Script and Caveats</a:t>
             </a:r>
           </a:p>
         </p:txBody>
@@ -32603,119 +32735,14 @@
       <p:grpSpPr/>
       <p:sp>
         <p:nvSpPr>
-          <p:cNvPr id="2" name="TextBox 1"/>
-          <p:cNvSpPr txBox="1"/>
-          <p:nvPr/>
-        </p:nvSpPr>
-        <p:spPr>
-          <a:xfrm>
-            <a:off x="457200" y="457200"/>
-            <a:ext cx="11277600" cy="768096"/>
-          </a:xfrm>
-          <a:prstGeom prst="rect">
-            <a:avLst/>
-          </a:prstGeom>
-          <a:noFill/>
-        </p:spPr>
-        <p:txBody>
-          <a:bodyPr wrap="none" lIns="0" rIns="0">
-            <a:noAutofit/>
-          </a:bodyPr>
-          <a:lstStyle/>
-          <a:p>
-            <a:pPr algn="l"/>
-            <a:r>
-              <a:rPr sz="4200" b="1" i="0">
-                <a:solidFill>
-                  <a:srgbClr val="0072CE"/>
-                </a:solidFill>
-                <a:latin typeface="Arial"/>
-              </a:rPr>
-              <a:t>The Three Minutes</a:t>
-            </a:r>
-          </a:p>
-        </p:txBody>
-      </p:sp>
-      <p:sp>
-        <p:nvSpPr>
-          <p:cNvPr id="3" name="TextBox 2"/>
-          <p:cNvSpPr txBox="1"/>
-          <p:nvPr/>
-        </p:nvSpPr>
-        <p:spPr>
-          <a:xfrm>
-            <a:off x="457200" y="1499616"/>
-            <a:ext cx="2286722" cy="518159"/>
-          </a:xfrm>
-          <a:prstGeom prst="rect">
-            <a:avLst/>
-          </a:prstGeom>
-          <a:noFill/>
-        </p:spPr>
-        <p:txBody>
-          <a:bodyPr wrap="none" lIns="0" rIns="0">
-            <a:noAutofit/>
-          </a:bodyPr>
-          <a:lstStyle/>
-          <a:p>
-            <a:pPr algn="l"/>
-            <a:r>
-              <a:rPr sz="3400" b="1" i="0">
-                <a:solidFill>
-                  <a:srgbClr val="123A6B"/>
-                </a:solidFill>
-                <a:latin typeface="Arial"/>
-              </a:rPr>
-              <a:t>Time</a:t>
-            </a:r>
-          </a:p>
-        </p:txBody>
-      </p:sp>
-      <p:sp>
-        <p:nvSpPr>
-          <p:cNvPr id="4" name="TextBox 3"/>
-          <p:cNvSpPr txBox="1"/>
-          <p:nvPr/>
-        </p:nvSpPr>
-        <p:spPr>
-          <a:xfrm>
-            <a:off x="3292562" y="1499616"/>
-            <a:ext cx="5406308" cy="518159"/>
-          </a:xfrm>
-          <a:prstGeom prst="rect">
-            <a:avLst/>
-          </a:prstGeom>
-          <a:noFill/>
-        </p:spPr>
-        <p:txBody>
-          <a:bodyPr wrap="none" lIns="0" rIns="0">
-            <a:noAutofit/>
-          </a:bodyPr>
-          <a:lstStyle/>
-          <a:p>
-            <a:pPr algn="l"/>
-            <a:r>
-              <a:rPr sz="3400" b="1" i="0">
-                <a:solidFill>
-                  <a:srgbClr val="123A6B"/>
-                </a:solidFill>
-                <a:latin typeface="Arial"/>
-              </a:rPr>
-              <a:t>What you say</a:t>
-            </a:r>
-          </a:p>
-        </p:txBody>
-      </p:sp>
-      <p:sp>
-        <p:nvSpPr>
-          <p:cNvPr id="5" name="Rectangle 4"/>
+          <p:cNvPr id="2" name="Rectangle 1"/>
           <p:cNvSpPr/>
           <p:nvPr/>
         </p:nvSpPr>
         <p:spPr>
           <a:xfrm>
-            <a:off x="457200" y="2072639"/>
-            <a:ext cx="8241670" cy="54864"/>
+            <a:off x="457200" y="2484120"/>
+            <a:ext cx="128016" cy="1889760"/>
           </a:xfrm>
           <a:prstGeom prst="rect">
             <a:avLst/>
@@ -32752,14 +32779,49 @@
       </p:sp>
       <p:sp>
         <p:nvSpPr>
-          <p:cNvPr id="6" name="TextBox 5"/>
+          <p:cNvPr id="3" name="TextBox 2"/>
           <p:cNvSpPr txBox="1"/>
           <p:nvPr/>
         </p:nvSpPr>
         <p:spPr>
           <a:xfrm>
-            <a:off x="457200" y="2401823"/>
-            <a:ext cx="3256419" cy="633984"/>
+            <a:off x="996696" y="2484120"/>
+            <a:ext cx="10738104" cy="1005840"/>
+          </a:xfrm>
+          <a:prstGeom prst="rect">
+            <a:avLst/>
+          </a:prstGeom>
+          <a:noFill/>
+        </p:spPr>
+        <p:txBody>
+          <a:bodyPr wrap="none" lIns="0" rIns="0">
+            <a:noAutofit/>
+          </a:bodyPr>
+          <a:lstStyle/>
+          <a:p>
+            <a:pPr algn="l"/>
+            <a:r>
+              <a:rPr sz="6000" b="1" i="0">
+                <a:solidFill>
+                  <a:srgbClr val="0072CE"/>
+                </a:solidFill>
+                <a:latin typeface="Arial"/>
+              </a:rPr>
+              <a:t>Demo script</a:t>
+            </a:r>
+          </a:p>
+        </p:txBody>
+      </p:sp>
+      <p:sp>
+        <p:nvSpPr>
+          <p:cNvPr id="4" name="TextBox 3"/>
+          <p:cNvSpPr txBox="1"/>
+          <p:nvPr/>
+        </p:nvSpPr>
+        <p:spPr>
+          <a:xfrm>
+            <a:off x="996696" y="3764280"/>
+            <a:ext cx="11195304" cy="609600"/>
           </a:xfrm>
           <a:prstGeom prst="rect">
             <a:avLst/>
@@ -32780,259 +32842,14 @@
                 </a:solidFill>
                 <a:latin typeface="Arial"/>
               </a:rPr>
-              <a:t>0:00–0:30</a:t>
-            </a:r>
-          </a:p>
-        </p:txBody>
-      </p:sp>
-      <p:sp>
-        <p:nvSpPr>
-          <p:cNvPr id="7" name="TextBox 6"/>
-          <p:cNvSpPr txBox="1"/>
-          <p:nvPr/>
-        </p:nvSpPr>
-        <p:spPr>
-          <a:xfrm>
-            <a:off x="3292562" y="2401823"/>
-            <a:ext cx="7593985" cy="633984"/>
-          </a:xfrm>
-          <a:prstGeom prst="rect">
-            <a:avLst/>
-          </a:prstGeom>
-          <a:noFill/>
-        </p:spPr>
-        <p:txBody>
-          <a:bodyPr wrap="none" lIns="0" rIns="0">
-            <a:noAutofit/>
-          </a:bodyPr>
-          <a:lstStyle/>
-          <a:p>
-            <a:pPr algn="l"/>
-            <a:r>
-              <a:rPr sz="3400" b="0" i="0">
-                <a:solidFill>
-                  <a:srgbClr val="0A2240"/>
-                </a:solidFill>
-                <a:latin typeface="Arial"/>
-              </a:rPr>
-              <a:t>The problem, concretely</a:t>
-            </a:r>
-          </a:p>
-        </p:txBody>
-      </p:sp>
-      <p:sp>
-        <p:nvSpPr>
-          <p:cNvPr id="8" name="TextBox 7"/>
-          <p:cNvSpPr txBox="1"/>
-          <p:nvPr/>
-        </p:nvSpPr>
-        <p:spPr>
-          <a:xfrm>
-            <a:off x="457200" y="3310127"/>
-            <a:ext cx="3256419" cy="633984"/>
-          </a:xfrm>
-          <a:prstGeom prst="rect">
-            <a:avLst/>
-          </a:prstGeom>
-          <a:noFill/>
-        </p:spPr>
-        <p:txBody>
-          <a:bodyPr wrap="none" lIns="0" rIns="0">
-            <a:noAutofit/>
-          </a:bodyPr>
-          <a:lstStyle/>
-          <a:p>
-            <a:pPr algn="l"/>
-            <a:r>
-              <a:rPr sz="3400" b="0" i="0">
-                <a:solidFill>
-                  <a:srgbClr val="0A2240"/>
-                </a:solidFill>
-                <a:latin typeface="Arial"/>
-              </a:rPr>
-              <a:t>0:30–2:00</a:t>
-            </a:r>
-          </a:p>
-        </p:txBody>
-      </p:sp>
-      <p:sp>
-        <p:nvSpPr>
-          <p:cNvPr id="9" name="TextBox 8"/>
-          <p:cNvSpPr txBox="1"/>
-          <p:nvPr/>
-        </p:nvSpPr>
-        <p:spPr>
-          <a:xfrm>
-            <a:off x="3292562" y="3310127"/>
-            <a:ext cx="7017126" cy="633984"/>
-          </a:xfrm>
-          <a:prstGeom prst="rect">
-            <a:avLst/>
-          </a:prstGeom>
-          <a:noFill/>
-        </p:spPr>
-        <p:txBody>
-          <a:bodyPr wrap="none" lIns="0" rIns="0">
-            <a:noAutofit/>
-          </a:bodyPr>
-          <a:lstStyle/>
-          <a:p>
-            <a:pPr algn="l"/>
-            <a:r>
-              <a:rPr sz="3400" b="0" i="0">
-                <a:solidFill>
-                  <a:srgbClr val="0A2240"/>
-                </a:solidFill>
-                <a:latin typeface="Arial"/>
-              </a:rPr>
-              <a:t>Drive it, live, in silence</a:t>
-            </a:r>
-          </a:p>
-        </p:txBody>
-      </p:sp>
-      <p:sp>
-        <p:nvSpPr>
-          <p:cNvPr id="10" name="TextBox 9"/>
-          <p:cNvSpPr txBox="1"/>
-          <p:nvPr/>
-        </p:nvSpPr>
-        <p:spPr>
-          <a:xfrm>
-            <a:off x="457200" y="4218431"/>
-            <a:ext cx="3256419" cy="633984"/>
-          </a:xfrm>
-          <a:prstGeom prst="rect">
-            <a:avLst/>
-          </a:prstGeom>
-          <a:noFill/>
-        </p:spPr>
-        <p:txBody>
-          <a:bodyPr wrap="none" lIns="0" rIns="0">
-            <a:noAutofit/>
-          </a:bodyPr>
-          <a:lstStyle/>
-          <a:p>
-            <a:pPr algn="l"/>
-            <a:r>
-              <a:rPr sz="3400" b="0" i="0">
-                <a:solidFill>
-                  <a:srgbClr val="0A2240"/>
-                </a:solidFill>
-                <a:latin typeface="Arial"/>
-              </a:rPr>
-              <a:t>2:00–2:30</a:t>
-            </a:r>
-          </a:p>
-        </p:txBody>
-      </p:sp>
-      <p:sp>
-        <p:nvSpPr>
-          <p:cNvPr id="11" name="TextBox 10"/>
-          <p:cNvSpPr txBox="1"/>
-          <p:nvPr/>
-        </p:nvSpPr>
-        <p:spPr>
-          <a:xfrm>
-            <a:off x="3292562" y="4218431"/>
-            <a:ext cx="7516732" cy="633984"/>
-          </a:xfrm>
-          <a:prstGeom prst="rect">
-            <a:avLst/>
-          </a:prstGeom>
-          <a:noFill/>
-        </p:spPr>
-        <p:txBody>
-          <a:bodyPr wrap="none" lIns="0" rIns="0">
-            <a:noAutofit/>
-          </a:bodyPr>
-          <a:lstStyle/>
-          <a:p>
-            <a:pPr algn="l"/>
-            <a:r>
-              <a:rPr sz="3400" b="0" i="0">
-                <a:solidFill>
-                  <a:srgbClr val="0A2240"/>
-                </a:solidFill>
-                <a:latin typeface="Arial"/>
-              </a:rPr>
-              <a:t>What is real, what is not</a:t>
-            </a:r>
-          </a:p>
-        </p:txBody>
-      </p:sp>
-      <p:sp>
-        <p:nvSpPr>
-          <p:cNvPr id="12" name="TextBox 11"/>
-          <p:cNvSpPr txBox="1"/>
-          <p:nvPr/>
-        </p:nvSpPr>
-        <p:spPr>
-          <a:xfrm>
-            <a:off x="457200" y="5126735"/>
-            <a:ext cx="3256419" cy="633984"/>
-          </a:xfrm>
-          <a:prstGeom prst="rect">
-            <a:avLst/>
-          </a:prstGeom>
-          <a:noFill/>
-        </p:spPr>
-        <p:txBody>
-          <a:bodyPr wrap="none" lIns="0" rIns="0">
-            <a:noAutofit/>
-          </a:bodyPr>
-          <a:lstStyle/>
-          <a:p>
-            <a:pPr algn="l"/>
-            <a:r>
-              <a:rPr sz="3400" b="0" i="0">
-                <a:solidFill>
-                  <a:srgbClr val="0A2240"/>
-                </a:solidFill>
-                <a:latin typeface="Arial"/>
-              </a:rPr>
-              <a:t>2:30–3:00</a:t>
-            </a:r>
-          </a:p>
-        </p:txBody>
-      </p:sp>
-      <p:sp>
-        <p:nvSpPr>
-          <p:cNvPr id="13" name="TextBox 12"/>
-          <p:cNvSpPr txBox="1"/>
-          <p:nvPr/>
-        </p:nvSpPr>
-        <p:spPr>
-          <a:xfrm>
-            <a:off x="3292562" y="5126735"/>
-            <a:ext cx="8247756" cy="633984"/>
-          </a:xfrm>
-          <a:prstGeom prst="rect">
-            <a:avLst/>
-          </a:prstGeom>
-          <a:noFill/>
-        </p:spPr>
-        <p:txBody>
-          <a:bodyPr wrap="none" lIns="0" rIns="0">
-            <a:noAutofit/>
-          </a:bodyPr>
-          <a:lstStyle/>
-          <a:p>
-            <a:pPr algn="l"/>
-            <a:r>
-              <a:rPr sz="3400" b="0" i="0">
-                <a:solidFill>
-                  <a:srgbClr val="0A2240"/>
-                </a:solidFill>
-                <a:latin typeface="Arial"/>
-              </a:rPr>
-              <a:t>What you would build next</a:t>
-            </a:r>
-          </a:p>
-        </p:txBody>
-      </p:sp>
-      <p:sp>
-        <p:nvSpPr>
-          <p:cNvPr id="14" name="TextBox 13"/>
+              <a:t>The three minutes, written down word for word</a:t>
+            </a:r>
+          </a:p>
+        </p:txBody>
+      </p:sp>
+      <p:sp>
+        <p:nvSpPr>
+          <p:cNvPr id="5" name="TextBox 4"/>
           <p:cNvSpPr/>
           <p:nvPr>
             <p:ph type="sldNum" idx="12"/>
@@ -33123,7 +32940,7 @@
                 </a:solidFill>
                 <a:latin typeface="Arial"/>
               </a:rPr>
-              <a:t>The First Thirty Seconds</a:t>
+              <a:t>The Three Minutes</a:t>
             </a:r>
           </a:p>
         </p:txBody>
@@ -33136,29 +32953,29 @@
         </p:nvSpPr>
         <p:spPr>
           <a:xfrm>
-            <a:off x="457200" y="1908050"/>
-            <a:ext cx="11277600" cy="518159"/>
-          </a:xfrm>
-          <a:prstGeom prst="rect">
-            <a:avLst/>
-          </a:prstGeom>
-          <a:noFill/>
-        </p:spPr>
-        <p:txBody>
-          <a:bodyPr wrap="none" lIns="0" rIns="0">
-            <a:noAutofit/>
-          </a:bodyPr>
-          <a:lstStyle/>
-          <a:p>
-            <a:pPr algn="l"/>
-            <a:r>
-              <a:rPr sz="3400" b="0" i="0">
-                <a:solidFill>
-                  <a:srgbClr val="0A2240"/>
-                </a:solidFill>
-                <a:latin typeface="Arial"/>
-              </a:rPr>
-              <a:t>Name who has the problem</a:t>
+            <a:off x="457200" y="1499616"/>
+            <a:ext cx="2286722" cy="518159"/>
+          </a:xfrm>
+          <a:prstGeom prst="rect">
+            <a:avLst/>
+          </a:prstGeom>
+          <a:noFill/>
+        </p:spPr>
+        <p:txBody>
+          <a:bodyPr wrap="none" lIns="0" rIns="0">
+            <a:noAutofit/>
+          </a:bodyPr>
+          <a:lstStyle/>
+          <a:p>
+            <a:pPr algn="l"/>
+            <a:r>
+              <a:rPr sz="3400" b="1" i="0">
+                <a:solidFill>
+                  <a:srgbClr val="123A6B"/>
+                </a:solidFill>
+                <a:latin typeface="Arial"/>
+              </a:rPr>
+              <a:t>Time</a:t>
             </a:r>
           </a:p>
         </p:txBody>
@@ -33171,65 +32988,74 @@
         </p:nvSpPr>
         <p:spPr>
           <a:xfrm>
-            <a:off x="457200" y="2883409"/>
-            <a:ext cx="11277600" cy="518159"/>
-          </a:xfrm>
-          <a:prstGeom prst="rect">
-            <a:avLst/>
-          </a:prstGeom>
-          <a:noFill/>
-        </p:spPr>
-        <p:txBody>
-          <a:bodyPr wrap="none" lIns="0" rIns="0">
-            <a:noAutofit/>
-          </a:bodyPr>
-          <a:lstStyle/>
-          <a:p>
-            <a:pPr algn="l"/>
-            <a:r>
-              <a:rPr sz="3400" b="0" i="0">
-                <a:solidFill>
-                  <a:srgbClr val="0A2240"/>
-                </a:solidFill>
-                <a:latin typeface="Arial"/>
-              </a:rPr>
-              <a:t>Say what it costs them today</a:t>
-            </a:r>
-          </a:p>
-        </p:txBody>
-      </p:sp>
-      <p:sp>
-        <p:nvSpPr>
-          <p:cNvPr id="5" name="TextBox 4"/>
-          <p:cNvSpPr txBox="1"/>
-          <p:nvPr/>
-        </p:nvSpPr>
-        <p:spPr>
-          <a:xfrm>
-            <a:off x="457200" y="3858768"/>
-            <a:ext cx="11277600" cy="518159"/>
-          </a:xfrm>
-          <a:prstGeom prst="rect">
-            <a:avLst/>
-          </a:prstGeom>
-          <a:noFill/>
-        </p:spPr>
-        <p:txBody>
-          <a:bodyPr wrap="none" lIns="0" rIns="0">
-            <a:noAutofit/>
-          </a:bodyPr>
-          <a:lstStyle/>
-          <a:p>
-            <a:pPr algn="l"/>
-            <a:r>
-              <a:rPr sz="3400" b="0" i="0">
-                <a:solidFill>
-                  <a:srgbClr val="0A2240"/>
-                </a:solidFill>
-                <a:latin typeface="Arial"/>
-              </a:rPr>
-              <a:t>One sentence, no background</a:t>
-            </a:r>
+            <a:off x="3292562" y="1499616"/>
+            <a:ext cx="5406308" cy="518159"/>
+          </a:xfrm>
+          <a:prstGeom prst="rect">
+            <a:avLst/>
+          </a:prstGeom>
+          <a:noFill/>
+        </p:spPr>
+        <p:txBody>
+          <a:bodyPr wrap="none" lIns="0" rIns="0">
+            <a:noAutofit/>
+          </a:bodyPr>
+          <a:lstStyle/>
+          <a:p>
+            <a:pPr algn="l"/>
+            <a:r>
+              <a:rPr sz="3400" b="1" i="0">
+                <a:solidFill>
+                  <a:srgbClr val="123A6B"/>
+                </a:solidFill>
+                <a:latin typeface="Arial"/>
+              </a:rPr>
+              <a:t>What you say</a:t>
+            </a:r>
+          </a:p>
+        </p:txBody>
+      </p:sp>
+      <p:sp>
+        <p:nvSpPr>
+          <p:cNvPr id="5" name="Rectangle 4"/>
+          <p:cNvSpPr/>
+          <p:nvPr/>
+        </p:nvSpPr>
+        <p:spPr>
+          <a:xfrm>
+            <a:off x="457200" y="2072639"/>
+            <a:ext cx="8241670" cy="54864"/>
+          </a:xfrm>
+          <a:prstGeom prst="rect">
+            <a:avLst/>
+          </a:prstGeom>
+          <a:solidFill>
+            <a:srgbClr val="0072CE"/>
+          </a:solidFill>
+          <a:ln>
+            <a:noFill/>
+          </a:ln>
+          <a:effectLst/>
+        </p:spPr>
+        <p:style>
+          <a:lnRef idx="1">
+            <a:schemeClr val="accent1"/>
+          </a:lnRef>
+          <a:fillRef idx="3">
+            <a:schemeClr val="accent1"/>
+          </a:fillRef>
+          <a:effectRef idx="2">
+            <a:schemeClr val="accent1"/>
+          </a:effectRef>
+          <a:fontRef idx="minor">
+            <a:schemeClr val="lt1"/>
+          </a:fontRef>
+        </p:style>
+        <p:txBody>
+          <a:bodyPr rtlCol="0" anchor="ctr"/>
+          <a:lstStyle/>
+          <a:p>
+            <a:pPr algn="ctr"/>
           </a:p>
         </p:txBody>
       </p:sp>
@@ -33241,8 +33067,8 @@
         </p:nvSpPr>
         <p:spPr>
           <a:xfrm>
-            <a:off x="457200" y="4834127"/>
-            <a:ext cx="11277600" cy="518159"/>
+            <a:off x="457200" y="2401823"/>
+            <a:ext cx="3256419" cy="633984"/>
           </a:xfrm>
           <a:prstGeom prst="rect">
             <a:avLst/>
@@ -33263,7 +33089,7 @@
                 </a:solidFill>
                 <a:latin typeface="Arial"/>
               </a:rPr>
-              <a:t>Then stop and show it</a:t>
+              <a:t>0:00–0:30</a:t>
             </a:r>
           </a:p>
         </p:txBody>
@@ -33271,6 +33097,251 @@
       <p:sp>
         <p:nvSpPr>
           <p:cNvPr id="7" name="TextBox 6"/>
+          <p:cNvSpPr txBox="1"/>
+          <p:nvPr/>
+        </p:nvSpPr>
+        <p:spPr>
+          <a:xfrm>
+            <a:off x="3292562" y="2401823"/>
+            <a:ext cx="7593985" cy="633984"/>
+          </a:xfrm>
+          <a:prstGeom prst="rect">
+            <a:avLst/>
+          </a:prstGeom>
+          <a:noFill/>
+        </p:spPr>
+        <p:txBody>
+          <a:bodyPr wrap="none" lIns="0" rIns="0">
+            <a:noAutofit/>
+          </a:bodyPr>
+          <a:lstStyle/>
+          <a:p>
+            <a:pPr algn="l"/>
+            <a:r>
+              <a:rPr sz="3400" b="0" i="0">
+                <a:solidFill>
+                  <a:srgbClr val="0A2240"/>
+                </a:solidFill>
+                <a:latin typeface="Arial"/>
+              </a:rPr>
+              <a:t>The problem, concretely</a:t>
+            </a:r>
+          </a:p>
+        </p:txBody>
+      </p:sp>
+      <p:sp>
+        <p:nvSpPr>
+          <p:cNvPr id="8" name="TextBox 7"/>
+          <p:cNvSpPr txBox="1"/>
+          <p:nvPr/>
+        </p:nvSpPr>
+        <p:spPr>
+          <a:xfrm>
+            <a:off x="457200" y="3310127"/>
+            <a:ext cx="3256419" cy="633984"/>
+          </a:xfrm>
+          <a:prstGeom prst="rect">
+            <a:avLst/>
+          </a:prstGeom>
+          <a:noFill/>
+        </p:spPr>
+        <p:txBody>
+          <a:bodyPr wrap="none" lIns="0" rIns="0">
+            <a:noAutofit/>
+          </a:bodyPr>
+          <a:lstStyle/>
+          <a:p>
+            <a:pPr algn="l"/>
+            <a:r>
+              <a:rPr sz="3400" b="0" i="0">
+                <a:solidFill>
+                  <a:srgbClr val="0A2240"/>
+                </a:solidFill>
+                <a:latin typeface="Arial"/>
+              </a:rPr>
+              <a:t>0:30–2:00</a:t>
+            </a:r>
+          </a:p>
+        </p:txBody>
+      </p:sp>
+      <p:sp>
+        <p:nvSpPr>
+          <p:cNvPr id="9" name="TextBox 8"/>
+          <p:cNvSpPr txBox="1"/>
+          <p:nvPr/>
+        </p:nvSpPr>
+        <p:spPr>
+          <a:xfrm>
+            <a:off x="3292562" y="3310127"/>
+            <a:ext cx="7017126" cy="633984"/>
+          </a:xfrm>
+          <a:prstGeom prst="rect">
+            <a:avLst/>
+          </a:prstGeom>
+          <a:noFill/>
+        </p:spPr>
+        <p:txBody>
+          <a:bodyPr wrap="none" lIns="0" rIns="0">
+            <a:noAutofit/>
+          </a:bodyPr>
+          <a:lstStyle/>
+          <a:p>
+            <a:pPr algn="l"/>
+            <a:r>
+              <a:rPr sz="3400" b="0" i="0">
+                <a:solidFill>
+                  <a:srgbClr val="0A2240"/>
+                </a:solidFill>
+                <a:latin typeface="Arial"/>
+              </a:rPr>
+              <a:t>Drive it, live, in silence</a:t>
+            </a:r>
+          </a:p>
+        </p:txBody>
+      </p:sp>
+      <p:sp>
+        <p:nvSpPr>
+          <p:cNvPr id="10" name="TextBox 9"/>
+          <p:cNvSpPr txBox="1"/>
+          <p:nvPr/>
+        </p:nvSpPr>
+        <p:spPr>
+          <a:xfrm>
+            <a:off x="457200" y="4218431"/>
+            <a:ext cx="3256419" cy="633984"/>
+          </a:xfrm>
+          <a:prstGeom prst="rect">
+            <a:avLst/>
+          </a:prstGeom>
+          <a:noFill/>
+        </p:spPr>
+        <p:txBody>
+          <a:bodyPr wrap="none" lIns="0" rIns="0">
+            <a:noAutofit/>
+          </a:bodyPr>
+          <a:lstStyle/>
+          <a:p>
+            <a:pPr algn="l"/>
+            <a:r>
+              <a:rPr sz="3400" b="0" i="0">
+                <a:solidFill>
+                  <a:srgbClr val="0A2240"/>
+                </a:solidFill>
+                <a:latin typeface="Arial"/>
+              </a:rPr>
+              <a:t>2:00–2:30</a:t>
+            </a:r>
+          </a:p>
+        </p:txBody>
+      </p:sp>
+      <p:sp>
+        <p:nvSpPr>
+          <p:cNvPr id="11" name="TextBox 10"/>
+          <p:cNvSpPr txBox="1"/>
+          <p:nvPr/>
+        </p:nvSpPr>
+        <p:spPr>
+          <a:xfrm>
+            <a:off x="3292562" y="4218431"/>
+            <a:ext cx="7516732" cy="633984"/>
+          </a:xfrm>
+          <a:prstGeom prst="rect">
+            <a:avLst/>
+          </a:prstGeom>
+          <a:noFill/>
+        </p:spPr>
+        <p:txBody>
+          <a:bodyPr wrap="none" lIns="0" rIns="0">
+            <a:noAutofit/>
+          </a:bodyPr>
+          <a:lstStyle/>
+          <a:p>
+            <a:pPr algn="l"/>
+            <a:r>
+              <a:rPr sz="3400" b="0" i="0">
+                <a:solidFill>
+                  <a:srgbClr val="0A2240"/>
+                </a:solidFill>
+                <a:latin typeface="Arial"/>
+              </a:rPr>
+              <a:t>What is real, what is not</a:t>
+            </a:r>
+          </a:p>
+        </p:txBody>
+      </p:sp>
+      <p:sp>
+        <p:nvSpPr>
+          <p:cNvPr id="12" name="TextBox 11"/>
+          <p:cNvSpPr txBox="1"/>
+          <p:nvPr/>
+        </p:nvSpPr>
+        <p:spPr>
+          <a:xfrm>
+            <a:off x="457200" y="5126735"/>
+            <a:ext cx="3256419" cy="633984"/>
+          </a:xfrm>
+          <a:prstGeom prst="rect">
+            <a:avLst/>
+          </a:prstGeom>
+          <a:noFill/>
+        </p:spPr>
+        <p:txBody>
+          <a:bodyPr wrap="none" lIns="0" rIns="0">
+            <a:noAutofit/>
+          </a:bodyPr>
+          <a:lstStyle/>
+          <a:p>
+            <a:pPr algn="l"/>
+            <a:r>
+              <a:rPr sz="3400" b="0" i="0">
+                <a:solidFill>
+                  <a:srgbClr val="0A2240"/>
+                </a:solidFill>
+                <a:latin typeface="Arial"/>
+              </a:rPr>
+              <a:t>2:30–3:00</a:t>
+            </a:r>
+          </a:p>
+        </p:txBody>
+      </p:sp>
+      <p:sp>
+        <p:nvSpPr>
+          <p:cNvPr id="13" name="TextBox 12"/>
+          <p:cNvSpPr txBox="1"/>
+          <p:nvPr/>
+        </p:nvSpPr>
+        <p:spPr>
+          <a:xfrm>
+            <a:off x="3292562" y="5126735"/>
+            <a:ext cx="8247756" cy="633984"/>
+          </a:xfrm>
+          <a:prstGeom prst="rect">
+            <a:avLst/>
+          </a:prstGeom>
+          <a:noFill/>
+        </p:spPr>
+        <p:txBody>
+          <a:bodyPr wrap="none" lIns="0" rIns="0">
+            <a:noAutofit/>
+          </a:bodyPr>
+          <a:lstStyle/>
+          <a:p>
+            <a:pPr algn="l"/>
+            <a:r>
+              <a:rPr sz="3400" b="0" i="0">
+                <a:solidFill>
+                  <a:srgbClr val="0A2240"/>
+                </a:solidFill>
+                <a:latin typeface="Arial"/>
+              </a:rPr>
+              <a:t>What you would build next</a:t>
+            </a:r>
+          </a:p>
+        </p:txBody>
+      </p:sp>
+      <p:sp>
+        <p:nvSpPr>
+          <p:cNvPr id="14" name="TextBox 13"/>
           <p:cNvSpPr/>
           <p:nvPr>
             <p:ph type="sldNum" idx="12"/>
@@ -33361,7 +33432,7 @@
                 </a:solidFill>
                 <a:latin typeface="Arial"/>
               </a:rPr>
-              <a:t>Do Not Say These</a:t>
+              <a:t>The First Thirty Seconds</a:t>
             </a:r>
           </a:p>
         </p:txBody>
@@ -33396,7 +33467,7 @@
                 </a:solidFill>
                 <a:latin typeface="Arial"/>
               </a:rPr>
-              <a:t>Let me explain the architecture</a:t>
+              <a:t>Name who has the problem</a:t>
             </a:r>
           </a:p>
         </p:txBody>
@@ -33431,7 +33502,7 @@
                 </a:solidFill>
                 <a:latin typeface="Arial"/>
               </a:rPr>
-              <a:t>Normally this works</a:t>
+              <a:t>Say what it costs them today</a:t>
             </a:r>
           </a:p>
         </p:txBody>
@@ -33466,7 +33537,7 @@
                 </a:solidFill>
                 <a:latin typeface="Arial"/>
               </a:rPr>
-              <a:t>We ran out of time to</a:t>
+              <a:t>One sentence, no background</a:t>
             </a:r>
           </a:p>
         </p:txBody>
@@ -33501,7 +33572,7 @@
                 </a:solidFill>
                 <a:latin typeface="Arial"/>
               </a:rPr>
-              <a:t>It is basically just a wrapper</a:t>
+              <a:t>Then stop and show it</a:t>
             </a:r>
           </a:p>
         </p:txBody>
@@ -33599,7 +33670,7 @@
                 </a:solidFill>
                 <a:latin typeface="Arial"/>
               </a:rPr>
-              <a:t>Rehearse It Properly</a:t>
+              <a:t>Do Not Say These</a:t>
             </a:r>
           </a:p>
         </p:txBody>
@@ -33612,29 +33683,29 @@
         </p:nvSpPr>
         <p:spPr>
           <a:xfrm>
-            <a:off x="457200" y="1499616"/>
-            <a:ext cx="1132164" cy="640080"/>
-          </a:xfrm>
-          <a:prstGeom prst="rect">
-            <a:avLst/>
-          </a:prstGeom>
-          <a:noFill/>
-        </p:spPr>
-        <p:txBody>
-          <a:bodyPr wrap="none" lIns="0" rIns="0">
-            <a:noAutofit/>
-          </a:bodyPr>
-          <a:lstStyle/>
-          <a:p>
-            <a:pPr algn="l"/>
-            <a:r>
-              <a:rPr sz="4200" b="1" i="0">
-                <a:solidFill>
-                  <a:srgbClr val="123A6B"/>
-                </a:solidFill>
-                <a:latin typeface="Arial"/>
-              </a:rPr>
-              <a:t>01</a:t>
+            <a:off x="457200" y="1908050"/>
+            <a:ext cx="11277600" cy="518159"/>
+          </a:xfrm>
+          <a:prstGeom prst="rect">
+            <a:avLst/>
+          </a:prstGeom>
+          <a:noFill/>
+        </p:spPr>
+        <p:txBody>
+          <a:bodyPr wrap="none" lIns="0" rIns="0">
+            <a:noAutofit/>
+          </a:bodyPr>
+          <a:lstStyle/>
+          <a:p>
+            <a:pPr algn="l"/>
+            <a:r>
+              <a:rPr sz="3400" b="0" i="0">
+                <a:solidFill>
+                  <a:srgbClr val="0A2240"/>
+                </a:solidFill>
+                <a:latin typeface="Arial"/>
+              </a:rPr>
+              <a:t>Let me explain the architecture</a:t>
             </a:r>
           </a:p>
         </p:txBody>
@@ -33647,29 +33718,29 @@
         </p:nvSpPr>
         <p:spPr>
           <a:xfrm>
-            <a:off x="1461983" y="1499616"/>
-            <a:ext cx="10272817" cy="640080"/>
-          </a:xfrm>
-          <a:prstGeom prst="rect">
-            <a:avLst/>
-          </a:prstGeom>
-          <a:noFill/>
-        </p:spPr>
-        <p:txBody>
-          <a:bodyPr wrap="none" lIns="0" rIns="0">
-            <a:noAutofit/>
-          </a:bodyPr>
-          <a:lstStyle/>
-          <a:p>
-            <a:pPr algn="l"/>
-            <a:r>
-              <a:rPr sz="4200" b="1" i="0">
-                <a:solidFill>
-                  <a:srgbClr val="123A6B"/>
-                </a:solidFill>
-                <a:latin typeface="Arial"/>
-              </a:rPr>
-              <a:t>Time it, out loud</a:t>
+            <a:off x="457200" y="2883409"/>
+            <a:ext cx="11277600" cy="518159"/>
+          </a:xfrm>
+          <a:prstGeom prst="rect">
+            <a:avLst/>
+          </a:prstGeom>
+          <a:noFill/>
+        </p:spPr>
+        <p:txBody>
+          <a:bodyPr wrap="none" lIns="0" rIns="0">
+            <a:noAutofit/>
+          </a:bodyPr>
+          <a:lstStyle/>
+          <a:p>
+            <a:pPr algn="l"/>
+            <a:r>
+              <a:rPr sz="3400" b="0" i="0">
+                <a:solidFill>
+                  <a:srgbClr val="0A2240"/>
+                </a:solidFill>
+                <a:latin typeface="Arial"/>
+              </a:rPr>
+              <a:t>Normally this works</a:t>
             </a:r>
           </a:p>
         </p:txBody>
@@ -33682,8 +33753,8 @@
         </p:nvSpPr>
         <p:spPr>
           <a:xfrm>
-            <a:off x="1461983" y="2185416"/>
-            <a:ext cx="10730017" cy="551688"/>
+            <a:off x="457200" y="3858768"/>
+            <a:ext cx="11277600" cy="518159"/>
           </a:xfrm>
           <a:prstGeom prst="rect">
             <a:avLst/>
@@ -33704,7 +33775,7 @@
                 </a:solidFill>
                 <a:latin typeface="Arial"/>
               </a:rPr>
-              <a:t>Silently in your head is always shorter</a:t>
+              <a:t>We ran out of time to</a:t>
             </a:r>
           </a:p>
         </p:txBody>
@@ -33717,29 +33788,29 @@
         </p:nvSpPr>
         <p:spPr>
           <a:xfrm>
-            <a:off x="457200" y="3011424"/>
-            <a:ext cx="1132164" cy="640080"/>
-          </a:xfrm>
-          <a:prstGeom prst="rect">
-            <a:avLst/>
-          </a:prstGeom>
-          <a:noFill/>
-        </p:spPr>
-        <p:txBody>
-          <a:bodyPr wrap="none" lIns="0" rIns="0">
-            <a:noAutofit/>
-          </a:bodyPr>
-          <a:lstStyle/>
-          <a:p>
-            <a:pPr algn="l"/>
-            <a:r>
-              <a:rPr sz="4200" b="1" i="0">
-                <a:solidFill>
-                  <a:srgbClr val="123A6B"/>
-                </a:solidFill>
-                <a:latin typeface="Arial"/>
-              </a:rPr>
-              <a:t>02</a:t>
+            <a:off x="457200" y="4834127"/>
+            <a:ext cx="11277600" cy="518159"/>
+          </a:xfrm>
+          <a:prstGeom prst="rect">
+            <a:avLst/>
+          </a:prstGeom>
+          <a:noFill/>
+        </p:spPr>
+        <p:txBody>
+          <a:bodyPr wrap="none" lIns="0" rIns="0">
+            <a:noAutofit/>
+          </a:bodyPr>
+          <a:lstStyle/>
+          <a:p>
+            <a:pPr algn="l"/>
+            <a:r>
+              <a:rPr sz="3400" b="0" i="0">
+                <a:solidFill>
+                  <a:srgbClr val="0A2240"/>
+                </a:solidFill>
+                <a:latin typeface="Arial"/>
+              </a:rPr>
+              <a:t>It is basically just a wrapper</a:t>
             </a:r>
           </a:p>
         </p:txBody>
@@ -33747,181 +33818,6 @@
       <p:sp>
         <p:nvSpPr>
           <p:cNvPr id="7" name="TextBox 6"/>
-          <p:cNvSpPr txBox="1"/>
-          <p:nvPr/>
-        </p:nvSpPr>
-        <p:spPr>
-          <a:xfrm>
-            <a:off x="1461983" y="3011424"/>
-            <a:ext cx="10382072" cy="640080"/>
-          </a:xfrm>
-          <a:prstGeom prst="rect">
-            <a:avLst/>
-          </a:prstGeom>
-          <a:noFill/>
-        </p:spPr>
-        <p:txBody>
-          <a:bodyPr wrap="none" lIns="0" rIns="0">
-            <a:noAutofit/>
-          </a:bodyPr>
-          <a:lstStyle/>
-          <a:p>
-            <a:pPr algn="l"/>
-            <a:r>
-              <a:rPr sz="4200" b="1" i="0">
-                <a:solidFill>
-                  <a:srgbClr val="123A6B"/>
-                </a:solidFill>
-                <a:latin typeface="Arial"/>
-              </a:rPr>
-              <a:t>Have someone else drive</a:t>
-            </a:r>
-          </a:p>
-        </p:txBody>
-      </p:sp>
-      <p:sp>
-        <p:nvSpPr>
-          <p:cNvPr id="8" name="TextBox 7"/>
-          <p:cNvSpPr txBox="1"/>
-          <p:nvPr/>
-        </p:nvSpPr>
-        <p:spPr>
-          <a:xfrm>
-            <a:off x="1461983" y="3697224"/>
-            <a:ext cx="10730017" cy="551688"/>
-          </a:xfrm>
-          <a:prstGeom prst="rect">
-            <a:avLst/>
-          </a:prstGeom>
-          <a:noFill/>
-        </p:spPr>
-        <p:txBody>
-          <a:bodyPr wrap="none" lIns="0" rIns="0">
-            <a:noAutofit/>
-          </a:bodyPr>
-          <a:lstStyle/>
-          <a:p>
-            <a:pPr algn="l"/>
-            <a:r>
-              <a:rPr sz="3400" b="0" i="0">
-                <a:solidFill>
-                  <a:srgbClr val="0A2240"/>
-                </a:solidFill>
-                <a:latin typeface="Arial"/>
-              </a:rPr>
-              <a:t>The builder's hands hide the rough edges</a:t>
-            </a:r>
-          </a:p>
-        </p:txBody>
-      </p:sp>
-      <p:sp>
-        <p:nvSpPr>
-          <p:cNvPr id="9" name="TextBox 8"/>
-          <p:cNvSpPr txBox="1"/>
-          <p:nvPr/>
-        </p:nvSpPr>
-        <p:spPr>
-          <a:xfrm>
-            <a:off x="457200" y="4523232"/>
-            <a:ext cx="1132164" cy="640080"/>
-          </a:xfrm>
-          <a:prstGeom prst="rect">
-            <a:avLst/>
-          </a:prstGeom>
-          <a:noFill/>
-        </p:spPr>
-        <p:txBody>
-          <a:bodyPr wrap="none" lIns="0" rIns="0">
-            <a:noAutofit/>
-          </a:bodyPr>
-          <a:lstStyle/>
-          <a:p>
-            <a:pPr algn="l"/>
-            <a:r>
-              <a:rPr sz="4200" b="1" i="0">
-                <a:solidFill>
-                  <a:srgbClr val="123A6B"/>
-                </a:solidFill>
-                <a:latin typeface="Arial"/>
-              </a:rPr>
-              <a:t>03</a:t>
-            </a:r>
-          </a:p>
-        </p:txBody>
-      </p:sp>
-      <p:sp>
-        <p:nvSpPr>
-          <p:cNvPr id="10" name="TextBox 9"/>
-          <p:cNvSpPr txBox="1"/>
-          <p:nvPr/>
-        </p:nvSpPr>
-        <p:spPr>
-          <a:xfrm>
-            <a:off x="1461983" y="4523232"/>
-            <a:ext cx="10272817" cy="640080"/>
-          </a:xfrm>
-          <a:prstGeom prst="rect">
-            <a:avLst/>
-          </a:prstGeom>
-          <a:noFill/>
-        </p:spPr>
-        <p:txBody>
-          <a:bodyPr wrap="none" lIns="0" rIns="0">
-            <a:noAutofit/>
-          </a:bodyPr>
-          <a:lstStyle/>
-          <a:p>
-            <a:pPr algn="l"/>
-            <a:r>
-              <a:rPr sz="4200" b="1" i="0">
-                <a:solidFill>
-                  <a:srgbClr val="123A6B"/>
-                </a:solidFill>
-                <a:latin typeface="Arial"/>
-              </a:rPr>
-              <a:t>Cut until it fits</a:t>
-            </a:r>
-          </a:p>
-        </p:txBody>
-      </p:sp>
-      <p:sp>
-        <p:nvSpPr>
-          <p:cNvPr id="11" name="TextBox 10"/>
-          <p:cNvSpPr txBox="1"/>
-          <p:nvPr/>
-        </p:nvSpPr>
-        <p:spPr>
-          <a:xfrm>
-            <a:off x="1461983" y="5209032"/>
-            <a:ext cx="10730017" cy="551688"/>
-          </a:xfrm>
-          <a:prstGeom prst="rect">
-            <a:avLst/>
-          </a:prstGeom>
-          <a:noFill/>
-        </p:spPr>
-        <p:txBody>
-          <a:bodyPr wrap="none" lIns="0" rIns="0">
-            <a:noAutofit/>
-          </a:bodyPr>
-          <a:lstStyle/>
-          <a:p>
-            <a:pPr algn="l"/>
-            <a:r>
-              <a:rPr sz="3400" b="0" i="0">
-                <a:solidFill>
-                  <a:srgbClr val="0A2240"/>
-                </a:solidFill>
-                <a:latin typeface="Arial"/>
-              </a:rPr>
-              <a:t>Three minutes means three minutes</a:t>
-            </a:r>
-          </a:p>
-        </p:txBody>
-      </p:sp>
-      <p:sp>
-        <p:nvSpPr>
-          <p:cNvPr id="12" name="TextBox 11"/>
           <p:cNvSpPr/>
           <p:nvPr>
             <p:ph type="sldNum" idx="12"/>
@@ -33984,45 +33880,36 @@
       <p:grpSpPr/>
       <p:sp>
         <p:nvSpPr>
-          <p:cNvPr id="2" name="Rectangle 1"/>
-          <p:cNvSpPr/>
-          <p:nvPr/>
-        </p:nvSpPr>
-        <p:spPr>
-          <a:xfrm>
-            <a:off x="457200" y="2484120"/>
-            <a:ext cx="128016" cy="1889760"/>
-          </a:xfrm>
-          <a:prstGeom prst="rect">
-            <a:avLst/>
-          </a:prstGeom>
-          <a:solidFill>
-            <a:srgbClr val="0072CE"/>
-          </a:solidFill>
-          <a:ln>
-            <a:noFill/>
-          </a:ln>
-          <a:effectLst/>
-        </p:spPr>
-        <p:style>
-          <a:lnRef idx="1">
-            <a:schemeClr val="accent1"/>
-          </a:lnRef>
-          <a:fillRef idx="3">
-            <a:schemeClr val="accent1"/>
-          </a:fillRef>
-          <a:effectRef idx="2">
-            <a:schemeClr val="accent1"/>
-          </a:effectRef>
-          <a:fontRef idx="minor">
-            <a:schemeClr val="lt1"/>
-          </a:fontRef>
-        </p:style>
-        <p:txBody>
-          <a:bodyPr rtlCol="0" anchor="ctr"/>
-          <a:lstStyle/>
-          <a:p>
-            <a:pPr algn="ctr"/>
+          <p:cNvPr id="2" name="TextBox 1"/>
+          <p:cNvSpPr txBox="1"/>
+          <p:nvPr/>
+        </p:nvSpPr>
+        <p:spPr>
+          <a:xfrm>
+            <a:off x="457200" y="457200"/>
+            <a:ext cx="11277600" cy="768096"/>
+          </a:xfrm>
+          <a:prstGeom prst="rect">
+            <a:avLst/>
+          </a:prstGeom>
+          <a:noFill/>
+        </p:spPr>
+        <p:txBody>
+          <a:bodyPr wrap="none" lIns="0" rIns="0">
+            <a:noAutofit/>
+          </a:bodyPr>
+          <a:lstStyle/>
+          <a:p>
+            <a:pPr algn="l"/>
+            <a:r>
+              <a:rPr sz="4200" b="1" i="0">
+                <a:solidFill>
+                  <a:srgbClr val="0072CE"/>
+                </a:solidFill>
+                <a:latin typeface="Arial"/>
+              </a:rPr>
+              <a:t>Rehearse It Properly</a:t>
+            </a:r>
           </a:p>
         </p:txBody>
       </p:sp>
@@ -34034,29 +33921,29 @@
         </p:nvSpPr>
         <p:spPr>
           <a:xfrm>
-            <a:off x="996696" y="2484120"/>
-            <a:ext cx="10738104" cy="1005840"/>
-          </a:xfrm>
-          <a:prstGeom prst="rect">
-            <a:avLst/>
-          </a:prstGeom>
-          <a:noFill/>
-        </p:spPr>
-        <p:txBody>
-          <a:bodyPr wrap="none" lIns="0" rIns="0">
-            <a:noAutofit/>
-          </a:bodyPr>
-          <a:lstStyle/>
-          <a:p>
-            <a:pPr algn="l"/>
-            <a:r>
-              <a:rPr sz="6000" b="1" i="0">
-                <a:solidFill>
-                  <a:srgbClr val="0072CE"/>
-                </a:solidFill>
-                <a:latin typeface="Arial"/>
-              </a:rPr>
-              <a:t>Caveat list</a:t>
+            <a:off x="457200" y="1499616"/>
+            <a:ext cx="1132164" cy="640080"/>
+          </a:xfrm>
+          <a:prstGeom prst="rect">
+            <a:avLst/>
+          </a:prstGeom>
+          <a:noFill/>
+        </p:spPr>
+        <p:txBody>
+          <a:bodyPr wrap="none" lIns="0" rIns="0">
+            <a:noAutofit/>
+          </a:bodyPr>
+          <a:lstStyle/>
+          <a:p>
+            <a:pPr algn="l"/>
+            <a:r>
+              <a:rPr sz="4200" b="1" i="0">
+                <a:solidFill>
+                  <a:srgbClr val="123A6B"/>
+                </a:solidFill>
+                <a:latin typeface="Arial"/>
+              </a:rPr>
+              <a:t>01</a:t>
             </a:r>
           </a:p>
         </p:txBody>
@@ -34069,8 +33956,43 @@
         </p:nvSpPr>
         <p:spPr>
           <a:xfrm>
-            <a:off x="996696" y="3764280"/>
-            <a:ext cx="11195304" cy="609600"/>
+            <a:off x="1461983" y="1499616"/>
+            <a:ext cx="10272817" cy="640080"/>
+          </a:xfrm>
+          <a:prstGeom prst="rect">
+            <a:avLst/>
+          </a:prstGeom>
+          <a:noFill/>
+        </p:spPr>
+        <p:txBody>
+          <a:bodyPr wrap="none" lIns="0" rIns="0">
+            <a:noAutofit/>
+          </a:bodyPr>
+          <a:lstStyle/>
+          <a:p>
+            <a:pPr algn="l"/>
+            <a:r>
+              <a:rPr sz="4200" b="1" i="0">
+                <a:solidFill>
+                  <a:srgbClr val="123A6B"/>
+                </a:solidFill>
+                <a:latin typeface="Arial"/>
+              </a:rPr>
+              <a:t>Time it, out loud</a:t>
+            </a:r>
+          </a:p>
+        </p:txBody>
+      </p:sp>
+      <p:sp>
+        <p:nvSpPr>
+          <p:cNvPr id="5" name="TextBox 4"/>
+          <p:cNvSpPr txBox="1"/>
+          <p:nvPr/>
+        </p:nvSpPr>
+        <p:spPr>
+          <a:xfrm>
+            <a:off x="1461983" y="2185416"/>
+            <a:ext cx="10730017" cy="551688"/>
           </a:xfrm>
           <a:prstGeom prst="rect">
             <a:avLst/>
@@ -34091,14 +34013,224 @@
                 </a:solidFill>
                 <a:latin typeface="Arial"/>
               </a:rPr>
-              <a:t>Everything stubbed, faked, or known to break</a:t>
-            </a:r>
-          </a:p>
-        </p:txBody>
-      </p:sp>
-      <p:sp>
-        <p:nvSpPr>
-          <p:cNvPr id="5" name="TextBox 4"/>
+              <a:t>Silently in your head is always shorter</a:t>
+            </a:r>
+          </a:p>
+        </p:txBody>
+      </p:sp>
+      <p:sp>
+        <p:nvSpPr>
+          <p:cNvPr id="6" name="TextBox 5"/>
+          <p:cNvSpPr txBox="1"/>
+          <p:nvPr/>
+        </p:nvSpPr>
+        <p:spPr>
+          <a:xfrm>
+            <a:off x="457200" y="3011424"/>
+            <a:ext cx="1132164" cy="640080"/>
+          </a:xfrm>
+          <a:prstGeom prst="rect">
+            <a:avLst/>
+          </a:prstGeom>
+          <a:noFill/>
+        </p:spPr>
+        <p:txBody>
+          <a:bodyPr wrap="none" lIns="0" rIns="0">
+            <a:noAutofit/>
+          </a:bodyPr>
+          <a:lstStyle/>
+          <a:p>
+            <a:pPr algn="l"/>
+            <a:r>
+              <a:rPr sz="4200" b="1" i="0">
+                <a:solidFill>
+                  <a:srgbClr val="123A6B"/>
+                </a:solidFill>
+                <a:latin typeface="Arial"/>
+              </a:rPr>
+              <a:t>02</a:t>
+            </a:r>
+          </a:p>
+        </p:txBody>
+      </p:sp>
+      <p:sp>
+        <p:nvSpPr>
+          <p:cNvPr id="7" name="TextBox 6"/>
+          <p:cNvSpPr txBox="1"/>
+          <p:nvPr/>
+        </p:nvSpPr>
+        <p:spPr>
+          <a:xfrm>
+            <a:off x="1461983" y="3011424"/>
+            <a:ext cx="10382072" cy="640080"/>
+          </a:xfrm>
+          <a:prstGeom prst="rect">
+            <a:avLst/>
+          </a:prstGeom>
+          <a:noFill/>
+        </p:spPr>
+        <p:txBody>
+          <a:bodyPr wrap="none" lIns="0" rIns="0">
+            <a:noAutofit/>
+          </a:bodyPr>
+          <a:lstStyle/>
+          <a:p>
+            <a:pPr algn="l"/>
+            <a:r>
+              <a:rPr sz="4200" b="1" i="0">
+                <a:solidFill>
+                  <a:srgbClr val="123A6B"/>
+                </a:solidFill>
+                <a:latin typeface="Arial"/>
+              </a:rPr>
+              <a:t>Have someone else drive</a:t>
+            </a:r>
+          </a:p>
+        </p:txBody>
+      </p:sp>
+      <p:sp>
+        <p:nvSpPr>
+          <p:cNvPr id="8" name="TextBox 7"/>
+          <p:cNvSpPr txBox="1"/>
+          <p:nvPr/>
+        </p:nvSpPr>
+        <p:spPr>
+          <a:xfrm>
+            <a:off x="1461983" y="3697224"/>
+            <a:ext cx="10730017" cy="551688"/>
+          </a:xfrm>
+          <a:prstGeom prst="rect">
+            <a:avLst/>
+          </a:prstGeom>
+          <a:noFill/>
+        </p:spPr>
+        <p:txBody>
+          <a:bodyPr wrap="none" lIns="0" rIns="0">
+            <a:noAutofit/>
+          </a:bodyPr>
+          <a:lstStyle/>
+          <a:p>
+            <a:pPr algn="l"/>
+            <a:r>
+              <a:rPr sz="3400" b="0" i="0">
+                <a:solidFill>
+                  <a:srgbClr val="0A2240"/>
+                </a:solidFill>
+                <a:latin typeface="Arial"/>
+              </a:rPr>
+              <a:t>The builder's hands hide the rough edges</a:t>
+            </a:r>
+          </a:p>
+        </p:txBody>
+      </p:sp>
+      <p:sp>
+        <p:nvSpPr>
+          <p:cNvPr id="9" name="TextBox 8"/>
+          <p:cNvSpPr txBox="1"/>
+          <p:nvPr/>
+        </p:nvSpPr>
+        <p:spPr>
+          <a:xfrm>
+            <a:off x="457200" y="4523232"/>
+            <a:ext cx="1132164" cy="640080"/>
+          </a:xfrm>
+          <a:prstGeom prst="rect">
+            <a:avLst/>
+          </a:prstGeom>
+          <a:noFill/>
+        </p:spPr>
+        <p:txBody>
+          <a:bodyPr wrap="none" lIns="0" rIns="0">
+            <a:noAutofit/>
+          </a:bodyPr>
+          <a:lstStyle/>
+          <a:p>
+            <a:pPr algn="l"/>
+            <a:r>
+              <a:rPr sz="4200" b="1" i="0">
+                <a:solidFill>
+                  <a:srgbClr val="123A6B"/>
+                </a:solidFill>
+                <a:latin typeface="Arial"/>
+              </a:rPr>
+              <a:t>03</a:t>
+            </a:r>
+          </a:p>
+        </p:txBody>
+      </p:sp>
+      <p:sp>
+        <p:nvSpPr>
+          <p:cNvPr id="10" name="TextBox 9"/>
+          <p:cNvSpPr txBox="1"/>
+          <p:nvPr/>
+        </p:nvSpPr>
+        <p:spPr>
+          <a:xfrm>
+            <a:off x="1461983" y="4523232"/>
+            <a:ext cx="10272817" cy="640080"/>
+          </a:xfrm>
+          <a:prstGeom prst="rect">
+            <a:avLst/>
+          </a:prstGeom>
+          <a:noFill/>
+        </p:spPr>
+        <p:txBody>
+          <a:bodyPr wrap="none" lIns="0" rIns="0">
+            <a:noAutofit/>
+          </a:bodyPr>
+          <a:lstStyle/>
+          <a:p>
+            <a:pPr algn="l"/>
+            <a:r>
+              <a:rPr sz="4200" b="1" i="0">
+                <a:solidFill>
+                  <a:srgbClr val="123A6B"/>
+                </a:solidFill>
+                <a:latin typeface="Arial"/>
+              </a:rPr>
+              <a:t>Cut until it fits</a:t>
+            </a:r>
+          </a:p>
+        </p:txBody>
+      </p:sp>
+      <p:sp>
+        <p:nvSpPr>
+          <p:cNvPr id="11" name="TextBox 10"/>
+          <p:cNvSpPr txBox="1"/>
+          <p:nvPr/>
+        </p:nvSpPr>
+        <p:spPr>
+          <a:xfrm>
+            <a:off x="1461983" y="5209032"/>
+            <a:ext cx="10730017" cy="551688"/>
+          </a:xfrm>
+          <a:prstGeom prst="rect">
+            <a:avLst/>
+          </a:prstGeom>
+          <a:noFill/>
+        </p:spPr>
+        <p:txBody>
+          <a:bodyPr wrap="none" lIns="0" rIns="0">
+            <a:noAutofit/>
+          </a:bodyPr>
+          <a:lstStyle/>
+          <a:p>
+            <a:pPr algn="l"/>
+            <a:r>
+              <a:rPr sz="3400" b="0" i="0">
+                <a:solidFill>
+                  <a:srgbClr val="0A2240"/>
+                </a:solidFill>
+                <a:latin typeface="Arial"/>
+              </a:rPr>
+              <a:t>Three minutes means three minutes</a:t>
+            </a:r>
+          </a:p>
+        </p:txBody>
+      </p:sp>
+      <p:sp>
+        <p:nvSpPr>
+          <p:cNvPr id="12" name="TextBox 11"/>
           <p:cNvSpPr/>
           <p:nvPr>
             <p:ph type="sldNum" idx="12"/>
@@ -34434,36 +34566,45 @@
       <p:grpSpPr/>
       <p:sp>
         <p:nvSpPr>
-          <p:cNvPr id="2" name="TextBox 1"/>
-          <p:cNvSpPr txBox="1"/>
-          <p:nvPr/>
-        </p:nvSpPr>
-        <p:spPr>
-          <a:xfrm>
-            <a:off x="457200" y="457200"/>
-            <a:ext cx="11277600" cy="768096"/>
-          </a:xfrm>
-          <a:prstGeom prst="rect">
-            <a:avLst/>
-          </a:prstGeom>
-          <a:noFill/>
-        </p:spPr>
-        <p:txBody>
-          <a:bodyPr wrap="none" lIns="0" rIns="0">
-            <a:noAutofit/>
-          </a:bodyPr>
-          <a:lstStyle/>
-          <a:p>
-            <a:pPr algn="l"/>
-            <a:r>
-              <a:rPr sz="4200" b="1" i="0">
-                <a:solidFill>
-                  <a:srgbClr val="0072CE"/>
-                </a:solidFill>
-                <a:latin typeface="Arial"/>
-              </a:rPr>
-              <a:t>What Goes on the List</a:t>
-            </a:r>
+          <p:cNvPr id="2" name="Rectangle 1"/>
+          <p:cNvSpPr/>
+          <p:nvPr/>
+        </p:nvSpPr>
+        <p:spPr>
+          <a:xfrm>
+            <a:off x="457200" y="2484120"/>
+            <a:ext cx="128016" cy="1889760"/>
+          </a:xfrm>
+          <a:prstGeom prst="rect">
+            <a:avLst/>
+          </a:prstGeom>
+          <a:solidFill>
+            <a:srgbClr val="0072CE"/>
+          </a:solidFill>
+          <a:ln>
+            <a:noFill/>
+          </a:ln>
+          <a:effectLst/>
+        </p:spPr>
+        <p:style>
+          <a:lnRef idx="1">
+            <a:schemeClr val="accent1"/>
+          </a:lnRef>
+          <a:fillRef idx="3">
+            <a:schemeClr val="accent1"/>
+          </a:fillRef>
+          <a:effectRef idx="2">
+            <a:schemeClr val="accent1"/>
+          </a:effectRef>
+          <a:fontRef idx="minor">
+            <a:schemeClr val="lt1"/>
+          </a:fontRef>
+        </p:style>
+        <p:txBody>
+          <a:bodyPr rtlCol="0" anchor="ctr"/>
+          <a:lstStyle/>
+          <a:p>
+            <a:pPr algn="ctr"/>
           </a:p>
         </p:txBody>
       </p:sp>
@@ -34475,29 +34616,29 @@
         </p:nvSpPr>
         <p:spPr>
           <a:xfrm>
-            <a:off x="457200" y="1908050"/>
-            <a:ext cx="11277600" cy="518159"/>
-          </a:xfrm>
-          <a:prstGeom prst="rect">
-            <a:avLst/>
-          </a:prstGeom>
-          <a:noFill/>
-        </p:spPr>
-        <p:txBody>
-          <a:bodyPr wrap="none" lIns="0" rIns="0">
-            <a:noAutofit/>
-          </a:bodyPr>
-          <a:lstStyle/>
-          <a:p>
-            <a:pPr algn="l"/>
-            <a:r>
-              <a:rPr sz="3400" b="0" i="0">
-                <a:solidFill>
-                  <a:srgbClr val="0A2240"/>
-                </a:solidFill>
-                <a:latin typeface="Arial"/>
-              </a:rPr>
-              <a:t>Every step you stubbed</a:t>
+            <a:off x="996696" y="2484120"/>
+            <a:ext cx="10738104" cy="1005840"/>
+          </a:xfrm>
+          <a:prstGeom prst="rect">
+            <a:avLst/>
+          </a:prstGeom>
+          <a:noFill/>
+        </p:spPr>
+        <p:txBody>
+          <a:bodyPr wrap="none" lIns="0" rIns="0">
+            <a:noAutofit/>
+          </a:bodyPr>
+          <a:lstStyle/>
+          <a:p>
+            <a:pPr algn="l"/>
+            <a:r>
+              <a:rPr sz="6000" b="1" i="0">
+                <a:solidFill>
+                  <a:srgbClr val="0072CE"/>
+                </a:solidFill>
+                <a:latin typeface="Arial"/>
+              </a:rPr>
+              <a:t>Caveat list</a:t>
             </a:r>
           </a:p>
         </p:txBody>
@@ -34510,8 +34651,8 @@
         </p:nvSpPr>
         <p:spPr>
           <a:xfrm>
-            <a:off x="457200" y="2883409"/>
-            <a:ext cx="11277600" cy="518159"/>
+            <a:off x="996696" y="3764280"/>
+            <a:ext cx="11195304" cy="609600"/>
           </a:xfrm>
           <a:prstGeom prst="rect">
             <a:avLst/>
@@ -34532,7 +34673,7 @@
                 </a:solidFill>
                 <a:latin typeface="Arial"/>
               </a:rPr>
-              <a:t>Every hardcoded value</a:t>
+              <a:t>Everything stubbed, faked, or known to break</a:t>
             </a:r>
           </a:p>
         </p:txBody>
@@ -34540,76 +34681,6 @@
       <p:sp>
         <p:nvSpPr>
           <p:cNvPr id="5" name="TextBox 4"/>
-          <p:cNvSpPr txBox="1"/>
-          <p:nvPr/>
-        </p:nvSpPr>
-        <p:spPr>
-          <a:xfrm>
-            <a:off x="457200" y="3858768"/>
-            <a:ext cx="11277600" cy="518159"/>
-          </a:xfrm>
-          <a:prstGeom prst="rect">
-            <a:avLst/>
-          </a:prstGeom>
-          <a:noFill/>
-        </p:spPr>
-        <p:txBody>
-          <a:bodyPr wrap="none" lIns="0" rIns="0">
-            <a:noAutofit/>
-          </a:bodyPr>
-          <a:lstStyle/>
-          <a:p>
-            <a:pPr algn="l"/>
-            <a:r>
-              <a:rPr sz="3400" b="0" i="0">
-                <a:solidFill>
-                  <a:srgbClr val="0A2240"/>
-                </a:solidFill>
-                <a:latin typeface="Arial"/>
-              </a:rPr>
-              <a:t>Inputs you know it fails on</a:t>
-            </a:r>
-          </a:p>
-        </p:txBody>
-      </p:sp>
-      <p:sp>
-        <p:nvSpPr>
-          <p:cNvPr id="6" name="TextBox 5"/>
-          <p:cNvSpPr txBox="1"/>
-          <p:nvPr/>
-        </p:nvSpPr>
-        <p:spPr>
-          <a:xfrm>
-            <a:off x="457200" y="4834127"/>
-            <a:ext cx="11277600" cy="518159"/>
-          </a:xfrm>
-          <a:prstGeom prst="rect">
-            <a:avLst/>
-          </a:prstGeom>
-          <a:noFill/>
-        </p:spPr>
-        <p:txBody>
-          <a:bodyPr wrap="none" lIns="0" rIns="0">
-            <a:noAutofit/>
-          </a:bodyPr>
-          <a:lstStyle/>
-          <a:p>
-            <a:pPr algn="l"/>
-            <a:r>
-              <a:rPr sz="3400" b="0" i="0">
-                <a:solidFill>
-                  <a:srgbClr val="0A2240"/>
-                </a:solidFill>
-                <a:latin typeface="Arial"/>
-              </a:rPr>
-              <a:t>Anything only tested once</a:t>
-            </a:r>
-          </a:p>
-        </p:txBody>
-      </p:sp>
-      <p:sp>
-        <p:nvSpPr>
-          <p:cNvPr id="7" name="TextBox 6"/>
           <p:cNvSpPr/>
           <p:nvPr>
             <p:ph type="sldNum" idx="12"/>
@@ -34700,6 +34771,244 @@
                 </a:solidFill>
                 <a:latin typeface="Arial"/>
               </a:rPr>
+              <a:t>What Goes on the List</a:t>
+            </a:r>
+          </a:p>
+        </p:txBody>
+      </p:sp>
+      <p:sp>
+        <p:nvSpPr>
+          <p:cNvPr id="3" name="TextBox 2"/>
+          <p:cNvSpPr txBox="1"/>
+          <p:nvPr/>
+        </p:nvSpPr>
+        <p:spPr>
+          <a:xfrm>
+            <a:off x="457200" y="1908050"/>
+            <a:ext cx="11277600" cy="518159"/>
+          </a:xfrm>
+          <a:prstGeom prst="rect">
+            <a:avLst/>
+          </a:prstGeom>
+          <a:noFill/>
+        </p:spPr>
+        <p:txBody>
+          <a:bodyPr wrap="none" lIns="0" rIns="0">
+            <a:noAutofit/>
+          </a:bodyPr>
+          <a:lstStyle/>
+          <a:p>
+            <a:pPr algn="l"/>
+            <a:r>
+              <a:rPr sz="3400" b="0" i="0">
+                <a:solidFill>
+                  <a:srgbClr val="0A2240"/>
+                </a:solidFill>
+                <a:latin typeface="Arial"/>
+              </a:rPr>
+              <a:t>Every step you stubbed</a:t>
+            </a:r>
+          </a:p>
+        </p:txBody>
+      </p:sp>
+      <p:sp>
+        <p:nvSpPr>
+          <p:cNvPr id="4" name="TextBox 3"/>
+          <p:cNvSpPr txBox="1"/>
+          <p:nvPr/>
+        </p:nvSpPr>
+        <p:spPr>
+          <a:xfrm>
+            <a:off x="457200" y="2883409"/>
+            <a:ext cx="11277600" cy="518159"/>
+          </a:xfrm>
+          <a:prstGeom prst="rect">
+            <a:avLst/>
+          </a:prstGeom>
+          <a:noFill/>
+        </p:spPr>
+        <p:txBody>
+          <a:bodyPr wrap="none" lIns="0" rIns="0">
+            <a:noAutofit/>
+          </a:bodyPr>
+          <a:lstStyle/>
+          <a:p>
+            <a:pPr algn="l"/>
+            <a:r>
+              <a:rPr sz="3400" b="0" i="0">
+                <a:solidFill>
+                  <a:srgbClr val="0A2240"/>
+                </a:solidFill>
+                <a:latin typeface="Arial"/>
+              </a:rPr>
+              <a:t>Every hardcoded value</a:t>
+            </a:r>
+          </a:p>
+        </p:txBody>
+      </p:sp>
+      <p:sp>
+        <p:nvSpPr>
+          <p:cNvPr id="5" name="TextBox 4"/>
+          <p:cNvSpPr txBox="1"/>
+          <p:nvPr/>
+        </p:nvSpPr>
+        <p:spPr>
+          <a:xfrm>
+            <a:off x="457200" y="3858768"/>
+            <a:ext cx="11277600" cy="518159"/>
+          </a:xfrm>
+          <a:prstGeom prst="rect">
+            <a:avLst/>
+          </a:prstGeom>
+          <a:noFill/>
+        </p:spPr>
+        <p:txBody>
+          <a:bodyPr wrap="none" lIns="0" rIns="0">
+            <a:noAutofit/>
+          </a:bodyPr>
+          <a:lstStyle/>
+          <a:p>
+            <a:pPr algn="l"/>
+            <a:r>
+              <a:rPr sz="3400" b="0" i="0">
+                <a:solidFill>
+                  <a:srgbClr val="0A2240"/>
+                </a:solidFill>
+                <a:latin typeface="Arial"/>
+              </a:rPr>
+              <a:t>Inputs you know it fails on</a:t>
+            </a:r>
+          </a:p>
+        </p:txBody>
+      </p:sp>
+      <p:sp>
+        <p:nvSpPr>
+          <p:cNvPr id="6" name="TextBox 5"/>
+          <p:cNvSpPr txBox="1"/>
+          <p:nvPr/>
+        </p:nvSpPr>
+        <p:spPr>
+          <a:xfrm>
+            <a:off x="457200" y="4834127"/>
+            <a:ext cx="11277600" cy="518159"/>
+          </a:xfrm>
+          <a:prstGeom prst="rect">
+            <a:avLst/>
+          </a:prstGeom>
+          <a:noFill/>
+        </p:spPr>
+        <p:txBody>
+          <a:bodyPr wrap="none" lIns="0" rIns="0">
+            <a:noAutofit/>
+          </a:bodyPr>
+          <a:lstStyle/>
+          <a:p>
+            <a:pPr algn="l"/>
+            <a:r>
+              <a:rPr sz="3400" b="0" i="0">
+                <a:solidFill>
+                  <a:srgbClr val="0A2240"/>
+                </a:solidFill>
+                <a:latin typeface="Arial"/>
+              </a:rPr>
+              <a:t>Anything only tested once</a:t>
+            </a:r>
+          </a:p>
+        </p:txBody>
+      </p:sp>
+      <p:sp>
+        <p:nvSpPr>
+          <p:cNvPr id="7" name="TextBox 6"/>
+          <p:cNvSpPr/>
+          <p:nvPr>
+            <p:ph type="sldNum" idx="12"/>
+          </p:nvPr>
+        </p:nvSpPr>
+        <p:spPr>
+          <a:xfrm>
+            <a:off x="11186160" y="6035040"/>
+            <a:ext cx="548640" cy="365760"/>
+          </a:xfrm>
+          <a:prstGeom prst="rect">
+            <a:avLst/>
+          </a:prstGeom>
+          <a:noFill/>
+        </p:spPr>
+        <p:txBody>
+          <a:bodyPr wrap="none" lIns="0" rIns="0">
+            <a:noAutofit/>
+          </a:bodyPr>
+          <a:lstStyle/>
+          <a:p>
+            <a:pPr algn="r"/>
+            <a:fld id="{4B0E1F8A-6C1D-4E2A-9F3B-7A5C8D2E1F60}" type="slidenum">
+              <a:rPr sz="1600" b="0" i="0">
+                <a:solidFill>
+                  <a:srgbClr val="5B6B82"/>
+                </a:solidFill>
+                <a:latin typeface="Arial"/>
+              </a:rPr>
+              <a:t>51</a:t>
+            </a:fld>
+          </a:p>
+        </p:txBody>
+      </p:sp>
+    </p:spTree>
+  </p:cSld>
+  <p:clrMapOvr>
+    <a:masterClrMapping/>
+  </p:clrMapOvr>
+</p:sld>
+</file>
+
+<file path=ppt/slides/slide52.xml><?xml version="1.0" encoding="utf-8"?>
+<p:sld xmlns:a="http://schemas.openxmlformats.org/drawingml/2006/main" xmlns:p="http://schemas.openxmlformats.org/presentationml/2006/main" xmlns:r="http://schemas.openxmlformats.org/officeDocument/2006/relationships" showMasterSp="0">
+  <p:cSld>
+    <p:bg>
+      <p:bgPr>
+        <a:solidFill>
+          <a:srgbClr val="FFFFFF"/>
+        </a:solidFill>
+        <a:effectLst/>
+      </p:bgPr>
+    </p:bg>
+    <p:spTree>
+      <p:nvGrpSpPr>
+        <p:cNvPr id="1" name=""/>
+        <p:cNvGrpSpPr/>
+        <p:nvPr/>
+      </p:nvGrpSpPr>
+      <p:grpSpPr/>
+      <p:sp>
+        <p:nvSpPr>
+          <p:cNvPr id="2" name="TextBox 1"/>
+          <p:cNvSpPr txBox="1"/>
+          <p:nvPr/>
+        </p:nvSpPr>
+        <p:spPr>
+          <a:xfrm>
+            <a:off x="457200" y="457200"/>
+            <a:ext cx="11277600" cy="768096"/>
+          </a:xfrm>
+          <a:prstGeom prst="rect">
+            <a:avLst/>
+          </a:prstGeom>
+          <a:noFill/>
+        </p:spPr>
+        <p:txBody>
+          <a:bodyPr wrap="none" lIns="0" rIns="0">
+            <a:noAutofit/>
+          </a:bodyPr>
+          <a:lstStyle/>
+          <a:p>
+            <a:pPr algn="l"/>
+            <a:r>
+              <a:rPr sz="4200" b="1" i="0">
+                <a:solidFill>
+                  <a:srgbClr val="0072CE"/>
+                </a:solidFill>
+                <a:latin typeface="Arial"/>
+              </a:rPr>
               <a:t>How to Write It Down</a:t>
             </a:r>
           </a:p>
@@ -35131,7 +35440,7 @@
                 </a:solidFill>
                 <a:latin typeface="Arial"/>
               </a:rPr>
-              <a:t>51</a:t>
+              <a:t>52</a:t>
             </a:fld>
           </a:p>
         </p:txBody>
@@ -35144,7 +35453,7 @@
 </p:sld>
 </file>
 
-<file path=ppt/slides/slide52.xml><?xml version="1.0" encoding="utf-8"?>
+<file path=ppt/slides/slide53.xml><?xml version="1.0" encoding="utf-8"?>
 <p:sld xmlns:a="http://schemas.openxmlformats.org/drawingml/2006/main" xmlns:p="http://schemas.openxmlformats.org/presentationml/2006/main" xmlns:r="http://schemas.openxmlformats.org/officeDocument/2006/relationships" showMasterSp="0">
   <p:cSld>
     <p:bg>
@@ -35752,675 +36061,6 @@
       <p:sp>
         <p:nvSpPr>
           <p:cNvPr id="18" name="TextBox 17"/>
-          <p:cNvSpPr/>
-          <p:nvPr>
-            <p:ph type="sldNum" idx="12"/>
-          </p:nvPr>
-        </p:nvSpPr>
-        <p:spPr>
-          <a:xfrm>
-            <a:off x="11186160" y="6035040"/>
-            <a:ext cx="548640" cy="365760"/>
-          </a:xfrm>
-          <a:prstGeom prst="rect">
-            <a:avLst/>
-          </a:prstGeom>
-          <a:noFill/>
-        </p:spPr>
-        <p:txBody>
-          <a:bodyPr wrap="none" lIns="0" rIns="0">
-            <a:noAutofit/>
-          </a:bodyPr>
-          <a:lstStyle/>
-          <a:p>
-            <a:pPr algn="r"/>
-            <a:fld id="{4B0E1F8A-6C1D-4E2A-9F3B-7A5C8D2E1F60}" type="slidenum">
-              <a:rPr sz="1600" b="0" i="0">
-                <a:solidFill>
-                  <a:srgbClr val="5B6B82"/>
-                </a:solidFill>
-                <a:latin typeface="Arial"/>
-              </a:rPr>
-              <a:t>52</a:t>
-            </a:fld>
-          </a:p>
-        </p:txBody>
-      </p:sp>
-    </p:spTree>
-  </p:cSld>
-  <p:clrMapOvr>
-    <a:masterClrMapping/>
-  </p:clrMapOvr>
-</p:sld>
-</file>
-
-<file path=ppt/slides/slide53.xml><?xml version="1.0" encoding="utf-8"?>
-<p:sld xmlns:a="http://schemas.openxmlformats.org/drawingml/2006/main" xmlns:p="http://schemas.openxmlformats.org/presentationml/2006/main" xmlns:r="http://schemas.openxmlformats.org/officeDocument/2006/relationships" showMasterSp="0">
-  <p:cSld>
-    <p:bg>
-      <p:bgPr>
-        <a:solidFill>
-          <a:srgbClr val="FFFFFF"/>
-        </a:solidFill>
-        <a:effectLst/>
-      </p:bgPr>
-    </p:bg>
-    <p:spTree>
-      <p:nvGrpSpPr>
-        <p:cNvPr id="1" name=""/>
-        <p:cNvGrpSpPr/>
-        <p:nvPr/>
-      </p:nvGrpSpPr>
-      <p:grpSpPr/>
-      <p:sp>
-        <p:nvSpPr>
-          <p:cNvPr id="2" name="TextBox 1"/>
-          <p:cNvSpPr txBox="1"/>
-          <p:nvPr/>
-        </p:nvSpPr>
-        <p:spPr>
-          <a:xfrm>
-            <a:off x="457200" y="457200"/>
-            <a:ext cx="11611392" cy="768096"/>
-          </a:xfrm>
-          <a:prstGeom prst="rect">
-            <a:avLst/>
-          </a:prstGeom>
-          <a:noFill/>
-        </p:spPr>
-        <p:txBody>
-          <a:bodyPr wrap="none" lIns="0" rIns="0">
-            <a:noAutofit/>
-          </a:bodyPr>
-          <a:lstStyle/>
-          <a:p>
-            <a:pPr algn="l"/>
-            <a:r>
-              <a:rPr sz="4200" b="1" i="0">
-                <a:solidFill>
-                  <a:srgbClr val="0072CE"/>
-                </a:solidFill>
-                <a:latin typeface="Arial"/>
-              </a:rPr>
-              <a:t>The repo at the end of Day 2</a:t>
-            </a:r>
-          </a:p>
-        </p:txBody>
-      </p:sp>
-      <p:sp>
-        <p:nvSpPr>
-          <p:cNvPr id="3" name="Rounded Rectangle 2"/>
-          <p:cNvSpPr/>
-          <p:nvPr/>
-        </p:nvSpPr>
-        <p:spPr>
-          <a:xfrm>
-            <a:off x="457200" y="1499616"/>
-            <a:ext cx="11277600" cy="4261104"/>
-          </a:xfrm>
-          <a:prstGeom prst="roundRect">
-            <a:avLst>
-              <a:gd name="adj" fmla="val 3004"/>
-            </a:avLst>
-          </a:prstGeom>
-          <a:solidFill>
-            <a:srgbClr val="0C1A1C"/>
-          </a:solidFill>
-          <a:ln>
-            <a:noFill/>
-          </a:ln>
-          <a:effectLst/>
-        </p:spPr>
-        <p:style>
-          <a:lnRef idx="1">
-            <a:schemeClr val="accent1"/>
-          </a:lnRef>
-          <a:fillRef idx="3">
-            <a:schemeClr val="accent1"/>
-          </a:fillRef>
-          <a:effectRef idx="2">
-            <a:schemeClr val="accent1"/>
-          </a:effectRef>
-          <a:fontRef idx="minor">
-            <a:schemeClr val="lt1"/>
-          </a:fontRef>
-        </p:style>
-        <p:txBody>
-          <a:bodyPr rtlCol="0" anchor="ctr"/>
-          <a:lstStyle/>
-          <a:p>
-            <a:pPr algn="ctr"/>
-          </a:p>
-        </p:txBody>
-      </p:sp>
-      <p:sp>
-        <p:nvSpPr>
-          <p:cNvPr id="4" name="TextBox 3"/>
-          <p:cNvSpPr txBox="1"/>
-          <p:nvPr/>
-        </p:nvSpPr>
-        <p:spPr>
-          <a:xfrm>
-            <a:off x="822960" y="1819656"/>
-            <a:ext cx="3670360" cy="396240"/>
-          </a:xfrm>
-          <a:prstGeom prst="rect">
-            <a:avLst/>
-          </a:prstGeom>
-          <a:noFill/>
-        </p:spPr>
-        <p:txBody>
-          <a:bodyPr wrap="none" lIns="0" rIns="0">
-            <a:noAutofit/>
-          </a:bodyPr>
-          <a:lstStyle/>
-          <a:p>
-            <a:pPr algn="l"/>
-            <a:r>
-              <a:rPr sz="2600" b="1" i="0">
-                <a:solidFill>
-                  <a:srgbClr val="569CD6"/>
-                </a:solidFill>
-                <a:latin typeface="Courier New"/>
-              </a:rPr>
-              <a:t>happy-path/</a:t>
-            </a:r>
-          </a:p>
-        </p:txBody>
-      </p:sp>
-      <p:sp>
-        <p:nvSpPr>
-          <p:cNvPr id="5" name="TextBox 4"/>
-          <p:cNvSpPr txBox="1"/>
-          <p:nvPr/>
-        </p:nvSpPr>
-        <p:spPr>
-          <a:xfrm>
-            <a:off x="822960" y="2215896"/>
-            <a:ext cx="1134011" cy="396240"/>
-          </a:xfrm>
-          <a:prstGeom prst="rect">
-            <a:avLst/>
-          </a:prstGeom>
-          <a:noFill/>
-        </p:spPr>
-        <p:txBody>
-          <a:bodyPr wrap="none" lIns="0" rIns="0">
-            <a:noAutofit/>
-          </a:bodyPr>
-          <a:lstStyle/>
-          <a:p>
-            <a:pPr algn="l"/>
-            <a:r>
-              <a:rPr sz="2600" b="0" i="0">
-                <a:solidFill>
-                  <a:srgbClr val="55707A"/>
-                </a:solidFill>
-                <a:latin typeface="Courier New"/>
-              </a:rPr>
-              <a:t>├─ </a:t>
-            </a:r>
-          </a:p>
-        </p:txBody>
-      </p:sp>
-      <p:sp>
-        <p:nvSpPr>
-          <p:cNvPr id="6" name="TextBox 5"/>
-          <p:cNvSpPr txBox="1"/>
-          <p:nvPr/>
-        </p:nvSpPr>
-        <p:spPr>
-          <a:xfrm>
-            <a:off x="1417417" y="2215896"/>
-            <a:ext cx="1768097" cy="396240"/>
-          </a:xfrm>
-          <a:prstGeom prst="rect">
-            <a:avLst/>
-          </a:prstGeom>
-          <a:noFill/>
-        </p:spPr>
-        <p:txBody>
-          <a:bodyPr wrap="none" lIns="0" rIns="0">
-            <a:noAutofit/>
-          </a:bodyPr>
-          <a:lstStyle/>
-          <a:p>
-            <a:pPr algn="l"/>
-            <a:r>
-              <a:rPr sz="2600" b="1" i="0">
-                <a:solidFill>
-                  <a:srgbClr val="569CD6"/>
-                </a:solidFill>
-                <a:latin typeface="Courier New"/>
-              </a:rPr>
-              <a:t>docs/</a:t>
-            </a:r>
-          </a:p>
-        </p:txBody>
-      </p:sp>
-      <p:sp>
-        <p:nvSpPr>
-          <p:cNvPr id="7" name="TextBox 6"/>
-          <p:cNvSpPr txBox="1"/>
-          <p:nvPr/>
-        </p:nvSpPr>
-        <p:spPr>
-          <a:xfrm>
-            <a:off x="822960" y="2612136"/>
-            <a:ext cx="2085140" cy="396240"/>
-          </a:xfrm>
-          <a:prstGeom prst="rect">
-            <a:avLst/>
-          </a:prstGeom>
-          <a:noFill/>
-        </p:spPr>
-        <p:txBody>
-          <a:bodyPr wrap="none" lIns="0" rIns="0">
-            <a:noAutofit/>
-          </a:bodyPr>
-          <a:lstStyle/>
-          <a:p>
-            <a:pPr algn="l"/>
-            <a:r>
-              <a:rPr sz="2600" b="0" i="0">
-                <a:solidFill>
-                  <a:srgbClr val="55707A"/>
-                </a:solidFill>
-                <a:latin typeface="Courier New"/>
-              </a:rPr>
-              <a:t>│  └─ </a:t>
-            </a:r>
-          </a:p>
-        </p:txBody>
-      </p:sp>
-      <p:sp>
-        <p:nvSpPr>
-          <p:cNvPr id="8" name="TextBox 7"/>
-          <p:cNvSpPr txBox="1"/>
-          <p:nvPr/>
-        </p:nvSpPr>
-        <p:spPr>
-          <a:xfrm>
-            <a:off x="2011873" y="2612136"/>
-            <a:ext cx="3353315" cy="396240"/>
-          </a:xfrm>
-          <a:prstGeom prst="rect">
-            <a:avLst/>
-          </a:prstGeom>
-          <a:noFill/>
-        </p:spPr>
-        <p:txBody>
-          <a:bodyPr wrap="none" lIns="0" rIns="0">
-            <a:noAutofit/>
-          </a:bodyPr>
-          <a:lstStyle/>
-          <a:p>
-            <a:pPr algn="l"/>
-            <a:r>
-              <a:rPr sz="2600" b="0" i="0">
-                <a:solidFill>
-                  <a:srgbClr val="D4D4D4"/>
-                </a:solidFill>
-                <a:latin typeface="Courier New"/>
-              </a:rPr>
-              <a:t>index.html</a:t>
-            </a:r>
-          </a:p>
-        </p:txBody>
-      </p:sp>
-      <p:sp>
-        <p:nvSpPr>
-          <p:cNvPr id="9" name="TextBox 8"/>
-          <p:cNvSpPr txBox="1"/>
-          <p:nvPr/>
-        </p:nvSpPr>
-        <p:spPr>
-          <a:xfrm>
-            <a:off x="822960" y="3008376"/>
-            <a:ext cx="1134011" cy="396240"/>
-          </a:xfrm>
-          <a:prstGeom prst="rect">
-            <a:avLst/>
-          </a:prstGeom>
-          <a:noFill/>
-        </p:spPr>
-        <p:txBody>
-          <a:bodyPr wrap="none" lIns="0" rIns="0">
-            <a:noAutofit/>
-          </a:bodyPr>
-          <a:lstStyle/>
-          <a:p>
-            <a:pPr algn="l"/>
-            <a:r>
-              <a:rPr sz="2600" b="0" i="0">
-                <a:solidFill>
-                  <a:srgbClr val="55707A"/>
-                </a:solidFill>
-                <a:latin typeface="Courier New"/>
-              </a:rPr>
-              <a:t>├─ </a:t>
-            </a:r>
-          </a:p>
-        </p:txBody>
-      </p:sp>
-      <p:sp>
-        <p:nvSpPr>
-          <p:cNvPr id="10" name="TextBox 9"/>
-          <p:cNvSpPr txBox="1"/>
-          <p:nvPr/>
-        </p:nvSpPr>
-        <p:spPr>
-          <a:xfrm>
-            <a:off x="1417417" y="3008376"/>
-            <a:ext cx="3036272" cy="396240"/>
-          </a:xfrm>
-          <a:prstGeom prst="rect">
-            <a:avLst/>
-          </a:prstGeom>
-          <a:noFill/>
-        </p:spPr>
-        <p:txBody>
-          <a:bodyPr wrap="none" lIns="0" rIns="0">
-            <a:noAutofit/>
-          </a:bodyPr>
-          <a:lstStyle/>
-          <a:p>
-            <a:pPr algn="l"/>
-            <a:r>
-              <a:rPr sz="2600" b="1" i="0">
-                <a:solidFill>
-                  <a:srgbClr val="569CD6"/>
-                </a:solidFill>
-                <a:latin typeface="Courier New"/>
-              </a:rPr>
-              <a:t>fixtures/</a:t>
-            </a:r>
-          </a:p>
-        </p:txBody>
-      </p:sp>
-      <p:sp>
-        <p:nvSpPr>
-          <p:cNvPr id="11" name="TextBox 10"/>
-          <p:cNvSpPr txBox="1"/>
-          <p:nvPr/>
-        </p:nvSpPr>
-        <p:spPr>
-          <a:xfrm>
-            <a:off x="822960" y="3404616"/>
-            <a:ext cx="1134011" cy="396240"/>
-          </a:xfrm>
-          <a:prstGeom prst="rect">
-            <a:avLst/>
-          </a:prstGeom>
-          <a:noFill/>
-        </p:spPr>
-        <p:txBody>
-          <a:bodyPr wrap="none" lIns="0" rIns="0">
-            <a:noAutofit/>
-          </a:bodyPr>
-          <a:lstStyle/>
-          <a:p>
-            <a:pPr algn="l"/>
-            <a:r>
-              <a:rPr sz="2600" b="0" i="0">
-                <a:solidFill>
-                  <a:srgbClr val="55707A"/>
-                </a:solidFill>
-                <a:latin typeface="Courier New"/>
-              </a:rPr>
-              <a:t>├─ </a:t>
-            </a:r>
-          </a:p>
-        </p:txBody>
-      </p:sp>
-      <p:sp>
-        <p:nvSpPr>
-          <p:cNvPr id="12" name="TextBox 11"/>
-          <p:cNvSpPr txBox="1"/>
-          <p:nvPr/>
-        </p:nvSpPr>
-        <p:spPr>
-          <a:xfrm>
-            <a:off x="1417417" y="3404616"/>
-            <a:ext cx="2085140" cy="396240"/>
-          </a:xfrm>
-          <a:prstGeom prst="rect">
-            <a:avLst/>
-          </a:prstGeom>
-          <a:noFill/>
-        </p:spPr>
-        <p:txBody>
-          <a:bodyPr wrap="none" lIns="0" rIns="0">
-            <a:noAutofit/>
-          </a:bodyPr>
-          <a:lstStyle/>
-          <a:p>
-            <a:pPr algn="l"/>
-            <a:r>
-              <a:rPr sz="2600" b="1" i="0">
-                <a:solidFill>
-                  <a:srgbClr val="569CD6"/>
-                </a:solidFill>
-                <a:latin typeface="Courier New"/>
-              </a:rPr>
-              <a:t>steps/</a:t>
-            </a:r>
-          </a:p>
-        </p:txBody>
-      </p:sp>
-      <p:sp>
-        <p:nvSpPr>
-          <p:cNvPr id="13" name="TextBox 12"/>
-          <p:cNvSpPr txBox="1"/>
-          <p:nvPr/>
-        </p:nvSpPr>
-        <p:spPr>
-          <a:xfrm>
-            <a:off x="822960" y="3800856"/>
-            <a:ext cx="1134011" cy="396240"/>
-          </a:xfrm>
-          <a:prstGeom prst="rect">
-            <a:avLst/>
-          </a:prstGeom>
-          <a:noFill/>
-        </p:spPr>
-        <p:txBody>
-          <a:bodyPr wrap="none" lIns="0" rIns="0">
-            <a:noAutofit/>
-          </a:bodyPr>
-          <a:lstStyle/>
-          <a:p>
-            <a:pPr algn="l"/>
-            <a:r>
-              <a:rPr sz="2600" b="0" i="0">
-                <a:solidFill>
-                  <a:srgbClr val="55707A"/>
-                </a:solidFill>
-                <a:latin typeface="Courier New"/>
-              </a:rPr>
-              <a:t>├─ </a:t>
-            </a:r>
-          </a:p>
-        </p:txBody>
-      </p:sp>
-      <p:sp>
-        <p:nvSpPr>
-          <p:cNvPr id="14" name="TextBox 13"/>
-          <p:cNvSpPr txBox="1"/>
-          <p:nvPr/>
-        </p:nvSpPr>
-        <p:spPr>
-          <a:xfrm>
-            <a:off x="1417417" y="3800856"/>
-            <a:ext cx="2085140" cy="396240"/>
-          </a:xfrm>
-          <a:prstGeom prst="rect">
-            <a:avLst/>
-          </a:prstGeom>
-          <a:noFill/>
-        </p:spPr>
-        <p:txBody>
-          <a:bodyPr wrap="none" lIns="0" rIns="0">
-            <a:noAutofit/>
-          </a:bodyPr>
-          <a:lstStyle/>
-          <a:p>
-            <a:pPr algn="l"/>
-            <a:r>
-              <a:rPr sz="2600" b="0" i="0">
-                <a:solidFill>
-                  <a:srgbClr val="D4D4D4"/>
-                </a:solidFill>
-                <a:latin typeface="Courier New"/>
-              </a:rPr>
-              <a:t>run.py</a:t>
-            </a:r>
-          </a:p>
-        </p:txBody>
-      </p:sp>
-      <p:sp>
-        <p:nvSpPr>
-          <p:cNvPr id="15" name="TextBox 14"/>
-          <p:cNvSpPr txBox="1"/>
-          <p:nvPr/>
-        </p:nvSpPr>
-        <p:spPr>
-          <a:xfrm>
-            <a:off x="822960" y="4197096"/>
-            <a:ext cx="1134011" cy="396240"/>
-          </a:xfrm>
-          <a:prstGeom prst="rect">
-            <a:avLst/>
-          </a:prstGeom>
-          <a:noFill/>
-        </p:spPr>
-        <p:txBody>
-          <a:bodyPr wrap="none" lIns="0" rIns="0">
-            <a:noAutofit/>
-          </a:bodyPr>
-          <a:lstStyle/>
-          <a:p>
-            <a:pPr algn="l"/>
-            <a:r>
-              <a:rPr sz="2600" b="0" i="0">
-                <a:solidFill>
-                  <a:srgbClr val="55707A"/>
-                </a:solidFill>
-                <a:latin typeface="Courier New"/>
-              </a:rPr>
-              <a:t>├─ </a:t>
-            </a:r>
-          </a:p>
-        </p:txBody>
-      </p:sp>
-      <p:sp>
-        <p:nvSpPr>
-          <p:cNvPr id="16" name="TextBox 15"/>
-          <p:cNvSpPr txBox="1"/>
-          <p:nvPr/>
-        </p:nvSpPr>
-        <p:spPr>
-          <a:xfrm>
-            <a:off x="1417417" y="4197096"/>
-            <a:ext cx="3353315" cy="396240"/>
-          </a:xfrm>
-          <a:prstGeom prst="rect">
-            <a:avLst/>
-          </a:prstGeom>
-          <a:noFill/>
-        </p:spPr>
-        <p:txBody>
-          <a:bodyPr wrap="none" lIns="0" rIns="0">
-            <a:noAutofit/>
-          </a:bodyPr>
-          <a:lstStyle/>
-          <a:p>
-            <a:pPr algn="l"/>
-            <a:r>
-              <a:rPr sz="2600" b="0" i="0">
-                <a:solidFill>
-                  <a:srgbClr val="D4D4D4"/>
-                </a:solidFill>
-                <a:latin typeface="Courier New"/>
-              </a:rPr>
-              <a:t>CAVEATS.md</a:t>
-            </a:r>
-          </a:p>
-        </p:txBody>
-      </p:sp>
-      <p:sp>
-        <p:nvSpPr>
-          <p:cNvPr id="17" name="TextBox 16"/>
-          <p:cNvSpPr txBox="1"/>
-          <p:nvPr/>
-        </p:nvSpPr>
-        <p:spPr>
-          <a:xfrm>
-            <a:off x="822960" y="4593336"/>
-            <a:ext cx="1134011" cy="396240"/>
-          </a:xfrm>
-          <a:prstGeom prst="rect">
-            <a:avLst/>
-          </a:prstGeom>
-          <a:noFill/>
-        </p:spPr>
-        <p:txBody>
-          <a:bodyPr wrap="none" lIns="0" rIns="0">
-            <a:noAutofit/>
-          </a:bodyPr>
-          <a:lstStyle/>
-          <a:p>
-            <a:pPr algn="l"/>
-            <a:r>
-              <a:rPr sz="2600" b="0" i="0">
-                <a:solidFill>
-                  <a:srgbClr val="55707A"/>
-                </a:solidFill>
-                <a:latin typeface="Courier New"/>
-              </a:rPr>
-              <a:t>└─ </a:t>
-            </a:r>
-          </a:p>
-        </p:txBody>
-      </p:sp>
-      <p:sp>
-        <p:nvSpPr>
-          <p:cNvPr id="18" name="TextBox 17"/>
-          <p:cNvSpPr txBox="1"/>
-          <p:nvPr/>
-        </p:nvSpPr>
-        <p:spPr>
-          <a:xfrm>
-            <a:off x="1417417" y="4593336"/>
-            <a:ext cx="3036272" cy="396240"/>
-          </a:xfrm>
-          <a:prstGeom prst="rect">
-            <a:avLst/>
-          </a:prstGeom>
-          <a:noFill/>
-        </p:spPr>
-        <p:txBody>
-          <a:bodyPr wrap="none" lIns="0" rIns="0">
-            <a:noAutofit/>
-          </a:bodyPr>
-          <a:lstStyle/>
-          <a:p>
-            <a:pPr algn="l"/>
-            <a:r>
-              <a:rPr sz="2600" b="0" i="0">
-                <a:solidFill>
-                  <a:srgbClr val="D4D4D4"/>
-                </a:solidFill>
-                <a:latin typeface="Courier New"/>
-              </a:rPr>
-              <a:t>README.md</a:t>
-            </a:r>
-          </a:p>
-        </p:txBody>
-      </p:sp>
-      <p:sp>
-        <p:nvSpPr>
-          <p:cNvPr id="19" name="TextBox 18"/>
           <p:cNvSpPr/>
           <p:nvPr>
             <p:ph type="sldNum" idx="12"/>
@@ -36490,7 +36130,7 @@
         <p:spPr>
           <a:xfrm>
             <a:off x="457200" y="457200"/>
-            <a:ext cx="11277600" cy="768096"/>
+            <a:ext cx="11611392" cy="768096"/>
           </a:xfrm>
           <a:prstGeom prst="rect">
             <a:avLst/>
@@ -36511,62 +36151,29 @@
                 </a:solidFill>
                 <a:latin typeface="Arial"/>
               </a:rPr>
-              <a:t>Hiding and Naming</a:t>
-            </a:r>
-          </a:p>
-        </p:txBody>
-      </p:sp>
-      <p:sp>
-        <p:nvSpPr>
-          <p:cNvPr id="3" name="TextBox 2"/>
-          <p:cNvSpPr txBox="1"/>
+              <a:t>The repo at the end of Day 2</a:t>
+            </a:r>
+          </a:p>
+        </p:txBody>
+      </p:sp>
+      <p:sp>
+        <p:nvSpPr>
+          <p:cNvPr id="3" name="Rounded Rectangle 2"/>
+          <p:cNvSpPr/>
           <p:nvPr/>
         </p:nvSpPr>
         <p:spPr>
           <a:xfrm>
             <a:off x="457200" y="1499616"/>
-            <a:ext cx="5501640" cy="621791"/>
-          </a:xfrm>
-          <a:prstGeom prst="rect">
-            <a:avLst/>
-          </a:prstGeom>
-          <a:noFill/>
-        </p:spPr>
-        <p:txBody>
-          <a:bodyPr wrap="none" lIns="0" rIns="0">
-            <a:noAutofit/>
-          </a:bodyPr>
-          <a:lstStyle/>
-          <a:p>
-            <a:pPr algn="l"/>
-            <a:r>
-              <a:rPr sz="3400" b="1" i="0">
-                <a:solidFill>
-                  <a:srgbClr val="5B6B82"/>
-                </a:solidFill>
-                <a:latin typeface="Arial"/>
-              </a:rPr>
-              <a:t>Hiding a limit</a:t>
-            </a:r>
-          </a:p>
-        </p:txBody>
-      </p:sp>
-      <p:sp>
-        <p:nvSpPr>
-          <p:cNvPr id="4" name="Rectangle 3"/>
-          <p:cNvSpPr/>
-          <p:nvPr/>
-        </p:nvSpPr>
-        <p:spPr>
-          <a:xfrm>
-            <a:off x="548640" y="2176271"/>
-            <a:ext cx="1650492" cy="54864"/>
-          </a:xfrm>
-          <a:prstGeom prst="rect">
-            <a:avLst/>
+            <a:ext cx="11277600" cy="4261104"/>
+          </a:xfrm>
+          <a:prstGeom prst="roundRect">
+            <a:avLst>
+              <a:gd name="adj" fmla="val 3004"/>
+            </a:avLst>
           </a:prstGeom>
           <a:solidFill>
-            <a:srgbClr val="5B6B82"/>
+            <a:srgbClr val="0C1A1C"/>
           </a:solidFill>
           <a:ln>
             <a:noFill/>
@@ -36597,80 +36204,106 @@
       </p:sp>
       <p:sp>
         <p:nvSpPr>
+          <p:cNvPr id="4" name="TextBox 3"/>
+          <p:cNvSpPr txBox="1"/>
+          <p:nvPr/>
+        </p:nvSpPr>
+        <p:spPr>
+          <a:xfrm>
+            <a:off x="822960" y="1819656"/>
+            <a:ext cx="3670360" cy="396240"/>
+          </a:xfrm>
+          <a:prstGeom prst="rect">
+            <a:avLst/>
+          </a:prstGeom>
+          <a:noFill/>
+        </p:spPr>
+        <p:txBody>
+          <a:bodyPr wrap="none" lIns="0" rIns="0">
+            <a:noAutofit/>
+          </a:bodyPr>
+          <a:lstStyle/>
+          <a:p>
+            <a:pPr algn="l"/>
+            <a:r>
+              <a:rPr sz="2600" b="1" i="0">
+                <a:solidFill>
+                  <a:srgbClr val="569CD6"/>
+                </a:solidFill>
+                <a:latin typeface="Courier New"/>
+              </a:rPr>
+              <a:t>happy-path/</a:t>
+            </a:r>
+          </a:p>
+        </p:txBody>
+      </p:sp>
+      <p:sp>
+        <p:nvSpPr>
           <p:cNvPr id="5" name="TextBox 4"/>
           <p:cNvSpPr txBox="1"/>
           <p:nvPr/>
         </p:nvSpPr>
         <p:spPr>
           <a:xfrm>
-            <a:off x="6233160" y="1499616"/>
-            <a:ext cx="5501640" cy="621791"/>
-          </a:xfrm>
-          <a:prstGeom prst="rect">
-            <a:avLst/>
-          </a:prstGeom>
-          <a:noFill/>
-        </p:spPr>
-        <p:txBody>
-          <a:bodyPr wrap="none" lIns="0" rIns="0">
-            <a:noAutofit/>
-          </a:bodyPr>
-          <a:lstStyle/>
-          <a:p>
-            <a:pPr algn="l"/>
-            <a:r>
-              <a:rPr sz="3400" b="1" i="0">
-                <a:solidFill>
-                  <a:srgbClr val="0072CE"/>
-                </a:solidFill>
-                <a:latin typeface="Arial"/>
-              </a:rPr>
-              <a:t>Naming a limit</a:t>
-            </a:r>
-          </a:p>
-        </p:txBody>
-      </p:sp>
-      <p:sp>
-        <p:nvSpPr>
-          <p:cNvPr id="6" name="Rectangle 5"/>
-          <p:cNvSpPr/>
-          <p:nvPr/>
-        </p:nvSpPr>
-        <p:spPr>
-          <a:xfrm>
-            <a:off x="6324600" y="2176271"/>
-            <a:ext cx="1650492" cy="54864"/>
-          </a:xfrm>
-          <a:prstGeom prst="rect">
-            <a:avLst/>
-          </a:prstGeom>
-          <a:solidFill>
-            <a:srgbClr val="0072CE"/>
-          </a:solidFill>
-          <a:ln>
-            <a:noFill/>
-          </a:ln>
-          <a:effectLst/>
-        </p:spPr>
-        <p:style>
-          <a:lnRef idx="1">
-            <a:schemeClr val="accent1"/>
-          </a:lnRef>
-          <a:fillRef idx="3">
-            <a:schemeClr val="accent1"/>
-          </a:fillRef>
-          <a:effectRef idx="2">
-            <a:schemeClr val="accent1"/>
-          </a:effectRef>
-          <a:fontRef idx="minor">
-            <a:schemeClr val="lt1"/>
-          </a:fontRef>
-        </p:style>
-        <p:txBody>
-          <a:bodyPr rtlCol="0" anchor="ctr"/>
-          <a:lstStyle/>
-          <a:p>
-            <a:pPr algn="ctr"/>
+            <a:off x="822960" y="2215896"/>
+            <a:ext cx="1134011" cy="396240"/>
+          </a:xfrm>
+          <a:prstGeom prst="rect">
+            <a:avLst/>
+          </a:prstGeom>
+          <a:noFill/>
+        </p:spPr>
+        <p:txBody>
+          <a:bodyPr wrap="none" lIns="0" rIns="0">
+            <a:noAutofit/>
+          </a:bodyPr>
+          <a:lstStyle/>
+          <a:p>
+            <a:pPr algn="l"/>
+            <a:r>
+              <a:rPr sz="2600" b="0" i="0">
+                <a:solidFill>
+                  <a:srgbClr val="55707A"/>
+                </a:solidFill>
+                <a:latin typeface="Courier New"/>
+              </a:rPr>
+              <a:t>├─ </a:t>
+            </a:r>
+          </a:p>
+        </p:txBody>
+      </p:sp>
+      <p:sp>
+        <p:nvSpPr>
+          <p:cNvPr id="6" name="TextBox 5"/>
+          <p:cNvSpPr txBox="1"/>
+          <p:nvPr/>
+        </p:nvSpPr>
+        <p:spPr>
+          <a:xfrm>
+            <a:off x="1417417" y="2215896"/>
+            <a:ext cx="1768097" cy="396240"/>
+          </a:xfrm>
+          <a:prstGeom prst="rect">
+            <a:avLst/>
+          </a:prstGeom>
+          <a:noFill/>
+        </p:spPr>
+        <p:txBody>
+          <a:bodyPr wrap="none" lIns="0" rIns="0">
+            <a:noAutofit/>
+          </a:bodyPr>
+          <a:lstStyle/>
+          <a:p>
+            <a:pPr algn="l"/>
+            <a:r>
+              <a:rPr sz="2600" b="1" i="0">
+                <a:solidFill>
+                  <a:srgbClr val="569CD6"/>
+                </a:solidFill>
+                <a:latin typeface="Courier New"/>
+              </a:rPr>
+              <a:t>docs/</a:t>
+            </a:r>
           </a:p>
         </p:txBody>
       </p:sp>
@@ -36682,29 +36315,29 @@
         </p:nvSpPr>
         <p:spPr>
           <a:xfrm>
-            <a:off x="457200" y="2395727"/>
-            <a:ext cx="6096515" cy="609600"/>
-          </a:xfrm>
-          <a:prstGeom prst="rect">
-            <a:avLst/>
-          </a:prstGeom>
-          <a:noFill/>
-        </p:spPr>
-        <p:txBody>
-          <a:bodyPr wrap="none" lIns="0" rIns="0">
-            <a:noAutofit/>
-          </a:bodyPr>
-          <a:lstStyle/>
-          <a:p>
-            <a:pPr algn="l"/>
-            <a:r>
-              <a:rPr sz="3400" b="0" i="0">
-                <a:solidFill>
-                  <a:srgbClr val="0A2240"/>
-                </a:solidFill>
-                <a:latin typeface="Arial"/>
-              </a:rPr>
-              <a:t>They find it anyway</a:t>
+            <a:off x="822960" y="2612136"/>
+            <a:ext cx="2085140" cy="396240"/>
+          </a:xfrm>
+          <a:prstGeom prst="rect">
+            <a:avLst/>
+          </a:prstGeom>
+          <a:noFill/>
+        </p:spPr>
+        <p:txBody>
+          <a:bodyPr wrap="none" lIns="0" rIns="0">
+            <a:noAutofit/>
+          </a:bodyPr>
+          <a:lstStyle/>
+          <a:p>
+            <a:pPr algn="l"/>
+            <a:r>
+              <a:rPr sz="2600" b="0" i="0">
+                <a:solidFill>
+                  <a:srgbClr val="55707A"/>
+                </a:solidFill>
+                <a:latin typeface="Courier New"/>
+              </a:rPr>
+              <a:t>│  └─ </a:t>
             </a:r>
           </a:p>
         </p:txBody>
@@ -36717,29 +36350,29 @@
         </p:nvSpPr>
         <p:spPr>
           <a:xfrm>
-            <a:off x="457200" y="3608831"/>
-            <a:ext cx="6748601" cy="609600"/>
-          </a:xfrm>
-          <a:prstGeom prst="rect">
-            <a:avLst/>
-          </a:prstGeom>
-          <a:noFill/>
-        </p:spPr>
-        <p:txBody>
-          <a:bodyPr wrap="none" lIns="0" rIns="0">
-            <a:noAutofit/>
-          </a:bodyPr>
-          <a:lstStyle/>
-          <a:p>
-            <a:pPr algn="l"/>
-            <a:r>
-              <a:rPr sz="3400" b="0" i="0">
-                <a:solidFill>
-                  <a:srgbClr val="0A2240"/>
-                </a:solidFill>
-                <a:latin typeface="Arial"/>
-              </a:rPr>
-              <a:t>It looks like a mistake</a:t>
+            <a:off x="2011873" y="2612136"/>
+            <a:ext cx="3353315" cy="396240"/>
+          </a:xfrm>
+          <a:prstGeom prst="rect">
+            <a:avLst/>
+          </a:prstGeom>
+          <a:noFill/>
+        </p:spPr>
+        <p:txBody>
+          <a:bodyPr wrap="none" lIns="0" rIns="0">
+            <a:noAutofit/>
+          </a:bodyPr>
+          <a:lstStyle/>
+          <a:p>
+            <a:pPr algn="l"/>
+            <a:r>
+              <a:rPr sz="2600" b="0" i="0">
+                <a:solidFill>
+                  <a:srgbClr val="D4D4D4"/>
+                </a:solidFill>
+                <a:latin typeface="Courier New"/>
+              </a:rPr>
+              <a:t>index.html</a:t>
             </a:r>
           </a:p>
         </p:txBody>
@@ -36752,29 +36385,29 @@
         </p:nvSpPr>
         <p:spPr>
           <a:xfrm>
-            <a:off x="457200" y="4821935"/>
-            <a:ext cx="5726449" cy="609600"/>
-          </a:xfrm>
-          <a:prstGeom prst="rect">
-            <a:avLst/>
-          </a:prstGeom>
-          <a:noFill/>
-        </p:spPr>
-        <p:txBody>
-          <a:bodyPr wrap="none" lIns="0" rIns="0">
-            <a:noAutofit/>
-          </a:bodyPr>
-          <a:lstStyle/>
-          <a:p>
-            <a:pPr algn="l"/>
-            <a:r>
-              <a:rPr sz="3400" b="0" i="0">
-                <a:solidFill>
-                  <a:srgbClr val="0A2240"/>
-                </a:solidFill>
-                <a:latin typeface="Arial"/>
-              </a:rPr>
-              <a:t>You lose the room</a:t>
+            <a:off x="822960" y="3008376"/>
+            <a:ext cx="1134011" cy="396240"/>
+          </a:xfrm>
+          <a:prstGeom prst="rect">
+            <a:avLst/>
+          </a:prstGeom>
+          <a:noFill/>
+        </p:spPr>
+        <p:txBody>
+          <a:bodyPr wrap="none" lIns="0" rIns="0">
+            <a:noAutofit/>
+          </a:bodyPr>
+          <a:lstStyle/>
+          <a:p>
+            <a:pPr algn="l"/>
+            <a:r>
+              <a:rPr sz="2600" b="0" i="0">
+                <a:solidFill>
+                  <a:srgbClr val="55707A"/>
+                </a:solidFill>
+                <a:latin typeface="Courier New"/>
+              </a:rPr>
+              <a:t>├─ </a:t>
             </a:r>
           </a:p>
         </p:txBody>
@@ -36787,29 +36420,29 @@
         </p:nvSpPr>
         <p:spPr>
           <a:xfrm>
-            <a:off x="6233160" y="2395727"/>
-            <a:ext cx="5803364" cy="609600"/>
-          </a:xfrm>
-          <a:prstGeom prst="rect">
-            <a:avLst/>
-          </a:prstGeom>
-          <a:noFill/>
-        </p:spPr>
-        <p:txBody>
-          <a:bodyPr wrap="none" lIns="0" rIns="0">
-            <a:noAutofit/>
-          </a:bodyPr>
-          <a:lstStyle/>
-          <a:p>
-            <a:pPr algn="l"/>
-            <a:r>
-              <a:rPr sz="3400" b="0" i="0">
-                <a:solidFill>
-                  <a:srgbClr val="0A2240"/>
-                </a:solidFill>
-                <a:latin typeface="Arial"/>
-              </a:rPr>
-              <a:t>You look in control</a:t>
+            <a:off x="1417417" y="3008376"/>
+            <a:ext cx="3036272" cy="396240"/>
+          </a:xfrm>
+          <a:prstGeom prst="rect">
+            <a:avLst/>
+          </a:prstGeom>
+          <a:noFill/>
+        </p:spPr>
+        <p:txBody>
+          <a:bodyPr wrap="none" lIns="0" rIns="0">
+            <a:noAutofit/>
+          </a:bodyPr>
+          <a:lstStyle/>
+          <a:p>
+            <a:pPr algn="l"/>
+            <a:r>
+              <a:rPr sz="2600" b="1" i="0">
+                <a:solidFill>
+                  <a:srgbClr val="569CD6"/>
+                </a:solidFill>
+                <a:latin typeface="Courier New"/>
+              </a:rPr>
+              <a:t>fixtures/</a:t>
             </a:r>
           </a:p>
         </p:txBody>
@@ -36822,29 +36455,29 @@
         </p:nvSpPr>
         <p:spPr>
           <a:xfrm>
-            <a:off x="6233160" y="3608831"/>
-            <a:ext cx="5958840" cy="609600"/>
-          </a:xfrm>
-          <a:prstGeom prst="rect">
-            <a:avLst/>
-          </a:prstGeom>
-          <a:noFill/>
-        </p:spPr>
-        <p:txBody>
-          <a:bodyPr wrap="none" lIns="0" rIns="0">
-            <a:noAutofit/>
-          </a:bodyPr>
-          <a:lstStyle/>
-          <a:p>
-            <a:pPr algn="l"/>
-            <a:r>
-              <a:rPr sz="3400" b="0" i="0">
-                <a:solidFill>
-                  <a:srgbClr val="0A2240"/>
-                </a:solidFill>
-                <a:latin typeface="Arial"/>
-              </a:rPr>
-              <a:t>It reads as a decision</a:t>
+            <a:off x="822960" y="3404616"/>
+            <a:ext cx="1134011" cy="396240"/>
+          </a:xfrm>
+          <a:prstGeom prst="rect">
+            <a:avLst/>
+          </a:prstGeom>
+          <a:noFill/>
+        </p:spPr>
+        <p:txBody>
+          <a:bodyPr wrap="none" lIns="0" rIns="0">
+            <a:noAutofit/>
+          </a:bodyPr>
+          <a:lstStyle/>
+          <a:p>
+            <a:pPr algn="l"/>
+            <a:r>
+              <a:rPr sz="2600" b="0" i="0">
+                <a:solidFill>
+                  <a:srgbClr val="55707A"/>
+                </a:solidFill>
+                <a:latin typeface="Courier New"/>
+              </a:rPr>
+              <a:t>├─ </a:t>
             </a:r>
           </a:p>
         </p:txBody>
@@ -36857,29 +36490,29 @@
         </p:nvSpPr>
         <p:spPr>
           <a:xfrm>
-            <a:off x="6233160" y="4821935"/>
-            <a:ext cx="5958840" cy="609600"/>
-          </a:xfrm>
-          <a:prstGeom prst="rect">
-            <a:avLst/>
-          </a:prstGeom>
-          <a:noFill/>
-        </p:spPr>
-        <p:txBody>
-          <a:bodyPr wrap="none" lIns="0" rIns="0">
-            <a:noAutofit/>
-          </a:bodyPr>
-          <a:lstStyle/>
-          <a:p>
-            <a:pPr algn="l"/>
-            <a:r>
-              <a:rPr sz="3400" b="0" i="0">
-                <a:solidFill>
-                  <a:srgbClr val="0A2240"/>
-                </a:solidFill>
-                <a:latin typeface="Arial"/>
-              </a:rPr>
-              <a:t>The question moves on</a:t>
+            <a:off x="1417417" y="3404616"/>
+            <a:ext cx="2085140" cy="396240"/>
+          </a:xfrm>
+          <a:prstGeom prst="rect">
+            <a:avLst/>
+          </a:prstGeom>
+          <a:noFill/>
+        </p:spPr>
+        <p:txBody>
+          <a:bodyPr wrap="none" lIns="0" rIns="0">
+            <a:noAutofit/>
+          </a:bodyPr>
+          <a:lstStyle/>
+          <a:p>
+            <a:pPr algn="l"/>
+            <a:r>
+              <a:rPr sz="2600" b="1" i="0">
+                <a:solidFill>
+                  <a:srgbClr val="569CD6"/>
+                </a:solidFill>
+                <a:latin typeface="Courier New"/>
+              </a:rPr>
+              <a:t>steps/</a:t>
             </a:r>
           </a:p>
         </p:txBody>
@@ -36887,6 +36520,216 @@
       <p:sp>
         <p:nvSpPr>
           <p:cNvPr id="13" name="TextBox 12"/>
+          <p:cNvSpPr txBox="1"/>
+          <p:nvPr/>
+        </p:nvSpPr>
+        <p:spPr>
+          <a:xfrm>
+            <a:off x="822960" y="3800856"/>
+            <a:ext cx="1134011" cy="396240"/>
+          </a:xfrm>
+          <a:prstGeom prst="rect">
+            <a:avLst/>
+          </a:prstGeom>
+          <a:noFill/>
+        </p:spPr>
+        <p:txBody>
+          <a:bodyPr wrap="none" lIns="0" rIns="0">
+            <a:noAutofit/>
+          </a:bodyPr>
+          <a:lstStyle/>
+          <a:p>
+            <a:pPr algn="l"/>
+            <a:r>
+              <a:rPr sz="2600" b="0" i="0">
+                <a:solidFill>
+                  <a:srgbClr val="55707A"/>
+                </a:solidFill>
+                <a:latin typeface="Courier New"/>
+              </a:rPr>
+              <a:t>├─ </a:t>
+            </a:r>
+          </a:p>
+        </p:txBody>
+      </p:sp>
+      <p:sp>
+        <p:nvSpPr>
+          <p:cNvPr id="14" name="TextBox 13"/>
+          <p:cNvSpPr txBox="1"/>
+          <p:nvPr/>
+        </p:nvSpPr>
+        <p:spPr>
+          <a:xfrm>
+            <a:off x="1417417" y="3800856"/>
+            <a:ext cx="2085140" cy="396240"/>
+          </a:xfrm>
+          <a:prstGeom prst="rect">
+            <a:avLst/>
+          </a:prstGeom>
+          <a:noFill/>
+        </p:spPr>
+        <p:txBody>
+          <a:bodyPr wrap="none" lIns="0" rIns="0">
+            <a:noAutofit/>
+          </a:bodyPr>
+          <a:lstStyle/>
+          <a:p>
+            <a:pPr algn="l"/>
+            <a:r>
+              <a:rPr sz="2600" b="0" i="0">
+                <a:solidFill>
+                  <a:srgbClr val="D4D4D4"/>
+                </a:solidFill>
+                <a:latin typeface="Courier New"/>
+              </a:rPr>
+              <a:t>run.py</a:t>
+            </a:r>
+          </a:p>
+        </p:txBody>
+      </p:sp>
+      <p:sp>
+        <p:nvSpPr>
+          <p:cNvPr id="15" name="TextBox 14"/>
+          <p:cNvSpPr txBox="1"/>
+          <p:nvPr/>
+        </p:nvSpPr>
+        <p:spPr>
+          <a:xfrm>
+            <a:off x="822960" y="4197096"/>
+            <a:ext cx="1134011" cy="396240"/>
+          </a:xfrm>
+          <a:prstGeom prst="rect">
+            <a:avLst/>
+          </a:prstGeom>
+          <a:noFill/>
+        </p:spPr>
+        <p:txBody>
+          <a:bodyPr wrap="none" lIns="0" rIns="0">
+            <a:noAutofit/>
+          </a:bodyPr>
+          <a:lstStyle/>
+          <a:p>
+            <a:pPr algn="l"/>
+            <a:r>
+              <a:rPr sz="2600" b="0" i="0">
+                <a:solidFill>
+                  <a:srgbClr val="55707A"/>
+                </a:solidFill>
+                <a:latin typeface="Courier New"/>
+              </a:rPr>
+              <a:t>├─ </a:t>
+            </a:r>
+          </a:p>
+        </p:txBody>
+      </p:sp>
+      <p:sp>
+        <p:nvSpPr>
+          <p:cNvPr id="16" name="TextBox 15"/>
+          <p:cNvSpPr txBox="1"/>
+          <p:nvPr/>
+        </p:nvSpPr>
+        <p:spPr>
+          <a:xfrm>
+            <a:off x="1417417" y="4197096"/>
+            <a:ext cx="3353315" cy="396240"/>
+          </a:xfrm>
+          <a:prstGeom prst="rect">
+            <a:avLst/>
+          </a:prstGeom>
+          <a:noFill/>
+        </p:spPr>
+        <p:txBody>
+          <a:bodyPr wrap="none" lIns="0" rIns="0">
+            <a:noAutofit/>
+          </a:bodyPr>
+          <a:lstStyle/>
+          <a:p>
+            <a:pPr algn="l"/>
+            <a:r>
+              <a:rPr sz="2600" b="0" i="0">
+                <a:solidFill>
+                  <a:srgbClr val="D4D4D4"/>
+                </a:solidFill>
+                <a:latin typeface="Courier New"/>
+              </a:rPr>
+              <a:t>CAVEATS.md</a:t>
+            </a:r>
+          </a:p>
+        </p:txBody>
+      </p:sp>
+      <p:sp>
+        <p:nvSpPr>
+          <p:cNvPr id="17" name="TextBox 16"/>
+          <p:cNvSpPr txBox="1"/>
+          <p:nvPr/>
+        </p:nvSpPr>
+        <p:spPr>
+          <a:xfrm>
+            <a:off x="822960" y="4593336"/>
+            <a:ext cx="1134011" cy="396240"/>
+          </a:xfrm>
+          <a:prstGeom prst="rect">
+            <a:avLst/>
+          </a:prstGeom>
+          <a:noFill/>
+        </p:spPr>
+        <p:txBody>
+          <a:bodyPr wrap="none" lIns="0" rIns="0">
+            <a:noAutofit/>
+          </a:bodyPr>
+          <a:lstStyle/>
+          <a:p>
+            <a:pPr algn="l"/>
+            <a:r>
+              <a:rPr sz="2600" b="0" i="0">
+                <a:solidFill>
+                  <a:srgbClr val="55707A"/>
+                </a:solidFill>
+                <a:latin typeface="Courier New"/>
+              </a:rPr>
+              <a:t>└─ </a:t>
+            </a:r>
+          </a:p>
+        </p:txBody>
+      </p:sp>
+      <p:sp>
+        <p:nvSpPr>
+          <p:cNvPr id="18" name="TextBox 17"/>
+          <p:cNvSpPr txBox="1"/>
+          <p:nvPr/>
+        </p:nvSpPr>
+        <p:spPr>
+          <a:xfrm>
+            <a:off x="1417417" y="4593336"/>
+            <a:ext cx="3036272" cy="396240"/>
+          </a:xfrm>
+          <a:prstGeom prst="rect">
+            <a:avLst/>
+          </a:prstGeom>
+          <a:noFill/>
+        </p:spPr>
+        <p:txBody>
+          <a:bodyPr wrap="none" lIns="0" rIns="0">
+            <a:noAutofit/>
+          </a:bodyPr>
+          <a:lstStyle/>
+          <a:p>
+            <a:pPr algn="l"/>
+            <a:r>
+              <a:rPr sz="2600" b="0" i="0">
+                <a:solidFill>
+                  <a:srgbClr val="D4D4D4"/>
+                </a:solidFill>
+                <a:latin typeface="Courier New"/>
+              </a:rPr>
+              <a:t>README.md</a:t>
+            </a:r>
+          </a:p>
+        </p:txBody>
+      </p:sp>
+      <p:sp>
+        <p:nvSpPr>
+          <p:cNvPr id="19" name="TextBox 18"/>
           <p:cNvSpPr/>
           <p:nvPr>
             <p:ph type="sldNum" idx="12"/>
@@ -36977,7 +36820,7 @@
                 </a:solidFill>
                 <a:latin typeface="Arial"/>
               </a:rPr>
-              <a:t>What Day 3 Will Attack</a:t>
+              <a:t>Hiding and Naming</a:t>
             </a:r>
           </a:p>
         </p:txBody>
@@ -36991,7 +36834,7 @@
         <p:spPr>
           <a:xfrm>
             <a:off x="457200" y="1499616"/>
-            <a:ext cx="11277600" cy="518159"/>
+            <a:ext cx="5501640" cy="621791"/>
           </a:xfrm>
           <a:prstGeom prst="rect">
             <a:avLst/>
@@ -37008,47 +36851,56 @@
             <a:r>
               <a:rPr sz="3400" b="1" i="0">
                 <a:solidFill>
-                  <a:srgbClr val="0A2240"/>
-                </a:solidFill>
-                <a:latin typeface="Arial"/>
-              </a:rPr>
-              <a:t>The undocumented fake</a:t>
-            </a:r>
-          </a:p>
-        </p:txBody>
-      </p:sp>
-      <p:sp>
-        <p:nvSpPr>
-          <p:cNvPr id="4" name="TextBox 3"/>
-          <p:cNvSpPr txBox="1"/>
-          <p:nvPr/>
-        </p:nvSpPr>
-        <p:spPr>
-          <a:xfrm>
-            <a:off x="457200" y="2109215"/>
-            <a:ext cx="11734800" cy="627889"/>
-          </a:xfrm>
-          <a:prstGeom prst="rect">
-            <a:avLst/>
-          </a:prstGeom>
-          <a:noFill/>
-        </p:spPr>
-        <p:txBody>
-          <a:bodyPr wrap="none" lIns="0" rIns="0">
-            <a:noAutofit/>
-          </a:bodyPr>
-          <a:lstStyle/>
-          <a:p>
-            <a:pPr algn="l"/>
-            <a:r>
-              <a:rPr sz="3400" b="0" i="0">
-                <a:solidFill>
-                  <a:srgbClr val="0A2240"/>
-                </a:solidFill>
-                <a:latin typeface="Arial"/>
-              </a:rPr>
-              <a:t>Anything real-looking that is not on your list</a:t>
-            </a:r>
+                  <a:srgbClr val="5B6B82"/>
+                </a:solidFill>
+                <a:latin typeface="Arial"/>
+              </a:rPr>
+              <a:t>Hiding a limit</a:t>
+            </a:r>
+          </a:p>
+        </p:txBody>
+      </p:sp>
+      <p:sp>
+        <p:nvSpPr>
+          <p:cNvPr id="4" name="Rectangle 3"/>
+          <p:cNvSpPr/>
+          <p:nvPr/>
+        </p:nvSpPr>
+        <p:spPr>
+          <a:xfrm>
+            <a:off x="548640" y="2176271"/>
+            <a:ext cx="1650492" cy="54864"/>
+          </a:xfrm>
+          <a:prstGeom prst="rect">
+            <a:avLst/>
+          </a:prstGeom>
+          <a:solidFill>
+            <a:srgbClr val="5B6B82"/>
+          </a:solidFill>
+          <a:ln>
+            <a:noFill/>
+          </a:ln>
+          <a:effectLst/>
+        </p:spPr>
+        <p:style>
+          <a:lnRef idx="1">
+            <a:schemeClr val="accent1"/>
+          </a:lnRef>
+          <a:fillRef idx="3">
+            <a:schemeClr val="accent1"/>
+          </a:fillRef>
+          <a:effectRef idx="2">
+            <a:schemeClr val="accent1"/>
+          </a:effectRef>
+          <a:fontRef idx="minor">
+            <a:schemeClr val="lt1"/>
+          </a:fontRef>
+        </p:style>
+        <p:txBody>
+          <a:bodyPr rtlCol="0" anchor="ctr"/>
+          <a:lstStyle/>
+          <a:p>
+            <a:pPr algn="ctr"/>
           </a:p>
         </p:txBody>
       </p:sp>
@@ -37060,8 +36912,8 @@
         </p:nvSpPr>
         <p:spPr>
           <a:xfrm>
-            <a:off x="457200" y="3011424"/>
-            <a:ext cx="11277600" cy="518159"/>
+            <a:off x="6233160" y="1499616"/>
+            <a:ext cx="5501640" cy="621791"/>
           </a:xfrm>
           <a:prstGeom prst="rect">
             <a:avLst/>
@@ -37078,47 +36930,56 @@
             <a:r>
               <a:rPr sz="3400" b="1" i="0">
                 <a:solidFill>
-                  <a:srgbClr val="0A2240"/>
-                </a:solidFill>
-                <a:latin typeface="Arial"/>
-              </a:rPr>
-              <a:t>The single input</a:t>
-            </a:r>
-          </a:p>
-        </p:txBody>
-      </p:sp>
-      <p:sp>
-        <p:nvSpPr>
-          <p:cNvPr id="6" name="TextBox 5"/>
-          <p:cNvSpPr txBox="1"/>
-          <p:nvPr/>
-        </p:nvSpPr>
-        <p:spPr>
-          <a:xfrm>
-            <a:off x="457200" y="3621023"/>
-            <a:ext cx="11734800" cy="627889"/>
-          </a:xfrm>
-          <a:prstGeom prst="rect">
-            <a:avLst/>
-          </a:prstGeom>
-          <a:noFill/>
-        </p:spPr>
-        <p:txBody>
-          <a:bodyPr wrap="none" lIns="0" rIns="0">
-            <a:noAutofit/>
-          </a:bodyPr>
-          <a:lstStyle/>
-          <a:p>
-            <a:pPr algn="l"/>
-            <a:r>
-              <a:rPr sz="3400" b="0" i="0">
-                <a:solidFill>
-                  <a:srgbClr val="0A2240"/>
-                </a:solidFill>
-                <a:latin typeface="Arial"/>
-              </a:rPr>
-              <a:t>The second thing they try will not be yours</a:t>
-            </a:r>
+                  <a:srgbClr val="0072CE"/>
+                </a:solidFill>
+                <a:latin typeface="Arial"/>
+              </a:rPr>
+              <a:t>Naming a limit</a:t>
+            </a:r>
+          </a:p>
+        </p:txBody>
+      </p:sp>
+      <p:sp>
+        <p:nvSpPr>
+          <p:cNvPr id="6" name="Rectangle 5"/>
+          <p:cNvSpPr/>
+          <p:nvPr/>
+        </p:nvSpPr>
+        <p:spPr>
+          <a:xfrm>
+            <a:off x="6324600" y="2176271"/>
+            <a:ext cx="1650492" cy="54864"/>
+          </a:xfrm>
+          <a:prstGeom prst="rect">
+            <a:avLst/>
+          </a:prstGeom>
+          <a:solidFill>
+            <a:srgbClr val="0072CE"/>
+          </a:solidFill>
+          <a:ln>
+            <a:noFill/>
+          </a:ln>
+          <a:effectLst/>
+        </p:spPr>
+        <p:style>
+          <a:lnRef idx="1">
+            <a:schemeClr val="accent1"/>
+          </a:lnRef>
+          <a:fillRef idx="3">
+            <a:schemeClr val="accent1"/>
+          </a:fillRef>
+          <a:effectRef idx="2">
+            <a:schemeClr val="accent1"/>
+          </a:effectRef>
+          <a:fontRef idx="minor">
+            <a:schemeClr val="lt1"/>
+          </a:fontRef>
+        </p:style>
+        <p:txBody>
+          <a:bodyPr rtlCol="0" anchor="ctr"/>
+          <a:lstStyle/>
+          <a:p>
+            <a:pPr algn="ctr"/>
           </a:p>
         </p:txBody>
       </p:sp>
@@ -37130,29 +36991,29 @@
         </p:nvSpPr>
         <p:spPr>
           <a:xfrm>
-            <a:off x="457200" y="4523232"/>
-            <a:ext cx="11277600" cy="518159"/>
-          </a:xfrm>
-          <a:prstGeom prst="rect">
-            <a:avLst/>
-          </a:prstGeom>
-          <a:noFill/>
-        </p:spPr>
-        <p:txBody>
-          <a:bodyPr wrap="none" lIns="0" rIns="0">
-            <a:noAutofit/>
-          </a:bodyPr>
-          <a:lstStyle/>
-          <a:p>
-            <a:pPr algn="l"/>
-            <a:r>
-              <a:rPr sz="3400" b="1" i="0">
+            <a:off x="457200" y="2395727"/>
+            <a:ext cx="6096515" cy="609600"/>
+          </a:xfrm>
+          <a:prstGeom prst="rect">
+            <a:avLst/>
+          </a:prstGeom>
+          <a:noFill/>
+        </p:spPr>
+        <p:txBody>
+          <a:bodyPr wrap="none" lIns="0" rIns="0">
+            <a:noAutofit/>
+          </a:bodyPr>
+          <a:lstStyle/>
+          <a:p>
+            <a:pPr algn="l"/>
+            <a:r>
+              <a:rPr sz="3400" b="0" i="0">
                 <a:solidFill>
                   <a:srgbClr val="0A2240"/>
                 </a:solidFill>
                 <a:latin typeface="Arial"/>
               </a:rPr>
-              <a:t>The dead link</a:t>
+              <a:t>They find it anyway</a:t>
             </a:r>
           </a:p>
         </p:txBody>
@@ -37165,8 +37026,8 @@
         </p:nvSpPr>
         <p:spPr>
           <a:xfrm>
-            <a:off x="457200" y="5132831"/>
-            <a:ext cx="11734800" cy="627889"/>
+            <a:off x="457200" y="3608831"/>
+            <a:ext cx="6748601" cy="609600"/>
           </a:xfrm>
           <a:prstGeom prst="rect">
             <a:avLst/>
@@ -37187,7 +37048,7 @@
                 </a:solidFill>
                 <a:latin typeface="Arial"/>
               </a:rPr>
-              <a:t>A URL that only worked on your machine</a:t>
+              <a:t>It looks like a mistake</a:t>
             </a:r>
           </a:p>
         </p:txBody>
@@ -37195,6 +37056,146 @@
       <p:sp>
         <p:nvSpPr>
           <p:cNvPr id="9" name="TextBox 8"/>
+          <p:cNvSpPr txBox="1"/>
+          <p:nvPr/>
+        </p:nvSpPr>
+        <p:spPr>
+          <a:xfrm>
+            <a:off x="457200" y="4821935"/>
+            <a:ext cx="5726449" cy="609600"/>
+          </a:xfrm>
+          <a:prstGeom prst="rect">
+            <a:avLst/>
+          </a:prstGeom>
+          <a:noFill/>
+        </p:spPr>
+        <p:txBody>
+          <a:bodyPr wrap="none" lIns="0" rIns="0">
+            <a:noAutofit/>
+          </a:bodyPr>
+          <a:lstStyle/>
+          <a:p>
+            <a:pPr algn="l"/>
+            <a:r>
+              <a:rPr sz="3400" b="0" i="0">
+                <a:solidFill>
+                  <a:srgbClr val="0A2240"/>
+                </a:solidFill>
+                <a:latin typeface="Arial"/>
+              </a:rPr>
+              <a:t>You lose the room</a:t>
+            </a:r>
+          </a:p>
+        </p:txBody>
+      </p:sp>
+      <p:sp>
+        <p:nvSpPr>
+          <p:cNvPr id="10" name="TextBox 9"/>
+          <p:cNvSpPr txBox="1"/>
+          <p:nvPr/>
+        </p:nvSpPr>
+        <p:spPr>
+          <a:xfrm>
+            <a:off x="6233160" y="2395727"/>
+            <a:ext cx="5803364" cy="609600"/>
+          </a:xfrm>
+          <a:prstGeom prst="rect">
+            <a:avLst/>
+          </a:prstGeom>
+          <a:noFill/>
+        </p:spPr>
+        <p:txBody>
+          <a:bodyPr wrap="none" lIns="0" rIns="0">
+            <a:noAutofit/>
+          </a:bodyPr>
+          <a:lstStyle/>
+          <a:p>
+            <a:pPr algn="l"/>
+            <a:r>
+              <a:rPr sz="3400" b="0" i="0">
+                <a:solidFill>
+                  <a:srgbClr val="0A2240"/>
+                </a:solidFill>
+                <a:latin typeface="Arial"/>
+              </a:rPr>
+              <a:t>You look in control</a:t>
+            </a:r>
+          </a:p>
+        </p:txBody>
+      </p:sp>
+      <p:sp>
+        <p:nvSpPr>
+          <p:cNvPr id="11" name="TextBox 10"/>
+          <p:cNvSpPr txBox="1"/>
+          <p:nvPr/>
+        </p:nvSpPr>
+        <p:spPr>
+          <a:xfrm>
+            <a:off x="6233160" y="3608831"/>
+            <a:ext cx="5958840" cy="609600"/>
+          </a:xfrm>
+          <a:prstGeom prst="rect">
+            <a:avLst/>
+          </a:prstGeom>
+          <a:noFill/>
+        </p:spPr>
+        <p:txBody>
+          <a:bodyPr wrap="none" lIns="0" rIns="0">
+            <a:noAutofit/>
+          </a:bodyPr>
+          <a:lstStyle/>
+          <a:p>
+            <a:pPr algn="l"/>
+            <a:r>
+              <a:rPr sz="3400" b="0" i="0">
+                <a:solidFill>
+                  <a:srgbClr val="0A2240"/>
+                </a:solidFill>
+                <a:latin typeface="Arial"/>
+              </a:rPr>
+              <a:t>It reads as a decision</a:t>
+            </a:r>
+          </a:p>
+        </p:txBody>
+      </p:sp>
+      <p:sp>
+        <p:nvSpPr>
+          <p:cNvPr id="12" name="TextBox 11"/>
+          <p:cNvSpPr txBox="1"/>
+          <p:nvPr/>
+        </p:nvSpPr>
+        <p:spPr>
+          <a:xfrm>
+            <a:off x="6233160" y="4821935"/>
+            <a:ext cx="5958840" cy="609600"/>
+          </a:xfrm>
+          <a:prstGeom prst="rect">
+            <a:avLst/>
+          </a:prstGeom>
+          <a:noFill/>
+        </p:spPr>
+        <p:txBody>
+          <a:bodyPr wrap="none" lIns="0" rIns="0">
+            <a:noAutofit/>
+          </a:bodyPr>
+          <a:lstStyle/>
+          <a:p>
+            <a:pPr algn="l"/>
+            <a:r>
+              <a:rPr sz="3400" b="0" i="0">
+                <a:solidFill>
+                  <a:srgbClr val="0A2240"/>
+                </a:solidFill>
+                <a:latin typeface="Arial"/>
+              </a:rPr>
+              <a:t>The question moves on</a:t>
+            </a:r>
+          </a:p>
+        </p:txBody>
+      </p:sp>
+      <p:sp>
+        <p:nvSpPr>
+          <p:cNvPr id="13" name="TextBox 12"/>
           <p:cNvSpPr/>
           <p:nvPr>
             <p:ph type="sldNum" idx="12"/>
@@ -37285,7 +37286,7 @@
                 </a:solidFill>
                 <a:latin typeface="Arial"/>
               </a:rPr>
-              <a:t>Leaving This Session</a:t>
+              <a:t>What Day 3 Will Attack</a:t>
             </a:r>
           </a:p>
         </p:txBody>
@@ -37298,7 +37299,7 @@
         </p:nvSpPr>
         <p:spPr>
           <a:xfrm>
-            <a:off x="457200" y="1908050"/>
+            <a:off x="457200" y="1499616"/>
             <a:ext cx="11277600" cy="518159"/>
           </a:xfrm>
           <a:prstGeom prst="rect">
@@ -37314,13 +37315,13 @@
           <a:p>
             <a:pPr algn="l"/>
             <a:r>
-              <a:rPr sz="3400" b="0" i="0">
+              <a:rPr sz="3400" b="1" i="0">
                 <a:solidFill>
                   <a:srgbClr val="0A2240"/>
                 </a:solidFill>
                 <a:latin typeface="Arial"/>
               </a:rPr>
-              <a:t>A URL a stranger can open</a:t>
+              <a:t>The undocumented fake</a:t>
             </a:r>
           </a:p>
         </p:txBody>
@@ -37333,8 +37334,8 @@
         </p:nvSpPr>
         <p:spPr>
           <a:xfrm>
-            <a:off x="457200" y="2883409"/>
-            <a:ext cx="11277600" cy="518159"/>
+            <a:off x="457200" y="2109215"/>
+            <a:ext cx="11734800" cy="627889"/>
           </a:xfrm>
           <a:prstGeom prst="rect">
             <a:avLst/>
@@ -37355,7 +37356,7 @@
                 </a:solidFill>
                 <a:latin typeface="Arial"/>
               </a:rPr>
-              <a:t>It works with your laptop shut</a:t>
+              <a:t>Anything real-looking that is not on your list</a:t>
             </a:r>
           </a:p>
         </p:txBody>
@@ -37368,7 +37369,7 @@
         </p:nvSpPr>
         <p:spPr>
           <a:xfrm>
-            <a:off x="457200" y="3858768"/>
+            <a:off x="457200" y="3011424"/>
             <a:ext cx="11277600" cy="518159"/>
           </a:xfrm>
           <a:prstGeom prst="rect">
@@ -37384,13 +37385,13 @@
           <a:p>
             <a:pPr algn="l"/>
             <a:r>
-              <a:rPr sz="3400" b="0" i="0">
+              <a:rPr sz="3400" b="1" i="0">
                 <a:solidFill>
                   <a:srgbClr val="0A2240"/>
                 </a:solidFill>
                 <a:latin typeface="Arial"/>
               </a:rPr>
-              <a:t>A three-minute script, rehearsed</a:t>
+              <a:t>The single input</a:t>
             </a:r>
           </a:p>
         </p:txBody>
@@ -37403,7 +37404,42 @@
         </p:nvSpPr>
         <p:spPr>
           <a:xfrm>
-            <a:off x="457200" y="4834127"/>
+            <a:off x="457200" y="3621023"/>
+            <a:ext cx="11734800" cy="627889"/>
+          </a:xfrm>
+          <a:prstGeom prst="rect">
+            <a:avLst/>
+          </a:prstGeom>
+          <a:noFill/>
+        </p:spPr>
+        <p:txBody>
+          <a:bodyPr wrap="none" lIns="0" rIns="0">
+            <a:noAutofit/>
+          </a:bodyPr>
+          <a:lstStyle/>
+          <a:p>
+            <a:pPr algn="l"/>
+            <a:r>
+              <a:rPr sz="3400" b="0" i="0">
+                <a:solidFill>
+                  <a:srgbClr val="0A2240"/>
+                </a:solidFill>
+                <a:latin typeface="Arial"/>
+              </a:rPr>
+              <a:t>The second thing they try will not be yours</a:t>
+            </a:r>
+          </a:p>
+        </p:txBody>
+      </p:sp>
+      <p:sp>
+        <p:nvSpPr>
+          <p:cNvPr id="7" name="TextBox 6"/>
+          <p:cNvSpPr txBox="1"/>
+          <p:nvPr/>
+        </p:nvSpPr>
+        <p:spPr>
+          <a:xfrm>
+            <a:off x="457200" y="4523232"/>
             <a:ext cx="11277600" cy="518159"/>
           </a:xfrm>
           <a:prstGeom prst="rect">
@@ -37419,20 +37455,55 @@
           <a:p>
             <a:pPr algn="l"/>
             <a:r>
+              <a:rPr sz="3400" b="1" i="0">
+                <a:solidFill>
+                  <a:srgbClr val="0A2240"/>
+                </a:solidFill>
+                <a:latin typeface="Arial"/>
+              </a:rPr>
+              <a:t>The dead link</a:t>
+            </a:r>
+          </a:p>
+        </p:txBody>
+      </p:sp>
+      <p:sp>
+        <p:nvSpPr>
+          <p:cNvPr id="8" name="TextBox 7"/>
+          <p:cNvSpPr txBox="1"/>
+          <p:nvPr/>
+        </p:nvSpPr>
+        <p:spPr>
+          <a:xfrm>
+            <a:off x="457200" y="5132831"/>
+            <a:ext cx="11734800" cy="627889"/>
+          </a:xfrm>
+          <a:prstGeom prst="rect">
+            <a:avLst/>
+          </a:prstGeom>
+          <a:noFill/>
+        </p:spPr>
+        <p:txBody>
+          <a:bodyPr wrap="none" lIns="0" rIns="0">
+            <a:noAutofit/>
+          </a:bodyPr>
+          <a:lstStyle/>
+          <a:p>
+            <a:pPr algn="l"/>
+            <a:r>
               <a:rPr sz="3400" b="0" i="0">
                 <a:solidFill>
                   <a:srgbClr val="0A2240"/>
                 </a:solidFill>
                 <a:latin typeface="Arial"/>
               </a:rPr>
-              <a:t>CAVEATS.md, committed</a:t>
-            </a:r>
-          </a:p>
-        </p:txBody>
-      </p:sp>
-      <p:sp>
-        <p:nvSpPr>
-          <p:cNvPr id="7" name="TextBox 6"/>
+              <a:t>A URL that only worked on your machine</a:t>
+            </a:r>
+          </a:p>
+        </p:txBody>
+      </p:sp>
+      <p:sp>
+        <p:nvSpPr>
+          <p:cNvPr id="9" name="TextBox 8"/>
           <p:cNvSpPr/>
           <p:nvPr>
             <p:ph type="sldNum" idx="12"/>
@@ -37523,7 +37594,7 @@
                 </a:solidFill>
                 <a:latin typeface="Arial"/>
               </a:rPr>
-              <a:t>Write This Down Now</a:t>
+              <a:t>Leaving This Session</a:t>
             </a:r>
           </a:p>
         </p:txBody>
@@ -37536,29 +37607,29 @@
         </p:nvSpPr>
         <p:spPr>
           <a:xfrm>
-            <a:off x="457200" y="1499616"/>
-            <a:ext cx="4445722" cy="518159"/>
-          </a:xfrm>
-          <a:prstGeom prst="rect">
-            <a:avLst/>
-          </a:prstGeom>
-          <a:noFill/>
-        </p:spPr>
-        <p:txBody>
-          <a:bodyPr wrap="none" lIns="0" rIns="0">
-            <a:noAutofit/>
-          </a:bodyPr>
-          <a:lstStyle/>
-          <a:p>
-            <a:pPr algn="l"/>
-            <a:r>
-              <a:rPr sz="3400" b="1" i="0">
-                <a:solidFill>
-                  <a:srgbClr val="123A6B"/>
-                </a:solidFill>
-                <a:latin typeface="Arial"/>
-              </a:rPr>
-              <a:t>Question</a:t>
+            <a:off x="457200" y="1908050"/>
+            <a:ext cx="11277600" cy="518159"/>
+          </a:xfrm>
+          <a:prstGeom prst="rect">
+            <a:avLst/>
+          </a:prstGeom>
+          <a:noFill/>
+        </p:spPr>
+        <p:txBody>
+          <a:bodyPr wrap="none" lIns="0" rIns="0">
+            <a:noAutofit/>
+          </a:bodyPr>
+          <a:lstStyle/>
+          <a:p>
+            <a:pPr algn="l"/>
+            <a:r>
+              <a:rPr sz="3400" b="0" i="0">
+                <a:solidFill>
+                  <a:srgbClr val="0A2240"/>
+                </a:solidFill>
+                <a:latin typeface="Arial"/>
+              </a:rPr>
+              <a:t>A URL a stranger can open</a:t>
             </a:r>
           </a:p>
         </p:txBody>
@@ -37571,74 +37642,65 @@
         </p:nvSpPr>
         <p:spPr>
           <a:xfrm>
-            <a:off x="5451562" y="1499616"/>
-            <a:ext cx="4278233" cy="518159"/>
-          </a:xfrm>
-          <a:prstGeom prst="rect">
-            <a:avLst/>
-          </a:prstGeom>
-          <a:noFill/>
-        </p:spPr>
-        <p:txBody>
-          <a:bodyPr wrap="none" lIns="0" rIns="0">
-            <a:noAutofit/>
-          </a:bodyPr>
-          <a:lstStyle/>
-          <a:p>
-            <a:pPr algn="l"/>
-            <a:r>
-              <a:rPr sz="3400" b="1" i="0">
-                <a:solidFill>
-                  <a:srgbClr val="123A6B"/>
-                </a:solidFill>
-                <a:latin typeface="Arial"/>
-              </a:rPr>
-              <a:t>Your answer</a:t>
-            </a:r>
-          </a:p>
-        </p:txBody>
-      </p:sp>
-      <p:sp>
-        <p:nvSpPr>
-          <p:cNvPr id="5" name="Rectangle 4"/>
-          <p:cNvSpPr/>
-          <p:nvPr/>
-        </p:nvSpPr>
-        <p:spPr>
-          <a:xfrm>
-            <a:off x="457200" y="2072639"/>
-            <a:ext cx="7919718" cy="54864"/>
-          </a:xfrm>
-          <a:prstGeom prst="rect">
-            <a:avLst/>
-          </a:prstGeom>
-          <a:solidFill>
-            <a:srgbClr val="0072CE"/>
-          </a:solidFill>
-          <a:ln>
-            <a:noFill/>
-          </a:ln>
-          <a:effectLst/>
-        </p:spPr>
-        <p:style>
-          <a:lnRef idx="1">
-            <a:schemeClr val="accent1"/>
-          </a:lnRef>
-          <a:fillRef idx="3">
-            <a:schemeClr val="accent1"/>
-          </a:fillRef>
-          <a:effectRef idx="2">
-            <a:schemeClr val="accent1"/>
-          </a:effectRef>
-          <a:fontRef idx="minor">
-            <a:schemeClr val="lt1"/>
-          </a:fontRef>
-        </p:style>
-        <p:txBody>
-          <a:bodyPr rtlCol="0" anchor="ctr"/>
-          <a:lstStyle/>
-          <a:p>
-            <a:pPr algn="ctr"/>
+            <a:off x="457200" y="2883409"/>
+            <a:ext cx="11277600" cy="518159"/>
+          </a:xfrm>
+          <a:prstGeom prst="rect">
+            <a:avLst/>
+          </a:prstGeom>
+          <a:noFill/>
+        </p:spPr>
+        <p:txBody>
+          <a:bodyPr wrap="none" lIns="0" rIns="0">
+            <a:noAutofit/>
+          </a:bodyPr>
+          <a:lstStyle/>
+          <a:p>
+            <a:pPr algn="l"/>
+            <a:r>
+              <a:rPr sz="3400" b="0" i="0">
+                <a:solidFill>
+                  <a:srgbClr val="0A2240"/>
+                </a:solidFill>
+                <a:latin typeface="Arial"/>
+              </a:rPr>
+              <a:t>It works with your laptop shut</a:t>
+            </a:r>
+          </a:p>
+        </p:txBody>
+      </p:sp>
+      <p:sp>
+        <p:nvSpPr>
+          <p:cNvPr id="5" name="TextBox 4"/>
+          <p:cNvSpPr txBox="1"/>
+          <p:nvPr/>
+        </p:nvSpPr>
+        <p:spPr>
+          <a:xfrm>
+            <a:off x="457200" y="3858768"/>
+            <a:ext cx="11277600" cy="518159"/>
+          </a:xfrm>
+          <a:prstGeom prst="rect">
+            <a:avLst/>
+          </a:prstGeom>
+          <a:noFill/>
+        </p:spPr>
+        <p:txBody>
+          <a:bodyPr wrap="none" lIns="0" rIns="0">
+            <a:noAutofit/>
+          </a:bodyPr>
+          <a:lstStyle/>
+          <a:p>
+            <a:pPr algn="l"/>
+            <a:r>
+              <a:rPr sz="3400" b="0" i="0">
+                <a:solidFill>
+                  <a:srgbClr val="0A2240"/>
+                </a:solidFill>
+                <a:latin typeface="Arial"/>
+              </a:rPr>
+              <a:t>A three-minute script, rehearsed</a:t>
+            </a:r>
           </a:p>
         </p:txBody>
       </p:sp>
@@ -37650,8 +37712,8 @@
         </p:nvSpPr>
         <p:spPr>
           <a:xfrm>
-            <a:off x="457200" y="2401823"/>
-            <a:ext cx="4944486" cy="633984"/>
+            <a:off x="457200" y="4834127"/>
+            <a:ext cx="11277600" cy="518159"/>
           </a:xfrm>
           <a:prstGeom prst="rect">
             <a:avLst/>
@@ -37672,7 +37734,7 @@
                 </a:solidFill>
                 <a:latin typeface="Arial"/>
               </a:rPr>
-              <a:t>The public URL</a:t>
+              <a:t>CAVEATS.md, committed</a:t>
             </a:r>
           </a:p>
         </p:txBody>
@@ -37680,251 +37742,6 @@
       <p:sp>
         <p:nvSpPr>
           <p:cNvPr id="7" name="TextBox 6"/>
-          <p:cNvSpPr txBox="1"/>
-          <p:nvPr/>
-        </p:nvSpPr>
-        <p:spPr>
-          <a:xfrm>
-            <a:off x="5451562" y="2401823"/>
-            <a:ext cx="2925356" cy="633984"/>
-          </a:xfrm>
-          <a:prstGeom prst="rect">
-            <a:avLst/>
-          </a:prstGeom>
-          <a:noFill/>
-        </p:spPr>
-        <p:txBody>
-          <a:bodyPr wrap="none" lIns="0" rIns="0">
-            <a:noAutofit/>
-          </a:bodyPr>
-          <a:lstStyle/>
-          <a:p>
-            <a:pPr algn="l"/>
-            <a:r>
-              <a:rPr sz="3400" b="0" i="0">
-                <a:solidFill>
-                  <a:srgbClr val="0A2240"/>
-                </a:solidFill>
-                <a:latin typeface="Arial"/>
-              </a:rPr>
-              <a:t>…</a:t>
-            </a:r>
-          </a:p>
-        </p:txBody>
-      </p:sp>
-      <p:sp>
-        <p:nvSpPr>
-          <p:cNvPr id="8" name="TextBox 7"/>
-          <p:cNvSpPr txBox="1"/>
-          <p:nvPr/>
-        </p:nvSpPr>
-        <p:spPr>
-          <a:xfrm>
-            <a:off x="457200" y="3310127"/>
-            <a:ext cx="6710819" cy="633984"/>
-          </a:xfrm>
-          <a:prstGeom prst="rect">
-            <a:avLst/>
-          </a:prstGeom>
-          <a:noFill/>
-        </p:spPr>
-        <p:txBody>
-          <a:bodyPr wrap="none" lIns="0" rIns="0">
-            <a:noAutofit/>
-          </a:bodyPr>
-          <a:lstStyle/>
-          <a:p>
-            <a:pPr algn="l"/>
-            <a:r>
-              <a:rPr sz="3400" b="0" i="0">
-                <a:solidFill>
-                  <a:srgbClr val="0A2240"/>
-                </a:solidFill>
-                <a:latin typeface="Arial"/>
-              </a:rPr>
-              <a:t>Who drives the demo</a:t>
-            </a:r>
-          </a:p>
-        </p:txBody>
-      </p:sp>
-      <p:sp>
-        <p:nvSpPr>
-          <p:cNvPr id="9" name="TextBox 8"/>
-          <p:cNvSpPr txBox="1"/>
-          <p:nvPr/>
-        </p:nvSpPr>
-        <p:spPr>
-          <a:xfrm>
-            <a:off x="5451562" y="3310127"/>
-            <a:ext cx="2925356" cy="633984"/>
-          </a:xfrm>
-          <a:prstGeom prst="rect">
-            <a:avLst/>
-          </a:prstGeom>
-          <a:noFill/>
-        </p:spPr>
-        <p:txBody>
-          <a:bodyPr wrap="none" lIns="0" rIns="0">
-            <a:noAutofit/>
-          </a:bodyPr>
-          <a:lstStyle/>
-          <a:p>
-            <a:pPr algn="l"/>
-            <a:r>
-              <a:rPr sz="3400" b="0" i="0">
-                <a:solidFill>
-                  <a:srgbClr val="0A2240"/>
-                </a:solidFill>
-                <a:latin typeface="Arial"/>
-              </a:rPr>
-              <a:t>…</a:t>
-            </a:r>
-          </a:p>
-        </p:txBody>
-      </p:sp>
-      <p:sp>
-        <p:nvSpPr>
-          <p:cNvPr id="10" name="TextBox 9"/>
-          <p:cNvSpPr txBox="1"/>
-          <p:nvPr/>
-        </p:nvSpPr>
-        <p:spPr>
-          <a:xfrm>
-            <a:off x="457200" y="4218431"/>
-            <a:ext cx="4714755" cy="633984"/>
-          </a:xfrm>
-          <a:prstGeom prst="rect">
-            <a:avLst/>
-          </a:prstGeom>
-          <a:noFill/>
-        </p:spPr>
-        <p:txBody>
-          <a:bodyPr wrap="none" lIns="0" rIns="0">
-            <a:noAutofit/>
-          </a:bodyPr>
-          <a:lstStyle/>
-          <a:p>
-            <a:pPr algn="l"/>
-            <a:r>
-              <a:rPr sz="3400" b="0" i="0">
-                <a:solidFill>
-                  <a:srgbClr val="0A2240"/>
-                </a:solidFill>
-                <a:latin typeface="Arial"/>
-              </a:rPr>
-              <a:t>Biggest caveat</a:t>
-            </a:r>
-          </a:p>
-        </p:txBody>
-      </p:sp>
-      <p:sp>
-        <p:nvSpPr>
-          <p:cNvPr id="11" name="TextBox 10"/>
-          <p:cNvSpPr txBox="1"/>
-          <p:nvPr/>
-        </p:nvSpPr>
-        <p:spPr>
-          <a:xfrm>
-            <a:off x="5451562" y="4218431"/>
-            <a:ext cx="2925356" cy="633984"/>
-          </a:xfrm>
-          <a:prstGeom prst="rect">
-            <a:avLst/>
-          </a:prstGeom>
-          <a:noFill/>
-        </p:spPr>
-        <p:txBody>
-          <a:bodyPr wrap="none" lIns="0" rIns="0">
-            <a:noAutofit/>
-          </a:bodyPr>
-          <a:lstStyle/>
-          <a:p>
-            <a:pPr algn="l"/>
-            <a:r>
-              <a:rPr sz="3400" b="0" i="0">
-                <a:solidFill>
-                  <a:srgbClr val="0A2240"/>
-                </a:solidFill>
-                <a:latin typeface="Arial"/>
-              </a:rPr>
-              <a:t>…</a:t>
-            </a:r>
-          </a:p>
-        </p:txBody>
-      </p:sp>
-      <p:sp>
-        <p:nvSpPr>
-          <p:cNvPr id="12" name="TextBox 11"/>
-          <p:cNvSpPr txBox="1"/>
-          <p:nvPr/>
-        </p:nvSpPr>
-        <p:spPr>
-          <a:xfrm>
-            <a:off x="457200" y="5126735"/>
-            <a:ext cx="6095841" cy="633984"/>
-          </a:xfrm>
-          <a:prstGeom prst="rect">
-            <a:avLst/>
-          </a:prstGeom>
-          <a:noFill/>
-        </p:spPr>
-        <p:txBody>
-          <a:bodyPr wrap="none" lIns="0" rIns="0">
-            <a:noAutofit/>
-          </a:bodyPr>
-          <a:lstStyle/>
-          <a:p>
-            <a:pPr algn="l"/>
-            <a:r>
-              <a:rPr sz="3400" b="0" i="0">
-                <a:solidFill>
-                  <a:srgbClr val="0A2240"/>
-                </a:solidFill>
-                <a:latin typeface="Arial"/>
-              </a:rPr>
-              <a:t>Most likely to break</a:t>
-            </a:r>
-          </a:p>
-        </p:txBody>
-      </p:sp>
-      <p:sp>
-        <p:nvSpPr>
-          <p:cNvPr id="13" name="TextBox 12"/>
-          <p:cNvSpPr txBox="1"/>
-          <p:nvPr/>
-        </p:nvSpPr>
-        <p:spPr>
-          <a:xfrm>
-            <a:off x="5451562" y="5126735"/>
-            <a:ext cx="2925356" cy="633984"/>
-          </a:xfrm>
-          <a:prstGeom prst="rect">
-            <a:avLst/>
-          </a:prstGeom>
-          <a:noFill/>
-        </p:spPr>
-        <p:txBody>
-          <a:bodyPr wrap="none" lIns="0" rIns="0">
-            <a:noAutofit/>
-          </a:bodyPr>
-          <a:lstStyle/>
-          <a:p>
-            <a:pPr algn="l"/>
-            <a:r>
-              <a:rPr sz="3400" b="0" i="0">
-                <a:solidFill>
-                  <a:srgbClr val="0A2240"/>
-                </a:solidFill>
-                <a:latin typeface="Arial"/>
-              </a:rPr>
-              <a:t>…</a:t>
-            </a:r>
-          </a:p>
-        </p:txBody>
-      </p:sp>
-      <p:sp>
-        <p:nvSpPr>
-          <p:cNvPr id="14" name="TextBox 13"/>
           <p:cNvSpPr/>
           <p:nvPr>
             <p:ph type="sldNum" idx="12"/>
@@ -37994,7 +37811,7 @@
         <p:spPr>
           <a:xfrm>
             <a:off x="457200" y="457200"/>
-            <a:ext cx="11420952" cy="768096"/>
+            <a:ext cx="11277600" cy="768096"/>
           </a:xfrm>
           <a:prstGeom prst="rect">
             <a:avLst/>
@@ -38015,7 +37832,7 @@
                 </a:solidFill>
                 <a:latin typeface="Arial"/>
               </a:rPr>
-              <a:t>Tonight, If You Have Energy</a:t>
+              <a:t>Write This Down Now</a:t>
             </a:r>
           </a:p>
         </p:txBody>
@@ -38028,29 +37845,29 @@
         </p:nvSpPr>
         <p:spPr>
           <a:xfrm>
-            <a:off x="457200" y="1908050"/>
-            <a:ext cx="11277600" cy="518159"/>
-          </a:xfrm>
-          <a:prstGeom prst="rect">
-            <a:avLst/>
-          </a:prstGeom>
-          <a:noFill/>
-        </p:spPr>
-        <p:txBody>
-          <a:bodyPr wrap="none" lIns="0" rIns="0">
-            <a:noAutofit/>
-          </a:bodyPr>
-          <a:lstStyle/>
-          <a:p>
-            <a:pPr algn="l"/>
-            <a:r>
-              <a:rPr sz="3400" b="0" i="0">
-                <a:solidFill>
-                  <a:srgbClr val="0A2240"/>
-                </a:solidFill>
-                <a:latin typeface="Arial"/>
-              </a:rPr>
-              <a:t>Send the link to one stranger</a:t>
+            <a:off x="457200" y="1499616"/>
+            <a:ext cx="4445722" cy="518159"/>
+          </a:xfrm>
+          <a:prstGeom prst="rect">
+            <a:avLst/>
+          </a:prstGeom>
+          <a:noFill/>
+        </p:spPr>
+        <p:txBody>
+          <a:bodyPr wrap="none" lIns="0" rIns="0">
+            <a:noAutofit/>
+          </a:bodyPr>
+          <a:lstStyle/>
+          <a:p>
+            <a:pPr algn="l"/>
+            <a:r>
+              <a:rPr sz="3400" b="1" i="0">
+                <a:solidFill>
+                  <a:srgbClr val="123A6B"/>
+                </a:solidFill>
+                <a:latin typeface="Arial"/>
+              </a:rPr>
+              <a:t>Question</a:t>
             </a:r>
           </a:p>
         </p:txBody>
@@ -38063,65 +37880,74 @@
         </p:nvSpPr>
         <p:spPr>
           <a:xfrm>
-            <a:off x="457200" y="2883409"/>
-            <a:ext cx="11277600" cy="518159"/>
-          </a:xfrm>
-          <a:prstGeom prst="rect">
-            <a:avLst/>
-          </a:prstGeom>
-          <a:noFill/>
-        </p:spPr>
-        <p:txBody>
-          <a:bodyPr wrap="none" lIns="0" rIns="0">
-            <a:noAutofit/>
-          </a:bodyPr>
-          <a:lstStyle/>
-          <a:p>
-            <a:pPr algn="l"/>
-            <a:r>
-              <a:rPr sz="3400" b="0" i="0">
-                <a:solidFill>
-                  <a:srgbClr val="0A2240"/>
-                </a:solidFill>
-                <a:latin typeface="Arial"/>
-              </a:rPr>
-              <a:t>Watch where they get stuck</a:t>
-            </a:r>
-          </a:p>
-        </p:txBody>
-      </p:sp>
-      <p:sp>
-        <p:nvSpPr>
-          <p:cNvPr id="5" name="TextBox 4"/>
-          <p:cNvSpPr txBox="1"/>
-          <p:nvPr/>
-        </p:nvSpPr>
-        <p:spPr>
-          <a:xfrm>
-            <a:off x="457200" y="3858768"/>
-            <a:ext cx="11277600" cy="518159"/>
-          </a:xfrm>
-          <a:prstGeom prst="rect">
-            <a:avLst/>
-          </a:prstGeom>
-          <a:noFill/>
-        </p:spPr>
-        <p:txBody>
-          <a:bodyPr wrap="none" lIns="0" rIns="0">
-            <a:noAutofit/>
-          </a:bodyPr>
-          <a:lstStyle/>
-          <a:p>
-            <a:pPr algn="l"/>
-            <a:r>
-              <a:rPr sz="3400" b="0" i="0">
-                <a:solidFill>
-                  <a:srgbClr val="0A2240"/>
-                </a:solidFill>
-                <a:latin typeface="Arial"/>
-              </a:rPr>
-              <a:t>Fix only what stopped them</a:t>
-            </a:r>
+            <a:off x="5451562" y="1499616"/>
+            <a:ext cx="4278233" cy="518159"/>
+          </a:xfrm>
+          <a:prstGeom prst="rect">
+            <a:avLst/>
+          </a:prstGeom>
+          <a:noFill/>
+        </p:spPr>
+        <p:txBody>
+          <a:bodyPr wrap="none" lIns="0" rIns="0">
+            <a:noAutofit/>
+          </a:bodyPr>
+          <a:lstStyle/>
+          <a:p>
+            <a:pPr algn="l"/>
+            <a:r>
+              <a:rPr sz="3400" b="1" i="0">
+                <a:solidFill>
+                  <a:srgbClr val="123A6B"/>
+                </a:solidFill>
+                <a:latin typeface="Arial"/>
+              </a:rPr>
+              <a:t>Your answer</a:t>
+            </a:r>
+          </a:p>
+        </p:txBody>
+      </p:sp>
+      <p:sp>
+        <p:nvSpPr>
+          <p:cNvPr id="5" name="Rectangle 4"/>
+          <p:cNvSpPr/>
+          <p:nvPr/>
+        </p:nvSpPr>
+        <p:spPr>
+          <a:xfrm>
+            <a:off x="457200" y="2072639"/>
+            <a:ext cx="7919718" cy="54864"/>
+          </a:xfrm>
+          <a:prstGeom prst="rect">
+            <a:avLst/>
+          </a:prstGeom>
+          <a:solidFill>
+            <a:srgbClr val="0072CE"/>
+          </a:solidFill>
+          <a:ln>
+            <a:noFill/>
+          </a:ln>
+          <a:effectLst/>
+        </p:spPr>
+        <p:style>
+          <a:lnRef idx="1">
+            <a:schemeClr val="accent1"/>
+          </a:lnRef>
+          <a:fillRef idx="3">
+            <a:schemeClr val="accent1"/>
+          </a:fillRef>
+          <a:effectRef idx="2">
+            <a:schemeClr val="accent1"/>
+          </a:effectRef>
+          <a:fontRef idx="minor">
+            <a:schemeClr val="lt1"/>
+          </a:fontRef>
+        </p:style>
+        <p:txBody>
+          <a:bodyPr rtlCol="0" anchor="ctr"/>
+          <a:lstStyle/>
+          <a:p>
+            <a:pPr algn="ctr"/>
           </a:p>
         </p:txBody>
       </p:sp>
@@ -38133,8 +37959,8 @@
         </p:nvSpPr>
         <p:spPr>
           <a:xfrm>
-            <a:off x="457200" y="4834127"/>
-            <a:ext cx="11277600" cy="518159"/>
+            <a:off x="457200" y="2401823"/>
+            <a:ext cx="4944486" cy="633984"/>
           </a:xfrm>
           <a:prstGeom prst="rect">
             <a:avLst/>
@@ -38155,7 +37981,7 @@
                 </a:solidFill>
                 <a:latin typeface="Arial"/>
               </a:rPr>
-              <a:t>Add what broke to the caveats</a:t>
+              <a:t>The public URL</a:t>
             </a:r>
           </a:p>
         </p:txBody>
@@ -38163,6 +37989,251 @@
       <p:sp>
         <p:nvSpPr>
           <p:cNvPr id="7" name="TextBox 6"/>
+          <p:cNvSpPr txBox="1"/>
+          <p:nvPr/>
+        </p:nvSpPr>
+        <p:spPr>
+          <a:xfrm>
+            <a:off x="5451562" y="2401823"/>
+            <a:ext cx="2925356" cy="633984"/>
+          </a:xfrm>
+          <a:prstGeom prst="rect">
+            <a:avLst/>
+          </a:prstGeom>
+          <a:noFill/>
+        </p:spPr>
+        <p:txBody>
+          <a:bodyPr wrap="none" lIns="0" rIns="0">
+            <a:noAutofit/>
+          </a:bodyPr>
+          <a:lstStyle/>
+          <a:p>
+            <a:pPr algn="l"/>
+            <a:r>
+              <a:rPr sz="3400" b="0" i="0">
+                <a:solidFill>
+                  <a:srgbClr val="0A2240"/>
+                </a:solidFill>
+                <a:latin typeface="Arial"/>
+              </a:rPr>
+              <a:t>…</a:t>
+            </a:r>
+          </a:p>
+        </p:txBody>
+      </p:sp>
+      <p:sp>
+        <p:nvSpPr>
+          <p:cNvPr id="8" name="TextBox 7"/>
+          <p:cNvSpPr txBox="1"/>
+          <p:nvPr/>
+        </p:nvSpPr>
+        <p:spPr>
+          <a:xfrm>
+            <a:off x="457200" y="3310127"/>
+            <a:ext cx="6710819" cy="633984"/>
+          </a:xfrm>
+          <a:prstGeom prst="rect">
+            <a:avLst/>
+          </a:prstGeom>
+          <a:noFill/>
+        </p:spPr>
+        <p:txBody>
+          <a:bodyPr wrap="none" lIns="0" rIns="0">
+            <a:noAutofit/>
+          </a:bodyPr>
+          <a:lstStyle/>
+          <a:p>
+            <a:pPr algn="l"/>
+            <a:r>
+              <a:rPr sz="3400" b="0" i="0">
+                <a:solidFill>
+                  <a:srgbClr val="0A2240"/>
+                </a:solidFill>
+                <a:latin typeface="Arial"/>
+              </a:rPr>
+              <a:t>Who drives the demo</a:t>
+            </a:r>
+          </a:p>
+        </p:txBody>
+      </p:sp>
+      <p:sp>
+        <p:nvSpPr>
+          <p:cNvPr id="9" name="TextBox 8"/>
+          <p:cNvSpPr txBox="1"/>
+          <p:nvPr/>
+        </p:nvSpPr>
+        <p:spPr>
+          <a:xfrm>
+            <a:off x="5451562" y="3310127"/>
+            <a:ext cx="2925356" cy="633984"/>
+          </a:xfrm>
+          <a:prstGeom prst="rect">
+            <a:avLst/>
+          </a:prstGeom>
+          <a:noFill/>
+        </p:spPr>
+        <p:txBody>
+          <a:bodyPr wrap="none" lIns="0" rIns="0">
+            <a:noAutofit/>
+          </a:bodyPr>
+          <a:lstStyle/>
+          <a:p>
+            <a:pPr algn="l"/>
+            <a:r>
+              <a:rPr sz="3400" b="0" i="0">
+                <a:solidFill>
+                  <a:srgbClr val="0A2240"/>
+                </a:solidFill>
+                <a:latin typeface="Arial"/>
+              </a:rPr>
+              <a:t>…</a:t>
+            </a:r>
+          </a:p>
+        </p:txBody>
+      </p:sp>
+      <p:sp>
+        <p:nvSpPr>
+          <p:cNvPr id="10" name="TextBox 9"/>
+          <p:cNvSpPr txBox="1"/>
+          <p:nvPr/>
+        </p:nvSpPr>
+        <p:spPr>
+          <a:xfrm>
+            <a:off x="457200" y="4218431"/>
+            <a:ext cx="4714755" cy="633984"/>
+          </a:xfrm>
+          <a:prstGeom prst="rect">
+            <a:avLst/>
+          </a:prstGeom>
+          <a:noFill/>
+        </p:spPr>
+        <p:txBody>
+          <a:bodyPr wrap="none" lIns="0" rIns="0">
+            <a:noAutofit/>
+          </a:bodyPr>
+          <a:lstStyle/>
+          <a:p>
+            <a:pPr algn="l"/>
+            <a:r>
+              <a:rPr sz="3400" b="0" i="0">
+                <a:solidFill>
+                  <a:srgbClr val="0A2240"/>
+                </a:solidFill>
+                <a:latin typeface="Arial"/>
+              </a:rPr>
+              <a:t>Biggest caveat</a:t>
+            </a:r>
+          </a:p>
+        </p:txBody>
+      </p:sp>
+      <p:sp>
+        <p:nvSpPr>
+          <p:cNvPr id="11" name="TextBox 10"/>
+          <p:cNvSpPr txBox="1"/>
+          <p:nvPr/>
+        </p:nvSpPr>
+        <p:spPr>
+          <a:xfrm>
+            <a:off x="5451562" y="4218431"/>
+            <a:ext cx="2925356" cy="633984"/>
+          </a:xfrm>
+          <a:prstGeom prst="rect">
+            <a:avLst/>
+          </a:prstGeom>
+          <a:noFill/>
+        </p:spPr>
+        <p:txBody>
+          <a:bodyPr wrap="none" lIns="0" rIns="0">
+            <a:noAutofit/>
+          </a:bodyPr>
+          <a:lstStyle/>
+          <a:p>
+            <a:pPr algn="l"/>
+            <a:r>
+              <a:rPr sz="3400" b="0" i="0">
+                <a:solidFill>
+                  <a:srgbClr val="0A2240"/>
+                </a:solidFill>
+                <a:latin typeface="Arial"/>
+              </a:rPr>
+              <a:t>…</a:t>
+            </a:r>
+          </a:p>
+        </p:txBody>
+      </p:sp>
+      <p:sp>
+        <p:nvSpPr>
+          <p:cNvPr id="12" name="TextBox 11"/>
+          <p:cNvSpPr txBox="1"/>
+          <p:nvPr/>
+        </p:nvSpPr>
+        <p:spPr>
+          <a:xfrm>
+            <a:off x="457200" y="5126735"/>
+            <a:ext cx="6095841" cy="633984"/>
+          </a:xfrm>
+          <a:prstGeom prst="rect">
+            <a:avLst/>
+          </a:prstGeom>
+          <a:noFill/>
+        </p:spPr>
+        <p:txBody>
+          <a:bodyPr wrap="none" lIns="0" rIns="0">
+            <a:noAutofit/>
+          </a:bodyPr>
+          <a:lstStyle/>
+          <a:p>
+            <a:pPr algn="l"/>
+            <a:r>
+              <a:rPr sz="3400" b="0" i="0">
+                <a:solidFill>
+                  <a:srgbClr val="0A2240"/>
+                </a:solidFill>
+                <a:latin typeface="Arial"/>
+              </a:rPr>
+              <a:t>Most likely to break</a:t>
+            </a:r>
+          </a:p>
+        </p:txBody>
+      </p:sp>
+      <p:sp>
+        <p:nvSpPr>
+          <p:cNvPr id="13" name="TextBox 12"/>
+          <p:cNvSpPr txBox="1"/>
+          <p:nvPr/>
+        </p:nvSpPr>
+        <p:spPr>
+          <a:xfrm>
+            <a:off x="5451562" y="5126735"/>
+            <a:ext cx="2925356" cy="633984"/>
+          </a:xfrm>
+          <a:prstGeom prst="rect">
+            <a:avLst/>
+          </a:prstGeom>
+          <a:noFill/>
+        </p:spPr>
+        <p:txBody>
+          <a:bodyPr wrap="none" lIns="0" rIns="0">
+            <a:noAutofit/>
+          </a:bodyPr>
+          <a:lstStyle/>
+          <a:p>
+            <a:pPr algn="l"/>
+            <a:r>
+              <a:rPr sz="3400" b="0" i="0">
+                <a:solidFill>
+                  <a:srgbClr val="0A2240"/>
+                </a:solidFill>
+                <a:latin typeface="Arial"/>
+              </a:rPr>
+              <a:t>…</a:t>
+            </a:r>
+          </a:p>
+        </p:txBody>
+      </p:sp>
+      <p:sp>
+        <p:nvSpPr>
+          <p:cNvPr id="14" name="TextBox 13"/>
           <p:cNvSpPr/>
           <p:nvPr>
             <p:ph type="sldNum" idx="12"/>
@@ -38225,45 +38296,36 @@
       <p:grpSpPr/>
       <p:sp>
         <p:nvSpPr>
-          <p:cNvPr id="2" name="Rectangle 1"/>
-          <p:cNvSpPr/>
-          <p:nvPr/>
-        </p:nvSpPr>
-        <p:spPr>
-          <a:xfrm>
-            <a:off x="457200" y="2926080"/>
-            <a:ext cx="128016" cy="1005840"/>
-          </a:xfrm>
-          <a:prstGeom prst="rect">
-            <a:avLst/>
-          </a:prstGeom>
-          <a:solidFill>
-            <a:srgbClr val="0072CE"/>
-          </a:solidFill>
-          <a:ln>
-            <a:noFill/>
-          </a:ln>
-          <a:effectLst/>
-        </p:spPr>
-        <p:style>
-          <a:lnRef idx="1">
-            <a:schemeClr val="accent1"/>
-          </a:lnRef>
-          <a:fillRef idx="3">
-            <a:schemeClr val="accent1"/>
-          </a:fillRef>
-          <a:effectRef idx="2">
-            <a:schemeClr val="accent1"/>
-          </a:effectRef>
-          <a:fontRef idx="minor">
-            <a:schemeClr val="lt1"/>
-          </a:fontRef>
-        </p:style>
-        <p:txBody>
-          <a:bodyPr rtlCol="0" anchor="ctr"/>
-          <a:lstStyle/>
-          <a:p>
-            <a:pPr algn="ctr"/>
+          <p:cNvPr id="2" name="TextBox 1"/>
+          <p:cNvSpPr txBox="1"/>
+          <p:nvPr/>
+        </p:nvSpPr>
+        <p:spPr>
+          <a:xfrm>
+            <a:off x="457200" y="457200"/>
+            <a:ext cx="11420952" cy="768096"/>
+          </a:xfrm>
+          <a:prstGeom prst="rect">
+            <a:avLst/>
+          </a:prstGeom>
+          <a:noFill/>
+        </p:spPr>
+        <p:txBody>
+          <a:bodyPr wrap="none" lIns="0" rIns="0">
+            <a:noAutofit/>
+          </a:bodyPr>
+          <a:lstStyle/>
+          <a:p>
+            <a:pPr algn="l"/>
+            <a:r>
+              <a:rPr sz="4200" b="1" i="0">
+                <a:solidFill>
+                  <a:srgbClr val="0072CE"/>
+                </a:solidFill>
+                <a:latin typeface="Arial"/>
+              </a:rPr>
+              <a:t>Tonight, If You Have Energy</a:t>
+            </a:r>
           </a:p>
         </p:txBody>
       </p:sp>
@@ -38275,29 +38337,29 @@
         </p:nvSpPr>
         <p:spPr>
           <a:xfrm>
-            <a:off x="996696" y="2926080"/>
-            <a:ext cx="11195304" cy="1005840"/>
-          </a:xfrm>
-          <a:prstGeom prst="rect">
-            <a:avLst/>
-          </a:prstGeom>
-          <a:noFill/>
-        </p:spPr>
-        <p:txBody>
-          <a:bodyPr wrap="none" lIns="0" rIns="0">
-            <a:noAutofit/>
-          </a:bodyPr>
-          <a:lstStyle/>
-          <a:p>
-            <a:pPr algn="l"/>
-            <a:r>
-              <a:rPr sz="6000" b="1" i="0">
+            <a:off x="457200" y="1908050"/>
+            <a:ext cx="11277600" cy="518159"/>
+          </a:xfrm>
+          <a:prstGeom prst="rect">
+            <a:avLst/>
+          </a:prstGeom>
+          <a:noFill/>
+        </p:spPr>
+        <p:txBody>
+          <a:bodyPr wrap="none" lIns="0" rIns="0">
+            <a:noAutofit/>
+          </a:bodyPr>
+          <a:lstStyle/>
+          <a:p>
+            <a:pPr algn="l"/>
+            <a:r>
+              <a:rPr sz="3400" b="0" i="0">
                 <a:solidFill>
                   <a:srgbClr val="0A2240"/>
                 </a:solidFill>
                 <a:latin typeface="Arial"/>
               </a:rPr>
-              <a:t>What would you attack?</a:t>
+              <a:t>Send the link to one stranger</a:t>
             </a:r>
           </a:p>
         </p:txBody>
@@ -38305,6 +38367,111 @@
       <p:sp>
         <p:nvSpPr>
           <p:cNvPr id="4" name="TextBox 3"/>
+          <p:cNvSpPr txBox="1"/>
+          <p:nvPr/>
+        </p:nvSpPr>
+        <p:spPr>
+          <a:xfrm>
+            <a:off x="457200" y="2883409"/>
+            <a:ext cx="11277600" cy="518159"/>
+          </a:xfrm>
+          <a:prstGeom prst="rect">
+            <a:avLst/>
+          </a:prstGeom>
+          <a:noFill/>
+        </p:spPr>
+        <p:txBody>
+          <a:bodyPr wrap="none" lIns="0" rIns="0">
+            <a:noAutofit/>
+          </a:bodyPr>
+          <a:lstStyle/>
+          <a:p>
+            <a:pPr algn="l"/>
+            <a:r>
+              <a:rPr sz="3400" b="0" i="0">
+                <a:solidFill>
+                  <a:srgbClr val="0A2240"/>
+                </a:solidFill>
+                <a:latin typeface="Arial"/>
+              </a:rPr>
+              <a:t>Watch where they get stuck</a:t>
+            </a:r>
+          </a:p>
+        </p:txBody>
+      </p:sp>
+      <p:sp>
+        <p:nvSpPr>
+          <p:cNvPr id="5" name="TextBox 4"/>
+          <p:cNvSpPr txBox="1"/>
+          <p:nvPr/>
+        </p:nvSpPr>
+        <p:spPr>
+          <a:xfrm>
+            <a:off x="457200" y="3858768"/>
+            <a:ext cx="11277600" cy="518159"/>
+          </a:xfrm>
+          <a:prstGeom prst="rect">
+            <a:avLst/>
+          </a:prstGeom>
+          <a:noFill/>
+        </p:spPr>
+        <p:txBody>
+          <a:bodyPr wrap="none" lIns="0" rIns="0">
+            <a:noAutofit/>
+          </a:bodyPr>
+          <a:lstStyle/>
+          <a:p>
+            <a:pPr algn="l"/>
+            <a:r>
+              <a:rPr sz="3400" b="0" i="0">
+                <a:solidFill>
+                  <a:srgbClr val="0A2240"/>
+                </a:solidFill>
+                <a:latin typeface="Arial"/>
+              </a:rPr>
+              <a:t>Fix only what stopped them</a:t>
+            </a:r>
+          </a:p>
+        </p:txBody>
+      </p:sp>
+      <p:sp>
+        <p:nvSpPr>
+          <p:cNvPr id="6" name="TextBox 5"/>
+          <p:cNvSpPr txBox="1"/>
+          <p:nvPr/>
+        </p:nvSpPr>
+        <p:spPr>
+          <a:xfrm>
+            <a:off x="457200" y="4834127"/>
+            <a:ext cx="11277600" cy="518159"/>
+          </a:xfrm>
+          <a:prstGeom prst="rect">
+            <a:avLst/>
+          </a:prstGeom>
+          <a:noFill/>
+        </p:spPr>
+        <p:txBody>
+          <a:bodyPr wrap="none" lIns="0" rIns="0">
+            <a:noAutofit/>
+          </a:bodyPr>
+          <a:lstStyle/>
+          <a:p>
+            <a:pPr algn="l"/>
+            <a:r>
+              <a:rPr sz="3400" b="0" i="0">
+                <a:solidFill>
+                  <a:srgbClr val="0A2240"/>
+                </a:solidFill>
+                <a:latin typeface="Arial"/>
+              </a:rPr>
+              <a:t>Add what broke to the caveats</a:t>
+            </a:r>
+          </a:p>
+        </p:txBody>
+      </p:sp>
+      <p:sp>
+        <p:nvSpPr>
+          <p:cNvPr id="7" name="TextBox 6"/>
           <p:cNvSpPr/>
           <p:nvPr>
             <p:ph type="sldNum" idx="12"/>
@@ -39061,36 +39228,45 @@
       <p:grpSpPr/>
       <p:sp>
         <p:nvSpPr>
-          <p:cNvPr id="2" name="TextBox 1"/>
-          <p:cNvSpPr txBox="1"/>
-          <p:nvPr/>
-        </p:nvSpPr>
-        <p:spPr>
-          <a:xfrm>
-            <a:off x="457200" y="457200"/>
-            <a:ext cx="11277600" cy="768096"/>
-          </a:xfrm>
-          <a:prstGeom prst="rect">
-            <a:avLst/>
-          </a:prstGeom>
-          <a:noFill/>
-        </p:spPr>
-        <p:txBody>
-          <a:bodyPr wrap="none" lIns="0" rIns="0">
-            <a:noAutofit/>
-          </a:bodyPr>
-          <a:lstStyle/>
-          <a:p>
-            <a:pPr algn="l"/>
-            <a:r>
-              <a:rPr sz="4200" b="1" i="0">
-                <a:solidFill>
-                  <a:srgbClr val="0072CE"/>
-                </a:solidFill>
-                <a:latin typeface="Arial"/>
-              </a:rPr>
-              <a:t>Next: The Battle Test</a:t>
-            </a:r>
+          <p:cNvPr id="2" name="Rectangle 1"/>
+          <p:cNvSpPr/>
+          <p:nvPr/>
+        </p:nvSpPr>
+        <p:spPr>
+          <a:xfrm>
+            <a:off x="457200" y="2926080"/>
+            <a:ext cx="128016" cy="1005840"/>
+          </a:xfrm>
+          <a:prstGeom prst="rect">
+            <a:avLst/>
+          </a:prstGeom>
+          <a:solidFill>
+            <a:srgbClr val="0072CE"/>
+          </a:solidFill>
+          <a:ln>
+            <a:noFill/>
+          </a:ln>
+          <a:effectLst/>
+        </p:spPr>
+        <p:style>
+          <a:lnRef idx="1">
+            <a:schemeClr val="accent1"/>
+          </a:lnRef>
+          <a:fillRef idx="3">
+            <a:schemeClr val="accent1"/>
+          </a:fillRef>
+          <a:effectRef idx="2">
+            <a:schemeClr val="accent1"/>
+          </a:effectRef>
+          <a:fontRef idx="minor">
+            <a:schemeClr val="lt1"/>
+          </a:fontRef>
+        </p:style>
+        <p:txBody>
+          <a:bodyPr rtlCol="0" anchor="ctr"/>
+          <a:lstStyle/>
+          <a:p>
+            <a:pPr algn="ctr"/>
           </a:p>
         </p:txBody>
       </p:sp>
@@ -39102,29 +39278,29 @@
         </p:nvSpPr>
         <p:spPr>
           <a:xfrm>
-            <a:off x="457200" y="1908050"/>
-            <a:ext cx="11277600" cy="518159"/>
-          </a:xfrm>
-          <a:prstGeom prst="rect">
-            <a:avLst/>
-          </a:prstGeom>
-          <a:noFill/>
-        </p:spPr>
-        <p:txBody>
-          <a:bodyPr wrap="none" lIns="0" rIns="0">
-            <a:noAutofit/>
-          </a:bodyPr>
-          <a:lstStyle/>
-          <a:p>
-            <a:pPr algn="l"/>
-            <a:r>
-              <a:rPr sz="3400" b="0" i="0">
+            <a:off x="996696" y="2926080"/>
+            <a:ext cx="11195304" cy="1005840"/>
+          </a:xfrm>
+          <a:prstGeom prst="rect">
+            <a:avLst/>
+          </a:prstGeom>
+          <a:noFill/>
+        </p:spPr>
+        <p:txBody>
+          <a:bodyPr wrap="none" lIns="0" rIns="0">
+            <a:noAutofit/>
+          </a:bodyPr>
+          <a:lstStyle/>
+          <a:p>
+            <a:pPr algn="l"/>
+            <a:r>
+              <a:rPr sz="6000" b="1" i="0">
                 <a:solidFill>
                   <a:srgbClr val="0A2240"/>
                 </a:solidFill>
                 <a:latin typeface="Arial"/>
               </a:rPr>
-              <a:t>You design an attack, not a feature</a:t>
+              <a:t>What would you attack?</a:t>
             </a:r>
           </a:p>
         </p:txBody>
@@ -39132,111 +39308,6 @@
       <p:sp>
         <p:nvSpPr>
           <p:cNvPr id="4" name="TextBox 3"/>
-          <p:cNvSpPr txBox="1"/>
-          <p:nvPr/>
-        </p:nvSpPr>
-        <p:spPr>
-          <a:xfrm>
-            <a:off x="457200" y="2883409"/>
-            <a:ext cx="11277600" cy="518159"/>
-          </a:xfrm>
-          <a:prstGeom prst="rect">
-            <a:avLst/>
-          </a:prstGeom>
-          <a:noFill/>
-        </p:spPr>
-        <p:txBody>
-          <a:bodyPr wrap="none" lIns="0" rIns="0">
-            <a:noAutofit/>
-          </a:bodyPr>
-          <a:lstStyle/>
-          <a:p>
-            <a:pPr algn="l"/>
-            <a:r>
-              <a:rPr sz="3400" b="0" i="0">
-                <a:solidFill>
-                  <a:srgbClr val="0A2240"/>
-                </a:solidFill>
-                <a:latin typeface="Arial"/>
-              </a:rPr>
-              <a:t>Another team red-teams yours</a:t>
-            </a:r>
-          </a:p>
-        </p:txBody>
-      </p:sp>
-      <p:sp>
-        <p:nvSpPr>
-          <p:cNvPr id="5" name="TextBox 4"/>
-          <p:cNvSpPr txBox="1"/>
-          <p:nvPr/>
-        </p:nvSpPr>
-        <p:spPr>
-          <a:xfrm>
-            <a:off x="457200" y="3858768"/>
-            <a:ext cx="11277600" cy="518159"/>
-          </a:xfrm>
-          <a:prstGeom prst="rect">
-            <a:avLst/>
-          </a:prstGeom>
-          <a:noFill/>
-        </p:spPr>
-        <p:txBody>
-          <a:bodyPr wrap="none" lIns="0" rIns="0">
-            <a:noAutofit/>
-          </a:bodyPr>
-          <a:lstStyle/>
-          <a:p>
-            <a:pPr algn="l"/>
-            <a:r>
-              <a:rPr sz="3400" b="0" i="0">
-                <a:solidFill>
-                  <a:srgbClr val="0A2240"/>
-                </a:solidFill>
-                <a:latin typeface="Arial"/>
-              </a:rPr>
-              <a:t>Agents probe it, not just people</a:t>
-            </a:r>
-          </a:p>
-        </p:txBody>
-      </p:sp>
-      <p:sp>
-        <p:nvSpPr>
-          <p:cNvPr id="6" name="TextBox 5"/>
-          <p:cNvSpPr txBox="1"/>
-          <p:nvPr/>
-        </p:nvSpPr>
-        <p:spPr>
-          <a:xfrm>
-            <a:off x="457200" y="4834127"/>
-            <a:ext cx="11277600" cy="518159"/>
-          </a:xfrm>
-          <a:prstGeom prst="rect">
-            <a:avLst/>
-          </a:prstGeom>
-          <a:noFill/>
-        </p:spPr>
-        <p:txBody>
-          <a:bodyPr wrap="none" lIns="0" rIns="0">
-            <a:noAutofit/>
-          </a:bodyPr>
-          <a:lstStyle/>
-          <a:p>
-            <a:pPr algn="l"/>
-            <a:r>
-              <a:rPr sz="3400" b="0" i="0">
-                <a:solidFill>
-                  <a:srgbClr val="0A2240"/>
-                </a:solidFill>
-                <a:latin typeface="Arial"/>
-              </a:rPr>
-              <a:t>Bring the caveat list with you</a:t>
-            </a:r>
-          </a:p>
-        </p:txBody>
-      </p:sp>
-      <p:sp>
-        <p:nvSpPr>
-          <p:cNvPr id="7" name="TextBox 6"/>
           <p:cNvSpPr/>
           <p:nvPr>
             <p:ph type="sldNum" idx="12"/>
@@ -39267,6 +39338,244 @@
                 <a:latin typeface="Arial"/>
               </a:rPr>
               <a:t>60</a:t>
+            </a:fld>
+          </a:p>
+        </p:txBody>
+      </p:sp>
+    </p:spTree>
+  </p:cSld>
+  <p:clrMapOvr>
+    <a:masterClrMapping/>
+  </p:clrMapOvr>
+</p:sld>
+</file>
+
+<file path=ppt/slides/slide61.xml><?xml version="1.0" encoding="utf-8"?>
+<p:sld xmlns:a="http://schemas.openxmlformats.org/drawingml/2006/main" xmlns:p="http://schemas.openxmlformats.org/presentationml/2006/main" xmlns:r="http://schemas.openxmlformats.org/officeDocument/2006/relationships" showMasterSp="0">
+  <p:cSld>
+    <p:bg>
+      <p:bgPr>
+        <a:solidFill>
+          <a:srgbClr val="FFFFFF"/>
+        </a:solidFill>
+        <a:effectLst/>
+      </p:bgPr>
+    </p:bg>
+    <p:spTree>
+      <p:nvGrpSpPr>
+        <p:cNvPr id="1" name=""/>
+        <p:cNvGrpSpPr/>
+        <p:nvPr/>
+      </p:nvGrpSpPr>
+      <p:grpSpPr/>
+      <p:sp>
+        <p:nvSpPr>
+          <p:cNvPr id="2" name="TextBox 1"/>
+          <p:cNvSpPr txBox="1"/>
+          <p:nvPr/>
+        </p:nvSpPr>
+        <p:spPr>
+          <a:xfrm>
+            <a:off x="457200" y="457200"/>
+            <a:ext cx="11277600" cy="768096"/>
+          </a:xfrm>
+          <a:prstGeom prst="rect">
+            <a:avLst/>
+          </a:prstGeom>
+          <a:noFill/>
+        </p:spPr>
+        <p:txBody>
+          <a:bodyPr wrap="none" lIns="0" rIns="0">
+            <a:noAutofit/>
+          </a:bodyPr>
+          <a:lstStyle/>
+          <a:p>
+            <a:pPr algn="l"/>
+            <a:r>
+              <a:rPr sz="4200" b="1" i="0">
+                <a:solidFill>
+                  <a:srgbClr val="0072CE"/>
+                </a:solidFill>
+                <a:latin typeface="Arial"/>
+              </a:rPr>
+              <a:t>Next: The Battle Test</a:t>
+            </a:r>
+          </a:p>
+        </p:txBody>
+      </p:sp>
+      <p:sp>
+        <p:nvSpPr>
+          <p:cNvPr id="3" name="TextBox 2"/>
+          <p:cNvSpPr txBox="1"/>
+          <p:nvPr/>
+        </p:nvSpPr>
+        <p:spPr>
+          <a:xfrm>
+            <a:off x="457200" y="1908050"/>
+            <a:ext cx="11277600" cy="518159"/>
+          </a:xfrm>
+          <a:prstGeom prst="rect">
+            <a:avLst/>
+          </a:prstGeom>
+          <a:noFill/>
+        </p:spPr>
+        <p:txBody>
+          <a:bodyPr wrap="none" lIns="0" rIns="0">
+            <a:noAutofit/>
+          </a:bodyPr>
+          <a:lstStyle/>
+          <a:p>
+            <a:pPr algn="l"/>
+            <a:r>
+              <a:rPr sz="3400" b="0" i="0">
+                <a:solidFill>
+                  <a:srgbClr val="0A2240"/>
+                </a:solidFill>
+                <a:latin typeface="Arial"/>
+              </a:rPr>
+              <a:t>You design an attack, not a feature</a:t>
+            </a:r>
+          </a:p>
+        </p:txBody>
+      </p:sp>
+      <p:sp>
+        <p:nvSpPr>
+          <p:cNvPr id="4" name="TextBox 3"/>
+          <p:cNvSpPr txBox="1"/>
+          <p:nvPr/>
+        </p:nvSpPr>
+        <p:spPr>
+          <a:xfrm>
+            <a:off x="457200" y="2883409"/>
+            <a:ext cx="11277600" cy="518159"/>
+          </a:xfrm>
+          <a:prstGeom prst="rect">
+            <a:avLst/>
+          </a:prstGeom>
+          <a:noFill/>
+        </p:spPr>
+        <p:txBody>
+          <a:bodyPr wrap="none" lIns="0" rIns="0">
+            <a:noAutofit/>
+          </a:bodyPr>
+          <a:lstStyle/>
+          <a:p>
+            <a:pPr algn="l"/>
+            <a:r>
+              <a:rPr sz="3400" b="0" i="0">
+                <a:solidFill>
+                  <a:srgbClr val="0A2240"/>
+                </a:solidFill>
+                <a:latin typeface="Arial"/>
+              </a:rPr>
+              <a:t>Another team red-teams yours</a:t>
+            </a:r>
+          </a:p>
+        </p:txBody>
+      </p:sp>
+      <p:sp>
+        <p:nvSpPr>
+          <p:cNvPr id="5" name="TextBox 4"/>
+          <p:cNvSpPr txBox="1"/>
+          <p:nvPr/>
+        </p:nvSpPr>
+        <p:spPr>
+          <a:xfrm>
+            <a:off x="457200" y="3858768"/>
+            <a:ext cx="11277600" cy="518159"/>
+          </a:xfrm>
+          <a:prstGeom prst="rect">
+            <a:avLst/>
+          </a:prstGeom>
+          <a:noFill/>
+        </p:spPr>
+        <p:txBody>
+          <a:bodyPr wrap="none" lIns="0" rIns="0">
+            <a:noAutofit/>
+          </a:bodyPr>
+          <a:lstStyle/>
+          <a:p>
+            <a:pPr algn="l"/>
+            <a:r>
+              <a:rPr sz="3400" b="0" i="0">
+                <a:solidFill>
+                  <a:srgbClr val="0A2240"/>
+                </a:solidFill>
+                <a:latin typeface="Arial"/>
+              </a:rPr>
+              <a:t>Agents probe it, not just people</a:t>
+            </a:r>
+          </a:p>
+        </p:txBody>
+      </p:sp>
+      <p:sp>
+        <p:nvSpPr>
+          <p:cNvPr id="6" name="TextBox 5"/>
+          <p:cNvSpPr txBox="1"/>
+          <p:nvPr/>
+        </p:nvSpPr>
+        <p:spPr>
+          <a:xfrm>
+            <a:off x="457200" y="4834127"/>
+            <a:ext cx="11277600" cy="518159"/>
+          </a:xfrm>
+          <a:prstGeom prst="rect">
+            <a:avLst/>
+          </a:prstGeom>
+          <a:noFill/>
+        </p:spPr>
+        <p:txBody>
+          <a:bodyPr wrap="none" lIns="0" rIns="0">
+            <a:noAutofit/>
+          </a:bodyPr>
+          <a:lstStyle/>
+          <a:p>
+            <a:pPr algn="l"/>
+            <a:r>
+              <a:rPr sz="3400" b="0" i="0">
+                <a:solidFill>
+                  <a:srgbClr val="0A2240"/>
+                </a:solidFill>
+                <a:latin typeface="Arial"/>
+              </a:rPr>
+              <a:t>Bring the caveat list with you</a:t>
+            </a:r>
+          </a:p>
+        </p:txBody>
+      </p:sp>
+      <p:sp>
+        <p:nvSpPr>
+          <p:cNvPr id="7" name="TextBox 6"/>
+          <p:cNvSpPr/>
+          <p:nvPr>
+            <p:ph type="sldNum" idx="12"/>
+          </p:nvPr>
+        </p:nvSpPr>
+        <p:spPr>
+          <a:xfrm>
+            <a:off x="11186160" y="6035040"/>
+            <a:ext cx="548640" cy="365760"/>
+          </a:xfrm>
+          <a:prstGeom prst="rect">
+            <a:avLst/>
+          </a:prstGeom>
+          <a:noFill/>
+        </p:spPr>
+        <p:txBody>
+          <a:bodyPr wrap="none" lIns="0" rIns="0">
+            <a:noAutofit/>
+          </a:bodyPr>
+          <a:lstStyle/>
+          <a:p>
+            <a:pPr algn="r"/>
+            <a:fld id="{4B0E1F8A-6C1D-4E2A-9F3B-7A5C8D2E1F60}" type="slidenum">
+              <a:rPr sz="1600" b="0" i="0">
+                <a:solidFill>
+                  <a:srgbClr val="5B6B82"/>
+                </a:solidFill>
+                <a:latin typeface="Arial"/>
+              </a:rPr>
+              <a:t>61</a:t>
             </a:fld>
           </a:p>
         </p:txBody>

--- a/examples/pptx/immersion-2-3-making-it-demoable.pptx
+++ b/examples/pptx/immersion-2-3-making-it-demoable.pptx
@@ -1682,7 +1682,7 @@
           <a:lstStyle/>
           <a:p>
             <a:r>
-              <a:t>Two ways to ship. GitHub Pages is already where your code is, a commit is a deploy, and it serves static pages only. Cloudflare handles more than static and is fast to set up, but it is another account to make.</a:t>
+              <a:t>Two ways to ship. GitHub Pages is already where your code is and a commit is a deploy, but it serves static files only, with nowhere to run code. Cloudflare is another account to make, and in exchange its Workers run code on a server, which is the only way a secret key stays out of the page.</a:t>
             </a:r>
           </a:p>
         </p:txBody>
@@ -25308,7 +25308,7 @@
                 </a:solidFill>
                 <a:latin typeface="Arial"/>
               </a:rPr>
-              <a:t>Handles more than static</a:t>
+              <a:t>Workers run your code</a:t>
             </a:r>
           </a:p>
         </p:txBody>
@@ -25357,7 +25357,7 @@
         <p:spPr>
           <a:xfrm>
             <a:off x="6233160" y="3517391"/>
-            <a:ext cx="5501640" cy="847344"/>
+            <a:ext cx="5958840" cy="847344"/>
           </a:xfrm>
           <a:prstGeom prst="rect">
             <a:avLst/>
@@ -25378,7 +25378,7 @@
                 </a:solidFill>
                 <a:latin typeface="Arial"/>
               </a:rPr>
-              <a:t>Fast to set up</a:t>
+              <a:t>Secret keys stay secret</a:t>
             </a:r>
           </a:p>
         </p:txBody>
@@ -25392,7 +25392,7 @@
         <p:spPr>
           <a:xfrm>
             <a:off x="457200" y="4639055"/>
-            <a:ext cx="5501640" cy="847344"/>
+            <a:ext cx="6582628" cy="847344"/>
           </a:xfrm>
           <a:prstGeom prst="rect">
             <a:avLst/>
@@ -25413,7 +25413,7 @@
                 </a:solidFill>
                 <a:latin typeface="Arial"/>
               </a:rPr>
-              <a:t>Static pages only</a:t>
+              <a:t>Static only, no server</a:t>
             </a:r>
           </a:p>
         </p:txBody>

--- a/examples/pptx/immersion-2-3-making-it-demoable.pptx
+++ b/examples/pptx/immersion-2-3-making-it-demoable.pptx
@@ -6747,7 +6747,7 @@
             <a:r>
               <a:rPr sz="3400" b="1" i="0">
                 <a:solidFill>
-                  <a:srgbClr val="123A6B"/>
+                  <a:srgbClr val="0072CE"/>
                 </a:solidFill>
                 <a:latin typeface="Arial"/>
               </a:rPr>
@@ -6784,7 +6784,7 @@
             <a:r>
               <a:rPr sz="3400" b="1" i="0">
                 <a:solidFill>
-                  <a:srgbClr val="123A6B"/>
+                  <a:srgbClr val="0072CE"/>
                 </a:solidFill>
                 <a:latin typeface="Arial"/>
               </a:rPr>
@@ -7676,15 +7676,15 @@
         <p:spPr>
           <a:xfrm>
             <a:off x="6233160" y="1499616"/>
-            <a:ext cx="5501640" cy="1127760"/>
-          </a:xfrm>
-          <a:prstGeom prst="rect">
-            <a:avLst/>
-          </a:prstGeom>
-          <a:noFill/>
-        </p:spPr>
-        <p:txBody>
-          <a:bodyPr wrap="square" lIns="0" rIns="0">
+            <a:ext cx="5958840" cy="609600"/>
+          </a:xfrm>
+          <a:prstGeom prst="rect">
+            <a:avLst/>
+          </a:prstGeom>
+          <a:noFill/>
+        </p:spPr>
+        <p:txBody>
+          <a:bodyPr wrap="none" lIns="0" rIns="0">
             <a:noAutofit/>
           </a:bodyPr>
           <a:lstStyle/>
@@ -7697,7 +7697,7 @@
                 </a:solidFill>
                 <a:latin typeface="Arial"/>
               </a:rPr>
-              <a:t>Built with customers, not just for them.</a:t>
+              <a:t>Built with customers.</a:t>
             </a:r>
           </a:p>
         </p:txBody>
@@ -7712,7 +7712,7 @@
         </p:nvSpPr>
         <p:spPr>
           <a:xfrm>
-            <a:off x="6233160" y="2901696"/>
+            <a:off x="6233160" y="2383536"/>
             <a:ext cx="5501640" cy="1127760"/>
           </a:xfrm>
           <a:prstGeom prst="rect">
@@ -7734,7 +7734,7 @@
                 </a:solidFill>
                 <a:latin typeface="Arial"/>
               </a:rPr>
-              <a:t>60% faster rollout; 50% fewer tickets.</a:t>
+              <a:t>60% faster; 50% fewer tickets</a:t>
             </a:r>
           </a:p>
         </p:txBody>
@@ -7753,405 +7753,6 @@
 </file>
 
 <file path=ppt/slideLayouts/slideLayout18.xml><?xml version="1.0" encoding="utf-8"?>
-<p:sldLayout xmlns:a="http://schemas.openxmlformats.org/drawingml/2006/main" xmlns:r="http://schemas.openxmlformats.org/officeDocument/2006/relationships" xmlns:p="http://schemas.openxmlformats.org/presentationml/2006/main" type="blank" preserve="1">
-  <p:cSld name="slidekit · Card Grid">
-    <p:bg>
-      <p:bgPr>
-        <a:solidFill>
-          <a:srgbClr val="FFFFFF"/>
-        </a:solidFill>
-        <a:effectLst/>
-      </p:bgPr>
-    </p:bg>
-    <p:spTree>
-      <p:nvGrpSpPr>
-        <p:cNvPr id="1" name=""/>
-        <p:cNvGrpSpPr/>
-        <p:nvPr/>
-      </p:nvGrpSpPr>
-      <p:grpSpPr>
-        <a:xfrm>
-          <a:off x="0" y="0"/>
-          <a:ext cx="0" cy="0"/>
-          <a:chOff x="0" y="0"/>
-          <a:chExt cx="0" cy="0"/>
-        </a:xfrm>
-      </p:grpSpPr>
-      <p:sp>
-        <p:nvSpPr>
-          <p:cNvPr id="4" name="Slide Number Placeholder 3"/>
-          <p:cNvSpPr>
-            <a:spLocks noGrp="1"/>
-          </p:cNvSpPr>
-          <p:nvPr>
-            <p:ph type="sldNum" sz="quarter" idx="12"/>
-          </p:nvPr>
-        </p:nvSpPr>
-        <p:spPr>
-          <a:xfrm>
-            <a:off x="11186160" y="6035040"/>
-            <a:ext cx="548640" cy="365760"/>
-          </a:xfrm>
-        </p:spPr>
-        <p:txBody>
-          <a:bodyPr/>
-          <a:lstStyle/>
-          <a:p>
-            <a:fld id="{C1FF6DA9-008F-8B48-92A6-B652298478BF}" type="slidenum">
-              <a:rPr lang="en-US" smtClean="0"/>
-              <a:t>‹#›</a:t>
-            </a:fld>
-            <a:endParaRPr lang="en-US"/>
-          </a:p>
-        </p:txBody>
-      </p:sp>
-      <p:sp>
-        <p:nvSpPr>
-          <p:cNvPr id="5" name="TextBox 4"/>
-          <p:cNvSpPr/>
-          <p:nvPr>
-            <p:ph type="title"/>
-          </p:nvPr>
-        </p:nvSpPr>
-        <p:spPr>
-          <a:xfrm>
-            <a:off x="457200" y="457200"/>
-            <a:ext cx="11277600" cy="768096"/>
-          </a:xfrm>
-          <a:prstGeom prst="rect">
-            <a:avLst/>
-          </a:prstGeom>
-          <a:noFill/>
-        </p:spPr>
-        <p:txBody>
-          <a:bodyPr wrap="none" lIns="0" rIns="0">
-            <a:noAutofit/>
-          </a:bodyPr>
-          <a:lstStyle/>
-          <a:p>
-            <a:pPr algn="l"/>
-            <a:r>
-              <a:rPr sz="4200" b="1" i="0">
-                <a:solidFill>
-                  <a:srgbClr val="0072CE"/>
-                </a:solidFill>
-                <a:latin typeface="Arial"/>
-              </a:rPr>
-              <a:t>What We Offer</a:t>
-            </a:r>
-          </a:p>
-        </p:txBody>
-      </p:sp>
-      <p:sp>
-        <p:nvSpPr>
-          <p:cNvPr id="6" name="TextBox 5"/>
-          <p:cNvSpPr/>
-          <p:nvPr>
-            <p:ph type="body" idx="1"/>
-          </p:nvPr>
-        </p:nvSpPr>
-        <p:spPr>
-          <a:xfrm>
-            <a:off x="457200" y="1499616"/>
-            <a:ext cx="2831366" cy="518159"/>
-          </a:xfrm>
-          <a:prstGeom prst="rect">
-            <a:avLst/>
-          </a:prstGeom>
-          <a:noFill/>
-        </p:spPr>
-        <p:txBody>
-          <a:bodyPr wrap="none" lIns="0" rIns="0">
-            <a:noAutofit/>
-          </a:bodyPr>
-          <a:lstStyle/>
-          <a:p>
-            <a:pPr algn="l"/>
-            <a:r>
-              <a:rPr sz="3400" b="1" i="0">
-                <a:solidFill>
-                  <a:srgbClr val="0A2240"/>
-                </a:solidFill>
-                <a:latin typeface="Arial"/>
-              </a:rPr>
-              <a:t>Insights</a:t>
-            </a:r>
-          </a:p>
-        </p:txBody>
-      </p:sp>
-      <p:sp>
-        <p:nvSpPr>
-          <p:cNvPr id="7" name="TextBox 6"/>
-          <p:cNvSpPr/>
-          <p:nvPr>
-            <p:ph type="body" idx="2"/>
-          </p:nvPr>
-        </p:nvSpPr>
-        <p:spPr>
-          <a:xfrm>
-            <a:off x="457200" y="2154935"/>
-            <a:ext cx="2613660" cy="3605785"/>
-          </a:xfrm>
-          <a:prstGeom prst="rect">
-            <a:avLst/>
-          </a:prstGeom>
-          <a:noFill/>
-        </p:spPr>
-        <p:txBody>
-          <a:bodyPr wrap="square" lIns="0" rIns="0">
-            <a:noAutofit/>
-          </a:bodyPr>
-          <a:lstStyle/>
-          <a:p>
-            <a:pPr algn="l"/>
-            <a:r>
-              <a:rPr sz="3400" b="0" i="0">
-                <a:solidFill>
-                  <a:srgbClr val="0A2240"/>
-                </a:solidFill>
-                <a:latin typeface="Arial"/>
-              </a:rPr>
-              <a:t>Live data and AI analytics.</a:t>
-            </a:r>
-          </a:p>
-        </p:txBody>
-      </p:sp>
-      <p:sp>
-        <p:nvSpPr>
-          <p:cNvPr id="8" name="TextBox 7"/>
-          <p:cNvSpPr/>
-          <p:nvPr>
-            <p:ph type="body" idx="3"/>
-          </p:nvPr>
-        </p:nvSpPr>
-        <p:spPr>
-          <a:xfrm>
-            <a:off x="3345180" y="1499616"/>
-            <a:ext cx="2909292" cy="518159"/>
-          </a:xfrm>
-          <a:prstGeom prst="rect">
-            <a:avLst/>
-          </a:prstGeom>
-          <a:noFill/>
-        </p:spPr>
-        <p:txBody>
-          <a:bodyPr wrap="none" lIns="0" rIns="0">
-            <a:noAutofit/>
-          </a:bodyPr>
-          <a:lstStyle/>
-          <a:p>
-            <a:pPr algn="l"/>
-            <a:r>
-              <a:rPr sz="3400" b="1" i="0">
-                <a:solidFill>
-                  <a:srgbClr val="0A2240"/>
-                </a:solidFill>
-                <a:latin typeface="Arial"/>
-              </a:rPr>
-              <a:t>Security</a:t>
-            </a:r>
-          </a:p>
-        </p:txBody>
-      </p:sp>
-      <p:sp>
-        <p:nvSpPr>
-          <p:cNvPr id="9" name="TextBox 8"/>
-          <p:cNvSpPr/>
-          <p:nvPr>
-            <p:ph type="body" idx="4"/>
-          </p:nvPr>
-        </p:nvSpPr>
-        <p:spPr>
-          <a:xfrm>
-            <a:off x="3345180" y="2154935"/>
-            <a:ext cx="2613660" cy="3605785"/>
-          </a:xfrm>
-          <a:prstGeom prst="rect">
-            <a:avLst/>
-          </a:prstGeom>
-          <a:noFill/>
-        </p:spPr>
-        <p:txBody>
-          <a:bodyPr wrap="square" lIns="0" rIns="0">
-            <a:noAutofit/>
-          </a:bodyPr>
-          <a:lstStyle/>
-          <a:p>
-            <a:pPr algn="l"/>
-            <a:r>
-              <a:rPr sz="3400" b="0" i="0">
-                <a:solidFill>
-                  <a:srgbClr val="0A2240"/>
-                </a:solidFill>
-                <a:latin typeface="Arial"/>
-              </a:rPr>
-              <a:t>Zero-trust, SOC 2 ready.</a:t>
-            </a:r>
-          </a:p>
-        </p:txBody>
-      </p:sp>
-      <p:sp>
-        <p:nvSpPr>
-          <p:cNvPr id="10" name="TextBox 9"/>
-          <p:cNvSpPr/>
-          <p:nvPr>
-            <p:ph type="body" idx="5"/>
-          </p:nvPr>
-        </p:nvSpPr>
-        <p:spPr>
-          <a:xfrm>
-            <a:off x="6233160" y="1499616"/>
-            <a:ext cx="2613660" cy="518159"/>
-          </a:xfrm>
-          <a:prstGeom prst="rect">
-            <a:avLst/>
-          </a:prstGeom>
-          <a:noFill/>
-        </p:spPr>
-        <p:txBody>
-          <a:bodyPr wrap="none" lIns="0" rIns="0">
-            <a:noAutofit/>
-          </a:bodyPr>
-          <a:lstStyle/>
-          <a:p>
-            <a:pPr algn="l"/>
-            <a:r>
-              <a:rPr sz="3400" b="1" i="0">
-                <a:solidFill>
-                  <a:srgbClr val="0A2240"/>
-                </a:solidFill>
-                <a:latin typeface="Arial"/>
-              </a:rPr>
-              <a:t>Speed</a:t>
-            </a:r>
-          </a:p>
-        </p:txBody>
-      </p:sp>
-      <p:sp>
-        <p:nvSpPr>
-          <p:cNvPr id="11" name="TextBox 10"/>
-          <p:cNvSpPr/>
-          <p:nvPr>
-            <p:ph type="body" idx="6"/>
-          </p:nvPr>
-        </p:nvSpPr>
-        <p:spPr>
-          <a:xfrm>
-            <a:off x="6233160" y="2154935"/>
-            <a:ext cx="2613660" cy="3605785"/>
-          </a:xfrm>
-          <a:prstGeom prst="rect">
-            <a:avLst/>
-          </a:prstGeom>
-          <a:noFill/>
-        </p:spPr>
-        <p:txBody>
-          <a:bodyPr wrap="square" lIns="0" rIns="0">
-            <a:noAutofit/>
-          </a:bodyPr>
-          <a:lstStyle/>
-          <a:p>
-            <a:pPr algn="l"/>
-            <a:r>
-              <a:rPr sz="3400" b="0" i="0">
-                <a:solidFill>
-                  <a:srgbClr val="0A2240"/>
-                </a:solidFill>
-                <a:latin typeface="Arial"/>
-              </a:rPr>
-              <a:t>Sub-100ms p99 latency.</a:t>
-            </a:r>
-          </a:p>
-        </p:txBody>
-      </p:sp>
-      <p:sp>
-        <p:nvSpPr>
-          <p:cNvPr id="12" name="TextBox 11"/>
-          <p:cNvSpPr/>
-          <p:nvPr>
-            <p:ph type="body" idx="7"/>
-          </p:nvPr>
-        </p:nvSpPr>
-        <p:spPr>
-          <a:xfrm>
-            <a:off x="9121140" y="1499616"/>
-            <a:ext cx="2613660" cy="518159"/>
-          </a:xfrm>
-          <a:prstGeom prst="rect">
-            <a:avLst/>
-          </a:prstGeom>
-          <a:noFill/>
-        </p:spPr>
-        <p:txBody>
-          <a:bodyPr wrap="none" lIns="0" rIns="0">
-            <a:noAutofit/>
-          </a:bodyPr>
-          <a:lstStyle/>
-          <a:p>
-            <a:pPr algn="l"/>
-            <a:r>
-              <a:rPr sz="3400" b="1" i="0">
-                <a:solidFill>
-                  <a:srgbClr val="0A2240"/>
-                </a:solidFill>
-                <a:latin typeface="Arial"/>
-              </a:rPr>
-              <a:t>APIs</a:t>
-            </a:r>
-          </a:p>
-        </p:txBody>
-      </p:sp>
-      <p:sp>
-        <p:nvSpPr>
-          <p:cNvPr id="13" name="TextBox 12"/>
-          <p:cNvSpPr/>
-          <p:nvPr>
-            <p:ph type="body" idx="8"/>
-          </p:nvPr>
-        </p:nvSpPr>
-        <p:spPr>
-          <a:xfrm>
-            <a:off x="9121140" y="2154935"/>
-            <a:ext cx="2613660" cy="3605785"/>
-          </a:xfrm>
-          <a:prstGeom prst="rect">
-            <a:avLst/>
-          </a:prstGeom>
-          <a:noFill/>
-        </p:spPr>
-        <p:txBody>
-          <a:bodyPr wrap="square" lIns="0" rIns="0">
-            <a:noAutofit/>
-          </a:bodyPr>
-          <a:lstStyle/>
-          <a:p>
-            <a:pPr algn="l"/>
-            <a:r>
-              <a:rPr sz="3400" b="0" i="0">
-                <a:solidFill>
-                  <a:srgbClr val="0A2240"/>
-                </a:solidFill>
-                <a:latin typeface="Arial"/>
-              </a:rPr>
-              <a:t>300+ open connectors.</a:t>
-            </a:r>
-          </a:p>
-        </p:txBody>
-      </p:sp>
-    </p:spTree>
-    <p:extLst>
-      <p:ext uri="{BB962C8B-B14F-4D97-AF65-F5344CB8AC3E}">
-        <p14:creationId xmlns:p14="http://schemas.microsoft.com/office/powerpoint/2010/main" val="1212999818"/>
-      </p:ext>
-    </p:extLst>
-  </p:cSld>
-  <p:clrMapOvr>
-    <a:masterClrMapping/>
-  </p:clrMapOvr>
-</p:sldLayout>
-</file>
-
-<file path=ppt/slideLayouts/slideLayout19.xml><?xml version="1.0" encoding="utf-8"?>
 <p:sldLayout xmlns:a="http://schemas.openxmlformats.org/drawingml/2006/main" xmlns:r="http://schemas.openxmlformats.org/officeDocument/2006/relationships" xmlns:p="http://schemas.openxmlformats.org/presentationml/2006/main" type="blank" preserve="1">
   <p:cSld name="slidekit · Section Divider">
     <p:bg>
@@ -8306,6 +7907,511 @@
                 <a:latin typeface="Arial"/>
               </a:rPr>
               <a:t>Where We Stand Today</a:t>
+            </a:r>
+          </a:p>
+        </p:txBody>
+      </p:sp>
+    </p:spTree>
+    <p:extLst>
+      <p:ext uri="{BB962C8B-B14F-4D97-AF65-F5344CB8AC3E}">
+        <p14:creationId xmlns:p14="http://schemas.microsoft.com/office/powerpoint/2010/main" val="1212999818"/>
+      </p:ext>
+    </p:extLst>
+  </p:cSld>
+  <p:clrMapOvr>
+    <a:masterClrMapping/>
+  </p:clrMapOvr>
+</p:sldLayout>
+</file>
+
+<file path=ppt/slideLayouts/slideLayout19.xml><?xml version="1.0" encoding="utf-8"?>
+<p:sldLayout xmlns:a="http://schemas.openxmlformats.org/drawingml/2006/main" xmlns:r="http://schemas.openxmlformats.org/officeDocument/2006/relationships" xmlns:p="http://schemas.openxmlformats.org/presentationml/2006/main" type="blank" preserve="1">
+  <p:cSld name="slidekit · Agenda">
+    <p:bg>
+      <p:bgPr>
+        <a:solidFill>
+          <a:srgbClr val="FFFFFF"/>
+        </a:solidFill>
+        <a:effectLst/>
+      </p:bgPr>
+    </p:bg>
+    <p:spTree>
+      <p:nvGrpSpPr>
+        <p:cNvPr id="1" name=""/>
+        <p:cNvGrpSpPr/>
+        <p:nvPr/>
+      </p:nvGrpSpPr>
+      <p:grpSpPr>
+        <a:xfrm>
+          <a:off x="0" y="0"/>
+          <a:ext cx="0" cy="0"/>
+          <a:chOff x="0" y="0"/>
+          <a:chExt cx="0" cy="0"/>
+        </a:xfrm>
+      </p:grpSpPr>
+      <p:sp>
+        <p:nvSpPr>
+          <p:cNvPr id="4" name="Slide Number Placeholder 3"/>
+          <p:cNvSpPr>
+            <a:spLocks noGrp="1"/>
+          </p:cNvSpPr>
+          <p:nvPr>
+            <p:ph type="sldNum" sz="quarter" idx="12"/>
+          </p:nvPr>
+        </p:nvSpPr>
+        <p:spPr>
+          <a:xfrm>
+            <a:off x="11186160" y="6035040"/>
+            <a:ext cx="548640" cy="365760"/>
+          </a:xfrm>
+        </p:spPr>
+        <p:txBody>
+          <a:bodyPr/>
+          <a:lstStyle/>
+          <a:p>
+            <a:fld id="{C1FF6DA9-008F-8B48-92A6-B652298478BF}" type="slidenum">
+              <a:rPr lang="en-US" smtClean="0"/>
+              <a:t>‹#›</a:t>
+            </a:fld>
+            <a:endParaRPr lang="en-US"/>
+          </a:p>
+        </p:txBody>
+      </p:sp>
+      <p:sp>
+        <p:nvSpPr>
+          <p:cNvPr id="5" name="TextBox 4"/>
+          <p:cNvSpPr/>
+          <p:nvPr>
+            <p:ph type="title"/>
+          </p:nvPr>
+        </p:nvSpPr>
+        <p:spPr>
+          <a:xfrm>
+            <a:off x="457200" y="457200"/>
+            <a:ext cx="11277600" cy="768096"/>
+          </a:xfrm>
+          <a:prstGeom prst="rect">
+            <a:avLst/>
+          </a:prstGeom>
+          <a:noFill/>
+        </p:spPr>
+        <p:txBody>
+          <a:bodyPr wrap="none" lIns="0" rIns="0">
+            <a:noAutofit/>
+          </a:bodyPr>
+          <a:lstStyle/>
+          <a:p>
+            <a:pPr algn="l"/>
+            <a:r>
+              <a:rPr sz="4200" b="1" i="0">
+                <a:solidFill>
+                  <a:srgbClr val="0072CE"/>
+                </a:solidFill>
+                <a:latin typeface="Arial"/>
+              </a:rPr>
+              <a:t>What We Will Cover</a:t>
+            </a:r>
+          </a:p>
+        </p:txBody>
+      </p:sp>
+      <p:sp>
+        <p:nvSpPr>
+          <p:cNvPr id="6" name="Rectangle 5"/>
+          <p:cNvSpPr/>
+          <p:nvPr>
+            <p:ph type="body" idx="1"/>
+          </p:nvPr>
+        </p:nvSpPr>
+        <p:spPr>
+          <a:xfrm>
+            <a:off x="457200" y="1280160"/>
+            <a:ext cx="11277600" cy="64008"/>
+          </a:xfrm>
+          <a:prstGeom prst="rect">
+            <a:avLst/>
+          </a:prstGeom>
+          <a:solidFill>
+            <a:srgbClr val="0072CE"/>
+          </a:solidFill>
+          <a:ln>
+            <a:noFill/>
+          </a:ln>
+          <a:effectLst/>
+        </p:spPr>
+        <p:txBody>
+          <a:bodyPr rtlCol="0" anchor="ctr"/>
+          <a:lstStyle/>
+          <a:p>
+            <a:pPr algn="ctr"/>
+          </a:p>
+        </p:txBody>
+      </p:sp>
+      <p:sp>
+        <p:nvSpPr>
+          <p:cNvPr id="7" name="TextBox 6"/>
+          <p:cNvSpPr/>
+          <p:nvPr>
+            <p:ph type="body" idx="2"/>
+          </p:nvPr>
+        </p:nvSpPr>
+        <p:spPr>
+          <a:xfrm>
+            <a:off x="457200" y="1618488"/>
+            <a:ext cx="951348" cy="518159"/>
+          </a:xfrm>
+          <a:prstGeom prst="rect">
+            <a:avLst/>
+          </a:prstGeom>
+          <a:noFill/>
+        </p:spPr>
+        <p:txBody>
+          <a:bodyPr wrap="none" lIns="0" rIns="0">
+            <a:noAutofit/>
+          </a:bodyPr>
+          <a:lstStyle/>
+          <a:p>
+            <a:pPr algn="l"/>
+            <a:r>
+              <a:rPr sz="3400" b="1" i="0">
+                <a:solidFill>
+                  <a:srgbClr val="0072CE"/>
+                </a:solidFill>
+                <a:latin typeface="Arial"/>
+              </a:rPr>
+              <a:t>01</a:t>
+            </a:r>
+          </a:p>
+        </p:txBody>
+      </p:sp>
+      <p:sp>
+        <p:nvSpPr>
+          <p:cNvPr id="8" name="TextBox 7"/>
+          <p:cNvSpPr/>
+          <p:nvPr>
+            <p:ph type="body" idx="3"/>
+          </p:nvPr>
+        </p:nvSpPr>
+        <p:spPr>
+          <a:xfrm>
+            <a:off x="1371600" y="1618488"/>
+            <a:ext cx="10363200" cy="518159"/>
+          </a:xfrm>
+          <a:prstGeom prst="rect">
+            <a:avLst/>
+          </a:prstGeom>
+          <a:noFill/>
+        </p:spPr>
+        <p:txBody>
+          <a:bodyPr wrap="none" lIns="0" rIns="0">
+            <a:noAutofit/>
+          </a:bodyPr>
+          <a:lstStyle/>
+          <a:p>
+            <a:pPr algn="l"/>
+            <a:r>
+              <a:rPr sz="3400" b="0" i="0">
+                <a:solidFill>
+                  <a:srgbClr val="0A2240"/>
+                </a:solidFill>
+                <a:latin typeface="Arial"/>
+              </a:rPr>
+              <a:t>Performance against targets</a:t>
+            </a:r>
+          </a:p>
+        </p:txBody>
+      </p:sp>
+      <p:sp>
+        <p:nvSpPr>
+          <p:cNvPr id="9" name="TextBox 8"/>
+          <p:cNvSpPr/>
+          <p:nvPr>
+            <p:ph type="body" idx="4"/>
+          </p:nvPr>
+        </p:nvSpPr>
+        <p:spPr>
+          <a:xfrm>
+            <a:off x="457200" y="2501798"/>
+            <a:ext cx="951348" cy="518159"/>
+          </a:xfrm>
+          <a:prstGeom prst="rect">
+            <a:avLst/>
+          </a:prstGeom>
+          <a:noFill/>
+        </p:spPr>
+        <p:txBody>
+          <a:bodyPr wrap="none" lIns="0" rIns="0">
+            <a:noAutofit/>
+          </a:bodyPr>
+          <a:lstStyle/>
+          <a:p>
+            <a:pPr algn="l"/>
+            <a:r>
+              <a:rPr sz="3400" b="1" i="0">
+                <a:solidFill>
+                  <a:srgbClr val="0072CE"/>
+                </a:solidFill>
+                <a:latin typeface="Arial"/>
+              </a:rPr>
+              <a:t>02</a:t>
+            </a:r>
+          </a:p>
+        </p:txBody>
+      </p:sp>
+      <p:sp>
+        <p:nvSpPr>
+          <p:cNvPr id="10" name="TextBox 9"/>
+          <p:cNvSpPr/>
+          <p:nvPr>
+            <p:ph type="body" idx="5"/>
+          </p:nvPr>
+        </p:nvSpPr>
+        <p:spPr>
+          <a:xfrm>
+            <a:off x="1371600" y="2501798"/>
+            <a:ext cx="10363200" cy="518159"/>
+          </a:xfrm>
+          <a:prstGeom prst="rect">
+            <a:avLst/>
+          </a:prstGeom>
+          <a:noFill/>
+        </p:spPr>
+        <p:txBody>
+          <a:bodyPr wrap="none" lIns="0" rIns="0">
+            <a:noAutofit/>
+          </a:bodyPr>
+          <a:lstStyle/>
+          <a:p>
+            <a:pPr algn="l"/>
+            <a:r>
+              <a:rPr sz="3400" b="0" i="0">
+                <a:solidFill>
+                  <a:srgbClr val="0A2240"/>
+                </a:solidFill>
+                <a:latin typeface="Arial"/>
+              </a:rPr>
+              <a:t>Customer and market signals</a:t>
+            </a:r>
+          </a:p>
+        </p:txBody>
+      </p:sp>
+      <p:sp>
+        <p:nvSpPr>
+          <p:cNvPr id="11" name="TextBox 10"/>
+          <p:cNvSpPr/>
+          <p:nvPr>
+            <p:ph type="body" idx="6"/>
+          </p:nvPr>
+        </p:nvSpPr>
+        <p:spPr>
+          <a:xfrm>
+            <a:off x="457200" y="3385108"/>
+            <a:ext cx="951348" cy="518159"/>
+          </a:xfrm>
+          <a:prstGeom prst="rect">
+            <a:avLst/>
+          </a:prstGeom>
+          <a:noFill/>
+        </p:spPr>
+        <p:txBody>
+          <a:bodyPr wrap="none" lIns="0" rIns="0">
+            <a:noAutofit/>
+          </a:bodyPr>
+          <a:lstStyle/>
+          <a:p>
+            <a:pPr algn="l"/>
+            <a:r>
+              <a:rPr sz="3400" b="1" i="0">
+                <a:solidFill>
+                  <a:srgbClr val="0072CE"/>
+                </a:solidFill>
+                <a:latin typeface="Arial"/>
+              </a:rPr>
+              <a:t>03</a:t>
+            </a:r>
+          </a:p>
+        </p:txBody>
+      </p:sp>
+      <p:sp>
+        <p:nvSpPr>
+          <p:cNvPr id="12" name="TextBox 11"/>
+          <p:cNvSpPr/>
+          <p:nvPr>
+            <p:ph type="body" idx="7"/>
+          </p:nvPr>
+        </p:nvSpPr>
+        <p:spPr>
+          <a:xfrm>
+            <a:off x="1371600" y="3385108"/>
+            <a:ext cx="10363200" cy="518159"/>
+          </a:xfrm>
+          <a:prstGeom prst="rect">
+            <a:avLst/>
+          </a:prstGeom>
+          <a:noFill/>
+        </p:spPr>
+        <p:txBody>
+          <a:bodyPr wrap="none" lIns="0" rIns="0">
+            <a:noAutofit/>
+          </a:bodyPr>
+          <a:lstStyle/>
+          <a:p>
+            <a:pPr algn="l"/>
+            <a:r>
+              <a:rPr sz="3400" b="0" i="0">
+                <a:solidFill>
+                  <a:srgbClr val="0A2240"/>
+                </a:solidFill>
+                <a:latin typeface="Arial"/>
+              </a:rPr>
+              <a:t>Operational health and risks</a:t>
+            </a:r>
+          </a:p>
+        </p:txBody>
+      </p:sp>
+      <p:sp>
+        <p:nvSpPr>
+          <p:cNvPr id="13" name="TextBox 12"/>
+          <p:cNvSpPr/>
+          <p:nvPr>
+            <p:ph type="body" idx="8"/>
+          </p:nvPr>
+        </p:nvSpPr>
+        <p:spPr>
+          <a:xfrm>
+            <a:off x="457200" y="4268418"/>
+            <a:ext cx="951348" cy="518159"/>
+          </a:xfrm>
+          <a:prstGeom prst="rect">
+            <a:avLst/>
+          </a:prstGeom>
+          <a:noFill/>
+        </p:spPr>
+        <p:txBody>
+          <a:bodyPr wrap="none" lIns="0" rIns="0">
+            <a:noAutofit/>
+          </a:bodyPr>
+          <a:lstStyle/>
+          <a:p>
+            <a:pPr algn="l"/>
+            <a:r>
+              <a:rPr sz="3400" b="1" i="0">
+                <a:solidFill>
+                  <a:srgbClr val="0072CE"/>
+                </a:solidFill>
+                <a:latin typeface="Arial"/>
+              </a:rPr>
+              <a:t>04</a:t>
+            </a:r>
+          </a:p>
+        </p:txBody>
+      </p:sp>
+      <p:sp>
+        <p:nvSpPr>
+          <p:cNvPr id="14" name="TextBox 13"/>
+          <p:cNvSpPr/>
+          <p:nvPr>
+            <p:ph type="body" idx="9"/>
+          </p:nvPr>
+        </p:nvSpPr>
+        <p:spPr>
+          <a:xfrm>
+            <a:off x="1371600" y="4268418"/>
+            <a:ext cx="10363200" cy="518159"/>
+          </a:xfrm>
+          <a:prstGeom prst="rect">
+            <a:avLst/>
+          </a:prstGeom>
+          <a:noFill/>
+        </p:spPr>
+        <p:txBody>
+          <a:bodyPr wrap="none" lIns="0" rIns="0">
+            <a:noAutofit/>
+          </a:bodyPr>
+          <a:lstStyle/>
+          <a:p>
+            <a:pPr algn="l"/>
+            <a:r>
+              <a:rPr sz="3400" b="0" i="0">
+                <a:solidFill>
+                  <a:srgbClr val="0A2240"/>
+                </a:solidFill>
+                <a:latin typeface="Arial"/>
+              </a:rPr>
+              <a:t>Roadmap for next quarter</a:t>
+            </a:r>
+          </a:p>
+        </p:txBody>
+      </p:sp>
+      <p:sp>
+        <p:nvSpPr>
+          <p:cNvPr id="15" name="TextBox 14"/>
+          <p:cNvSpPr/>
+          <p:nvPr>
+            <p:ph type="body" idx="13"/>
+          </p:nvPr>
+        </p:nvSpPr>
+        <p:spPr>
+          <a:xfrm>
+            <a:off x="457200" y="5151728"/>
+            <a:ext cx="951348" cy="518159"/>
+          </a:xfrm>
+          <a:prstGeom prst="rect">
+            <a:avLst/>
+          </a:prstGeom>
+          <a:noFill/>
+        </p:spPr>
+        <p:txBody>
+          <a:bodyPr wrap="none" lIns="0" rIns="0">
+            <a:noAutofit/>
+          </a:bodyPr>
+          <a:lstStyle/>
+          <a:p>
+            <a:pPr algn="l"/>
+            <a:r>
+              <a:rPr sz="3400" b="1" i="0">
+                <a:solidFill>
+                  <a:srgbClr val="0072CE"/>
+                </a:solidFill>
+                <a:latin typeface="Arial"/>
+              </a:rPr>
+              <a:t>05</a:t>
+            </a:r>
+          </a:p>
+        </p:txBody>
+      </p:sp>
+      <p:sp>
+        <p:nvSpPr>
+          <p:cNvPr id="16" name="TextBox 15"/>
+          <p:cNvSpPr/>
+          <p:nvPr>
+            <p:ph type="body" idx="14"/>
+          </p:nvPr>
+        </p:nvSpPr>
+        <p:spPr>
+          <a:xfrm>
+            <a:off x="1371600" y="5151728"/>
+            <a:ext cx="10363200" cy="518159"/>
+          </a:xfrm>
+          <a:prstGeom prst="rect">
+            <a:avLst/>
+          </a:prstGeom>
+          <a:noFill/>
+        </p:spPr>
+        <p:txBody>
+          <a:bodyPr wrap="none" lIns="0" rIns="0">
+            <a:noAutofit/>
+          </a:bodyPr>
+          <a:lstStyle/>
+          <a:p>
+            <a:pPr algn="l"/>
+            <a:r>
+              <a:rPr sz="3400" b="0" i="0">
+                <a:solidFill>
+                  <a:srgbClr val="0A2240"/>
+                </a:solidFill>
+                <a:latin typeface="Arial"/>
+              </a:rPr>
+              <a:t>Decisions we need today</a:t>
             </a:r>
           </a:p>
         </p:txBody>
@@ -8495,511 +8601,6 @@
 
 <file path=ppt/slideLayouts/slideLayout20.xml><?xml version="1.0" encoding="utf-8"?>
 <p:sldLayout xmlns:a="http://schemas.openxmlformats.org/drawingml/2006/main" xmlns:r="http://schemas.openxmlformats.org/officeDocument/2006/relationships" xmlns:p="http://schemas.openxmlformats.org/presentationml/2006/main" type="blank" preserve="1">
-  <p:cSld name="slidekit · Agenda">
-    <p:bg>
-      <p:bgPr>
-        <a:solidFill>
-          <a:srgbClr val="FFFFFF"/>
-        </a:solidFill>
-        <a:effectLst/>
-      </p:bgPr>
-    </p:bg>
-    <p:spTree>
-      <p:nvGrpSpPr>
-        <p:cNvPr id="1" name=""/>
-        <p:cNvGrpSpPr/>
-        <p:nvPr/>
-      </p:nvGrpSpPr>
-      <p:grpSpPr>
-        <a:xfrm>
-          <a:off x="0" y="0"/>
-          <a:ext cx="0" cy="0"/>
-          <a:chOff x="0" y="0"/>
-          <a:chExt cx="0" cy="0"/>
-        </a:xfrm>
-      </p:grpSpPr>
-      <p:sp>
-        <p:nvSpPr>
-          <p:cNvPr id="4" name="Slide Number Placeholder 3"/>
-          <p:cNvSpPr>
-            <a:spLocks noGrp="1"/>
-          </p:cNvSpPr>
-          <p:nvPr>
-            <p:ph type="sldNum" sz="quarter" idx="12"/>
-          </p:nvPr>
-        </p:nvSpPr>
-        <p:spPr>
-          <a:xfrm>
-            <a:off x="11186160" y="6035040"/>
-            <a:ext cx="548640" cy="365760"/>
-          </a:xfrm>
-        </p:spPr>
-        <p:txBody>
-          <a:bodyPr/>
-          <a:lstStyle/>
-          <a:p>
-            <a:fld id="{C1FF6DA9-008F-8B48-92A6-B652298478BF}" type="slidenum">
-              <a:rPr lang="en-US" smtClean="0"/>
-              <a:t>‹#›</a:t>
-            </a:fld>
-            <a:endParaRPr lang="en-US"/>
-          </a:p>
-        </p:txBody>
-      </p:sp>
-      <p:sp>
-        <p:nvSpPr>
-          <p:cNvPr id="5" name="TextBox 4"/>
-          <p:cNvSpPr/>
-          <p:nvPr>
-            <p:ph type="title"/>
-          </p:nvPr>
-        </p:nvSpPr>
-        <p:spPr>
-          <a:xfrm>
-            <a:off x="457200" y="457200"/>
-            <a:ext cx="11277600" cy="768096"/>
-          </a:xfrm>
-          <a:prstGeom prst="rect">
-            <a:avLst/>
-          </a:prstGeom>
-          <a:noFill/>
-        </p:spPr>
-        <p:txBody>
-          <a:bodyPr wrap="none" lIns="0" rIns="0">
-            <a:noAutofit/>
-          </a:bodyPr>
-          <a:lstStyle/>
-          <a:p>
-            <a:pPr algn="l"/>
-            <a:r>
-              <a:rPr sz="4200" b="1" i="0">
-                <a:solidFill>
-                  <a:srgbClr val="0072CE"/>
-                </a:solidFill>
-                <a:latin typeface="Arial"/>
-              </a:rPr>
-              <a:t>What We Will Cover</a:t>
-            </a:r>
-          </a:p>
-        </p:txBody>
-      </p:sp>
-      <p:sp>
-        <p:nvSpPr>
-          <p:cNvPr id="6" name="Rectangle 5"/>
-          <p:cNvSpPr/>
-          <p:nvPr>
-            <p:ph type="body" idx="1"/>
-          </p:nvPr>
-        </p:nvSpPr>
-        <p:spPr>
-          <a:xfrm>
-            <a:off x="457200" y="1280160"/>
-            <a:ext cx="11277600" cy="64008"/>
-          </a:xfrm>
-          <a:prstGeom prst="rect">
-            <a:avLst/>
-          </a:prstGeom>
-          <a:solidFill>
-            <a:srgbClr val="0072CE"/>
-          </a:solidFill>
-          <a:ln>
-            <a:noFill/>
-          </a:ln>
-          <a:effectLst/>
-        </p:spPr>
-        <p:txBody>
-          <a:bodyPr rtlCol="0" anchor="ctr"/>
-          <a:lstStyle/>
-          <a:p>
-            <a:pPr algn="ctr"/>
-          </a:p>
-        </p:txBody>
-      </p:sp>
-      <p:sp>
-        <p:nvSpPr>
-          <p:cNvPr id="7" name="TextBox 6"/>
-          <p:cNvSpPr/>
-          <p:nvPr>
-            <p:ph type="body" idx="2"/>
-          </p:nvPr>
-        </p:nvSpPr>
-        <p:spPr>
-          <a:xfrm>
-            <a:off x="457200" y="1618488"/>
-            <a:ext cx="951348" cy="518159"/>
-          </a:xfrm>
-          <a:prstGeom prst="rect">
-            <a:avLst/>
-          </a:prstGeom>
-          <a:noFill/>
-        </p:spPr>
-        <p:txBody>
-          <a:bodyPr wrap="none" lIns="0" rIns="0">
-            <a:noAutofit/>
-          </a:bodyPr>
-          <a:lstStyle/>
-          <a:p>
-            <a:pPr algn="l"/>
-            <a:r>
-              <a:rPr sz="3400" b="1" i="0">
-                <a:solidFill>
-                  <a:srgbClr val="0072CE"/>
-                </a:solidFill>
-                <a:latin typeface="Arial"/>
-              </a:rPr>
-              <a:t>01</a:t>
-            </a:r>
-          </a:p>
-        </p:txBody>
-      </p:sp>
-      <p:sp>
-        <p:nvSpPr>
-          <p:cNvPr id="8" name="TextBox 7"/>
-          <p:cNvSpPr/>
-          <p:nvPr>
-            <p:ph type="body" idx="3"/>
-          </p:nvPr>
-        </p:nvSpPr>
-        <p:spPr>
-          <a:xfrm>
-            <a:off x="1371600" y="1618488"/>
-            <a:ext cx="10363200" cy="518159"/>
-          </a:xfrm>
-          <a:prstGeom prst="rect">
-            <a:avLst/>
-          </a:prstGeom>
-          <a:noFill/>
-        </p:spPr>
-        <p:txBody>
-          <a:bodyPr wrap="none" lIns="0" rIns="0">
-            <a:noAutofit/>
-          </a:bodyPr>
-          <a:lstStyle/>
-          <a:p>
-            <a:pPr algn="l"/>
-            <a:r>
-              <a:rPr sz="3400" b="0" i="0">
-                <a:solidFill>
-                  <a:srgbClr val="0A2240"/>
-                </a:solidFill>
-                <a:latin typeface="Arial"/>
-              </a:rPr>
-              <a:t>Performance against targets</a:t>
-            </a:r>
-          </a:p>
-        </p:txBody>
-      </p:sp>
-      <p:sp>
-        <p:nvSpPr>
-          <p:cNvPr id="9" name="TextBox 8"/>
-          <p:cNvSpPr/>
-          <p:nvPr>
-            <p:ph type="body" idx="4"/>
-          </p:nvPr>
-        </p:nvSpPr>
-        <p:spPr>
-          <a:xfrm>
-            <a:off x="457200" y="2501798"/>
-            <a:ext cx="951348" cy="518159"/>
-          </a:xfrm>
-          <a:prstGeom prst="rect">
-            <a:avLst/>
-          </a:prstGeom>
-          <a:noFill/>
-        </p:spPr>
-        <p:txBody>
-          <a:bodyPr wrap="none" lIns="0" rIns="0">
-            <a:noAutofit/>
-          </a:bodyPr>
-          <a:lstStyle/>
-          <a:p>
-            <a:pPr algn="l"/>
-            <a:r>
-              <a:rPr sz="3400" b="1" i="0">
-                <a:solidFill>
-                  <a:srgbClr val="0072CE"/>
-                </a:solidFill>
-                <a:latin typeface="Arial"/>
-              </a:rPr>
-              <a:t>02</a:t>
-            </a:r>
-          </a:p>
-        </p:txBody>
-      </p:sp>
-      <p:sp>
-        <p:nvSpPr>
-          <p:cNvPr id="10" name="TextBox 9"/>
-          <p:cNvSpPr/>
-          <p:nvPr>
-            <p:ph type="body" idx="5"/>
-          </p:nvPr>
-        </p:nvSpPr>
-        <p:spPr>
-          <a:xfrm>
-            <a:off x="1371600" y="2501798"/>
-            <a:ext cx="10363200" cy="518159"/>
-          </a:xfrm>
-          <a:prstGeom prst="rect">
-            <a:avLst/>
-          </a:prstGeom>
-          <a:noFill/>
-        </p:spPr>
-        <p:txBody>
-          <a:bodyPr wrap="none" lIns="0" rIns="0">
-            <a:noAutofit/>
-          </a:bodyPr>
-          <a:lstStyle/>
-          <a:p>
-            <a:pPr algn="l"/>
-            <a:r>
-              <a:rPr sz="3400" b="0" i="0">
-                <a:solidFill>
-                  <a:srgbClr val="0A2240"/>
-                </a:solidFill>
-                <a:latin typeface="Arial"/>
-              </a:rPr>
-              <a:t>Customer and market signals</a:t>
-            </a:r>
-          </a:p>
-        </p:txBody>
-      </p:sp>
-      <p:sp>
-        <p:nvSpPr>
-          <p:cNvPr id="11" name="TextBox 10"/>
-          <p:cNvSpPr/>
-          <p:nvPr>
-            <p:ph type="body" idx="6"/>
-          </p:nvPr>
-        </p:nvSpPr>
-        <p:spPr>
-          <a:xfrm>
-            <a:off x="457200" y="3385108"/>
-            <a:ext cx="951348" cy="518159"/>
-          </a:xfrm>
-          <a:prstGeom prst="rect">
-            <a:avLst/>
-          </a:prstGeom>
-          <a:noFill/>
-        </p:spPr>
-        <p:txBody>
-          <a:bodyPr wrap="none" lIns="0" rIns="0">
-            <a:noAutofit/>
-          </a:bodyPr>
-          <a:lstStyle/>
-          <a:p>
-            <a:pPr algn="l"/>
-            <a:r>
-              <a:rPr sz="3400" b="1" i="0">
-                <a:solidFill>
-                  <a:srgbClr val="0072CE"/>
-                </a:solidFill>
-                <a:latin typeface="Arial"/>
-              </a:rPr>
-              <a:t>03</a:t>
-            </a:r>
-          </a:p>
-        </p:txBody>
-      </p:sp>
-      <p:sp>
-        <p:nvSpPr>
-          <p:cNvPr id="12" name="TextBox 11"/>
-          <p:cNvSpPr/>
-          <p:nvPr>
-            <p:ph type="body" idx="7"/>
-          </p:nvPr>
-        </p:nvSpPr>
-        <p:spPr>
-          <a:xfrm>
-            <a:off x="1371600" y="3385108"/>
-            <a:ext cx="10363200" cy="518159"/>
-          </a:xfrm>
-          <a:prstGeom prst="rect">
-            <a:avLst/>
-          </a:prstGeom>
-          <a:noFill/>
-        </p:spPr>
-        <p:txBody>
-          <a:bodyPr wrap="none" lIns="0" rIns="0">
-            <a:noAutofit/>
-          </a:bodyPr>
-          <a:lstStyle/>
-          <a:p>
-            <a:pPr algn="l"/>
-            <a:r>
-              <a:rPr sz="3400" b="0" i="0">
-                <a:solidFill>
-                  <a:srgbClr val="0A2240"/>
-                </a:solidFill>
-                <a:latin typeface="Arial"/>
-              </a:rPr>
-              <a:t>Operational health and risks</a:t>
-            </a:r>
-          </a:p>
-        </p:txBody>
-      </p:sp>
-      <p:sp>
-        <p:nvSpPr>
-          <p:cNvPr id="13" name="TextBox 12"/>
-          <p:cNvSpPr/>
-          <p:nvPr>
-            <p:ph type="body" idx="8"/>
-          </p:nvPr>
-        </p:nvSpPr>
-        <p:spPr>
-          <a:xfrm>
-            <a:off x="457200" y="4268418"/>
-            <a:ext cx="951348" cy="518159"/>
-          </a:xfrm>
-          <a:prstGeom prst="rect">
-            <a:avLst/>
-          </a:prstGeom>
-          <a:noFill/>
-        </p:spPr>
-        <p:txBody>
-          <a:bodyPr wrap="none" lIns="0" rIns="0">
-            <a:noAutofit/>
-          </a:bodyPr>
-          <a:lstStyle/>
-          <a:p>
-            <a:pPr algn="l"/>
-            <a:r>
-              <a:rPr sz="3400" b="1" i="0">
-                <a:solidFill>
-                  <a:srgbClr val="0072CE"/>
-                </a:solidFill>
-                <a:latin typeface="Arial"/>
-              </a:rPr>
-              <a:t>04</a:t>
-            </a:r>
-          </a:p>
-        </p:txBody>
-      </p:sp>
-      <p:sp>
-        <p:nvSpPr>
-          <p:cNvPr id="14" name="TextBox 13"/>
-          <p:cNvSpPr/>
-          <p:nvPr>
-            <p:ph type="body" idx="9"/>
-          </p:nvPr>
-        </p:nvSpPr>
-        <p:spPr>
-          <a:xfrm>
-            <a:off x="1371600" y="4268418"/>
-            <a:ext cx="10363200" cy="518159"/>
-          </a:xfrm>
-          <a:prstGeom prst="rect">
-            <a:avLst/>
-          </a:prstGeom>
-          <a:noFill/>
-        </p:spPr>
-        <p:txBody>
-          <a:bodyPr wrap="none" lIns="0" rIns="0">
-            <a:noAutofit/>
-          </a:bodyPr>
-          <a:lstStyle/>
-          <a:p>
-            <a:pPr algn="l"/>
-            <a:r>
-              <a:rPr sz="3400" b="0" i="0">
-                <a:solidFill>
-                  <a:srgbClr val="0A2240"/>
-                </a:solidFill>
-                <a:latin typeface="Arial"/>
-              </a:rPr>
-              <a:t>Roadmap for next quarter</a:t>
-            </a:r>
-          </a:p>
-        </p:txBody>
-      </p:sp>
-      <p:sp>
-        <p:nvSpPr>
-          <p:cNvPr id="15" name="TextBox 14"/>
-          <p:cNvSpPr/>
-          <p:nvPr>
-            <p:ph type="body" idx="13"/>
-          </p:nvPr>
-        </p:nvSpPr>
-        <p:spPr>
-          <a:xfrm>
-            <a:off x="457200" y="5151728"/>
-            <a:ext cx="951348" cy="518159"/>
-          </a:xfrm>
-          <a:prstGeom prst="rect">
-            <a:avLst/>
-          </a:prstGeom>
-          <a:noFill/>
-        </p:spPr>
-        <p:txBody>
-          <a:bodyPr wrap="none" lIns="0" rIns="0">
-            <a:noAutofit/>
-          </a:bodyPr>
-          <a:lstStyle/>
-          <a:p>
-            <a:pPr algn="l"/>
-            <a:r>
-              <a:rPr sz="3400" b="1" i="0">
-                <a:solidFill>
-                  <a:srgbClr val="0072CE"/>
-                </a:solidFill>
-                <a:latin typeface="Arial"/>
-              </a:rPr>
-              <a:t>05</a:t>
-            </a:r>
-          </a:p>
-        </p:txBody>
-      </p:sp>
-      <p:sp>
-        <p:nvSpPr>
-          <p:cNvPr id="16" name="TextBox 15"/>
-          <p:cNvSpPr/>
-          <p:nvPr>
-            <p:ph type="body" idx="14"/>
-          </p:nvPr>
-        </p:nvSpPr>
-        <p:spPr>
-          <a:xfrm>
-            <a:off x="1371600" y="5151728"/>
-            <a:ext cx="10363200" cy="518159"/>
-          </a:xfrm>
-          <a:prstGeom prst="rect">
-            <a:avLst/>
-          </a:prstGeom>
-          <a:noFill/>
-        </p:spPr>
-        <p:txBody>
-          <a:bodyPr wrap="none" lIns="0" rIns="0">
-            <a:noAutofit/>
-          </a:bodyPr>
-          <a:lstStyle/>
-          <a:p>
-            <a:pPr algn="l"/>
-            <a:r>
-              <a:rPr sz="3400" b="0" i="0">
-                <a:solidFill>
-                  <a:srgbClr val="0A2240"/>
-                </a:solidFill>
-                <a:latin typeface="Arial"/>
-              </a:rPr>
-              <a:t>Decisions we need today</a:t>
-            </a:r>
-          </a:p>
-        </p:txBody>
-      </p:sp>
-    </p:spTree>
-    <p:extLst>
-      <p:ext uri="{BB962C8B-B14F-4D97-AF65-F5344CB8AC3E}">
-        <p14:creationId xmlns:p14="http://schemas.microsoft.com/office/powerpoint/2010/main" val="1212999818"/>
-      </p:ext>
-    </p:extLst>
-  </p:cSld>
-  <p:clrMapOvr>
-    <a:masterClrMapping/>
-  </p:clrMapOvr>
-</p:sldLayout>
-</file>
-
-<file path=ppt/slideLayouts/slideLayout21.xml><?xml version="1.0" encoding="utf-8"?>
-<p:sldLayout xmlns:a="http://schemas.openxmlformats.org/drawingml/2006/main" xmlns:r="http://schemas.openxmlformats.org/officeDocument/2006/relationships" xmlns:p="http://schemas.openxmlformats.org/presentationml/2006/main" type="blank" preserve="1">
   <p:cSld name="slidekit · Big Number">
     <p:bg>
       <p:bgPr>
@@ -9170,7 +8771,7 @@
 </p:sldLayout>
 </file>
 
-<file path=ppt/slideLayouts/slideLayout22.xml><?xml version="1.0" encoding="utf-8"?>
+<file path=ppt/slideLayouts/slideLayout21.xml><?xml version="1.0" encoding="utf-8"?>
 <p:sldLayout xmlns:a="http://schemas.openxmlformats.org/drawingml/2006/main" xmlns:r="http://schemas.openxmlformats.org/officeDocument/2006/relationships" xmlns:p="http://schemas.openxmlformats.org/presentationml/2006/main" type="blank" preserve="1">
   <p:cSld name="slidekit · Pull Quote">
     <p:bg>
@@ -9233,8 +8834,8 @@
         </p:nvSpPr>
         <p:spPr>
           <a:xfrm>
-            <a:off x="457200" y="2301240"/>
-            <a:ext cx="128016" cy="2255520"/>
+            <a:off x="457200" y="2621280"/>
+            <a:ext cx="128016" cy="1615440"/>
           </a:xfrm>
           <a:prstGeom prst="rect">
             <a:avLst/>
@@ -9265,16 +8866,16 @@
         </p:nvSpPr>
         <p:spPr>
           <a:xfrm>
-            <a:off x="996696" y="2301240"/>
-            <a:ext cx="10738104" cy="1371600"/>
-          </a:xfrm>
-          <a:prstGeom prst="rect">
-            <a:avLst/>
-          </a:prstGeom>
-          <a:noFill/>
-        </p:spPr>
-        <p:txBody>
-          <a:bodyPr wrap="square" lIns="0" rIns="0">
+            <a:off x="996696" y="2621280"/>
+            <a:ext cx="11195304" cy="731520"/>
+          </a:xfrm>
+          <a:prstGeom prst="rect">
+            <a:avLst/>
+          </a:prstGeom>
+          <a:noFill/>
+        </p:spPr>
+        <p:txBody>
+          <a:bodyPr wrap="none" lIns="0" rIns="0">
             <a:noAutofit/>
           </a:bodyPr>
           <a:lstStyle/>
@@ -9287,7 +8888,7 @@
                 </a:solidFill>
                 <a:latin typeface="Arial"/>
               </a:rPr>
-              <a:t>"We stopped buying tools and started buying outcomes."</a:t>
+              <a:t>"We buy outcomes, not tools."</a:t>
             </a:r>
           </a:p>
         </p:txBody>
@@ -9302,7 +8903,7 @@
         </p:nvSpPr>
         <p:spPr>
           <a:xfrm>
-            <a:off x="996696" y="3947160"/>
+            <a:off x="996696" y="3627120"/>
             <a:ext cx="11195304" cy="609600"/>
           </a:xfrm>
           <a:prstGeom prst="rect">
@@ -9320,7 +8921,7 @@
             <a:r>
               <a:rPr sz="3400" b="0" i="0">
                 <a:solidFill>
-                  <a:srgbClr val="5B6B82"/>
+                  <a:srgbClr val="0A2240"/>
                 </a:solidFill>
                 <a:latin typeface="Arial"/>
               </a:rPr>
@@ -9342,7 +8943,7 @@
 </p:sldLayout>
 </file>
 
-<file path=ppt/slideLayouts/slideLayout23.xml><?xml version="1.0" encoding="utf-8"?>
+<file path=ppt/slideLayouts/slideLayout22.xml><?xml version="1.0" encoding="utf-8"?>
 <p:sldLayout xmlns:a="http://schemas.openxmlformats.org/drawingml/2006/main" xmlns:r="http://schemas.openxmlformats.org/officeDocument/2006/relationships" xmlns:p="http://schemas.openxmlformats.org/presentationml/2006/main" type="blank" preserve="1">
   <p:cSld name="slidekit · Definition">
     <p:bg>
@@ -9405,8 +9006,8 @@
         </p:nvSpPr>
         <p:spPr>
           <a:xfrm>
-            <a:off x="457200" y="1965960"/>
-            <a:ext cx="128016" cy="2926080"/>
+            <a:off x="457200" y="2484120"/>
+            <a:ext cx="128016" cy="1889760"/>
           </a:xfrm>
           <a:prstGeom prst="rect">
             <a:avLst/>
@@ -9437,7 +9038,7 @@
         </p:nvSpPr>
         <p:spPr>
           <a:xfrm>
-            <a:off x="996696" y="1965960"/>
+            <a:off x="996696" y="2484120"/>
             <a:ext cx="11195304" cy="1005840"/>
           </a:xfrm>
           <a:prstGeom prst="rect">
@@ -9474,16 +9075,16 @@
         </p:nvSpPr>
         <p:spPr>
           <a:xfrm>
-            <a:off x="996696" y="3246120"/>
-            <a:ext cx="10738104" cy="1645920"/>
-          </a:xfrm>
-          <a:prstGeom prst="rect">
-            <a:avLst/>
-          </a:prstGeom>
-          <a:noFill/>
-        </p:spPr>
-        <p:txBody>
-          <a:bodyPr wrap="square" lIns="0" rIns="0">
+            <a:off x="996696" y="3764280"/>
+            <a:ext cx="11195304" cy="609600"/>
+          </a:xfrm>
+          <a:prstGeom prst="rect">
+            <a:avLst/>
+          </a:prstGeom>
+          <a:noFill/>
+        </p:spPr>
+        <p:txBody>
+          <a:bodyPr wrap="none" lIns="0" rIns="0">
             <a:noAutofit/>
           </a:bodyPr>
           <a:lstStyle/>
@@ -9496,7 +9097,7 @@
                 </a:solidFill>
                 <a:latin typeface="Arial"/>
               </a:rPr>
-              <a:t>The percentage of recurring revenue retained from existing customers over a period, including expansion and after churn.</a:t>
+              <a:t>Revenue kept from existing customers.</a:t>
             </a:r>
           </a:p>
         </p:txBody>
@@ -9514,7 +9115,7 @@
 </p:sldLayout>
 </file>
 
-<file path=ppt/slideLayouts/slideLayout24.xml><?xml version="1.0" encoding="utf-8"?>
+<file path=ppt/slideLayouts/slideLayout23.xml><?xml version="1.0" encoding="utf-8"?>
 <p:sldLayout xmlns:a="http://schemas.openxmlformats.org/drawingml/2006/main" xmlns:r="http://schemas.openxmlformats.org/officeDocument/2006/relationships" xmlns:p="http://schemas.openxmlformats.org/presentationml/2006/main" type="blank" preserve="1">
   <p:cSld name="slidekit · Question">
     <p:bg>
@@ -9577,8 +9178,8 @@
         </p:nvSpPr>
         <p:spPr>
           <a:xfrm>
-            <a:off x="457200" y="2011680"/>
-            <a:ext cx="128016" cy="2834640"/>
+            <a:off x="457200" y="2926080"/>
+            <a:ext cx="128016" cy="1005840"/>
           </a:xfrm>
           <a:prstGeom prst="rect">
             <a:avLst/>
@@ -9609,16 +9210,16 @@
         </p:nvSpPr>
         <p:spPr>
           <a:xfrm>
-            <a:off x="996696" y="2011680"/>
-            <a:ext cx="10738104" cy="2834640"/>
-          </a:xfrm>
-          <a:prstGeom prst="rect">
-            <a:avLst/>
-          </a:prstGeom>
-          <a:noFill/>
-        </p:spPr>
-        <p:txBody>
-          <a:bodyPr wrap="square" lIns="0" rIns="0">
+            <a:off x="996696" y="2926080"/>
+            <a:ext cx="11195304" cy="1005840"/>
+          </a:xfrm>
+          <a:prstGeom prst="rect">
+            <a:avLst/>
+          </a:prstGeom>
+          <a:noFill/>
+        </p:spPr>
+        <p:txBody>
+          <a:bodyPr wrap="none" lIns="0" rIns="0">
             <a:noAutofit/>
           </a:bodyPr>
           <a:lstStyle/>
@@ -9631,7 +9232,7 @@
                 </a:solidFill>
                 <a:latin typeface="Arial"/>
               </a:rPr>
-              <a:t>What would we build if we trusted our customers completely?</a:t>
+              <a:t>What if we trusted users?</a:t>
             </a:r>
           </a:p>
         </p:txBody>
@@ -9649,7 +9250,7 @@
 </p:sldLayout>
 </file>
 
-<file path=ppt/slideLayouts/slideLayout25.xml><?xml version="1.0" encoding="utf-8"?>
+<file path=ppt/slideLayouts/slideLayout24.xml><?xml version="1.0" encoding="utf-8"?>
 <p:sldLayout xmlns:a="http://schemas.openxmlformats.org/drawingml/2006/main" xmlns:r="http://schemas.openxmlformats.org/officeDocument/2006/relationships" xmlns:p="http://schemas.openxmlformats.org/presentationml/2006/main" type="blank" preserve="1">
   <p:cSld name="slidekit · Bullet List">
     <p:bg>
@@ -9863,7 +9464,7 @@
 </p:sldLayout>
 </file>
 
-<file path=ppt/slideLayouts/slideLayout26.xml><?xml version="1.0" encoding="utf-8"?>
+<file path=ppt/slideLayouts/slideLayout25.xml><?xml version="1.0" encoding="utf-8"?>
 <p:sldLayout xmlns:a="http://schemas.openxmlformats.org/drawingml/2006/main" xmlns:r="http://schemas.openxmlformats.org/officeDocument/2006/relationships" xmlns:p="http://schemas.openxmlformats.org/presentationml/2006/main" type="blank" preserve="1">
   <p:cSld name="slidekit · Code Block">
     <p:bg>
@@ -9933,7 +9534,7 @@
             <a:avLst/>
           </a:prstGeom>
           <a:solidFill>
-            <a:srgbClr val="FF5F56"/>
+            <a:srgbClr val="FFFFFF"/>
           </a:solidFill>
           <a:ln>
             <a:noFill/>
@@ -9965,7 +9566,7 @@
             <a:avLst/>
           </a:prstGeom>
           <a:solidFill>
-            <a:srgbClr val="FFBD2E"/>
+            <a:srgbClr val="FFFFFF"/>
           </a:solidFill>
           <a:ln>
             <a:noFill/>
@@ -9997,7 +9598,7 @@
             <a:avLst/>
           </a:prstGeom>
           <a:solidFill>
-            <a:srgbClr val="27C93F"/>
+            <a:srgbClr val="FFFFFF"/>
           </a:solidFill>
           <a:ln>
             <a:noFill/>
@@ -10040,7 +9641,7 @@
             <a:r>
               <a:rPr sz="4200" b="0" i="0">
                 <a:solidFill>
-                  <a:srgbClr val="D4D4D4"/>
+                  <a:srgbClr val="FFFFFF"/>
                 </a:solidFill>
                 <a:latin typeface="Arial"/>
               </a:rPr>
@@ -10077,7 +9678,7 @@
             <a:r>
               <a:rPr sz="3400" b="0" i="0">
                 <a:solidFill>
-                  <a:srgbClr val="6A9955"/>
+                  <a:srgbClr val="FFFFFF"/>
                 </a:solidFill>
                 <a:latin typeface="Arial"/>
               </a:rPr>
@@ -10134,7 +9735,7 @@
         <p:spPr>
           <a:xfrm>
             <a:off x="1057461" y="2356103"/>
-            <a:ext cx="302848" cy="518159"/>
+            <a:ext cx="2524382" cy="518159"/>
           </a:xfrm>
           <a:prstGeom prst="rect">
             <a:avLst/>
@@ -10151,11 +9752,11 @@
             <a:r>
               <a:rPr sz="3400" b="0" i="0">
                 <a:solidFill>
-                  <a:srgbClr val="D4D4D4"/>
-                </a:solidFill>
-                <a:latin typeface="Arial"/>
-              </a:rPr>
-              <a:t> </a:t>
+                  <a:srgbClr val="FFFFFF"/>
+                </a:solidFill>
+                <a:latin typeface="Arial"/>
+              </a:rPr>
+              <a:t> main():</a:t>
             </a:r>
           </a:p>
         </p:txBody>
@@ -10170,8 +9771,8 @@
         </p:nvSpPr>
         <p:spPr>
           <a:xfrm>
-            <a:off x="1177429" y="2356103"/>
-            <a:ext cx="1680348" cy="518159"/>
+            <a:off x="457200" y="2874262"/>
+            <a:ext cx="7046475" cy="518159"/>
           </a:xfrm>
           <a:prstGeom prst="rect">
             <a:avLst/>
@@ -10188,11 +9789,11 @@
             <a:r>
               <a:rPr sz="3400" b="0" i="0">
                 <a:solidFill>
-                  <a:srgbClr val="DCDCAA"/>
-                </a:solidFill>
-                <a:latin typeface="Arial"/>
-              </a:rPr>
-              <a:t>main</a:t>
+                  <a:srgbClr val="FFFFFF"/>
+                </a:solidFill>
+                <a:latin typeface="Arial"/>
+              </a:rPr>
+              <a:t>    print("Hello, world!")</a:t>
             </a:r>
           </a:p>
         </p:txBody>
@@ -10207,8 +9808,8 @@
         </p:nvSpPr>
         <p:spPr>
           <a:xfrm>
-            <a:off x="2113347" y="2356103"/>
-            <a:ext cx="834964" cy="518159"/>
+            <a:off x="457200" y="3910580"/>
+            <a:ext cx="2140486" cy="518159"/>
           </a:xfrm>
           <a:prstGeom prst="rect">
             <a:avLst/>
@@ -10225,11 +9826,11 @@
             <a:r>
               <a:rPr sz="3400" b="0" i="0">
                 <a:solidFill>
-                  <a:srgbClr val="D4D4D4"/>
-                </a:solidFill>
-                <a:latin typeface="Arial"/>
-              </a:rPr>
-              <a:t>():</a:t>
+                  <a:srgbClr val="FFFFFF"/>
+                </a:solidFill>
+                <a:latin typeface="Arial"/>
+              </a:rPr>
+              <a:t>main()</a:t>
             </a:r>
           </a:p>
         </p:txBody>
@@ -10244,8 +9845,8 @@
         </p:nvSpPr>
         <p:spPr>
           <a:xfrm>
-            <a:off x="457200" y="2874262"/>
-            <a:ext cx="662751" cy="518159"/>
+            <a:off x="457200" y="4946898"/>
+            <a:ext cx="567115" cy="518159"/>
           </a:xfrm>
           <a:prstGeom prst="rect">
             <a:avLst/>
@@ -10262,11 +9863,11 @@
             <a:r>
               <a:rPr sz="3400" b="0" i="0">
                 <a:solidFill>
-                  <a:srgbClr val="D4D4D4"/>
-                </a:solidFill>
-                <a:latin typeface="Arial"/>
-              </a:rPr>
-              <a:t>    </a:t>
+                  <a:srgbClr val="569CD6"/>
+                </a:solidFill>
+                <a:latin typeface="Arial"/>
+              </a:rPr>
+              <a:t>$</a:t>
             </a:r>
           </a:p>
         </p:txBody>
@@ -10281,8 +9882,8 @@
         </p:nvSpPr>
         <p:spPr>
           <a:xfrm>
-            <a:off x="937071" y="2874262"/>
-            <a:ext cx="1526857" cy="518159"/>
+            <a:off x="697347" y="4946898"/>
+            <a:ext cx="5022412" cy="518159"/>
           </a:xfrm>
           <a:prstGeom prst="rect">
             <a:avLst/>
@@ -10299,11 +9900,11 @@
             <a:r>
               <a:rPr sz="3400" b="0" i="0">
                 <a:solidFill>
-                  <a:srgbClr val="DCDCAA"/>
-                </a:solidFill>
-                <a:latin typeface="Arial"/>
-              </a:rPr>
-              <a:t>print</a:t>
+                  <a:srgbClr val="FFFFFF"/>
+                </a:solidFill>
+                <a:latin typeface="Arial"/>
+              </a:rPr>
+              <a:t> python hello.py</a:t>
             </a:r>
           </a:p>
         </p:txBody>
@@ -10318,265 +9919,6 @@
         </p:nvSpPr>
         <p:spPr>
           <a:xfrm>
-            <a:off x="1777057" y="2874262"/>
-            <a:ext cx="412948" cy="518159"/>
-          </a:xfrm>
-          <a:prstGeom prst="rect">
-            <a:avLst/>
-          </a:prstGeom>
-          <a:noFill/>
-        </p:spPr>
-        <p:txBody>
-          <a:bodyPr wrap="none" lIns="0" rIns="0">
-            <a:noAutofit/>
-          </a:bodyPr>
-          <a:lstStyle/>
-          <a:p>
-            <a:pPr algn="l"/>
-            <a:r>
-              <a:rPr sz="3400" b="0" i="0">
-                <a:solidFill>
-                  <a:srgbClr val="D4D4D4"/>
-                </a:solidFill>
-                <a:latin typeface="Arial"/>
-              </a:rPr>
-              <a:t>(</a:t>
-            </a:r>
-          </a:p>
-        </p:txBody>
-      </p:sp>
-      <p:sp>
-        <p:nvSpPr>
-          <p:cNvPr id="17" name="TextBox 16"/>
-          <p:cNvSpPr/>
-          <p:nvPr>
-            <p:ph type="body" idx="16"/>
-          </p:nvPr>
-        </p:nvSpPr>
-        <p:spPr>
-          <a:xfrm>
-            <a:off x="1920850" y="2874262"/>
-            <a:ext cx="4474566" cy="518159"/>
-          </a:xfrm>
-          <a:prstGeom prst="rect">
-            <a:avLst/>
-          </a:prstGeom>
-          <a:noFill/>
-        </p:spPr>
-        <p:txBody>
-          <a:bodyPr wrap="none" lIns="0" rIns="0">
-            <a:noAutofit/>
-          </a:bodyPr>
-          <a:lstStyle/>
-          <a:p>
-            <a:pPr algn="l"/>
-            <a:r>
-              <a:rPr sz="3400" b="0" i="0">
-                <a:solidFill>
-                  <a:srgbClr val="CE9178"/>
-                </a:solidFill>
-                <a:latin typeface="Arial"/>
-              </a:rPr>
-              <a:t>"Hello, world!"</a:t>
-            </a:r>
-          </a:p>
-        </p:txBody>
-      </p:sp>
-      <p:sp>
-        <p:nvSpPr>
-          <p:cNvPr id="18" name="TextBox 17"/>
-          <p:cNvSpPr/>
-          <p:nvPr>
-            <p:ph type="body" idx="17"/>
-          </p:nvPr>
-        </p:nvSpPr>
-        <p:spPr>
-          <a:xfrm>
-            <a:off x="4603155" y="2874262"/>
-            <a:ext cx="412948" cy="518159"/>
-          </a:xfrm>
-          <a:prstGeom prst="rect">
-            <a:avLst/>
-          </a:prstGeom>
-          <a:noFill/>
-        </p:spPr>
-        <p:txBody>
-          <a:bodyPr wrap="none" lIns="0" rIns="0">
-            <a:noAutofit/>
-          </a:bodyPr>
-          <a:lstStyle/>
-          <a:p>
-            <a:pPr algn="l"/>
-            <a:r>
-              <a:rPr sz="3400" b="0" i="0">
-                <a:solidFill>
-                  <a:srgbClr val="D4D4D4"/>
-                </a:solidFill>
-                <a:latin typeface="Arial"/>
-              </a:rPr>
-              <a:t>)</a:t>
-            </a:r>
-          </a:p>
-        </p:txBody>
-      </p:sp>
-      <p:sp>
-        <p:nvSpPr>
-          <p:cNvPr id="19" name="TextBox 18"/>
-          <p:cNvSpPr/>
-          <p:nvPr>
-            <p:ph type="body" idx="18"/>
-          </p:nvPr>
-        </p:nvSpPr>
-        <p:spPr>
-          <a:xfrm>
-            <a:off x="457200" y="3910580"/>
-            <a:ext cx="1680348" cy="518159"/>
-          </a:xfrm>
-          <a:prstGeom prst="rect">
-            <a:avLst/>
-          </a:prstGeom>
-          <a:noFill/>
-        </p:spPr>
-        <p:txBody>
-          <a:bodyPr wrap="none" lIns="0" rIns="0">
-            <a:noAutofit/>
-          </a:bodyPr>
-          <a:lstStyle/>
-          <a:p>
-            <a:pPr algn="l"/>
-            <a:r>
-              <a:rPr sz="3400" b="0" i="0">
-                <a:solidFill>
-                  <a:srgbClr val="DCDCAA"/>
-                </a:solidFill>
-                <a:latin typeface="Arial"/>
-              </a:rPr>
-              <a:t>main</a:t>
-            </a:r>
-          </a:p>
-        </p:txBody>
-      </p:sp>
-      <p:sp>
-        <p:nvSpPr>
-          <p:cNvPr id="20" name="TextBox 19"/>
-          <p:cNvSpPr/>
-          <p:nvPr>
-            <p:ph type="body" idx="19"/>
-          </p:nvPr>
-        </p:nvSpPr>
-        <p:spPr>
-          <a:xfrm>
-            <a:off x="1393118" y="3910580"/>
-            <a:ext cx="643017" cy="518159"/>
-          </a:xfrm>
-          <a:prstGeom prst="rect">
-            <a:avLst/>
-          </a:prstGeom>
-          <a:noFill/>
-        </p:spPr>
-        <p:txBody>
-          <a:bodyPr wrap="none" lIns="0" rIns="0">
-            <a:noAutofit/>
-          </a:bodyPr>
-          <a:lstStyle/>
-          <a:p>
-            <a:pPr algn="l"/>
-            <a:r>
-              <a:rPr sz="3400" b="0" i="0">
-                <a:solidFill>
-                  <a:srgbClr val="D4D4D4"/>
-                </a:solidFill>
-                <a:latin typeface="Arial"/>
-              </a:rPr>
-              <a:t>()</a:t>
-            </a:r>
-          </a:p>
-        </p:txBody>
-      </p:sp>
-      <p:sp>
-        <p:nvSpPr>
-          <p:cNvPr id="21" name="TextBox 20"/>
-          <p:cNvSpPr/>
-          <p:nvPr>
-            <p:ph type="body" idx="20"/>
-          </p:nvPr>
-        </p:nvSpPr>
-        <p:spPr>
-          <a:xfrm>
-            <a:off x="457200" y="4946898"/>
-            <a:ext cx="567115" cy="518159"/>
-          </a:xfrm>
-          <a:prstGeom prst="rect">
-            <a:avLst/>
-          </a:prstGeom>
-          <a:noFill/>
-        </p:spPr>
-        <p:txBody>
-          <a:bodyPr wrap="none" lIns="0" rIns="0">
-            <a:noAutofit/>
-          </a:bodyPr>
-          <a:lstStyle/>
-          <a:p>
-            <a:pPr algn="l"/>
-            <a:r>
-              <a:rPr sz="3400" b="0" i="0">
-                <a:solidFill>
-                  <a:srgbClr val="4EC9B0"/>
-                </a:solidFill>
-                <a:latin typeface="Arial"/>
-              </a:rPr>
-              <a:t>$</a:t>
-            </a:r>
-          </a:p>
-        </p:txBody>
-      </p:sp>
-      <p:sp>
-        <p:nvSpPr>
-          <p:cNvPr id="22" name="TextBox 21"/>
-          <p:cNvSpPr/>
-          <p:nvPr>
-            <p:ph type="body" idx="21"/>
-          </p:nvPr>
-        </p:nvSpPr>
-        <p:spPr>
-          <a:xfrm>
-            <a:off x="697347" y="4946898"/>
-            <a:ext cx="5022412" cy="518159"/>
-          </a:xfrm>
-          <a:prstGeom prst="rect">
-            <a:avLst/>
-          </a:prstGeom>
-          <a:noFill/>
-        </p:spPr>
-        <p:txBody>
-          <a:bodyPr wrap="none" lIns="0" rIns="0">
-            <a:noAutofit/>
-          </a:bodyPr>
-          <a:lstStyle/>
-          <a:p>
-            <a:pPr algn="l"/>
-            <a:r>
-              <a:rPr sz="3400" b="0" i="0">
-                <a:solidFill>
-                  <a:srgbClr val="D4D4D4"/>
-                </a:solidFill>
-                <a:latin typeface="Arial"/>
-              </a:rPr>
-              <a:t> python hello.py</a:t>
-            </a:r>
-          </a:p>
-        </p:txBody>
-      </p:sp>
-      <p:sp>
-        <p:nvSpPr>
-          <p:cNvPr id="23" name="TextBox 22"/>
-          <p:cNvSpPr/>
-          <p:nvPr>
-            <p:ph type="body" idx="22"/>
-          </p:nvPr>
-        </p:nvSpPr>
-        <p:spPr>
-          <a:xfrm>
             <a:off x="457200" y="5465057"/>
             <a:ext cx="3984068" cy="518159"/>
           </a:xfrm>
@@ -10595,7 +9937,7 @@
             <a:r>
               <a:rPr sz="3400" b="0" i="0">
                 <a:solidFill>
-                  <a:srgbClr val="D4D4D4"/>
+                  <a:srgbClr val="FFFFFF"/>
                 </a:solidFill>
                 <a:latin typeface="Arial"/>
               </a:rPr>
@@ -10617,7 +9959,7 @@
 </p:sldLayout>
 </file>
 
-<file path=ppt/slideLayouts/slideLayout27.xml><?xml version="1.0" encoding="utf-8"?>
+<file path=ppt/slideLayouts/slideLayout26.xml><?xml version="1.0" encoding="utf-8"?>
 <p:sldLayout xmlns:a="http://schemas.openxmlformats.org/drawingml/2006/main" xmlns:r="http://schemas.openxmlformats.org/officeDocument/2006/relationships" xmlns:p="http://schemas.openxmlformats.org/presentationml/2006/main" type="blank" preserve="1">
   <p:cSld name="slidekit · File Tree">
     <p:bg>
@@ -10726,7 +10068,7 @@
             </a:avLst>
           </a:prstGeom>
           <a:solidFill>
-            <a:srgbClr val="0C1A1C"/>
+            <a:srgbClr val="0A2240"/>
           </a:solidFill>
           <a:ln>
             <a:noFill/>
@@ -10769,7 +10111,7 @@
             <a:r>
               <a:rPr sz="2600" b="1" i="0">
                 <a:solidFill>
-                  <a:srgbClr val="569CD6"/>
+                  <a:srgbClr val="0072CE"/>
                 </a:solidFill>
                 <a:latin typeface="Courier New"/>
               </a:rPr>
@@ -10806,7 +10148,7 @@
             <a:r>
               <a:rPr sz="2600" b="0" i="0">
                 <a:solidFill>
-                  <a:srgbClr val="55707A"/>
+                  <a:srgbClr val="0072CE"/>
                 </a:solidFill>
                 <a:latin typeface="Courier New"/>
               </a:rPr>
@@ -10843,7 +10185,7 @@
             <a:r>
               <a:rPr sz="2600" b="1" i="0">
                 <a:solidFill>
-                  <a:srgbClr val="569CD6"/>
+                  <a:srgbClr val="0072CE"/>
                 </a:solidFill>
                 <a:latin typeface="Courier New"/>
               </a:rPr>
@@ -10880,7 +10222,7 @@
             <a:r>
               <a:rPr sz="2600" b="0" i="0">
                 <a:solidFill>
-                  <a:srgbClr val="55707A"/>
+                  <a:srgbClr val="0072CE"/>
                 </a:solidFill>
                 <a:latin typeface="Courier New"/>
               </a:rPr>
@@ -10917,7 +10259,7 @@
             <a:r>
               <a:rPr sz="2600" b="1" i="0">
                 <a:solidFill>
-                  <a:srgbClr val="569CD6"/>
+                  <a:srgbClr val="0072CE"/>
                 </a:solidFill>
                 <a:latin typeface="Courier New"/>
               </a:rPr>
@@ -10954,7 +10296,7 @@
             <a:r>
               <a:rPr sz="2600" b="0" i="0">
                 <a:solidFill>
-                  <a:srgbClr val="55707A"/>
+                  <a:srgbClr val="0072CE"/>
                 </a:solidFill>
                 <a:latin typeface="Courier New"/>
               </a:rPr>
@@ -10991,7 +10333,7 @@
             <a:r>
               <a:rPr sz="2600" b="0" i="0">
                 <a:solidFill>
-                  <a:srgbClr val="D4D4D4"/>
+                  <a:srgbClr val="FFFFFF"/>
                 </a:solidFill>
                 <a:latin typeface="Courier New"/>
               </a:rPr>
@@ -11028,7 +10370,7 @@
             <a:r>
               <a:rPr sz="2600" b="0" i="0">
                 <a:solidFill>
-                  <a:srgbClr val="55707A"/>
+                  <a:srgbClr val="0072CE"/>
                 </a:solidFill>
                 <a:latin typeface="Courier New"/>
               </a:rPr>
@@ -11065,7 +10407,7 @@
             <a:r>
               <a:rPr sz="2600" b="0" i="0">
                 <a:solidFill>
-                  <a:srgbClr val="D4D4D4"/>
+                  <a:srgbClr val="FFFFFF"/>
                 </a:solidFill>
                 <a:latin typeface="Courier New"/>
               </a:rPr>
@@ -11102,7 +10444,7 @@
             <a:r>
               <a:rPr sz="2600" b="0" i="0">
                 <a:solidFill>
-                  <a:srgbClr val="55707A"/>
+                  <a:srgbClr val="0072CE"/>
                 </a:solidFill>
                 <a:latin typeface="Courier New"/>
               </a:rPr>
@@ -11139,7 +10481,7 @@
             <a:r>
               <a:rPr sz="2600" b="0" i="0">
                 <a:solidFill>
-                  <a:srgbClr val="D4D4D4"/>
+                  <a:srgbClr val="FFFFFF"/>
                 </a:solidFill>
                 <a:latin typeface="Courier New"/>
               </a:rPr>
@@ -11176,7 +10518,7 @@
             <a:r>
               <a:rPr sz="2600" b="0" i="0">
                 <a:solidFill>
-                  <a:srgbClr val="55707A"/>
+                  <a:srgbClr val="0072CE"/>
                 </a:solidFill>
                 <a:latin typeface="Courier New"/>
               </a:rPr>
@@ -11213,7 +10555,7 @@
             <a:r>
               <a:rPr sz="2600" b="0" i="0">
                 <a:solidFill>
-                  <a:srgbClr val="D4D4D4"/>
+                  <a:srgbClr val="FFFFFF"/>
                 </a:solidFill>
                 <a:latin typeface="Courier New"/>
               </a:rPr>
@@ -11250,7 +10592,7 @@
             <a:r>
               <a:rPr sz="2600" b="0" i="0">
                 <a:solidFill>
-                  <a:srgbClr val="55707A"/>
+                  <a:srgbClr val="0072CE"/>
                 </a:solidFill>
                 <a:latin typeface="Courier New"/>
               </a:rPr>
@@ -11287,7 +10629,7 @@
             <a:r>
               <a:rPr sz="2600" b="0" i="0">
                 <a:solidFill>
-                  <a:srgbClr val="D4D4D4"/>
+                  <a:srgbClr val="FFFFFF"/>
                 </a:solidFill>
                 <a:latin typeface="Courier New"/>
               </a:rPr>
@@ -11309,7 +10651,7 @@
 </p:sldLayout>
 </file>
 
-<file path=ppt/slideLayouts/slideLayout28.xml><?xml version="1.0" encoding="utf-8"?>
+<file path=ppt/slideLayouts/slideLayout27.xml><?xml version="1.0" encoding="utf-8"?>
 <p:sldLayout xmlns:a="http://schemas.openxmlformats.org/drawingml/2006/main" xmlns:r="http://schemas.openxmlformats.org/officeDocument/2006/relationships" xmlns:p="http://schemas.openxmlformats.org/presentationml/2006/main" type="blank" preserve="1">
   <p:cSld name="slidekit · Numbered Steps">
     <p:bg>
@@ -11427,7 +10769,7 @@
             <a:r>
               <a:rPr sz="4200" b="1" i="0">
                 <a:solidFill>
-                  <a:srgbClr val="123A6B"/>
+                  <a:srgbClr val="0072CE"/>
                 </a:solidFill>
                 <a:latin typeface="Arial"/>
               </a:rPr>
@@ -11464,7 +10806,7 @@
             <a:r>
               <a:rPr sz="4200" b="1" i="0">
                 <a:solidFill>
-                  <a:srgbClr val="123A6B"/>
+                  <a:srgbClr val="0072CE"/>
                 </a:solidFill>
                 <a:latin typeface="Arial"/>
               </a:rPr>
@@ -11538,7 +10880,7 @@
             <a:r>
               <a:rPr sz="4200" b="1" i="0">
                 <a:solidFill>
-                  <a:srgbClr val="123A6B"/>
+                  <a:srgbClr val="0072CE"/>
                 </a:solidFill>
                 <a:latin typeface="Arial"/>
               </a:rPr>
@@ -11575,7 +10917,7 @@
             <a:r>
               <a:rPr sz="4200" b="1" i="0">
                 <a:solidFill>
-                  <a:srgbClr val="123A6B"/>
+                  <a:srgbClr val="0072CE"/>
                 </a:solidFill>
                 <a:latin typeface="Arial"/>
               </a:rPr>
@@ -11649,7 +10991,7 @@
             <a:r>
               <a:rPr sz="4200" b="1" i="0">
                 <a:solidFill>
-                  <a:srgbClr val="123A6B"/>
+                  <a:srgbClr val="0072CE"/>
                 </a:solidFill>
                 <a:latin typeface="Arial"/>
               </a:rPr>
@@ -11686,7 +11028,7 @@
             <a:r>
               <a:rPr sz="4200" b="1" i="0">
                 <a:solidFill>
-                  <a:srgbClr val="123A6B"/>
+                  <a:srgbClr val="0072CE"/>
                 </a:solidFill>
                 <a:latin typeface="Arial"/>
               </a:rPr>
@@ -11745,7 +11087,7 @@
 </p:sldLayout>
 </file>
 
-<file path=ppt/slideLayouts/slideLayout29.xml><?xml version="1.0" encoding="utf-8"?>
+<file path=ppt/slideLayouts/slideLayout28.xml><?xml version="1.0" encoding="utf-8"?>
 <p:sldLayout xmlns:a="http://schemas.openxmlformats.org/drawingml/2006/main" xmlns:r="http://schemas.openxmlformats.org/officeDocument/2006/relationships" xmlns:p="http://schemas.openxmlformats.org/presentationml/2006/main" type="blank" preserve="1">
   <p:cSld name="slidekit · Two Panel List">
     <p:bg>
@@ -11863,7 +11205,7 @@
             <a:r>
               <a:rPr sz="3400" b="1" i="0">
                 <a:solidFill>
-                  <a:srgbClr val="123A6B"/>
+                  <a:srgbClr val="0072CE"/>
                 </a:solidFill>
                 <a:latin typeface="Arial"/>
               </a:rPr>
@@ -11882,14 +11224,14 @@
         </p:nvSpPr>
         <p:spPr>
           <a:xfrm>
-            <a:off x="548640" y="2176271"/>
-            <a:ext cx="1650492" cy="54864"/>
+            <a:off x="457200" y="2176271"/>
+            <a:ext cx="1367718" cy="54864"/>
           </a:xfrm>
           <a:prstGeom prst="rect">
             <a:avLst/>
           </a:prstGeom>
           <a:solidFill>
-            <a:srgbClr val="123A6B"/>
+            <a:srgbClr val="0072CE"/>
           </a:solidFill>
           <a:ln>
             <a:noFill/>
@@ -11932,7 +11274,7 @@
             <a:r>
               <a:rPr sz="3400" b="1" i="0">
                 <a:solidFill>
-                  <a:srgbClr val="5B6B82"/>
+                  <a:srgbClr val="0A2240"/>
                 </a:solidFill>
                 <a:latin typeface="Arial"/>
               </a:rPr>
@@ -11951,14 +11293,14 @@
         </p:nvSpPr>
         <p:spPr>
           <a:xfrm>
-            <a:off x="6324600" y="2176271"/>
-            <a:ext cx="1650492" cy="54864"/>
+            <a:off x="6233160" y="2176271"/>
+            <a:ext cx="1007604" cy="54864"/>
           </a:xfrm>
           <a:prstGeom prst="rect">
             <a:avLst/>
           </a:prstGeom>
           <a:solidFill>
-            <a:srgbClr val="5B6B82"/>
+            <a:srgbClr val="0A2240"/>
           </a:solidFill>
           <a:ln>
             <a:noFill/>
@@ -12191,6 +11533,294 @@
                 <a:latin typeface="Arial"/>
               </a:rPr>
               <a:t>In-product live chat</a:t>
+            </a:r>
+          </a:p>
+        </p:txBody>
+      </p:sp>
+    </p:spTree>
+    <p:extLst>
+      <p:ext uri="{BB962C8B-B14F-4D97-AF65-F5344CB8AC3E}">
+        <p14:creationId xmlns:p14="http://schemas.microsoft.com/office/powerpoint/2010/main" val="1212999818"/>
+      </p:ext>
+    </p:extLst>
+  </p:cSld>
+  <p:clrMapOvr>
+    <a:masterClrMapping/>
+  </p:clrMapOvr>
+</p:sldLayout>
+</file>
+
+<file path=ppt/slideLayouts/slideLayout29.xml><?xml version="1.0" encoding="utf-8"?>
+<p:sldLayout xmlns:a="http://schemas.openxmlformats.org/drawingml/2006/main" xmlns:r="http://schemas.openxmlformats.org/officeDocument/2006/relationships" xmlns:p="http://schemas.openxmlformats.org/presentationml/2006/main" type="blank" preserve="1">
+  <p:cSld name="slidekit · This vs That">
+    <p:bg>
+      <p:bgPr>
+        <a:solidFill>
+          <a:srgbClr val="FFFFFF"/>
+        </a:solidFill>
+        <a:effectLst/>
+      </p:bgPr>
+    </p:bg>
+    <p:spTree>
+      <p:nvGrpSpPr>
+        <p:cNvPr id="1" name=""/>
+        <p:cNvGrpSpPr/>
+        <p:nvPr/>
+      </p:nvGrpSpPr>
+      <p:grpSpPr>
+        <a:xfrm>
+          <a:off x="0" y="0"/>
+          <a:ext cx="0" cy="0"/>
+          <a:chOff x="0" y="0"/>
+          <a:chExt cx="0" cy="0"/>
+        </a:xfrm>
+      </p:grpSpPr>
+      <p:sp>
+        <p:nvSpPr>
+          <p:cNvPr id="4" name="Slide Number Placeholder 3"/>
+          <p:cNvSpPr>
+            <a:spLocks noGrp="1"/>
+          </p:cNvSpPr>
+          <p:nvPr>
+            <p:ph type="sldNum" sz="quarter" idx="12"/>
+          </p:nvPr>
+        </p:nvSpPr>
+        <p:spPr>
+          <a:xfrm>
+            <a:off x="11186160" y="6035040"/>
+            <a:ext cx="548640" cy="365760"/>
+          </a:xfrm>
+        </p:spPr>
+        <p:txBody>
+          <a:bodyPr/>
+          <a:lstStyle/>
+          <a:p>
+            <a:fld id="{C1FF6DA9-008F-8B48-92A6-B652298478BF}" type="slidenum">
+              <a:rPr lang="en-US" smtClean="0"/>
+              <a:t>‹#›</a:t>
+            </a:fld>
+            <a:endParaRPr lang="en-US"/>
+          </a:p>
+        </p:txBody>
+      </p:sp>
+      <p:sp>
+        <p:nvSpPr>
+          <p:cNvPr id="5" name="TextBox 4"/>
+          <p:cNvSpPr/>
+          <p:nvPr>
+            <p:ph type="title"/>
+          </p:nvPr>
+        </p:nvSpPr>
+        <p:spPr>
+          <a:xfrm>
+            <a:off x="457200" y="457200"/>
+            <a:ext cx="11277600" cy="768096"/>
+          </a:xfrm>
+          <a:prstGeom prst="rect">
+            <a:avLst/>
+          </a:prstGeom>
+          <a:noFill/>
+        </p:spPr>
+        <p:txBody>
+          <a:bodyPr wrap="none" lIns="0" rIns="0">
+            <a:noAutofit/>
+          </a:bodyPr>
+          <a:lstStyle/>
+          <a:p>
+            <a:pPr algn="l"/>
+            <a:r>
+              <a:rPr sz="4200" b="1" i="0">
+                <a:solidFill>
+                  <a:srgbClr val="0072CE"/>
+                </a:solidFill>
+                <a:latin typeface="Arial"/>
+              </a:rPr>
+              <a:t>Cloud or On-Prem</a:t>
+            </a:r>
+          </a:p>
+        </p:txBody>
+      </p:sp>
+      <p:sp>
+        <p:nvSpPr>
+          <p:cNvPr id="6" name="TextBox 5"/>
+          <p:cNvSpPr/>
+          <p:nvPr>
+            <p:ph type="body" idx="1"/>
+          </p:nvPr>
+        </p:nvSpPr>
+        <p:spPr>
+          <a:xfrm>
+            <a:off x="457200" y="2776728"/>
+            <a:ext cx="4792980" cy="914400"/>
+          </a:xfrm>
+          <a:prstGeom prst="rect">
+            <a:avLst/>
+          </a:prstGeom>
+          <a:noFill/>
+        </p:spPr>
+        <p:txBody>
+          <a:bodyPr wrap="none" lIns="0" rIns="0">
+            <a:noAutofit/>
+          </a:bodyPr>
+          <a:lstStyle/>
+          <a:p>
+            <a:pPr algn="ctr"/>
+            <a:r>
+              <a:rPr sz="6000" b="1" i="0">
+                <a:solidFill>
+                  <a:srgbClr val="0A2240"/>
+                </a:solidFill>
+                <a:latin typeface="Arial"/>
+              </a:rPr>
+              <a:t>3 wks</a:t>
+            </a:r>
+          </a:p>
+        </p:txBody>
+      </p:sp>
+      <p:sp>
+        <p:nvSpPr>
+          <p:cNvPr id="7" name="TextBox 6"/>
+          <p:cNvSpPr/>
+          <p:nvPr>
+            <p:ph type="body" idx="2"/>
+          </p:nvPr>
+        </p:nvSpPr>
+        <p:spPr>
+          <a:xfrm>
+            <a:off x="0" y="3965448"/>
+            <a:ext cx="5707380" cy="518159"/>
+          </a:xfrm>
+          <a:prstGeom prst="rect">
+            <a:avLst/>
+          </a:prstGeom>
+          <a:noFill/>
+        </p:spPr>
+        <p:txBody>
+          <a:bodyPr wrap="none" lIns="0" rIns="0">
+            <a:noAutofit/>
+          </a:bodyPr>
+          <a:lstStyle/>
+          <a:p>
+            <a:pPr algn="ctr"/>
+            <a:r>
+              <a:rPr sz="3400" b="0" i="0">
+                <a:solidFill>
+                  <a:srgbClr val="0A2240"/>
+                </a:solidFill>
+                <a:latin typeface="Arial"/>
+              </a:rPr>
+              <a:t>Cloud time-to-launch</a:t>
+            </a:r>
+          </a:p>
+        </p:txBody>
+      </p:sp>
+      <p:sp>
+        <p:nvSpPr>
+          <p:cNvPr id="8" name="TextBox 7"/>
+          <p:cNvSpPr/>
+          <p:nvPr>
+            <p:ph type="body" idx="3"/>
+          </p:nvPr>
+        </p:nvSpPr>
+        <p:spPr>
+          <a:xfrm>
+            <a:off x="6941820" y="2776728"/>
+            <a:ext cx="4792980" cy="914400"/>
+          </a:xfrm>
+          <a:prstGeom prst="rect">
+            <a:avLst/>
+          </a:prstGeom>
+          <a:noFill/>
+        </p:spPr>
+        <p:txBody>
+          <a:bodyPr wrap="none" lIns="0" rIns="0">
+            <a:noAutofit/>
+          </a:bodyPr>
+          <a:lstStyle/>
+          <a:p>
+            <a:pPr algn="ctr"/>
+            <a:r>
+              <a:rPr sz="6000" b="1" i="0">
+                <a:solidFill>
+                  <a:srgbClr val="0A2240"/>
+                </a:solidFill>
+                <a:latin typeface="Arial"/>
+              </a:rPr>
+              <a:t>6 mo</a:t>
+            </a:r>
+          </a:p>
+        </p:txBody>
+      </p:sp>
+      <p:sp>
+        <p:nvSpPr>
+          <p:cNvPr id="9" name="TextBox 8"/>
+          <p:cNvSpPr/>
+          <p:nvPr>
+            <p:ph type="body" idx="4"/>
+          </p:nvPr>
+        </p:nvSpPr>
+        <p:spPr>
+          <a:xfrm>
+            <a:off x="6484620" y="3965448"/>
+            <a:ext cx="5707380" cy="518159"/>
+          </a:xfrm>
+          <a:prstGeom prst="rect">
+            <a:avLst/>
+          </a:prstGeom>
+          <a:noFill/>
+        </p:spPr>
+        <p:txBody>
+          <a:bodyPr wrap="none" lIns="0" rIns="0">
+            <a:noAutofit/>
+          </a:bodyPr>
+          <a:lstStyle/>
+          <a:p>
+            <a:pPr algn="ctr"/>
+            <a:r>
+              <a:rPr sz="3400" b="0" i="0">
+                <a:solidFill>
+                  <a:srgbClr val="0A2240"/>
+                </a:solidFill>
+                <a:latin typeface="Arial"/>
+              </a:rPr>
+              <a:t>On-prem time-to-launch</a:t>
+            </a:r>
+          </a:p>
+        </p:txBody>
+      </p:sp>
+      <p:sp>
+        <p:nvSpPr>
+          <p:cNvPr id="10" name="TextBox 9"/>
+          <p:cNvSpPr/>
+          <p:nvPr>
+            <p:ph type="body" idx="5"/>
+          </p:nvPr>
+        </p:nvSpPr>
+        <p:spPr>
+          <a:xfrm>
+            <a:off x="5435323" y="3310127"/>
+            <a:ext cx="1321354" cy="640080"/>
+          </a:xfrm>
+          <a:prstGeom prst="rect">
+            <a:avLst/>
+          </a:prstGeom>
+          <a:noFill/>
+        </p:spPr>
+        <p:txBody>
+          <a:bodyPr wrap="none" lIns="0" rIns="0">
+            <a:noAutofit/>
+          </a:bodyPr>
+          <a:lstStyle/>
+          <a:p>
+            <a:pPr algn="ctr"/>
+            <a:r>
+              <a:rPr sz="4200" b="1" i="0">
+                <a:solidFill>
+                  <a:srgbClr val="0A2240"/>
+                </a:solidFill>
+                <a:latin typeface="Arial"/>
+              </a:rPr>
+              <a:t>VS</a:t>
             </a:r>
           </a:p>
         </p:txBody>
@@ -12456,294 +12086,6 @@
 
 <file path=ppt/slideLayouts/slideLayout30.xml><?xml version="1.0" encoding="utf-8"?>
 <p:sldLayout xmlns:a="http://schemas.openxmlformats.org/drawingml/2006/main" xmlns:r="http://schemas.openxmlformats.org/officeDocument/2006/relationships" xmlns:p="http://schemas.openxmlformats.org/presentationml/2006/main" type="blank" preserve="1">
-  <p:cSld name="slidekit · This vs That">
-    <p:bg>
-      <p:bgPr>
-        <a:solidFill>
-          <a:srgbClr val="FFFFFF"/>
-        </a:solidFill>
-        <a:effectLst/>
-      </p:bgPr>
-    </p:bg>
-    <p:spTree>
-      <p:nvGrpSpPr>
-        <p:cNvPr id="1" name=""/>
-        <p:cNvGrpSpPr/>
-        <p:nvPr/>
-      </p:nvGrpSpPr>
-      <p:grpSpPr>
-        <a:xfrm>
-          <a:off x="0" y="0"/>
-          <a:ext cx="0" cy="0"/>
-          <a:chOff x="0" y="0"/>
-          <a:chExt cx="0" cy="0"/>
-        </a:xfrm>
-      </p:grpSpPr>
-      <p:sp>
-        <p:nvSpPr>
-          <p:cNvPr id="4" name="Slide Number Placeholder 3"/>
-          <p:cNvSpPr>
-            <a:spLocks noGrp="1"/>
-          </p:cNvSpPr>
-          <p:nvPr>
-            <p:ph type="sldNum" sz="quarter" idx="12"/>
-          </p:nvPr>
-        </p:nvSpPr>
-        <p:spPr>
-          <a:xfrm>
-            <a:off x="11186160" y="6035040"/>
-            <a:ext cx="548640" cy="365760"/>
-          </a:xfrm>
-        </p:spPr>
-        <p:txBody>
-          <a:bodyPr/>
-          <a:lstStyle/>
-          <a:p>
-            <a:fld id="{C1FF6DA9-008F-8B48-92A6-B652298478BF}" type="slidenum">
-              <a:rPr lang="en-US" smtClean="0"/>
-              <a:t>‹#›</a:t>
-            </a:fld>
-            <a:endParaRPr lang="en-US"/>
-          </a:p>
-        </p:txBody>
-      </p:sp>
-      <p:sp>
-        <p:nvSpPr>
-          <p:cNvPr id="5" name="TextBox 4"/>
-          <p:cNvSpPr/>
-          <p:nvPr>
-            <p:ph type="title"/>
-          </p:nvPr>
-        </p:nvSpPr>
-        <p:spPr>
-          <a:xfrm>
-            <a:off x="457200" y="457200"/>
-            <a:ext cx="11277600" cy="768096"/>
-          </a:xfrm>
-          <a:prstGeom prst="rect">
-            <a:avLst/>
-          </a:prstGeom>
-          <a:noFill/>
-        </p:spPr>
-        <p:txBody>
-          <a:bodyPr wrap="none" lIns="0" rIns="0">
-            <a:noAutofit/>
-          </a:bodyPr>
-          <a:lstStyle/>
-          <a:p>
-            <a:pPr algn="l"/>
-            <a:r>
-              <a:rPr sz="4200" b="1" i="0">
-                <a:solidFill>
-                  <a:srgbClr val="0072CE"/>
-                </a:solidFill>
-                <a:latin typeface="Arial"/>
-              </a:rPr>
-              <a:t>Cloud or On-Prem</a:t>
-            </a:r>
-          </a:p>
-        </p:txBody>
-      </p:sp>
-      <p:sp>
-        <p:nvSpPr>
-          <p:cNvPr id="6" name="TextBox 5"/>
-          <p:cNvSpPr/>
-          <p:nvPr>
-            <p:ph type="body" idx="1"/>
-          </p:nvPr>
-        </p:nvSpPr>
-        <p:spPr>
-          <a:xfrm>
-            <a:off x="457200" y="2776728"/>
-            <a:ext cx="4792980" cy="914400"/>
-          </a:xfrm>
-          <a:prstGeom prst="rect">
-            <a:avLst/>
-          </a:prstGeom>
-          <a:noFill/>
-        </p:spPr>
-        <p:txBody>
-          <a:bodyPr wrap="none" lIns="0" rIns="0">
-            <a:noAutofit/>
-          </a:bodyPr>
-          <a:lstStyle/>
-          <a:p>
-            <a:pPr algn="ctr"/>
-            <a:r>
-              <a:rPr sz="6000" b="1" i="0">
-                <a:solidFill>
-                  <a:srgbClr val="0A2240"/>
-                </a:solidFill>
-                <a:latin typeface="Arial"/>
-              </a:rPr>
-              <a:t>3 wks</a:t>
-            </a:r>
-          </a:p>
-        </p:txBody>
-      </p:sp>
-      <p:sp>
-        <p:nvSpPr>
-          <p:cNvPr id="7" name="TextBox 6"/>
-          <p:cNvSpPr/>
-          <p:nvPr>
-            <p:ph type="body" idx="2"/>
-          </p:nvPr>
-        </p:nvSpPr>
-        <p:spPr>
-          <a:xfrm>
-            <a:off x="0" y="3965448"/>
-            <a:ext cx="5707380" cy="518159"/>
-          </a:xfrm>
-          <a:prstGeom prst="rect">
-            <a:avLst/>
-          </a:prstGeom>
-          <a:noFill/>
-        </p:spPr>
-        <p:txBody>
-          <a:bodyPr wrap="none" lIns="0" rIns="0">
-            <a:noAutofit/>
-          </a:bodyPr>
-          <a:lstStyle/>
-          <a:p>
-            <a:pPr algn="ctr"/>
-            <a:r>
-              <a:rPr sz="3400" b="0" i="0">
-                <a:solidFill>
-                  <a:srgbClr val="0A2240"/>
-                </a:solidFill>
-                <a:latin typeface="Arial"/>
-              </a:rPr>
-              <a:t>Cloud time-to-launch</a:t>
-            </a:r>
-          </a:p>
-        </p:txBody>
-      </p:sp>
-      <p:sp>
-        <p:nvSpPr>
-          <p:cNvPr id="8" name="TextBox 7"/>
-          <p:cNvSpPr/>
-          <p:nvPr>
-            <p:ph type="body" idx="3"/>
-          </p:nvPr>
-        </p:nvSpPr>
-        <p:spPr>
-          <a:xfrm>
-            <a:off x="6941820" y="2776728"/>
-            <a:ext cx="4792980" cy="914400"/>
-          </a:xfrm>
-          <a:prstGeom prst="rect">
-            <a:avLst/>
-          </a:prstGeom>
-          <a:noFill/>
-        </p:spPr>
-        <p:txBody>
-          <a:bodyPr wrap="none" lIns="0" rIns="0">
-            <a:noAutofit/>
-          </a:bodyPr>
-          <a:lstStyle/>
-          <a:p>
-            <a:pPr algn="ctr"/>
-            <a:r>
-              <a:rPr sz="6000" b="1" i="0">
-                <a:solidFill>
-                  <a:srgbClr val="0A2240"/>
-                </a:solidFill>
-                <a:latin typeface="Arial"/>
-              </a:rPr>
-              <a:t>6 mo</a:t>
-            </a:r>
-          </a:p>
-        </p:txBody>
-      </p:sp>
-      <p:sp>
-        <p:nvSpPr>
-          <p:cNvPr id="9" name="TextBox 8"/>
-          <p:cNvSpPr/>
-          <p:nvPr>
-            <p:ph type="body" idx="4"/>
-          </p:nvPr>
-        </p:nvSpPr>
-        <p:spPr>
-          <a:xfrm>
-            <a:off x="6484620" y="3965448"/>
-            <a:ext cx="5707380" cy="518159"/>
-          </a:xfrm>
-          <a:prstGeom prst="rect">
-            <a:avLst/>
-          </a:prstGeom>
-          <a:noFill/>
-        </p:spPr>
-        <p:txBody>
-          <a:bodyPr wrap="none" lIns="0" rIns="0">
-            <a:noAutofit/>
-          </a:bodyPr>
-          <a:lstStyle/>
-          <a:p>
-            <a:pPr algn="ctr"/>
-            <a:r>
-              <a:rPr sz="3400" b="0" i="0">
-                <a:solidFill>
-                  <a:srgbClr val="0A2240"/>
-                </a:solidFill>
-                <a:latin typeface="Arial"/>
-              </a:rPr>
-              <a:t>On-prem time-to-launch</a:t>
-            </a:r>
-          </a:p>
-        </p:txBody>
-      </p:sp>
-      <p:sp>
-        <p:nvSpPr>
-          <p:cNvPr id="10" name="TextBox 9"/>
-          <p:cNvSpPr/>
-          <p:nvPr>
-            <p:ph type="body" idx="5"/>
-          </p:nvPr>
-        </p:nvSpPr>
-        <p:spPr>
-          <a:xfrm>
-            <a:off x="5435323" y="3310127"/>
-            <a:ext cx="1321354" cy="640080"/>
-          </a:xfrm>
-          <a:prstGeom prst="rect">
-            <a:avLst/>
-          </a:prstGeom>
-          <a:noFill/>
-        </p:spPr>
-        <p:txBody>
-          <a:bodyPr wrap="none" lIns="0" rIns="0">
-            <a:noAutofit/>
-          </a:bodyPr>
-          <a:lstStyle/>
-          <a:p>
-            <a:pPr algn="ctr"/>
-            <a:r>
-              <a:rPr sz="4200" b="1" i="0">
-                <a:solidFill>
-                  <a:srgbClr val="5B6B82"/>
-                </a:solidFill>
-                <a:latin typeface="Arial"/>
-              </a:rPr>
-              <a:t>VS</a:t>
-            </a:r>
-          </a:p>
-        </p:txBody>
-      </p:sp>
-    </p:spTree>
-    <p:extLst>
-      <p:ext uri="{BB962C8B-B14F-4D97-AF65-F5344CB8AC3E}">
-        <p14:creationId xmlns:p14="http://schemas.microsoft.com/office/powerpoint/2010/main" val="1212999818"/>
-      </p:ext>
-    </p:extLst>
-  </p:cSld>
-  <p:clrMapOvr>
-    <a:masterClrMapping/>
-  </p:clrMapOvr>
-</p:sldLayout>
-</file>
-
-<file path=ppt/slideLayouts/slideLayout31.xml><?xml version="1.0" encoding="utf-8"?>
-<p:sldLayout xmlns:a="http://schemas.openxmlformats.org/drawingml/2006/main" xmlns:r="http://schemas.openxmlformats.org/officeDocument/2006/relationships" xmlns:p="http://schemas.openxmlformats.org/presentationml/2006/main" type="blank" preserve="1">
   <p:cSld name="slidekit · KPI Grid">
     <p:bg>
       <p:bgPr>
@@ -13266,7 +12608,7 @@
         </p:nvSpPr>
         <p:spPr>
           <a:xfrm>
-            <a:off x="4307840" y="3797808"/>
+            <a:off x="4307840" y="4056888"/>
             <a:ext cx="3576320" cy="640080"/>
           </a:xfrm>
           <a:prstGeom prst="rect">
@@ -13303,7 +12645,7 @@
         </p:nvSpPr>
         <p:spPr>
           <a:xfrm>
-            <a:off x="5559552" y="4492752"/>
+            <a:off x="5559552" y="4751832"/>
             <a:ext cx="1072896" cy="54864"/>
           </a:xfrm>
           <a:prstGeom prst="rect">
@@ -13335,16 +12677,16 @@
         </p:nvSpPr>
         <p:spPr>
           <a:xfrm>
-            <a:off x="4307840" y="4602480"/>
-            <a:ext cx="3576320" cy="1127760"/>
-          </a:xfrm>
-          <a:prstGeom prst="rect">
-            <a:avLst/>
-          </a:prstGeom>
-          <a:noFill/>
-        </p:spPr>
-        <p:txBody>
-          <a:bodyPr wrap="square" lIns="0" rIns="0">
+            <a:off x="3943896" y="4861560"/>
+            <a:ext cx="4304208" cy="609600"/>
+          </a:xfrm>
+          <a:prstGeom prst="rect">
+            <a:avLst/>
+          </a:prstGeom>
+          <a:noFill/>
+        </p:spPr>
+        <p:txBody>
+          <a:bodyPr wrap="none" lIns="0" rIns="0">
             <a:noAutofit/>
           </a:bodyPr>
           <a:lstStyle/>
@@ -13357,7 +12699,7 @@
                 </a:solidFill>
                 <a:latin typeface="Arial"/>
               </a:rPr>
-              <a:t>Avg. time to value</a:t>
+              <a:t>Time to value</a:t>
             </a:r>
           </a:p>
         </p:txBody>
@@ -13481,7 +12823,7 @@
 </p:sldLayout>
 </file>
 
-<file path=ppt/slideLayouts/slideLayout32.xml><?xml version="1.0" encoding="utf-8"?>
+<file path=ppt/slideLayouts/slideLayout31.xml><?xml version="1.0" encoding="utf-8"?>
 <p:sldLayout xmlns:a="http://schemas.openxmlformats.org/drawingml/2006/main" xmlns:r="http://schemas.openxmlformats.org/officeDocument/2006/relationships" xmlns:p="http://schemas.openxmlformats.org/presentationml/2006/main" type="blank" preserve="1">
   <p:cSld name="slidekit · Chart With Insight">
     <p:bg>
@@ -13668,7 +13010,7 @@
             <a:r>
               <a:rPr sz="2500" b="0" i="0">
                 <a:solidFill>
-                  <a:srgbClr val="5B6B82"/>
+                  <a:srgbClr val="0A2240"/>
                 </a:solidFill>
                 <a:latin typeface="Arial"/>
               </a:rPr>
@@ -13774,7 +13116,7 @@
             <a:r>
               <a:rPr sz="2500" b="0" i="0">
                 <a:solidFill>
-                  <a:srgbClr val="5B6B82"/>
+                  <a:srgbClr val="0A2240"/>
                 </a:solidFill>
                 <a:latin typeface="Arial"/>
               </a:rPr>
@@ -13880,7 +13222,7 @@
             <a:r>
               <a:rPr sz="2500" b="0" i="0">
                 <a:solidFill>
-                  <a:srgbClr val="5B6B82"/>
+                  <a:srgbClr val="0A2240"/>
                 </a:solidFill>
                 <a:latin typeface="Arial"/>
               </a:rPr>
@@ -13986,7 +13328,7 @@
             <a:r>
               <a:rPr sz="2500" b="0" i="0">
                 <a:solidFill>
-                  <a:srgbClr val="5B6B82"/>
+                  <a:srgbClr val="0A2240"/>
                 </a:solidFill>
                 <a:latin typeface="Arial"/>
               </a:rPr>
@@ -14005,8 +13347,8 @@
         </p:nvSpPr>
         <p:spPr>
           <a:xfrm>
-            <a:off x="7498080" y="1770888"/>
-            <a:ext cx="128016" cy="3718560"/>
+            <a:off x="7498080" y="3325368"/>
+            <a:ext cx="128016" cy="609600"/>
           </a:xfrm>
           <a:prstGeom prst="rect">
             <a:avLst/>
@@ -14037,16 +13379,16 @@
         </p:nvSpPr>
         <p:spPr>
           <a:xfrm>
-            <a:off x="8037576" y="1770888"/>
-            <a:ext cx="3697224" cy="3718560"/>
-          </a:xfrm>
-          <a:prstGeom prst="rect">
-            <a:avLst/>
-          </a:prstGeom>
-          <a:noFill/>
-        </p:spPr>
-        <p:txBody>
-          <a:bodyPr wrap="square" lIns="0" rIns="0">
+            <a:off x="8037576" y="3325368"/>
+            <a:ext cx="4154424" cy="609600"/>
+          </a:xfrm>
+          <a:prstGeom prst="rect">
+            <a:avLst/>
+          </a:prstGeom>
+          <a:noFill/>
+        </p:spPr>
+        <p:txBody>
+          <a:bodyPr wrap="none" lIns="0" rIns="0">
             <a:noAutofit/>
           </a:bodyPr>
           <a:lstStyle/>
@@ -14059,7 +13401,7 @@
                 </a:solidFill>
                 <a:latin typeface="Arial"/>
               </a:rPr>
-              <a:t>Activations nearly quadrupled once self-serve onboarding shipped in February.</a:t>
+              <a:t>Activations 4x.</a:t>
             </a:r>
           </a:p>
         </p:txBody>
@@ -14077,7 +13419,7 @@
 </p:sldLayout>
 </file>
 
-<file path=ppt/slideLayouts/slideLayout33.xml><?xml version="1.0" encoding="utf-8"?>
+<file path=ppt/slideLayouts/slideLayout32.xml><?xml version="1.0" encoding="utf-8"?>
 <p:sldLayout xmlns:a="http://schemas.openxmlformats.org/drawingml/2006/main" xmlns:r="http://schemas.openxmlformats.org/officeDocument/2006/relationships" xmlns:p="http://schemas.openxmlformats.org/presentationml/2006/main" type="blank" preserve="1">
   <p:cSld name="slidekit · Table">
     <p:bg>
@@ -14195,7 +13537,7 @@
             <a:r>
               <a:rPr sz="3400" b="1" i="0">
                 <a:solidFill>
-                  <a:srgbClr val="123A6B"/>
+                  <a:srgbClr val="0072CE"/>
                 </a:solidFill>
                 <a:latin typeface="Arial"/>
               </a:rPr>
@@ -14232,7 +13574,7 @@
             <a:r>
               <a:rPr sz="3400" b="1" i="0">
                 <a:solidFill>
-                  <a:srgbClr val="123A6B"/>
+                  <a:srgbClr val="0072CE"/>
                 </a:solidFill>
                 <a:latin typeface="Arial"/>
               </a:rPr>
@@ -14269,7 +13611,7 @@
             <a:r>
               <a:rPr sz="3400" b="1" i="0">
                 <a:solidFill>
-                  <a:srgbClr val="123A6B"/>
+                  <a:srgbClr val="0072CE"/>
                 </a:solidFill>
                 <a:latin typeface="Arial"/>
               </a:rPr>
@@ -14767,7 +14109,7 @@
 </p:sldLayout>
 </file>
 
-<file path=ppt/slideLayouts/slideLayout34.xml><?xml version="1.0" encoding="utf-8"?>
+<file path=ppt/slideLayouts/slideLayout33.xml><?xml version="1.0" encoding="utf-8"?>
 <p:sldLayout xmlns:a="http://schemas.openxmlformats.org/drawingml/2006/main" xmlns:r="http://schemas.openxmlformats.org/officeDocument/2006/relationships" xmlns:p="http://schemas.openxmlformats.org/presentationml/2006/main" type="blank" preserve="1">
   <p:cSld name="slidekit · Metric Comparison">
     <p:bg>
@@ -14867,7 +14209,7 @@
         </p:nvSpPr>
         <p:spPr>
           <a:xfrm>
-            <a:off x="457200" y="2075688"/>
+            <a:off x="457200" y="2334768"/>
             <a:ext cx="3576320" cy="914400"/>
           </a:xfrm>
           <a:prstGeom prst="rect">
@@ -14904,16 +14246,16 @@
         </p:nvSpPr>
         <p:spPr>
           <a:xfrm>
-            <a:off x="457200" y="3264408"/>
-            <a:ext cx="3576320" cy="1127760"/>
-          </a:xfrm>
-          <a:prstGeom prst="rect">
-            <a:avLst/>
-          </a:prstGeom>
-          <a:noFill/>
-        </p:spPr>
-        <p:txBody>
-          <a:bodyPr wrap="square" lIns="0" rIns="0">
+            <a:off x="457200" y="3523488"/>
+            <a:ext cx="3576320" cy="609600"/>
+          </a:xfrm>
+          <a:prstGeom prst="rect">
+            <a:avLst/>
+          </a:prstGeom>
+          <a:noFill/>
+        </p:spPr>
+        <p:txBody>
+          <a:bodyPr wrap="none" lIns="0" rIns="0">
             <a:noAutofit/>
           </a:bodyPr>
           <a:lstStyle/>
@@ -14926,7 +14268,7 @@
                 </a:solidFill>
                 <a:latin typeface="Arial"/>
               </a:rPr>
-              <a:t>Annual recurring revenue</a:t>
+              <a:t>Revenue</a:t>
             </a:r>
           </a:p>
         </p:txBody>
@@ -14941,7 +14283,7 @@
         </p:nvSpPr>
         <p:spPr>
           <a:xfrm>
-            <a:off x="1522569" y="4666488"/>
+            <a:off x="1522569" y="4407408"/>
             <a:ext cx="1445581" cy="518159"/>
           </a:xfrm>
           <a:prstGeom prst="rect">
@@ -14973,7 +14315,7 @@
         </p:nvSpPr>
         <p:spPr>
           <a:xfrm>
-            <a:off x="1260802" y="4666488"/>
+            <a:off x="1260802" y="4407408"/>
             <a:ext cx="1969115" cy="518159"/>
           </a:xfrm>
           <a:prstGeom prst="rect">
@@ -15010,7 +14352,7 @@
         </p:nvSpPr>
         <p:spPr>
           <a:xfrm>
-            <a:off x="4307840" y="2075688"/>
+            <a:off x="4307840" y="2334768"/>
             <a:ext cx="3576320" cy="914400"/>
           </a:xfrm>
           <a:prstGeom prst="rect">
@@ -15047,8 +14389,8 @@
         </p:nvSpPr>
         <p:spPr>
           <a:xfrm>
-            <a:off x="3834934" y="3264408"/>
-            <a:ext cx="4522132" cy="1127760"/>
+            <a:off x="3834934" y="3523488"/>
+            <a:ext cx="4522132" cy="609600"/>
           </a:xfrm>
           <a:prstGeom prst="rect">
             <a:avLst/>
@@ -15084,7 +14426,7 @@
         </p:nvSpPr>
         <p:spPr>
           <a:xfrm>
-            <a:off x="5175547" y="4666488"/>
+            <a:off x="5175547" y="4407408"/>
             <a:ext cx="1840906" cy="518159"/>
           </a:xfrm>
           <a:prstGeom prst="rect">
@@ -15116,7 +14458,7 @@
         </p:nvSpPr>
         <p:spPr>
           <a:xfrm>
-            <a:off x="4795183" y="4666488"/>
+            <a:off x="4795183" y="4407408"/>
             <a:ext cx="2601634" cy="518159"/>
           </a:xfrm>
           <a:prstGeom prst="rect">
@@ -15153,7 +14495,7 @@
         </p:nvSpPr>
         <p:spPr>
           <a:xfrm>
-            <a:off x="8158480" y="2075688"/>
+            <a:off x="8158480" y="2334768"/>
             <a:ext cx="3576320" cy="914400"/>
           </a:xfrm>
           <a:prstGeom prst="rect">
@@ -15190,16 +14532,16 @@
         </p:nvSpPr>
         <p:spPr>
           <a:xfrm>
-            <a:off x="8158480" y="3264408"/>
-            <a:ext cx="3576320" cy="1127760"/>
-          </a:xfrm>
-          <a:prstGeom prst="rect">
-            <a:avLst/>
-          </a:prstGeom>
-          <a:noFill/>
-        </p:spPr>
-        <p:txBody>
-          <a:bodyPr wrap="square" lIns="0" rIns="0">
+            <a:off x="7701280" y="3523488"/>
+            <a:ext cx="4490720" cy="609600"/>
+          </a:xfrm>
+          <a:prstGeom prst="rect">
+            <a:avLst/>
+          </a:prstGeom>
+          <a:noFill/>
+        </p:spPr>
+        <p:txBody>
+          <a:bodyPr wrap="none" lIns="0" rIns="0">
             <a:noAutofit/>
           </a:bodyPr>
           <a:lstStyle/>
@@ -15212,7 +14554,7 @@
                 </a:solidFill>
                 <a:latin typeface="Arial"/>
               </a:rPr>
-              <a:t>Net promoter score</a:t>
+              <a:t>Promoter score</a:t>
             </a:r>
           </a:p>
         </p:txBody>
@@ -15227,7 +14569,7 @@
         </p:nvSpPr>
         <p:spPr>
           <a:xfrm>
-            <a:off x="9427731" y="4666488"/>
+            <a:off x="9427731" y="4407408"/>
             <a:ext cx="1037817" cy="518159"/>
           </a:xfrm>
           <a:prstGeom prst="rect">
@@ -15259,7 +14601,7 @@
         </p:nvSpPr>
         <p:spPr>
           <a:xfrm>
-            <a:off x="9288294" y="4666488"/>
+            <a:off x="9288294" y="4407408"/>
             <a:ext cx="1316691" cy="518159"/>
           </a:xfrm>
           <a:prstGeom prst="rect">
@@ -15299,7 +14641,7 @@
 </p:sldLayout>
 </file>
 
-<file path=ppt/slideLayouts/slideLayout35.xml><?xml version="1.0" encoding="utf-8"?>
+<file path=ppt/slideLayouts/slideLayout34.xml><?xml version="1.0" encoding="utf-8"?>
 <p:sldLayout xmlns:a="http://schemas.openxmlformats.org/drawingml/2006/main" xmlns:r="http://schemas.openxmlformats.org/officeDocument/2006/relationships" xmlns:p="http://schemas.openxmlformats.org/presentationml/2006/main" type="blank" preserve="1">
   <p:cSld name="slidekit · Process Steps">
     <p:bg>
@@ -15417,7 +14759,7 @@
             <a:r>
               <a:rPr sz="4200" b="1" i="0">
                 <a:solidFill>
-                  <a:srgbClr val="123A6B"/>
+                  <a:srgbClr val="0072CE"/>
                 </a:solidFill>
                 <a:latin typeface="Arial"/>
               </a:rPr>
@@ -15437,13 +14779,13 @@
         <p:spPr>
           <a:xfrm>
             <a:off x="457200" y="2194560"/>
-            <a:ext cx="784098" cy="54864"/>
+            <a:ext cx="593303" cy="54864"/>
           </a:xfrm>
           <a:prstGeom prst="rect">
             <a:avLst/>
           </a:prstGeom>
           <a:solidFill>
-            <a:srgbClr val="123A6B"/>
+            <a:srgbClr val="0072CE"/>
           </a:solidFill>
           <a:ln>
             <a:noFill/>
@@ -15486,7 +14828,7 @@
             <a:r>
               <a:rPr sz="3400" b="1" i="0">
                 <a:solidFill>
-                  <a:srgbClr val="123A6B"/>
+                  <a:srgbClr val="0072CE"/>
                 </a:solidFill>
                 <a:latin typeface="Arial"/>
               </a:rPr>
@@ -15560,7 +14902,7 @@
             <a:r>
               <a:rPr sz="4200" b="1" i="0">
                 <a:solidFill>
-                  <a:srgbClr val="123A6B"/>
+                  <a:srgbClr val="0072CE"/>
                 </a:solidFill>
                 <a:latin typeface="Arial"/>
               </a:rPr>
@@ -15580,13 +14922,13 @@
         <p:spPr>
           <a:xfrm>
             <a:off x="3345180" y="2194560"/>
-            <a:ext cx="784098" cy="54864"/>
+            <a:ext cx="593303" cy="54864"/>
           </a:xfrm>
           <a:prstGeom prst="rect">
             <a:avLst/>
           </a:prstGeom>
           <a:solidFill>
-            <a:srgbClr val="123A6B"/>
+            <a:srgbClr val="0072CE"/>
           </a:solidFill>
           <a:ln>
             <a:noFill/>
@@ -15629,7 +14971,7 @@
             <a:r>
               <a:rPr sz="3400" b="1" i="0">
                 <a:solidFill>
-                  <a:srgbClr val="123A6B"/>
+                  <a:srgbClr val="0072CE"/>
                 </a:solidFill>
                 <a:latin typeface="Arial"/>
               </a:rPr>
@@ -15703,7 +15045,7 @@
             <a:r>
               <a:rPr sz="4200" b="1" i="0">
                 <a:solidFill>
-                  <a:srgbClr val="123A6B"/>
+                  <a:srgbClr val="0072CE"/>
                 </a:solidFill>
                 <a:latin typeface="Arial"/>
               </a:rPr>
@@ -15723,13 +15065,13 @@
         <p:spPr>
           <a:xfrm>
             <a:off x="6233160" y="2194560"/>
-            <a:ext cx="784098" cy="54864"/>
+            <a:ext cx="593303" cy="54864"/>
           </a:xfrm>
           <a:prstGeom prst="rect">
             <a:avLst/>
           </a:prstGeom>
           <a:solidFill>
-            <a:srgbClr val="123A6B"/>
+            <a:srgbClr val="0072CE"/>
           </a:solidFill>
           <a:ln>
             <a:noFill/>
@@ -15772,7 +15114,7 @@
             <a:r>
               <a:rPr sz="3400" b="1" i="0">
                 <a:solidFill>
-                  <a:srgbClr val="123A6B"/>
+                  <a:srgbClr val="0072CE"/>
                 </a:solidFill>
                 <a:latin typeface="Arial"/>
               </a:rPr>
@@ -15846,7 +15188,7 @@
             <a:r>
               <a:rPr sz="4200" b="1" i="0">
                 <a:solidFill>
-                  <a:srgbClr val="123A6B"/>
+                  <a:srgbClr val="0072CE"/>
                 </a:solidFill>
                 <a:latin typeface="Arial"/>
               </a:rPr>
@@ -15866,13 +15208,13 @@
         <p:spPr>
           <a:xfrm>
             <a:off x="9121140" y="2194560"/>
-            <a:ext cx="784098" cy="54864"/>
+            <a:ext cx="593303" cy="54864"/>
           </a:xfrm>
           <a:prstGeom prst="rect">
             <a:avLst/>
           </a:prstGeom>
           <a:solidFill>
-            <a:srgbClr val="123A6B"/>
+            <a:srgbClr val="0072CE"/>
           </a:solidFill>
           <a:ln>
             <a:noFill/>
@@ -15915,7 +15257,7 @@
             <a:r>
               <a:rPr sz="3400" b="1" i="0">
                 <a:solidFill>
-                  <a:srgbClr val="123A6B"/>
+                  <a:srgbClr val="0072CE"/>
                 </a:solidFill>
                 <a:latin typeface="Arial"/>
               </a:rPr>
@@ -15974,7 +15316,7 @@
 </p:sldLayout>
 </file>
 
-<file path=ppt/slideLayouts/slideLayout36.xml><?xml version="1.0" encoding="utf-8"?>
+<file path=ppt/slideLayouts/slideLayout35.xml><?xml version="1.0" encoding="utf-8"?>
 <p:sldLayout xmlns:a="http://schemas.openxmlformats.org/drawingml/2006/main" xmlns:r="http://schemas.openxmlformats.org/officeDocument/2006/relationships" xmlns:p="http://schemas.openxmlformats.org/presentationml/2006/main" type="blank" preserve="1">
   <p:cSld name="slidekit · Roadmap">
     <p:bg>
@@ -16506,7 +15848,7 @@
 </p:sldLayout>
 </file>
 
-<file path=ppt/slideLayouts/slideLayout37.xml><?xml version="1.0" encoding="utf-8"?>
+<file path=ppt/slideLayouts/slideLayout36.xml><?xml version="1.0" encoding="utf-8"?>
 <p:sldLayout xmlns:a="http://schemas.openxmlformats.org/drawingml/2006/main" xmlns:r="http://schemas.openxmlformats.org/officeDocument/2006/relationships" xmlns:p="http://schemas.openxmlformats.org/presentationml/2006/main" type="blank" preserve="1">
   <p:cSld name="slidekit · Funnel">
     <p:bg>
@@ -16885,7 +16227,7 @@
 </p:sldLayout>
 </file>
 
-<file path=ppt/slideLayouts/slideLayout38.xml><?xml version="1.0" encoding="utf-8"?>
+<file path=ppt/slideLayouts/slideLayout37.xml><?xml version="1.0" encoding="utf-8"?>
 <p:sldLayout xmlns:a="http://schemas.openxmlformats.org/drawingml/2006/main" xmlns:r="http://schemas.openxmlformats.org/officeDocument/2006/relationships" xmlns:p="http://schemas.openxmlformats.org/presentationml/2006/main" type="blank" preserve="1">
   <p:cSld name="slidekit · Nested Circles">
     <p:bg>
@@ -16992,7 +16334,7 @@
             <a:avLst/>
           </a:prstGeom>
           <a:solidFill>
-            <a:srgbClr val="5B6B82"/>
+            <a:srgbClr val="0A2240"/>
           </a:solidFill>
           <a:ln>
             <a:noFill/>
@@ -17056,7 +16398,7 @@
             <a:avLst/>
           </a:prstGeom>
           <a:solidFill>
-            <a:srgbClr val="123A6B"/>
+            <a:srgbClr val="0A2240"/>
           </a:solidFill>
           <a:ln>
             <a:noFill/>
@@ -17306,7 +16648,7 @@
 </p:sldLayout>
 </file>
 
-<file path=ppt/slideLayouts/slideLayout39.xml><?xml version="1.0" encoding="utf-8"?>
+<file path=ppt/slideLayouts/slideLayout38.xml><?xml version="1.0" encoding="utf-8"?>
 <p:sldLayout xmlns:a="http://schemas.openxmlformats.org/drawingml/2006/main" xmlns:r="http://schemas.openxmlformats.org/officeDocument/2006/relationships" xmlns:p="http://schemas.openxmlformats.org/presentationml/2006/main" type="blank" preserve="1">
   <p:cSld name="slidekit · Pyramid">
     <p:bg>
@@ -17413,7 +16755,7 @@
             <a:avLst/>
           </a:prstGeom>
           <a:solidFill>
-            <a:srgbClr val="123A6B"/>
+            <a:srgbClr val="0072CE"/>
           </a:solidFill>
           <a:ln>
             <a:noFill/>
@@ -17551,7 +16893,7 @@
             <a:avLst/>
           </a:prstGeom>
           <a:solidFill>
-            <a:srgbClr val="123A6B"/>
+            <a:srgbClr val="0072CE"/>
           </a:solidFill>
           <a:ln>
             <a:noFill/>
@@ -17668,6 +17010,533 @@
                 <a:latin typeface="Arial"/>
               </a:rPr>
               <a:t>Tactics</a:t>
+            </a:r>
+          </a:p>
+        </p:txBody>
+      </p:sp>
+    </p:spTree>
+    <p:extLst>
+      <p:ext uri="{BB962C8B-B14F-4D97-AF65-F5344CB8AC3E}">
+        <p14:creationId xmlns:p14="http://schemas.microsoft.com/office/powerpoint/2010/main" val="1212999818"/>
+      </p:ext>
+    </p:extLst>
+  </p:cSld>
+  <p:clrMapOvr>
+    <a:masterClrMapping/>
+  </p:clrMapOvr>
+</p:sldLayout>
+</file>
+
+<file path=ppt/slideLayouts/slideLayout39.xml><?xml version="1.0" encoding="utf-8"?>
+<p:sldLayout xmlns:a="http://schemas.openxmlformats.org/drawingml/2006/main" xmlns:r="http://schemas.openxmlformats.org/officeDocument/2006/relationships" xmlns:p="http://schemas.openxmlformats.org/presentationml/2006/main" type="blank" preserve="1">
+  <p:cSld name="slidekit · SWOT">
+    <p:bg>
+      <p:bgPr>
+        <a:solidFill>
+          <a:srgbClr val="FFFFFF"/>
+        </a:solidFill>
+        <a:effectLst/>
+      </p:bgPr>
+    </p:bg>
+    <p:spTree>
+      <p:nvGrpSpPr>
+        <p:cNvPr id="1" name=""/>
+        <p:cNvGrpSpPr/>
+        <p:nvPr/>
+      </p:nvGrpSpPr>
+      <p:grpSpPr>
+        <a:xfrm>
+          <a:off x="0" y="0"/>
+          <a:ext cx="0" cy="0"/>
+          <a:chOff x="0" y="0"/>
+          <a:chExt cx="0" cy="0"/>
+        </a:xfrm>
+      </p:grpSpPr>
+      <p:sp>
+        <p:nvSpPr>
+          <p:cNvPr id="4" name="Slide Number Placeholder 3"/>
+          <p:cNvSpPr>
+            <a:spLocks noGrp="1"/>
+          </p:cNvSpPr>
+          <p:nvPr>
+            <p:ph type="sldNum" sz="quarter" idx="12"/>
+          </p:nvPr>
+        </p:nvSpPr>
+        <p:spPr>
+          <a:xfrm>
+            <a:off x="11186160" y="6035040"/>
+            <a:ext cx="548640" cy="365760"/>
+          </a:xfrm>
+        </p:spPr>
+        <p:txBody>
+          <a:bodyPr/>
+          <a:lstStyle/>
+          <a:p>
+            <a:fld id="{C1FF6DA9-008F-8B48-92A6-B652298478BF}" type="slidenum">
+              <a:rPr lang="en-US" smtClean="0"/>
+              <a:t>‹#›</a:t>
+            </a:fld>
+            <a:endParaRPr lang="en-US"/>
+          </a:p>
+        </p:txBody>
+      </p:sp>
+      <p:sp>
+        <p:nvSpPr>
+          <p:cNvPr id="5" name="TextBox 4"/>
+          <p:cNvSpPr/>
+          <p:nvPr>
+            <p:ph type="title"/>
+          </p:nvPr>
+        </p:nvSpPr>
+        <p:spPr>
+          <a:xfrm>
+            <a:off x="457200" y="457200"/>
+            <a:ext cx="11277600" cy="768096"/>
+          </a:xfrm>
+          <a:prstGeom prst="rect">
+            <a:avLst/>
+          </a:prstGeom>
+          <a:noFill/>
+        </p:spPr>
+        <p:txBody>
+          <a:bodyPr wrap="none" lIns="0" rIns="0">
+            <a:noAutofit/>
+          </a:bodyPr>
+          <a:lstStyle/>
+          <a:p>
+            <a:pPr algn="l"/>
+            <a:r>
+              <a:rPr sz="4200" b="1" i="0">
+                <a:solidFill>
+                  <a:srgbClr val="0072CE"/>
+                </a:solidFill>
+                <a:latin typeface="Arial"/>
+              </a:rPr>
+              <a:t>SWOT Analysis</a:t>
+            </a:r>
+          </a:p>
+        </p:txBody>
+      </p:sp>
+      <p:sp>
+        <p:nvSpPr>
+          <p:cNvPr id="6" name="TextBox 5"/>
+          <p:cNvSpPr/>
+          <p:nvPr>
+            <p:ph type="body" idx="1"/>
+          </p:nvPr>
+        </p:nvSpPr>
+        <p:spPr>
+          <a:xfrm>
+            <a:off x="457200" y="1499616"/>
+            <a:ext cx="5501640" cy="621791"/>
+          </a:xfrm>
+          <a:prstGeom prst="rect">
+            <a:avLst/>
+          </a:prstGeom>
+          <a:noFill/>
+        </p:spPr>
+        <p:txBody>
+          <a:bodyPr wrap="none" lIns="0" rIns="0">
+            <a:noAutofit/>
+          </a:bodyPr>
+          <a:lstStyle/>
+          <a:p>
+            <a:pPr algn="l"/>
+            <a:r>
+              <a:rPr sz="3400" b="1" i="0">
+                <a:solidFill>
+                  <a:srgbClr val="0072CE"/>
+                </a:solidFill>
+                <a:latin typeface="Arial"/>
+              </a:rPr>
+              <a:t>Strengths</a:t>
+            </a:r>
+          </a:p>
+        </p:txBody>
+      </p:sp>
+      <p:sp>
+        <p:nvSpPr>
+          <p:cNvPr id="7" name="Rectangle 6"/>
+          <p:cNvSpPr/>
+          <p:nvPr>
+            <p:ph type="body" idx="2"/>
+          </p:nvPr>
+        </p:nvSpPr>
+        <p:spPr>
+          <a:xfrm>
+            <a:off x="457200" y="2176271"/>
+            <a:ext cx="2015207" cy="54864"/>
+          </a:xfrm>
+          <a:prstGeom prst="rect">
+            <a:avLst/>
+          </a:prstGeom>
+          <a:solidFill>
+            <a:srgbClr val="0072CE"/>
+          </a:solidFill>
+          <a:ln>
+            <a:noFill/>
+          </a:ln>
+          <a:effectLst/>
+        </p:spPr>
+        <p:txBody>
+          <a:bodyPr rtlCol="0" anchor="ctr"/>
+          <a:lstStyle/>
+          <a:p>
+            <a:pPr algn="ctr"/>
+          </a:p>
+        </p:txBody>
+      </p:sp>
+      <p:sp>
+        <p:nvSpPr>
+          <p:cNvPr id="8" name="TextBox 7"/>
+          <p:cNvSpPr/>
+          <p:nvPr>
+            <p:ph type="body" idx="3"/>
+          </p:nvPr>
+        </p:nvSpPr>
+        <p:spPr>
+          <a:xfrm>
+            <a:off x="457200" y="2395727"/>
+            <a:ext cx="7863523" cy="609600"/>
+          </a:xfrm>
+          <a:prstGeom prst="rect">
+            <a:avLst/>
+          </a:prstGeom>
+          <a:noFill/>
+        </p:spPr>
+        <p:txBody>
+          <a:bodyPr wrap="none" lIns="0" rIns="0">
+            <a:noAutofit/>
+          </a:bodyPr>
+          <a:lstStyle/>
+          <a:p>
+            <a:pPr algn="l"/>
+            <a:r>
+              <a:rPr sz="3400" b="0" i="0">
+                <a:solidFill>
+                  <a:srgbClr val="0A2240"/>
+                </a:solidFill>
+                <a:latin typeface="Arial"/>
+              </a:rPr>
+              <a:t>Strong brand, loyal users</a:t>
+            </a:r>
+          </a:p>
+        </p:txBody>
+      </p:sp>
+      <p:sp>
+        <p:nvSpPr>
+          <p:cNvPr id="9" name="TextBox 8"/>
+          <p:cNvSpPr/>
+          <p:nvPr>
+            <p:ph type="body" idx="4"/>
+          </p:nvPr>
+        </p:nvSpPr>
+        <p:spPr>
+          <a:xfrm>
+            <a:off x="6233160" y="1499616"/>
+            <a:ext cx="5501640" cy="621791"/>
+          </a:xfrm>
+          <a:prstGeom prst="rect">
+            <a:avLst/>
+          </a:prstGeom>
+          <a:noFill/>
+        </p:spPr>
+        <p:txBody>
+          <a:bodyPr wrap="none" lIns="0" rIns="0">
+            <a:noAutofit/>
+          </a:bodyPr>
+          <a:lstStyle/>
+          <a:p>
+            <a:pPr algn="l"/>
+            <a:r>
+              <a:rPr sz="3400" b="1" i="0">
+                <a:solidFill>
+                  <a:srgbClr val="0A2240"/>
+                </a:solidFill>
+                <a:latin typeface="Arial"/>
+              </a:rPr>
+              <a:t>Weaknesses</a:t>
+            </a:r>
+          </a:p>
+        </p:txBody>
+      </p:sp>
+      <p:sp>
+        <p:nvSpPr>
+          <p:cNvPr id="10" name="Rectangle 9"/>
+          <p:cNvSpPr/>
+          <p:nvPr>
+            <p:ph type="body" idx="5"/>
+          </p:nvPr>
+        </p:nvSpPr>
+        <p:spPr>
+          <a:xfrm>
+            <a:off x="6233160" y="2176271"/>
+            <a:ext cx="2584686" cy="54864"/>
+          </a:xfrm>
+          <a:prstGeom prst="rect">
+            <a:avLst/>
+          </a:prstGeom>
+          <a:solidFill>
+            <a:srgbClr val="0A2240"/>
+          </a:solidFill>
+          <a:ln>
+            <a:noFill/>
+          </a:ln>
+          <a:effectLst/>
+        </p:spPr>
+        <p:txBody>
+          <a:bodyPr rtlCol="0" anchor="ctr"/>
+          <a:lstStyle/>
+          <a:p>
+            <a:pPr algn="ctr"/>
+          </a:p>
+        </p:txBody>
+      </p:sp>
+      <p:sp>
+        <p:nvSpPr>
+          <p:cNvPr id="11" name="TextBox 10"/>
+          <p:cNvSpPr/>
+          <p:nvPr>
+            <p:ph type="body" idx="6"/>
+          </p:nvPr>
+        </p:nvSpPr>
+        <p:spPr>
+          <a:xfrm>
+            <a:off x="6233160" y="2395727"/>
+            <a:ext cx="5958840" cy="609600"/>
+          </a:xfrm>
+          <a:prstGeom prst="rect">
+            <a:avLst/>
+          </a:prstGeom>
+          <a:noFill/>
+        </p:spPr>
+        <p:txBody>
+          <a:bodyPr wrap="none" lIns="0" rIns="0">
+            <a:noAutofit/>
+          </a:bodyPr>
+          <a:lstStyle/>
+          <a:p>
+            <a:pPr algn="l"/>
+            <a:r>
+              <a:rPr sz="3400" b="0" i="0">
+                <a:solidFill>
+                  <a:srgbClr val="0A2240"/>
+                </a:solidFill>
+                <a:latin typeface="Arial"/>
+              </a:rPr>
+              <a:t>Thin margins, small team</a:t>
+            </a:r>
+          </a:p>
+        </p:txBody>
+      </p:sp>
+      <p:sp>
+        <p:nvSpPr>
+          <p:cNvPr id="12" name="TextBox 11"/>
+          <p:cNvSpPr/>
+          <p:nvPr>
+            <p:ph type="body" idx="7"/>
+          </p:nvPr>
+        </p:nvSpPr>
+        <p:spPr>
+          <a:xfrm>
+            <a:off x="457200" y="3767328"/>
+            <a:ext cx="5501640" cy="621791"/>
+          </a:xfrm>
+          <a:prstGeom prst="rect">
+            <a:avLst/>
+          </a:prstGeom>
+          <a:noFill/>
+        </p:spPr>
+        <p:txBody>
+          <a:bodyPr wrap="none" lIns="0" rIns="0">
+            <a:noAutofit/>
+          </a:bodyPr>
+          <a:lstStyle/>
+          <a:p>
+            <a:pPr algn="l"/>
+            <a:r>
+              <a:rPr sz="3400" b="1" i="0">
+                <a:solidFill>
+                  <a:srgbClr val="0072CE"/>
+                </a:solidFill>
+                <a:latin typeface="Arial"/>
+              </a:rPr>
+              <a:t>Opportunities</a:t>
+            </a:r>
+          </a:p>
+        </p:txBody>
+      </p:sp>
+      <p:sp>
+        <p:nvSpPr>
+          <p:cNvPr id="13" name="Rectangle 12"/>
+          <p:cNvSpPr/>
+          <p:nvPr>
+            <p:ph type="body" idx="8"/>
+          </p:nvPr>
+        </p:nvSpPr>
+        <p:spPr>
+          <a:xfrm>
+            <a:off x="457200" y="4443983"/>
+            <a:ext cx="2830525" cy="54864"/>
+          </a:xfrm>
+          <a:prstGeom prst="rect">
+            <a:avLst/>
+          </a:prstGeom>
+          <a:solidFill>
+            <a:srgbClr val="0072CE"/>
+          </a:solidFill>
+          <a:ln>
+            <a:noFill/>
+          </a:ln>
+          <a:effectLst/>
+        </p:spPr>
+        <p:txBody>
+          <a:bodyPr rtlCol="0" anchor="ctr"/>
+          <a:lstStyle/>
+          <a:p>
+            <a:pPr algn="ctr"/>
+          </a:p>
+        </p:txBody>
+      </p:sp>
+      <p:sp>
+        <p:nvSpPr>
+          <p:cNvPr id="14" name="TextBox 13"/>
+          <p:cNvSpPr/>
+          <p:nvPr>
+            <p:ph type="body" idx="9"/>
+          </p:nvPr>
+        </p:nvSpPr>
+        <p:spPr>
+          <a:xfrm>
+            <a:off x="457200" y="4663439"/>
+            <a:ext cx="8015326" cy="609600"/>
+          </a:xfrm>
+          <a:prstGeom prst="rect">
+            <a:avLst/>
+          </a:prstGeom>
+          <a:noFill/>
+        </p:spPr>
+        <p:txBody>
+          <a:bodyPr wrap="none" lIns="0" rIns="0">
+            <a:noAutofit/>
+          </a:bodyPr>
+          <a:lstStyle/>
+          <a:p>
+            <a:pPr algn="l"/>
+            <a:r>
+              <a:rPr sz="3400" b="0" i="0">
+                <a:solidFill>
+                  <a:srgbClr val="0A2240"/>
+                </a:solidFill>
+                <a:latin typeface="Arial"/>
+              </a:rPr>
+              <a:t>New markets via partners</a:t>
+            </a:r>
+          </a:p>
+        </p:txBody>
+      </p:sp>
+      <p:sp>
+        <p:nvSpPr>
+          <p:cNvPr id="15" name="TextBox 14"/>
+          <p:cNvSpPr/>
+          <p:nvPr>
+            <p:ph type="body" idx="13"/>
+          </p:nvPr>
+        </p:nvSpPr>
+        <p:spPr>
+          <a:xfrm>
+            <a:off x="6233160" y="3767328"/>
+            <a:ext cx="5501640" cy="621791"/>
+          </a:xfrm>
+          <a:prstGeom prst="rect">
+            <a:avLst/>
+          </a:prstGeom>
+          <a:noFill/>
+        </p:spPr>
+        <p:txBody>
+          <a:bodyPr wrap="none" lIns="0" rIns="0">
+            <a:noAutofit/>
+          </a:bodyPr>
+          <a:lstStyle/>
+          <a:p>
+            <a:pPr algn="l"/>
+            <a:r>
+              <a:rPr sz="3400" b="1" i="0">
+                <a:solidFill>
+                  <a:srgbClr val="0A2240"/>
+                </a:solidFill>
+                <a:latin typeface="Arial"/>
+              </a:rPr>
+              <a:t>Threats</a:t>
+            </a:r>
+          </a:p>
+        </p:txBody>
+      </p:sp>
+      <p:sp>
+        <p:nvSpPr>
+          <p:cNvPr id="16" name="Rectangle 15"/>
+          <p:cNvSpPr/>
+          <p:nvPr>
+            <p:ph type="body" idx="14"/>
+          </p:nvPr>
+        </p:nvSpPr>
+        <p:spPr>
+          <a:xfrm>
+            <a:off x="6233160" y="4443983"/>
+            <a:ext cx="1559793" cy="54864"/>
+          </a:xfrm>
+          <a:prstGeom prst="rect">
+            <a:avLst/>
+          </a:prstGeom>
+          <a:solidFill>
+            <a:srgbClr val="0A2240"/>
+          </a:solidFill>
+          <a:ln>
+            <a:noFill/>
+          </a:ln>
+          <a:effectLst/>
+        </p:spPr>
+        <p:txBody>
+          <a:bodyPr rtlCol="0" anchor="ctr"/>
+          <a:lstStyle/>
+          <a:p>
+            <a:pPr algn="ctr"/>
+          </a:p>
+        </p:txBody>
+      </p:sp>
+      <p:sp>
+        <p:nvSpPr>
+          <p:cNvPr id="17" name="TextBox 16"/>
+          <p:cNvSpPr/>
+          <p:nvPr>
+            <p:ph type="body" idx="15"/>
+          </p:nvPr>
+        </p:nvSpPr>
+        <p:spPr>
+          <a:xfrm>
+            <a:off x="6233160" y="4663439"/>
+            <a:ext cx="5958840" cy="609600"/>
+          </a:xfrm>
+          <a:prstGeom prst="rect">
+            <a:avLst/>
+          </a:prstGeom>
+          <a:noFill/>
+        </p:spPr>
+        <p:txBody>
+          <a:bodyPr wrap="none" lIns="0" rIns="0">
+            <a:noAutofit/>
+          </a:bodyPr>
+          <a:lstStyle/>
+          <a:p>
+            <a:pPr algn="l"/>
+            <a:r>
+              <a:rPr sz="3400" b="0" i="0">
+                <a:solidFill>
+                  <a:srgbClr val="0A2240"/>
+                </a:solidFill>
+                <a:latin typeface="Arial"/>
+              </a:rPr>
+              <a:t>New entrants cut prices</a:t>
             </a:r>
           </a:p>
         </p:txBody>
@@ -17974,533 +17843,6 @@
 </file>
 
 <file path=ppt/slideLayouts/slideLayout40.xml><?xml version="1.0" encoding="utf-8"?>
-<p:sldLayout xmlns:a="http://schemas.openxmlformats.org/drawingml/2006/main" xmlns:r="http://schemas.openxmlformats.org/officeDocument/2006/relationships" xmlns:p="http://schemas.openxmlformats.org/presentationml/2006/main" type="blank" preserve="1">
-  <p:cSld name="slidekit · SWOT">
-    <p:bg>
-      <p:bgPr>
-        <a:solidFill>
-          <a:srgbClr val="FFFFFF"/>
-        </a:solidFill>
-        <a:effectLst/>
-      </p:bgPr>
-    </p:bg>
-    <p:spTree>
-      <p:nvGrpSpPr>
-        <p:cNvPr id="1" name=""/>
-        <p:cNvGrpSpPr/>
-        <p:nvPr/>
-      </p:nvGrpSpPr>
-      <p:grpSpPr>
-        <a:xfrm>
-          <a:off x="0" y="0"/>
-          <a:ext cx="0" cy="0"/>
-          <a:chOff x="0" y="0"/>
-          <a:chExt cx="0" cy="0"/>
-        </a:xfrm>
-      </p:grpSpPr>
-      <p:sp>
-        <p:nvSpPr>
-          <p:cNvPr id="4" name="Slide Number Placeholder 3"/>
-          <p:cNvSpPr>
-            <a:spLocks noGrp="1"/>
-          </p:cNvSpPr>
-          <p:nvPr>
-            <p:ph type="sldNum" sz="quarter" idx="12"/>
-          </p:nvPr>
-        </p:nvSpPr>
-        <p:spPr>
-          <a:xfrm>
-            <a:off x="11186160" y="6035040"/>
-            <a:ext cx="548640" cy="365760"/>
-          </a:xfrm>
-        </p:spPr>
-        <p:txBody>
-          <a:bodyPr/>
-          <a:lstStyle/>
-          <a:p>
-            <a:fld id="{C1FF6DA9-008F-8B48-92A6-B652298478BF}" type="slidenum">
-              <a:rPr lang="en-US" smtClean="0"/>
-              <a:t>‹#›</a:t>
-            </a:fld>
-            <a:endParaRPr lang="en-US"/>
-          </a:p>
-        </p:txBody>
-      </p:sp>
-      <p:sp>
-        <p:nvSpPr>
-          <p:cNvPr id="5" name="TextBox 4"/>
-          <p:cNvSpPr/>
-          <p:nvPr>
-            <p:ph type="title"/>
-          </p:nvPr>
-        </p:nvSpPr>
-        <p:spPr>
-          <a:xfrm>
-            <a:off x="457200" y="457200"/>
-            <a:ext cx="11277600" cy="768096"/>
-          </a:xfrm>
-          <a:prstGeom prst="rect">
-            <a:avLst/>
-          </a:prstGeom>
-          <a:noFill/>
-        </p:spPr>
-        <p:txBody>
-          <a:bodyPr wrap="none" lIns="0" rIns="0">
-            <a:noAutofit/>
-          </a:bodyPr>
-          <a:lstStyle/>
-          <a:p>
-            <a:pPr algn="l"/>
-            <a:r>
-              <a:rPr sz="4200" b="1" i="0">
-                <a:solidFill>
-                  <a:srgbClr val="0072CE"/>
-                </a:solidFill>
-                <a:latin typeface="Arial"/>
-              </a:rPr>
-              <a:t>SWOT Analysis</a:t>
-            </a:r>
-          </a:p>
-        </p:txBody>
-      </p:sp>
-      <p:sp>
-        <p:nvSpPr>
-          <p:cNvPr id="6" name="TextBox 5"/>
-          <p:cNvSpPr/>
-          <p:nvPr>
-            <p:ph type="body" idx="1"/>
-          </p:nvPr>
-        </p:nvSpPr>
-        <p:spPr>
-          <a:xfrm>
-            <a:off x="457200" y="1499616"/>
-            <a:ext cx="5501640" cy="621791"/>
-          </a:xfrm>
-          <a:prstGeom prst="rect">
-            <a:avLst/>
-          </a:prstGeom>
-          <a:noFill/>
-        </p:spPr>
-        <p:txBody>
-          <a:bodyPr wrap="none" lIns="0" rIns="0">
-            <a:noAutofit/>
-          </a:bodyPr>
-          <a:lstStyle/>
-          <a:p>
-            <a:pPr algn="l"/>
-            <a:r>
-              <a:rPr sz="3400" b="1" i="0">
-                <a:solidFill>
-                  <a:srgbClr val="0072CE"/>
-                </a:solidFill>
-                <a:latin typeface="Arial"/>
-              </a:rPr>
-              <a:t>Strengths</a:t>
-            </a:r>
-          </a:p>
-        </p:txBody>
-      </p:sp>
-      <p:sp>
-        <p:nvSpPr>
-          <p:cNvPr id="7" name="Rectangle 6"/>
-          <p:cNvSpPr/>
-          <p:nvPr>
-            <p:ph type="body" idx="2"/>
-          </p:nvPr>
-        </p:nvSpPr>
-        <p:spPr>
-          <a:xfrm>
-            <a:off x="457200" y="2176271"/>
-            <a:ext cx="1650492" cy="54864"/>
-          </a:xfrm>
-          <a:prstGeom prst="rect">
-            <a:avLst/>
-          </a:prstGeom>
-          <a:solidFill>
-            <a:srgbClr val="0072CE"/>
-          </a:solidFill>
-          <a:ln>
-            <a:noFill/>
-          </a:ln>
-          <a:effectLst/>
-        </p:spPr>
-        <p:txBody>
-          <a:bodyPr rtlCol="0" anchor="ctr"/>
-          <a:lstStyle/>
-          <a:p>
-            <a:pPr algn="ctr"/>
-          </a:p>
-        </p:txBody>
-      </p:sp>
-      <p:sp>
-        <p:nvSpPr>
-          <p:cNvPr id="8" name="TextBox 7"/>
-          <p:cNvSpPr/>
-          <p:nvPr>
-            <p:ph type="body" idx="3"/>
-          </p:nvPr>
-        </p:nvSpPr>
-        <p:spPr>
-          <a:xfrm>
-            <a:off x="457200" y="2395727"/>
-            <a:ext cx="5501640" cy="1097281"/>
-          </a:xfrm>
-          <a:prstGeom prst="rect">
-            <a:avLst/>
-          </a:prstGeom>
-          <a:noFill/>
-        </p:spPr>
-        <p:txBody>
-          <a:bodyPr wrap="square" lIns="0" rIns="0">
-            <a:noAutofit/>
-          </a:bodyPr>
-          <a:lstStyle/>
-          <a:p>
-            <a:pPr algn="l"/>
-            <a:r>
-              <a:rPr sz="3400" b="0" i="0">
-                <a:solidFill>
-                  <a:srgbClr val="0A2240"/>
-                </a:solidFill>
-                <a:latin typeface="Arial"/>
-              </a:rPr>
-              <a:t>A strong brand with loyal users</a:t>
-            </a:r>
-          </a:p>
-        </p:txBody>
-      </p:sp>
-      <p:sp>
-        <p:nvSpPr>
-          <p:cNvPr id="9" name="TextBox 8"/>
-          <p:cNvSpPr/>
-          <p:nvPr>
-            <p:ph type="body" idx="4"/>
-          </p:nvPr>
-        </p:nvSpPr>
-        <p:spPr>
-          <a:xfrm>
-            <a:off x="6233160" y="1499616"/>
-            <a:ext cx="5501640" cy="621791"/>
-          </a:xfrm>
-          <a:prstGeom prst="rect">
-            <a:avLst/>
-          </a:prstGeom>
-          <a:noFill/>
-        </p:spPr>
-        <p:txBody>
-          <a:bodyPr wrap="none" lIns="0" rIns="0">
-            <a:noAutofit/>
-          </a:bodyPr>
-          <a:lstStyle/>
-          <a:p>
-            <a:pPr algn="l"/>
-            <a:r>
-              <a:rPr sz="3400" b="1" i="0">
-                <a:solidFill>
-                  <a:srgbClr val="5B6B82"/>
-                </a:solidFill>
-                <a:latin typeface="Arial"/>
-              </a:rPr>
-              <a:t>Weaknesses</a:t>
-            </a:r>
-          </a:p>
-        </p:txBody>
-      </p:sp>
-      <p:sp>
-        <p:nvSpPr>
-          <p:cNvPr id="10" name="Rectangle 9"/>
-          <p:cNvSpPr/>
-          <p:nvPr>
-            <p:ph type="body" idx="5"/>
-          </p:nvPr>
-        </p:nvSpPr>
-        <p:spPr>
-          <a:xfrm>
-            <a:off x="6233160" y="2176271"/>
-            <a:ext cx="1650492" cy="54864"/>
-          </a:xfrm>
-          <a:prstGeom prst="rect">
-            <a:avLst/>
-          </a:prstGeom>
-          <a:solidFill>
-            <a:srgbClr val="5B6B82"/>
-          </a:solidFill>
-          <a:ln>
-            <a:noFill/>
-          </a:ln>
-          <a:effectLst/>
-        </p:spPr>
-        <p:txBody>
-          <a:bodyPr rtlCol="0" anchor="ctr"/>
-          <a:lstStyle/>
-          <a:p>
-            <a:pPr algn="ctr"/>
-          </a:p>
-        </p:txBody>
-      </p:sp>
-      <p:sp>
-        <p:nvSpPr>
-          <p:cNvPr id="11" name="TextBox 10"/>
-          <p:cNvSpPr/>
-          <p:nvPr>
-            <p:ph type="body" idx="6"/>
-          </p:nvPr>
-        </p:nvSpPr>
-        <p:spPr>
-          <a:xfrm>
-            <a:off x="6233160" y="2395727"/>
-            <a:ext cx="5501640" cy="1097281"/>
-          </a:xfrm>
-          <a:prstGeom prst="rect">
-            <a:avLst/>
-          </a:prstGeom>
-          <a:noFill/>
-        </p:spPr>
-        <p:txBody>
-          <a:bodyPr wrap="square" lIns="0" rIns="0">
-            <a:noAutofit/>
-          </a:bodyPr>
-          <a:lstStyle/>
-          <a:p>
-            <a:pPr algn="l"/>
-            <a:r>
-              <a:rPr sz="3400" b="0" i="0">
-                <a:solidFill>
-                  <a:srgbClr val="0A2240"/>
-                </a:solidFill>
-                <a:latin typeface="Arial"/>
-              </a:rPr>
-              <a:t>Thin margins and a small team</a:t>
-            </a:r>
-          </a:p>
-        </p:txBody>
-      </p:sp>
-      <p:sp>
-        <p:nvSpPr>
-          <p:cNvPr id="12" name="TextBox 11"/>
-          <p:cNvSpPr/>
-          <p:nvPr>
-            <p:ph type="body" idx="7"/>
-          </p:nvPr>
-        </p:nvSpPr>
-        <p:spPr>
-          <a:xfrm>
-            <a:off x="457200" y="3767328"/>
-            <a:ext cx="5501640" cy="621791"/>
-          </a:xfrm>
-          <a:prstGeom prst="rect">
-            <a:avLst/>
-          </a:prstGeom>
-          <a:noFill/>
-        </p:spPr>
-        <p:txBody>
-          <a:bodyPr wrap="none" lIns="0" rIns="0">
-            <a:noAutofit/>
-          </a:bodyPr>
-          <a:lstStyle/>
-          <a:p>
-            <a:pPr algn="l"/>
-            <a:r>
-              <a:rPr sz="3400" b="1" i="0">
-                <a:solidFill>
-                  <a:srgbClr val="0072CE"/>
-                </a:solidFill>
-                <a:latin typeface="Arial"/>
-              </a:rPr>
-              <a:t>Opportunities</a:t>
-            </a:r>
-          </a:p>
-        </p:txBody>
-      </p:sp>
-      <p:sp>
-        <p:nvSpPr>
-          <p:cNvPr id="13" name="Rectangle 12"/>
-          <p:cNvSpPr/>
-          <p:nvPr>
-            <p:ph type="body" idx="8"/>
-          </p:nvPr>
-        </p:nvSpPr>
-        <p:spPr>
-          <a:xfrm>
-            <a:off x="457200" y="4443983"/>
-            <a:ext cx="1650492" cy="54864"/>
-          </a:xfrm>
-          <a:prstGeom prst="rect">
-            <a:avLst/>
-          </a:prstGeom>
-          <a:solidFill>
-            <a:srgbClr val="0072CE"/>
-          </a:solidFill>
-          <a:ln>
-            <a:noFill/>
-          </a:ln>
-          <a:effectLst/>
-        </p:spPr>
-        <p:txBody>
-          <a:bodyPr rtlCol="0" anchor="ctr"/>
-          <a:lstStyle/>
-          <a:p>
-            <a:pPr algn="ctr"/>
-          </a:p>
-        </p:txBody>
-      </p:sp>
-      <p:sp>
-        <p:nvSpPr>
-          <p:cNvPr id="14" name="TextBox 13"/>
-          <p:cNvSpPr/>
-          <p:nvPr>
-            <p:ph type="body" idx="9"/>
-          </p:nvPr>
-        </p:nvSpPr>
-        <p:spPr>
-          <a:xfrm>
-            <a:off x="457200" y="4663439"/>
-            <a:ext cx="5501640" cy="1097281"/>
-          </a:xfrm>
-          <a:prstGeom prst="rect">
-            <a:avLst/>
-          </a:prstGeom>
-          <a:noFill/>
-        </p:spPr>
-        <p:txBody>
-          <a:bodyPr wrap="square" lIns="0" rIns="0">
-            <a:noAutofit/>
-          </a:bodyPr>
-          <a:lstStyle/>
-          <a:p>
-            <a:pPr algn="l"/>
-            <a:r>
-              <a:rPr sz="3400" b="0" i="0">
-                <a:solidFill>
-                  <a:srgbClr val="0A2240"/>
-                </a:solidFill>
-                <a:latin typeface="Arial"/>
-              </a:rPr>
-              <a:t>New markets through partnerships</a:t>
-            </a:r>
-          </a:p>
-        </p:txBody>
-      </p:sp>
-      <p:sp>
-        <p:nvSpPr>
-          <p:cNvPr id="15" name="TextBox 14"/>
-          <p:cNvSpPr/>
-          <p:nvPr>
-            <p:ph type="body" idx="13"/>
-          </p:nvPr>
-        </p:nvSpPr>
-        <p:spPr>
-          <a:xfrm>
-            <a:off x="6233160" y="3767328"/>
-            <a:ext cx="5501640" cy="621791"/>
-          </a:xfrm>
-          <a:prstGeom prst="rect">
-            <a:avLst/>
-          </a:prstGeom>
-          <a:noFill/>
-        </p:spPr>
-        <p:txBody>
-          <a:bodyPr wrap="none" lIns="0" rIns="0">
-            <a:noAutofit/>
-          </a:bodyPr>
-          <a:lstStyle/>
-          <a:p>
-            <a:pPr algn="l"/>
-            <a:r>
-              <a:rPr sz="3400" b="1" i="0">
-                <a:solidFill>
-                  <a:srgbClr val="5B6B82"/>
-                </a:solidFill>
-                <a:latin typeface="Arial"/>
-              </a:rPr>
-              <a:t>Threats</a:t>
-            </a:r>
-          </a:p>
-        </p:txBody>
-      </p:sp>
-      <p:sp>
-        <p:nvSpPr>
-          <p:cNvPr id="16" name="Rectangle 15"/>
-          <p:cNvSpPr/>
-          <p:nvPr>
-            <p:ph type="body" idx="14"/>
-          </p:nvPr>
-        </p:nvSpPr>
-        <p:spPr>
-          <a:xfrm>
-            <a:off x="6233160" y="4443983"/>
-            <a:ext cx="1650492" cy="54864"/>
-          </a:xfrm>
-          <a:prstGeom prst="rect">
-            <a:avLst/>
-          </a:prstGeom>
-          <a:solidFill>
-            <a:srgbClr val="5B6B82"/>
-          </a:solidFill>
-          <a:ln>
-            <a:noFill/>
-          </a:ln>
-          <a:effectLst/>
-        </p:spPr>
-        <p:txBody>
-          <a:bodyPr rtlCol="0" anchor="ctr"/>
-          <a:lstStyle/>
-          <a:p>
-            <a:pPr algn="ctr"/>
-          </a:p>
-        </p:txBody>
-      </p:sp>
-      <p:sp>
-        <p:nvSpPr>
-          <p:cNvPr id="17" name="TextBox 16"/>
-          <p:cNvSpPr/>
-          <p:nvPr>
-            <p:ph type="body" idx="15"/>
-          </p:nvPr>
-        </p:nvSpPr>
-        <p:spPr>
-          <a:xfrm>
-            <a:off x="6233160" y="4663439"/>
-            <a:ext cx="5501640" cy="1097281"/>
-          </a:xfrm>
-          <a:prstGeom prst="rect">
-            <a:avLst/>
-          </a:prstGeom>
-          <a:noFill/>
-        </p:spPr>
-        <p:txBody>
-          <a:bodyPr wrap="square" lIns="0" rIns="0">
-            <a:noAutofit/>
-          </a:bodyPr>
-          <a:lstStyle/>
-          <a:p>
-            <a:pPr algn="l"/>
-            <a:r>
-              <a:rPr sz="3400" b="0" i="0">
-                <a:solidFill>
-                  <a:srgbClr val="0A2240"/>
-                </a:solidFill>
-                <a:latin typeface="Arial"/>
-              </a:rPr>
-              <a:t>New entrants driving price pressure</a:t>
-            </a:r>
-          </a:p>
-        </p:txBody>
-      </p:sp>
-    </p:spTree>
-    <p:extLst>
-      <p:ext uri="{BB962C8B-B14F-4D97-AF65-F5344CB8AC3E}">
-        <p14:creationId xmlns:p14="http://schemas.microsoft.com/office/powerpoint/2010/main" val="1212999818"/>
-      </p:ext>
-    </p:extLst>
-  </p:cSld>
-  <p:clrMapOvr>
-    <a:masterClrMapping/>
-  </p:clrMapOvr>
-</p:sldLayout>
-</file>
-
-<file path=ppt/slideLayouts/slideLayout41.xml><?xml version="1.0" encoding="utf-8"?>
 <p:sldLayout xmlns:a="http://schemas.openxmlformats.org/drawingml/2006/main" xmlns:r="http://schemas.openxmlformats.org/officeDocument/2006/relationships" xmlns:p="http://schemas.openxmlformats.org/presentationml/2006/main" type="blank" preserve="1">
   <p:cSld name="slidekit · Comparison Matrix">
     <p:bg>
@@ -20704,7 +20046,6 @@
     <p:sldLayoutId id="2147483738" r:id="rId39"/>
     <p:sldLayoutId id="2147483739" r:id="rId40"/>
     <p:sldLayoutId id="2147483740" r:id="rId41"/>
-    <p:sldLayoutId id="2147483741" r:id="rId42"/>
   </p:sldLayoutIdLst>
   <p:txStyles>
     <p:titleStyle>
@@ -21215,7 +20556,7 @@
             <a:fld id="{4B0E1F8A-6C1D-4E2A-9F3B-7A5C8D2E1F60}" type="slidenum">
               <a:rPr sz="1600" b="0" i="0">
                 <a:solidFill>
-                  <a:srgbClr val="5B6B82"/>
+                  <a:srgbClr val="0A2240"/>
                 </a:solidFill>
                 <a:latin typeface="Arial"/>
               </a:rPr>
@@ -21453,7 +20794,7 @@
             <a:fld id="{4B0E1F8A-6C1D-4E2A-9F3B-7A5C8D2E1F60}" type="slidenum">
               <a:rPr sz="1600" b="0" i="0">
                 <a:solidFill>
-                  <a:srgbClr val="5B6B82"/>
+                  <a:srgbClr val="0A2240"/>
                 </a:solidFill>
                 <a:latin typeface="Arial"/>
               </a:rPr>
@@ -21566,8 +20907,8 @@
         </p:nvSpPr>
         <p:spPr>
           <a:xfrm>
-            <a:off x="548640" y="2176271"/>
-            <a:ext cx="1650492" cy="54864"/>
+            <a:off x="457200" y="2176271"/>
+            <a:ext cx="3470846" cy="54864"/>
           </a:xfrm>
           <a:prstGeom prst="rect">
             <a:avLst/>
@@ -21628,7 +20969,7 @@
             <a:r>
               <a:rPr sz="3400" b="1" i="0">
                 <a:solidFill>
-                  <a:srgbClr val="5B6B82"/>
+                  <a:srgbClr val="0A2240"/>
                 </a:solidFill>
                 <a:latin typeface="Arial"/>
               </a:rPr>
@@ -21645,14 +20986,14 @@
         </p:nvSpPr>
         <p:spPr>
           <a:xfrm>
-            <a:off x="6324600" y="2176271"/>
-            <a:ext cx="1650492" cy="54864"/>
+            <a:off x="6233160" y="2176271"/>
+            <a:ext cx="3342655" cy="54864"/>
           </a:xfrm>
           <a:prstGeom prst="rect">
             <a:avLst/>
           </a:prstGeom>
           <a:solidFill>
-            <a:srgbClr val="5B6B82"/>
+            <a:srgbClr val="0A2240"/>
           </a:solidFill>
           <a:ln>
             <a:noFill/>
@@ -21919,7 +21260,7 @@
             <a:fld id="{4B0E1F8A-6C1D-4E2A-9F3B-7A5C8D2E1F60}" type="slidenum">
               <a:rPr sz="1600" b="0" i="0">
                 <a:solidFill>
-                  <a:srgbClr val="5B6B82"/>
+                  <a:srgbClr val="0A2240"/>
                 </a:solidFill>
                 <a:latin typeface="Arial"/>
               </a:rPr>
@@ -22534,7 +21875,7 @@
             <a:fld id="{4B0E1F8A-6C1D-4E2A-9F3B-7A5C8D2E1F60}" type="slidenum">
               <a:rPr sz="1600" b="0" i="0">
                 <a:solidFill>
-                  <a:srgbClr val="5B6B82"/>
+                  <a:srgbClr val="0A2240"/>
                 </a:solidFill>
                 <a:latin typeface="Arial"/>
               </a:rPr>
@@ -22711,7 +22052,7 @@
             <a:fld id="{4B0E1F8A-6C1D-4E2A-9F3B-7A5C8D2E1F60}" type="slidenum">
               <a:rPr sz="1600" b="0" i="0">
                 <a:solidFill>
-                  <a:srgbClr val="5B6B82"/>
+                  <a:srgbClr val="0A2240"/>
                 </a:solidFill>
                 <a:latin typeface="Arial"/>
               </a:rPr>
@@ -22807,7 +22148,7 @@
             <a:r>
               <a:rPr sz="4200" b="1" i="0">
                 <a:solidFill>
-                  <a:srgbClr val="123A6B"/>
+                  <a:srgbClr val="0072CE"/>
                 </a:solidFill>
                 <a:latin typeface="Arial"/>
               </a:rPr>
@@ -22842,7 +22183,7 @@
             <a:r>
               <a:rPr sz="4200" b="1" i="0">
                 <a:solidFill>
-                  <a:srgbClr val="123A6B"/>
+                  <a:srgbClr val="0072CE"/>
                 </a:solidFill>
                 <a:latin typeface="Arial"/>
               </a:rPr>
@@ -22912,7 +22253,7 @@
             <a:r>
               <a:rPr sz="4200" b="1" i="0">
                 <a:solidFill>
-                  <a:srgbClr val="123A6B"/>
+                  <a:srgbClr val="0072CE"/>
                 </a:solidFill>
                 <a:latin typeface="Arial"/>
               </a:rPr>
@@ -22947,7 +22288,7 @@
             <a:r>
               <a:rPr sz="4200" b="1" i="0">
                 <a:solidFill>
-                  <a:srgbClr val="123A6B"/>
+                  <a:srgbClr val="0072CE"/>
                 </a:solidFill>
                 <a:latin typeface="Arial"/>
               </a:rPr>
@@ -23017,7 +22358,7 @@
             <a:r>
               <a:rPr sz="4200" b="1" i="0">
                 <a:solidFill>
-                  <a:srgbClr val="123A6B"/>
+                  <a:srgbClr val="0072CE"/>
                 </a:solidFill>
                 <a:latin typeface="Arial"/>
               </a:rPr>
@@ -23052,7 +22393,7 @@
             <a:r>
               <a:rPr sz="4200" b="1" i="0">
                 <a:solidFill>
-                  <a:srgbClr val="123A6B"/>
+                  <a:srgbClr val="0072CE"/>
                 </a:solidFill>
                 <a:latin typeface="Arial"/>
               </a:rPr>
@@ -23124,7 +22465,7 @@
             <a:fld id="{4B0E1F8A-6C1D-4E2A-9F3B-7A5C8D2E1F60}" type="slidenum">
               <a:rPr sz="1600" b="0" i="0">
                 <a:solidFill>
-                  <a:srgbClr val="5B6B82"/>
+                  <a:srgbClr val="0A2240"/>
                 </a:solidFill>
                 <a:latin typeface="Arial"/>
               </a:rPr>
@@ -23174,7 +22515,7 @@
             <a:avLst/>
           </a:prstGeom>
           <a:solidFill>
-            <a:srgbClr val="FF5F56"/>
+            <a:srgbClr val="FFFFFF"/>
           </a:solidFill>
           <a:ln>
             <a:noFill/>
@@ -23218,7 +22559,7 @@
             <a:avLst/>
           </a:prstGeom>
           <a:solidFill>
-            <a:srgbClr val="FFBD2E"/>
+            <a:srgbClr val="FFFFFF"/>
           </a:solidFill>
           <a:ln>
             <a:noFill/>
@@ -23262,7 +22603,7 @@
             <a:avLst/>
           </a:prstGeom>
           <a:solidFill>
-            <a:srgbClr val="27C93F"/>
+            <a:srgbClr val="FFFFFF"/>
           </a:solidFill>
           <a:ln>
             <a:noFill/>
@@ -23317,7 +22658,7 @@
             <a:r>
               <a:rPr sz="4200" b="0" i="0">
                 <a:solidFill>
-                  <a:srgbClr val="D4D4D4"/>
+                  <a:srgbClr val="FFFFFF"/>
                 </a:solidFill>
                 <a:latin typeface="Arial"/>
               </a:rPr>
@@ -23352,7 +22693,7 @@
             <a:r>
               <a:rPr sz="3400" b="0" i="0">
                 <a:solidFill>
-                  <a:srgbClr val="D4D4D4"/>
+                  <a:srgbClr val="FFFFFF"/>
                 </a:solidFill>
                 <a:latin typeface="Arial"/>
               </a:rPr>
@@ -23422,7 +22763,7 @@
             <a:r>
               <a:rPr sz="3400" b="0" i="0">
                 <a:solidFill>
-                  <a:srgbClr val="D4D4D4"/>
+                  <a:srgbClr val="FFFFFF"/>
                 </a:solidFill>
                 <a:latin typeface="Arial"/>
               </a:rPr>
@@ -23457,7 +22798,7 @@
             <a:r>
               <a:rPr sz="3400" b="0" i="0">
                 <a:solidFill>
-                  <a:srgbClr val="D4D4D4"/>
+                  <a:srgbClr val="FFFFFF"/>
                 </a:solidFill>
                 <a:latin typeface="Arial"/>
               </a:rPr>
@@ -23527,7 +22868,7 @@
             <a:r>
               <a:rPr sz="3400" b="0" i="0">
                 <a:solidFill>
-                  <a:srgbClr val="D4D4D4"/>
+                  <a:srgbClr val="FFFFFF"/>
                 </a:solidFill>
                 <a:latin typeface="Arial"/>
               </a:rPr>
@@ -23562,7 +22903,7 @@
             <a:r>
               <a:rPr sz="3400" b="0" i="0">
                 <a:solidFill>
-                  <a:srgbClr val="D4D4D4"/>
+                  <a:srgbClr val="FFFFFF"/>
                 </a:solidFill>
                 <a:latin typeface="Arial"/>
               </a:rPr>
@@ -23632,7 +22973,7 @@
             <a:r>
               <a:rPr sz="3400" b="0" i="0">
                 <a:solidFill>
-                  <a:srgbClr val="D4D4D4"/>
+                  <a:srgbClr val="FFFFFF"/>
                 </a:solidFill>
                 <a:latin typeface="Arial"/>
               </a:rPr>
@@ -23667,7 +23008,7 @@
             <a:r>
               <a:rPr sz="3400" b="0" i="0">
                 <a:solidFill>
-                  <a:srgbClr val="D4D4D4"/>
+                  <a:srgbClr val="FFFFFF"/>
                 </a:solidFill>
                 <a:latin typeface="Arial"/>
               </a:rPr>
@@ -23702,7 +23043,7 @@
             <a:r>
               <a:rPr sz="3400" b="0" i="0">
                 <a:solidFill>
-                  <a:srgbClr val="D4D4D4"/>
+                  <a:srgbClr val="FFFFFF"/>
                 </a:solidFill>
                 <a:latin typeface="Arial"/>
               </a:rPr>
@@ -23772,7 +23113,7 @@
             <a:r>
               <a:rPr sz="3400" b="0" i="0">
                 <a:solidFill>
-                  <a:srgbClr val="D4D4D4"/>
+                  <a:srgbClr val="FFFFFF"/>
                 </a:solidFill>
                 <a:latin typeface="Arial"/>
               </a:rPr>
@@ -23809,7 +23150,7 @@
             <a:fld id="{4B0E1F8A-6C1D-4E2A-9F3B-7A5C8D2E1F60}" type="slidenum">
               <a:rPr sz="1600" b="0" i="0">
                 <a:solidFill>
-                  <a:srgbClr val="5B6B82"/>
+                  <a:srgbClr val="0A2240"/>
                 </a:solidFill>
                 <a:latin typeface="Arial"/>
               </a:rPr>
@@ -24047,7 +23388,7 @@
             <a:fld id="{4B0E1F8A-6C1D-4E2A-9F3B-7A5C8D2E1F60}" type="slidenum">
               <a:rPr sz="1600" b="0" i="0">
                 <a:solidFill>
-                  <a:srgbClr val="5B6B82"/>
+                  <a:srgbClr val="0A2240"/>
                 </a:solidFill>
                 <a:latin typeface="Arial"/>
               </a:rPr>
@@ -24285,7 +23626,7 @@
             <a:fld id="{4B0E1F8A-6C1D-4E2A-9F3B-7A5C8D2E1F60}" type="slidenum">
               <a:rPr sz="1600" b="0" i="0">
                 <a:solidFill>
-                  <a:srgbClr val="5B6B82"/>
+                  <a:srgbClr val="0A2240"/>
                 </a:solidFill>
                 <a:latin typeface="Arial"/>
               </a:rPr>
@@ -24593,7 +23934,7 @@
             <a:fld id="{4B0E1F8A-6C1D-4E2A-9F3B-7A5C8D2E1F60}" type="slidenum">
               <a:rPr sz="1600" b="0" i="0">
                 <a:solidFill>
-                  <a:srgbClr val="5B6B82"/>
+                  <a:srgbClr val="0A2240"/>
                 </a:solidFill>
                 <a:latin typeface="Arial"/>
               </a:rPr>
@@ -24768,7 +24109,7 @@
             <a:r>
               <a:rPr sz="3400" b="0" i="0">
                 <a:solidFill>
-                  <a:srgbClr val="5B6B82"/>
+                  <a:srgbClr val="0A2240"/>
                 </a:solidFill>
                 <a:latin typeface="Arial"/>
               </a:rPr>
@@ -24805,7 +24146,7 @@
             <a:fld id="{4B0E1F8A-6C1D-4E2A-9F3B-7A5C8D2E1F60}" type="slidenum">
               <a:rPr sz="1600" b="0" i="0">
                 <a:solidFill>
-                  <a:srgbClr val="5B6B82"/>
+                  <a:srgbClr val="0A2240"/>
                 </a:solidFill>
                 <a:latin typeface="Arial"/>
               </a:rPr>
@@ -25043,7 +24384,7 @@
             <a:fld id="{4B0E1F8A-6C1D-4E2A-9F3B-7A5C8D2E1F60}" type="slidenum">
               <a:rPr sz="1600" b="0" i="0">
                 <a:solidFill>
-                  <a:srgbClr val="5B6B82"/>
+                  <a:srgbClr val="0A2240"/>
                 </a:solidFill>
                 <a:latin typeface="Arial"/>
               </a:rPr>
@@ -25220,7 +24561,7 @@
             <a:fld id="{4B0E1F8A-6C1D-4E2A-9F3B-7A5C8D2E1F60}" type="slidenum">
               <a:rPr sz="1600" b="0" i="0">
                 <a:solidFill>
-                  <a:srgbClr val="5B6B82"/>
+                  <a:srgbClr val="0A2240"/>
                 </a:solidFill>
                 <a:latin typeface="Arial"/>
               </a:rPr>
@@ -25362,7 +24703,7 @@
             <a:fld id="{4B0E1F8A-6C1D-4E2A-9F3B-7A5C8D2E1F60}" type="slidenum">
               <a:rPr sz="1600" b="0" i="0">
                 <a:solidFill>
-                  <a:srgbClr val="5B6B82"/>
+                  <a:srgbClr val="0A2240"/>
                 </a:solidFill>
                 <a:latin typeface="Arial"/>
               </a:rPr>
@@ -25600,7 +24941,7 @@
             <a:fld id="{4B0E1F8A-6C1D-4E2A-9F3B-7A5C8D2E1F60}" type="slidenum">
               <a:rPr sz="1600" b="0" i="0">
                 <a:solidFill>
-                  <a:srgbClr val="5B6B82"/>
+                  <a:srgbClr val="0A2240"/>
                 </a:solidFill>
                 <a:latin typeface="Arial"/>
               </a:rPr>
@@ -25696,7 +25037,7 @@
             <a:r>
               <a:rPr sz="3400" b="1" i="0">
                 <a:solidFill>
-                  <a:srgbClr val="123A6B"/>
+                  <a:srgbClr val="0072CE"/>
                 </a:solidFill>
                 <a:latin typeface="Arial"/>
               </a:rPr>
@@ -25731,7 +25072,7 @@
             <a:r>
               <a:rPr sz="3400" b="1" i="0">
                 <a:solidFill>
-                  <a:srgbClr val="123A6B"/>
+                  <a:srgbClr val="0072CE"/>
                 </a:solidFill>
                 <a:latin typeface="Arial"/>
               </a:rPr>
@@ -25978,7 +25319,7 @@
             <a:fld id="{4B0E1F8A-6C1D-4E2A-9F3B-7A5C8D2E1F60}" type="slidenum">
               <a:rPr sz="1600" b="0" i="0">
                 <a:solidFill>
-                  <a:srgbClr val="5B6B82"/>
+                  <a:srgbClr val="0A2240"/>
                 </a:solidFill>
                 <a:latin typeface="Arial"/>
               </a:rPr>
@@ -26074,7 +25415,7 @@
             <a:r>
               <a:rPr sz="4200" b="1" i="0">
                 <a:solidFill>
-                  <a:srgbClr val="123A6B"/>
+                  <a:srgbClr val="0072CE"/>
                 </a:solidFill>
                 <a:latin typeface="Arial"/>
               </a:rPr>
@@ -26109,7 +25450,7 @@
             <a:r>
               <a:rPr sz="4200" b="1" i="0">
                 <a:solidFill>
-                  <a:srgbClr val="123A6B"/>
+                  <a:srgbClr val="0072CE"/>
                 </a:solidFill>
                 <a:latin typeface="Arial"/>
               </a:rPr>
@@ -26179,7 +25520,7 @@
             <a:r>
               <a:rPr sz="4200" b="1" i="0">
                 <a:solidFill>
-                  <a:srgbClr val="123A6B"/>
+                  <a:srgbClr val="0072CE"/>
                 </a:solidFill>
                 <a:latin typeface="Arial"/>
               </a:rPr>
@@ -26214,7 +25555,7 @@
             <a:r>
               <a:rPr sz="4200" b="1" i="0">
                 <a:solidFill>
-                  <a:srgbClr val="123A6B"/>
+                  <a:srgbClr val="0072CE"/>
                 </a:solidFill>
                 <a:latin typeface="Arial"/>
               </a:rPr>
@@ -26284,7 +25625,7 @@
             <a:r>
               <a:rPr sz="4200" b="1" i="0">
                 <a:solidFill>
-                  <a:srgbClr val="123A6B"/>
+                  <a:srgbClr val="0072CE"/>
                 </a:solidFill>
                 <a:latin typeface="Arial"/>
               </a:rPr>
@@ -26319,7 +25660,7 @@
             <a:r>
               <a:rPr sz="4200" b="1" i="0">
                 <a:solidFill>
-                  <a:srgbClr val="123A6B"/>
+                  <a:srgbClr val="0072CE"/>
                 </a:solidFill>
                 <a:latin typeface="Arial"/>
               </a:rPr>
@@ -26391,7 +25732,7 @@
             <a:fld id="{4B0E1F8A-6C1D-4E2A-9F3B-7A5C8D2E1F60}" type="slidenum">
               <a:rPr sz="1600" b="0" i="0">
                 <a:solidFill>
-                  <a:srgbClr val="5B6B82"/>
+                  <a:srgbClr val="0A2240"/>
                 </a:solidFill>
                 <a:latin typeface="Arial"/>
               </a:rPr>
@@ -26441,7 +25782,7 @@
             <a:avLst/>
           </a:prstGeom>
           <a:solidFill>
-            <a:srgbClr val="FF5F56"/>
+            <a:srgbClr val="FFFFFF"/>
           </a:solidFill>
           <a:ln>
             <a:noFill/>
@@ -26485,7 +25826,7 @@
             <a:avLst/>
           </a:prstGeom>
           <a:solidFill>
-            <a:srgbClr val="FFBD2E"/>
+            <a:srgbClr val="FFFFFF"/>
           </a:solidFill>
           <a:ln>
             <a:noFill/>
@@ -26529,7 +25870,7 @@
             <a:avLst/>
           </a:prstGeom>
           <a:solidFill>
-            <a:srgbClr val="27C93F"/>
+            <a:srgbClr val="FFFFFF"/>
           </a:solidFill>
           <a:ln>
             <a:noFill/>
@@ -26584,7 +25925,7 @@
             <a:r>
               <a:rPr sz="4200" b="0" i="0">
                 <a:solidFill>
-                  <a:srgbClr val="D4D4D4"/>
+                  <a:srgbClr val="FFFFFF"/>
                 </a:solidFill>
                 <a:latin typeface="Arial"/>
               </a:rPr>
@@ -26619,7 +25960,7 @@
             <a:r>
               <a:rPr sz="3400" b="0" i="0">
                 <a:solidFill>
-                  <a:srgbClr val="4EC9B0"/>
+                  <a:srgbClr val="569CD6"/>
                 </a:solidFill>
                 <a:latin typeface="Arial"/>
               </a:rPr>
@@ -26654,7 +25995,7 @@
             <a:r>
               <a:rPr sz="3400" b="0" i="0">
                 <a:solidFill>
-                  <a:srgbClr val="D4D4D4"/>
+                  <a:srgbClr val="FFFFFF"/>
                 </a:solidFill>
                 <a:latin typeface="Arial"/>
               </a:rPr>
@@ -26689,7 +26030,7 @@
             <a:r>
               <a:rPr sz="3400" b="0" i="0">
                 <a:solidFill>
-                  <a:srgbClr val="4EC9B0"/>
+                  <a:srgbClr val="569CD6"/>
                 </a:solidFill>
                 <a:latin typeface="Arial"/>
               </a:rPr>
@@ -26724,7 +26065,7 @@
             <a:r>
               <a:rPr sz="3400" b="0" i="0">
                 <a:solidFill>
-                  <a:srgbClr val="D4D4D4"/>
+                  <a:srgbClr val="FFFFFF"/>
                 </a:solidFill>
                 <a:latin typeface="Arial"/>
               </a:rPr>
@@ -26759,7 +26100,7 @@
             <a:r>
               <a:rPr sz="3400" b="0" i="0">
                 <a:solidFill>
-                  <a:srgbClr val="4EC9B0"/>
+                  <a:srgbClr val="569CD6"/>
                 </a:solidFill>
                 <a:latin typeface="Arial"/>
               </a:rPr>
@@ -26794,7 +26135,7 @@
             <a:r>
               <a:rPr sz="3400" b="0" i="0">
                 <a:solidFill>
-                  <a:srgbClr val="D4D4D4"/>
+                  <a:srgbClr val="FFFFFF"/>
                 </a:solidFill>
                 <a:latin typeface="Arial"/>
               </a:rPr>
@@ -26829,7 +26170,7 @@
             <a:r>
               <a:rPr sz="3400" b="0" i="0">
                 <a:solidFill>
-                  <a:srgbClr val="4EC9B0"/>
+                  <a:srgbClr val="569CD6"/>
                 </a:solidFill>
                 <a:latin typeface="Arial"/>
               </a:rPr>
@@ -26864,7 +26205,7 @@
             <a:r>
               <a:rPr sz="3400" b="0" i="0">
                 <a:solidFill>
-                  <a:srgbClr val="D4D4D4"/>
+                  <a:srgbClr val="FFFFFF"/>
                 </a:solidFill>
                 <a:latin typeface="Arial"/>
               </a:rPr>
@@ -26899,7 +26240,7 @@
             <a:r>
               <a:rPr sz="3400" b="0" i="0">
                 <a:solidFill>
-                  <a:srgbClr val="6A9955"/>
+                  <a:srgbClr val="FFFFFF"/>
                 </a:solidFill>
                 <a:latin typeface="Arial"/>
               </a:rPr>
@@ -26936,7 +26277,7 @@
             <a:fld id="{4B0E1F8A-6C1D-4E2A-9F3B-7A5C8D2E1F60}" type="slidenum">
               <a:rPr sz="1600" b="0" i="0">
                 <a:solidFill>
-                  <a:srgbClr val="5B6B82"/>
+                  <a:srgbClr val="0A2240"/>
                 </a:solidFill>
                 <a:latin typeface="Arial"/>
               </a:rPr>
@@ -27174,7 +26515,7 @@
             <a:fld id="{4B0E1F8A-6C1D-4E2A-9F3B-7A5C8D2E1F60}" type="slidenum">
               <a:rPr sz="1600" b="0" i="0">
                 <a:solidFill>
-                  <a:srgbClr val="5B6B82"/>
+                  <a:srgbClr val="0A2240"/>
                 </a:solidFill>
                 <a:latin typeface="Arial"/>
               </a:rPr>
@@ -27412,7 +26753,7 @@
             <a:fld id="{4B0E1F8A-6C1D-4E2A-9F3B-7A5C8D2E1F60}" type="slidenum">
               <a:rPr sz="1600" b="0" i="0">
                 <a:solidFill>
-                  <a:srgbClr val="5B6B82"/>
+                  <a:srgbClr val="0A2240"/>
                 </a:solidFill>
                 <a:latin typeface="Arial"/>
               </a:rPr>
@@ -27554,7 +26895,7 @@
             <a:fld id="{4B0E1F8A-6C1D-4E2A-9F3B-7A5C8D2E1F60}" type="slidenum">
               <a:rPr sz="1600" b="0" i="0">
                 <a:solidFill>
-                  <a:srgbClr val="5B6B82"/>
+                  <a:srgbClr val="0A2240"/>
                 </a:solidFill>
                 <a:latin typeface="Arial"/>
               </a:rPr>
@@ -27976,7 +27317,7 @@
             <a:fld id="{4B0E1F8A-6C1D-4E2A-9F3B-7A5C8D2E1F60}" type="slidenum">
               <a:rPr sz="1600" b="0" i="0">
                 <a:solidFill>
-                  <a:srgbClr val="5B6B82"/>
+                  <a:srgbClr val="0A2240"/>
                 </a:solidFill>
                 <a:latin typeface="Arial"/>
               </a:rPr>
@@ -28212,7 +27553,7 @@
             <a:r>
               <a:rPr sz="4200" b="1" i="0">
                 <a:solidFill>
-                  <a:srgbClr val="5B6B82"/>
+                  <a:srgbClr val="0A2240"/>
                 </a:solidFill>
                 <a:latin typeface="Arial"/>
               </a:rPr>
@@ -28249,7 +27590,7 @@
             <a:fld id="{4B0E1F8A-6C1D-4E2A-9F3B-7A5C8D2E1F60}" type="slidenum">
               <a:rPr sz="1600" b="0" i="0">
                 <a:solidFill>
-                  <a:srgbClr val="5B6B82"/>
+                  <a:srgbClr val="0A2240"/>
                 </a:solidFill>
                 <a:latin typeface="Arial"/>
               </a:rPr>
@@ -28426,7 +27767,7 @@
             <a:fld id="{4B0E1F8A-6C1D-4E2A-9F3B-7A5C8D2E1F60}" type="slidenum">
               <a:rPr sz="1600" b="0" i="0">
                 <a:solidFill>
-                  <a:srgbClr val="5B6B82"/>
+                  <a:srgbClr val="0A2240"/>
                 </a:solidFill>
                 <a:latin typeface="Arial"/>
               </a:rPr>
@@ -28505,7 +27846,7 @@
         <p:spPr>
           <a:xfrm>
             <a:off x="457200" y="1499616"/>
-            <a:ext cx="3255068" cy="518159"/>
+            <a:ext cx="2214193" cy="518159"/>
           </a:xfrm>
           <a:prstGeom prst="rect">
             <a:avLst/>
@@ -28522,6 +27863,120 @@
             <a:r>
               <a:rPr sz="3400" b="1" i="0">
                 <a:solidFill>
+                  <a:srgbClr val="0072CE"/>
+                </a:solidFill>
+                <a:latin typeface="Arial"/>
+              </a:rPr>
+              <a:t>Piece</a:t>
+            </a:r>
+          </a:p>
+        </p:txBody>
+      </p:sp>
+      <p:sp>
+        <p:nvSpPr>
+          <p:cNvPr id="4" name="TextBox 3"/>
+          <p:cNvSpPr txBox="1"/>
+          <p:nvPr/>
+        </p:nvSpPr>
+        <p:spPr>
+          <a:xfrm>
+            <a:off x="3220033" y="1499616"/>
+            <a:ext cx="5864086" cy="518159"/>
+          </a:xfrm>
+          <a:prstGeom prst="rect">
+            <a:avLst/>
+          </a:prstGeom>
+          <a:noFill/>
+        </p:spPr>
+        <p:txBody>
+          <a:bodyPr wrap="none" lIns="0" rIns="0">
+            <a:noAutofit/>
+          </a:bodyPr>
+          <a:lstStyle/>
+          <a:p>
+            <a:pPr algn="l"/>
+            <a:r>
+              <a:rPr sz="3400" b="1" i="0">
+                <a:solidFill>
+                  <a:srgbClr val="0072CE"/>
+                </a:solidFill>
+                <a:latin typeface="Arial"/>
+              </a:rPr>
+              <a:t>What it gives you</a:t>
+            </a:r>
+          </a:p>
+        </p:txBody>
+      </p:sp>
+      <p:sp>
+        <p:nvSpPr>
+          <p:cNvPr id="5" name="Rectangle 4"/>
+          <p:cNvSpPr/>
+          <p:nvPr/>
+        </p:nvSpPr>
+        <p:spPr>
+          <a:xfrm>
+            <a:off x="457200" y="2072639"/>
+            <a:ext cx="8096612" cy="54864"/>
+          </a:xfrm>
+          <a:prstGeom prst="rect">
+            <a:avLst/>
+          </a:prstGeom>
+          <a:solidFill>
+            <a:srgbClr val="0072CE"/>
+          </a:solidFill>
+          <a:ln>
+            <a:noFill/>
+          </a:ln>
+          <a:effectLst/>
+        </p:spPr>
+        <p:style>
+          <a:lnRef idx="1">
+            <a:schemeClr val="accent1"/>
+          </a:lnRef>
+          <a:fillRef idx="3">
+            <a:schemeClr val="accent1"/>
+          </a:fillRef>
+          <a:effectRef idx="2">
+            <a:schemeClr val="accent1"/>
+          </a:effectRef>
+          <a:fontRef idx="minor">
+            <a:schemeClr val="lt1"/>
+          </a:fontRef>
+        </p:style>
+        <p:txBody>
+          <a:bodyPr rtlCol="0" anchor="ctr"/>
+          <a:lstStyle/>
+          <a:p>
+            <a:pPr algn="ctr"/>
+          </a:p>
+        </p:txBody>
+      </p:sp>
+      <p:sp>
+        <p:nvSpPr>
+          <p:cNvPr id="6" name="TextBox 5"/>
+          <p:cNvSpPr txBox="1"/>
+          <p:nvPr/>
+        </p:nvSpPr>
+        <p:spPr>
+          <a:xfrm>
+            <a:off x="457200" y="2401823"/>
+            <a:ext cx="3140372" cy="633984"/>
+          </a:xfrm>
+          <a:prstGeom prst="rect">
+            <a:avLst/>
+          </a:prstGeom>
+          <a:noFill/>
+        </p:spPr>
+        <p:txBody>
+          <a:bodyPr wrap="none" lIns="0" rIns="0">
+            <a:noAutofit/>
+          </a:bodyPr>
+          <a:lstStyle/>
+          <a:p>
+            <a:pPr algn="l"/>
+            <a:r>
+              <a:rPr sz="3400" b="0" i="0">
+                <a:solidFill>
                   <a:srgbClr val="0A2240"/>
                 </a:solidFill>
                 <a:latin typeface="Arial"/>
@@ -28533,22 +27988,22 @@
       </p:sp>
       <p:sp>
         <p:nvSpPr>
-          <p:cNvPr id="4" name="TextBox 3"/>
-          <p:cNvSpPr txBox="1"/>
-          <p:nvPr/>
-        </p:nvSpPr>
-        <p:spPr>
-          <a:xfrm>
-            <a:off x="457200" y="2154935"/>
-            <a:ext cx="2613660" cy="3605785"/>
-          </a:xfrm>
-          <a:prstGeom prst="rect">
-            <a:avLst/>
-          </a:prstGeom>
-          <a:noFill/>
-        </p:spPr>
-        <p:txBody>
-          <a:bodyPr wrap="square" lIns="0" rIns="0">
+          <p:cNvPr id="7" name="TextBox 6"/>
+          <p:cNvSpPr txBox="1"/>
+          <p:nvPr/>
+        </p:nvSpPr>
+        <p:spPr>
+          <a:xfrm>
+            <a:off x="3220033" y="2401823"/>
+            <a:ext cx="8131710" cy="633984"/>
+          </a:xfrm>
+          <a:prstGeom prst="rect">
+            <a:avLst/>
+          </a:prstGeom>
+          <a:noFill/>
+        </p:spPr>
+        <p:txBody>
+          <a:bodyPr wrap="none" lIns="0" rIns="0">
             <a:noAutofit/>
           </a:bodyPr>
           <a:lstStyle/>
@@ -28568,29 +28023,29 @@
       </p:sp>
       <p:sp>
         <p:nvSpPr>
-          <p:cNvPr id="5" name="TextBox 4"/>
-          <p:cNvSpPr txBox="1"/>
-          <p:nvPr/>
-        </p:nvSpPr>
-        <p:spPr>
-          <a:xfrm>
-            <a:off x="3345180" y="1499616"/>
-            <a:ext cx="2613660" cy="518159"/>
-          </a:xfrm>
-          <a:prstGeom prst="rect">
-            <a:avLst/>
-          </a:prstGeom>
-          <a:noFill/>
-        </p:spPr>
-        <p:txBody>
-          <a:bodyPr wrap="none" lIns="0" rIns="0">
-            <a:noAutofit/>
-          </a:bodyPr>
-          <a:lstStyle/>
-          <a:p>
-            <a:pPr algn="l"/>
-            <a:r>
-              <a:rPr sz="3400" b="1" i="0">
+          <p:cNvPr id="8" name="TextBox 7"/>
+          <p:cNvSpPr txBox="1"/>
+          <p:nvPr/>
+        </p:nvSpPr>
+        <p:spPr>
+          <a:xfrm>
+            <a:off x="457200" y="3310127"/>
+            <a:ext cx="2214193" cy="633984"/>
+          </a:xfrm>
+          <a:prstGeom prst="rect">
+            <a:avLst/>
+          </a:prstGeom>
+          <a:noFill/>
+        </p:spPr>
+        <p:txBody>
+          <a:bodyPr wrap="none" lIns="0" rIns="0">
+            <a:noAutofit/>
+          </a:bodyPr>
+          <a:lstStyle/>
+          <a:p>
+            <a:pPr algn="l"/>
+            <a:r>
+              <a:rPr sz="3400" b="0" i="0">
                 <a:solidFill>
                   <a:srgbClr val="0A2240"/>
                 </a:solidFill>
@@ -28603,22 +28058,22 @@
       </p:sp>
       <p:sp>
         <p:nvSpPr>
-          <p:cNvPr id="6" name="TextBox 5"/>
-          <p:cNvSpPr txBox="1"/>
-          <p:nvPr/>
-        </p:nvSpPr>
-        <p:spPr>
-          <a:xfrm>
-            <a:off x="3345180" y="2154935"/>
-            <a:ext cx="2613660" cy="3605785"/>
-          </a:xfrm>
-          <a:prstGeom prst="rect">
-            <a:avLst/>
-          </a:prstGeom>
-          <a:noFill/>
-        </p:spPr>
-        <p:txBody>
-          <a:bodyPr wrap="square" lIns="0" rIns="0">
+          <p:cNvPr id="9" name="TextBox 8"/>
+          <p:cNvSpPr txBox="1"/>
+          <p:nvPr/>
+        </p:nvSpPr>
+        <p:spPr>
+          <a:xfrm>
+            <a:off x="3220033" y="3310127"/>
+            <a:ext cx="7557214" cy="633984"/>
+          </a:xfrm>
+          <a:prstGeom prst="rect">
+            <a:avLst/>
+          </a:prstGeom>
+          <a:noFill/>
+        </p:spPr>
+        <p:txBody>
+          <a:bodyPr wrap="none" lIns="0" rIns="0">
             <a:noAutofit/>
           </a:bodyPr>
           <a:lstStyle/>
@@ -28638,29 +28093,29 @@
       </p:sp>
       <p:sp>
         <p:nvSpPr>
-          <p:cNvPr id="7" name="TextBox 6"/>
-          <p:cNvSpPr txBox="1"/>
-          <p:nvPr/>
-        </p:nvSpPr>
-        <p:spPr>
-          <a:xfrm>
-            <a:off x="6233160" y="1499616"/>
-            <a:ext cx="2755126" cy="518159"/>
-          </a:xfrm>
-          <a:prstGeom prst="rect">
-            <a:avLst/>
-          </a:prstGeom>
-          <a:noFill/>
-        </p:spPr>
-        <p:txBody>
-          <a:bodyPr wrap="none" lIns="0" rIns="0">
-            <a:noAutofit/>
-          </a:bodyPr>
-          <a:lstStyle/>
-          <a:p>
-            <a:pPr algn="l"/>
-            <a:r>
-              <a:rPr sz="3400" b="1" i="0">
+          <p:cNvPr id="10" name="TextBox 9"/>
+          <p:cNvSpPr txBox="1"/>
+          <p:nvPr/>
+        </p:nvSpPr>
+        <p:spPr>
+          <a:xfrm>
+            <a:off x="457200" y="4218431"/>
+            <a:ext cx="2602646" cy="633984"/>
+          </a:xfrm>
+          <a:prstGeom prst="rect">
+            <a:avLst/>
+          </a:prstGeom>
+          <a:noFill/>
+        </p:spPr>
+        <p:txBody>
+          <a:bodyPr wrap="none" lIns="0" rIns="0">
+            <a:noAutofit/>
+          </a:bodyPr>
+          <a:lstStyle/>
+          <a:p>
+            <a:pPr algn="l"/>
+            <a:r>
+              <a:rPr sz="3400" b="0" i="0">
                 <a:solidFill>
                   <a:srgbClr val="0A2240"/>
                 </a:solidFill>
@@ -28673,22 +28128,22 @@
       </p:sp>
       <p:sp>
         <p:nvSpPr>
-          <p:cNvPr id="8" name="TextBox 7"/>
-          <p:cNvSpPr txBox="1"/>
-          <p:nvPr/>
-        </p:nvSpPr>
-        <p:spPr>
-          <a:xfrm>
-            <a:off x="6233160" y="2154935"/>
-            <a:ext cx="2613660" cy="3605785"/>
-          </a:xfrm>
-          <a:prstGeom prst="rect">
-            <a:avLst/>
-          </a:prstGeom>
-          <a:noFill/>
-        </p:spPr>
-        <p:txBody>
-          <a:bodyPr wrap="square" lIns="0" rIns="0">
+          <p:cNvPr id="11" name="TextBox 10"/>
+          <p:cNvSpPr txBox="1"/>
+          <p:nvPr/>
+        </p:nvSpPr>
+        <p:spPr>
+          <a:xfrm>
+            <a:off x="3220033" y="4218431"/>
+            <a:ext cx="6174779" cy="633984"/>
+          </a:xfrm>
+          <a:prstGeom prst="rect">
+            <a:avLst/>
+          </a:prstGeom>
+          <a:noFill/>
+        </p:spPr>
+        <p:txBody>
+          <a:bodyPr wrap="none" lIns="0" rIns="0">
             <a:noAutofit/>
           </a:bodyPr>
           <a:lstStyle/>
@@ -28708,29 +28163,29 @@
       </p:sp>
       <p:sp>
         <p:nvSpPr>
-          <p:cNvPr id="9" name="TextBox 8"/>
-          <p:cNvSpPr txBox="1"/>
-          <p:nvPr/>
-        </p:nvSpPr>
-        <p:spPr>
-          <a:xfrm>
-            <a:off x="9121140" y="1499616"/>
-            <a:ext cx="2613660" cy="518159"/>
-          </a:xfrm>
-          <a:prstGeom prst="rect">
-            <a:avLst/>
-          </a:prstGeom>
-          <a:noFill/>
-        </p:spPr>
-        <p:txBody>
-          <a:bodyPr wrap="none" lIns="0" rIns="0">
-            <a:noAutofit/>
-          </a:bodyPr>
-          <a:lstStyle/>
-          <a:p>
-            <a:pPr algn="l"/>
-            <a:r>
-              <a:rPr sz="3400" b="1" i="0">
+          <p:cNvPr id="12" name="TextBox 11"/>
+          <p:cNvSpPr txBox="1"/>
+          <p:nvPr/>
+        </p:nvSpPr>
+        <p:spPr>
+          <a:xfrm>
+            <a:off x="457200" y="5126735"/>
+            <a:ext cx="2214193" cy="633984"/>
+          </a:xfrm>
+          <a:prstGeom prst="rect">
+            <a:avLst/>
+          </a:prstGeom>
+          <a:noFill/>
+        </p:spPr>
+        <p:txBody>
+          <a:bodyPr wrap="none" lIns="0" rIns="0">
+            <a:noAutofit/>
+          </a:bodyPr>
+          <a:lstStyle/>
+          <a:p>
+            <a:pPr algn="l"/>
+            <a:r>
+              <a:rPr sz="3400" b="0" i="0">
                 <a:solidFill>
                   <a:srgbClr val="0A2240"/>
                 </a:solidFill>
@@ -28743,22 +28198,22 @@
       </p:sp>
       <p:sp>
         <p:nvSpPr>
-          <p:cNvPr id="10" name="TextBox 9"/>
-          <p:cNvSpPr txBox="1"/>
-          <p:nvPr/>
-        </p:nvSpPr>
-        <p:spPr>
-          <a:xfrm>
-            <a:off x="9121140" y="2154935"/>
-            <a:ext cx="2613660" cy="3605785"/>
-          </a:xfrm>
-          <a:prstGeom prst="rect">
-            <a:avLst/>
-          </a:prstGeom>
-          <a:noFill/>
-        </p:spPr>
-        <p:txBody>
-          <a:bodyPr wrap="square" lIns="0" rIns="0">
+          <p:cNvPr id="13" name="TextBox 12"/>
+          <p:cNvSpPr txBox="1"/>
+          <p:nvPr/>
+        </p:nvSpPr>
+        <p:spPr>
+          <a:xfrm>
+            <a:off x="3220033" y="5126735"/>
+            <a:ext cx="6440606" cy="633984"/>
+          </a:xfrm>
+          <a:prstGeom prst="rect">
+            <a:avLst/>
+          </a:prstGeom>
+          <a:noFill/>
+        </p:spPr>
+        <p:txBody>
+          <a:bodyPr wrap="none" lIns="0" rIns="0">
             <a:noAutofit/>
           </a:bodyPr>
           <a:lstStyle/>
@@ -28778,7 +28233,7 @@
       </p:sp>
       <p:sp>
         <p:nvSpPr>
-          <p:cNvPr id="11" name="TextBox 10"/>
+          <p:cNvPr id="14" name="TextBox 13"/>
           <p:cNvSpPr/>
           <p:nvPr>
             <p:ph type="sldNum" idx="12"/>
@@ -28804,7 +28259,7 @@
             <a:fld id="{4B0E1F8A-6C1D-4E2A-9F3B-7A5C8D2E1F60}" type="slidenum">
               <a:rPr sz="1600" b="0" i="0">
                 <a:solidFill>
-                  <a:srgbClr val="5B6B82"/>
+                  <a:srgbClr val="0A2240"/>
                 </a:solidFill>
                 <a:latin typeface="Arial"/>
               </a:rPr>
@@ -28900,7 +28355,7 @@
             <a:r>
               <a:rPr sz="4200" b="1" i="0">
                 <a:solidFill>
-                  <a:srgbClr val="123A6B"/>
+                  <a:srgbClr val="0072CE"/>
                 </a:solidFill>
                 <a:latin typeface="Arial"/>
               </a:rPr>
@@ -28935,7 +28390,7 @@
             <a:r>
               <a:rPr sz="4200" b="1" i="0">
                 <a:solidFill>
-                  <a:srgbClr val="123A6B"/>
+                  <a:srgbClr val="0072CE"/>
                 </a:solidFill>
                 <a:latin typeface="Arial"/>
               </a:rPr>
@@ -29005,7 +28460,7 @@
             <a:r>
               <a:rPr sz="4200" b="1" i="0">
                 <a:solidFill>
-                  <a:srgbClr val="123A6B"/>
+                  <a:srgbClr val="0072CE"/>
                 </a:solidFill>
                 <a:latin typeface="Arial"/>
               </a:rPr>
@@ -29040,7 +28495,7 @@
             <a:r>
               <a:rPr sz="4200" b="1" i="0">
                 <a:solidFill>
-                  <a:srgbClr val="123A6B"/>
+                  <a:srgbClr val="0072CE"/>
                 </a:solidFill>
                 <a:latin typeface="Arial"/>
               </a:rPr>
@@ -29110,7 +28565,7 @@
             <a:r>
               <a:rPr sz="4200" b="1" i="0">
                 <a:solidFill>
-                  <a:srgbClr val="123A6B"/>
+                  <a:srgbClr val="0072CE"/>
                 </a:solidFill>
                 <a:latin typeface="Arial"/>
               </a:rPr>
@@ -29145,7 +28600,7 @@
             <a:r>
               <a:rPr sz="4200" b="1" i="0">
                 <a:solidFill>
-                  <a:srgbClr val="123A6B"/>
+                  <a:srgbClr val="0072CE"/>
                 </a:solidFill>
                 <a:latin typeface="Arial"/>
               </a:rPr>
@@ -29217,7 +28672,7 @@
             <a:fld id="{4B0E1F8A-6C1D-4E2A-9F3B-7A5C8D2E1F60}" type="slidenum">
               <a:rPr sz="1600" b="0" i="0">
                 <a:solidFill>
-                  <a:srgbClr val="5B6B82"/>
+                  <a:srgbClr val="0A2240"/>
                 </a:solidFill>
                 <a:latin typeface="Arial"/>
               </a:rPr>
@@ -29267,7 +28722,7 @@
             <a:avLst/>
           </a:prstGeom>
           <a:solidFill>
-            <a:srgbClr val="FF5F56"/>
+            <a:srgbClr val="FFFFFF"/>
           </a:solidFill>
           <a:ln>
             <a:noFill/>
@@ -29311,7 +28766,7 @@
             <a:avLst/>
           </a:prstGeom>
           <a:solidFill>
-            <a:srgbClr val="FFBD2E"/>
+            <a:srgbClr val="FFFFFF"/>
           </a:solidFill>
           <a:ln>
             <a:noFill/>
@@ -29355,7 +28810,7 @@
             <a:avLst/>
           </a:prstGeom>
           <a:solidFill>
-            <a:srgbClr val="27C93F"/>
+            <a:srgbClr val="FFFFFF"/>
           </a:solidFill>
           <a:ln>
             <a:noFill/>
@@ -29410,7 +28865,7 @@
             <a:r>
               <a:rPr sz="4200" b="0" i="0">
                 <a:solidFill>
-                  <a:srgbClr val="D4D4D4"/>
+                  <a:srgbClr val="FFFFFF"/>
                 </a:solidFill>
                 <a:latin typeface="Arial"/>
               </a:rPr>
@@ -29428,7 +28883,7 @@
         <p:spPr>
           <a:xfrm>
             <a:off x="457200" y="1837944"/>
-            <a:ext cx="3581955" cy="518159"/>
+            <a:ext cx="11734800" cy="518159"/>
           </a:xfrm>
           <a:prstGeom prst="rect">
             <a:avLst/>
@@ -29445,11 +28900,11 @@
             <a:r>
               <a:rPr sz="3400" b="0" i="0">
                 <a:solidFill>
-                  <a:srgbClr val="D4D4D4"/>
-                </a:solidFill>
-                <a:latin typeface="Arial"/>
-              </a:rPr>
-              <a:t>const db = </a:t>
+                  <a:srgbClr val="FFFFFF"/>
+                </a:solidFill>
+                <a:latin typeface="Arial"/>
+              </a:rPr>
+              <a:t>const db = createClient(URL, PUBLIC_KEY)</a:t>
             </a:r>
           </a:p>
         </p:txBody>
@@ -29457,76 +28912,6 @@
       <p:sp>
         <p:nvSpPr>
           <p:cNvPr id="7" name="TextBox 6"/>
-          <p:cNvSpPr txBox="1"/>
-          <p:nvPr/>
-        </p:nvSpPr>
-        <p:spPr>
-          <a:xfrm>
-            <a:off x="2581622" y="1837944"/>
-            <a:ext cx="3869372" cy="518159"/>
-          </a:xfrm>
-          <a:prstGeom prst="rect">
-            <a:avLst/>
-          </a:prstGeom>
-          <a:noFill/>
-        </p:spPr>
-        <p:txBody>
-          <a:bodyPr wrap="none" lIns="0" rIns="0">
-            <a:noAutofit/>
-          </a:bodyPr>
-          <a:lstStyle/>
-          <a:p>
-            <a:pPr algn="l"/>
-            <a:r>
-              <a:rPr sz="3400" b="0" i="0">
-                <a:solidFill>
-                  <a:srgbClr val="DCDCAA"/>
-                </a:solidFill>
-                <a:latin typeface="Arial"/>
-              </a:rPr>
-              <a:t>createClient</a:t>
-            </a:r>
-          </a:p>
-        </p:txBody>
-      </p:sp>
-      <p:sp>
-        <p:nvSpPr>
-          <p:cNvPr id="8" name="TextBox 7"/>
-          <p:cNvSpPr txBox="1"/>
-          <p:nvPr/>
-        </p:nvSpPr>
-        <p:spPr>
-          <a:xfrm>
-            <a:off x="4885680" y="1837944"/>
-            <a:ext cx="6671350" cy="518159"/>
-          </a:xfrm>
-          <a:prstGeom prst="rect">
-            <a:avLst/>
-          </a:prstGeom>
-          <a:noFill/>
-        </p:spPr>
-        <p:txBody>
-          <a:bodyPr wrap="none" lIns="0" rIns="0">
-            <a:noAutofit/>
-          </a:bodyPr>
-          <a:lstStyle/>
-          <a:p>
-            <a:pPr algn="l"/>
-            <a:r>
-              <a:rPr sz="3400" b="0" i="0">
-                <a:solidFill>
-                  <a:srgbClr val="D4D4D4"/>
-                </a:solidFill>
-                <a:latin typeface="Arial"/>
-              </a:rPr>
-              <a:t>(URL, PUBLIC_KEY)</a:t>
-            </a:r>
-          </a:p>
-        </p:txBody>
-      </p:sp>
-      <p:sp>
-        <p:nvSpPr>
-          <p:cNvPr id="9" name="TextBox 8"/>
           <p:cNvSpPr txBox="1"/>
           <p:nvPr/>
         </p:nvSpPr>
@@ -29561,7 +28946,7 @@
       </p:sp>
       <p:sp>
         <p:nvSpPr>
-          <p:cNvPr id="10" name="TextBox 9"/>
+          <p:cNvPr id="8" name="TextBox 7"/>
           <p:cNvSpPr txBox="1"/>
           <p:nvPr/>
         </p:nvSpPr>
@@ -29585,7 +28970,7 @@
             <a:r>
               <a:rPr sz="3400" b="0" i="0">
                 <a:solidFill>
-                  <a:srgbClr val="D4D4D4"/>
+                  <a:srgbClr val="FFFFFF"/>
                 </a:solidFill>
                 <a:latin typeface="Arial"/>
               </a:rPr>
@@ -29596,7 +28981,7 @@
       </p:sp>
       <p:sp>
         <p:nvSpPr>
-          <p:cNvPr id="11" name="TextBox 10"/>
+          <p:cNvPr id="9" name="TextBox 8"/>
           <p:cNvSpPr txBox="1"/>
           <p:nvPr/>
         </p:nvSpPr>
@@ -29631,14 +29016,14 @@
       </p:sp>
       <p:sp>
         <p:nvSpPr>
-          <p:cNvPr id="12" name="TextBox 11"/>
+          <p:cNvPr id="10" name="TextBox 9"/>
           <p:cNvSpPr txBox="1"/>
           <p:nvPr/>
         </p:nvSpPr>
         <p:spPr>
           <a:xfrm>
             <a:off x="3049054" y="2874262"/>
-            <a:ext cx="412948" cy="518159"/>
+            <a:ext cx="4819670" cy="518159"/>
           </a:xfrm>
           <a:prstGeom prst="rect">
             <a:avLst/>
@@ -29655,158 +29040,18 @@
             <a:r>
               <a:rPr sz="3400" b="0" i="0">
                 <a:solidFill>
-                  <a:srgbClr val="D4D4D4"/>
-                </a:solidFill>
-                <a:latin typeface="Arial"/>
-              </a:rPr>
-              <a:t>(</a:t>
-            </a:r>
-          </a:p>
-        </p:txBody>
-      </p:sp>
-      <p:sp>
-        <p:nvSpPr>
-          <p:cNvPr id="13" name="TextBox 12"/>
-          <p:cNvSpPr txBox="1"/>
-          <p:nvPr/>
-        </p:nvSpPr>
-        <p:spPr>
-          <a:xfrm>
-            <a:off x="3192847" y="2874262"/>
-            <a:ext cx="2017355" cy="518159"/>
-          </a:xfrm>
-          <a:prstGeom prst="rect">
-            <a:avLst/>
-          </a:prstGeom>
-          <a:noFill/>
-        </p:spPr>
-        <p:txBody>
-          <a:bodyPr wrap="none" lIns="0" rIns="0">
-            <a:noAutofit/>
-          </a:bodyPr>
-          <a:lstStyle/>
-          <a:p>
-            <a:pPr algn="l"/>
-            <a:r>
-              <a:rPr sz="3400" b="0" i="0">
-                <a:solidFill>
-                  <a:srgbClr val="CE9178"/>
-                </a:solidFill>
-                <a:latin typeface="Arial"/>
-              </a:rPr>
-              <a:t>"runs"</a:t>
-            </a:r>
-          </a:p>
-        </p:txBody>
-      </p:sp>
-      <p:sp>
-        <p:nvSpPr>
-          <p:cNvPr id="14" name="TextBox 13"/>
-          <p:cNvSpPr txBox="1"/>
-          <p:nvPr/>
-        </p:nvSpPr>
-        <p:spPr>
-          <a:xfrm>
-            <a:off x="4339394" y="2874262"/>
-            <a:ext cx="604897" cy="518159"/>
-          </a:xfrm>
-          <a:prstGeom prst="rect">
-            <a:avLst/>
-          </a:prstGeom>
-          <a:noFill/>
-        </p:spPr>
-        <p:txBody>
-          <a:bodyPr wrap="none" lIns="0" rIns="0">
-            <a:noAutofit/>
-          </a:bodyPr>
-          <a:lstStyle/>
-          <a:p>
-            <a:pPr algn="l"/>
-            <a:r>
-              <a:rPr sz="3400" b="0" i="0">
-                <a:solidFill>
-                  <a:srgbClr val="D4D4D4"/>
-                </a:solidFill>
-                <a:latin typeface="Arial"/>
-              </a:rPr>
-              <a:t>).</a:t>
-            </a:r>
-          </a:p>
-        </p:txBody>
-      </p:sp>
-      <p:sp>
-        <p:nvSpPr>
-          <p:cNvPr id="15" name="TextBox 14"/>
-          <p:cNvSpPr txBox="1"/>
-          <p:nvPr/>
-        </p:nvSpPr>
-        <p:spPr>
-          <a:xfrm>
-            <a:off x="4603155" y="2874262"/>
-            <a:ext cx="1872297" cy="518159"/>
-          </a:xfrm>
-          <a:prstGeom prst="rect">
-            <a:avLst/>
-          </a:prstGeom>
-          <a:noFill/>
-        </p:spPr>
-        <p:txBody>
-          <a:bodyPr wrap="none" lIns="0" rIns="0">
-            <a:noAutofit/>
-          </a:bodyPr>
-          <a:lstStyle/>
-          <a:p>
-            <a:pPr algn="l"/>
-            <a:r>
-              <a:rPr sz="3400" b="0" i="0">
-                <a:solidFill>
-                  <a:srgbClr val="DCDCAA"/>
-                </a:solidFill>
-                <a:latin typeface="Arial"/>
-              </a:rPr>
-              <a:t>insert</a:t>
-            </a:r>
-          </a:p>
-        </p:txBody>
-      </p:sp>
-      <p:sp>
-        <p:nvSpPr>
-          <p:cNvPr id="16" name="TextBox 15"/>
-          <p:cNvSpPr txBox="1"/>
-          <p:nvPr/>
-        </p:nvSpPr>
-        <p:spPr>
-          <a:xfrm>
-            <a:off x="5659041" y="2874262"/>
-            <a:ext cx="643691" cy="518159"/>
-          </a:xfrm>
-          <a:prstGeom prst="rect">
-            <a:avLst/>
-          </a:prstGeom>
-          <a:noFill/>
-        </p:spPr>
-        <p:txBody>
-          <a:bodyPr wrap="none" lIns="0" rIns="0">
-            <a:noAutofit/>
-          </a:bodyPr>
-          <a:lstStyle/>
-          <a:p>
-            <a:pPr algn="l"/>
-            <a:r>
-              <a:rPr sz="3400" b="0" i="0">
-                <a:solidFill>
-                  <a:srgbClr val="D4D4D4"/>
-                </a:solidFill>
-                <a:latin typeface="Arial"/>
-              </a:rPr>
-              <a:t>({</a:t>
-            </a:r>
-          </a:p>
-        </p:txBody>
-      </p:sp>
-      <p:sp>
-        <p:nvSpPr>
-          <p:cNvPr id="17" name="TextBox 16"/>
+                  <a:srgbClr val="FFFFFF"/>
+                </a:solidFill>
+                <a:latin typeface="Arial"/>
+              </a:rPr>
+              <a:t>("runs").insert({</a:t>
+            </a:r>
+          </a:p>
+        </p:txBody>
+      </p:sp>
+      <p:sp>
+        <p:nvSpPr>
+          <p:cNvPr id="11" name="TextBox 10"/>
           <p:cNvSpPr txBox="1"/>
           <p:nvPr/>
         </p:nvSpPr>
@@ -29830,7 +29075,7 @@
             <a:r>
               <a:rPr sz="3400" b="0" i="0">
                 <a:solidFill>
-                  <a:srgbClr val="D4D4D4"/>
+                  <a:srgbClr val="FFFFFF"/>
                 </a:solidFill>
                 <a:latin typeface="Arial"/>
               </a:rPr>
@@ -29841,7 +29086,7 @@
       </p:sp>
       <p:sp>
         <p:nvSpPr>
-          <p:cNvPr id="18" name="TextBox 17"/>
+          <p:cNvPr id="12" name="TextBox 11"/>
           <p:cNvSpPr txBox="1"/>
           <p:nvPr/>
         </p:nvSpPr>
@@ -29865,7 +29110,7 @@
             <a:r>
               <a:rPr sz="3400" b="0" i="0">
                 <a:solidFill>
-                  <a:srgbClr val="D4D4D4"/>
+                  <a:srgbClr val="FFFFFF"/>
                 </a:solidFill>
                 <a:latin typeface="Arial"/>
               </a:rPr>
@@ -29876,7 +29121,7 @@
       </p:sp>
       <p:sp>
         <p:nvSpPr>
-          <p:cNvPr id="19" name="TextBox 18"/>
+          <p:cNvPr id="13" name="TextBox 12"/>
           <p:cNvSpPr txBox="1"/>
           <p:nvPr/>
         </p:nvSpPr>
@@ -29900,7 +29145,7 @@
             <a:r>
               <a:rPr sz="3400" b="0" i="0">
                 <a:solidFill>
-                  <a:srgbClr val="D4D4D4"/>
+                  <a:srgbClr val="FFFFFF"/>
                 </a:solidFill>
                 <a:latin typeface="Arial"/>
               </a:rPr>
@@ -29911,7 +29156,7 @@
       </p:sp>
       <p:sp>
         <p:nvSpPr>
-          <p:cNvPr id="20" name="TextBox 19"/>
+          <p:cNvPr id="14" name="TextBox 13"/>
           <p:cNvSpPr/>
           <p:nvPr>
             <p:ph type="sldNum" idx="12"/>
@@ -29937,7 +29182,7 @@
             <a:fld id="{4B0E1F8A-6C1D-4E2A-9F3B-7A5C8D2E1F60}" type="slidenum">
               <a:rPr sz="1600" b="0" i="0">
                 <a:solidFill>
-                  <a:srgbClr val="5B6B82"/>
+                  <a:srgbClr val="0A2240"/>
                 </a:solidFill>
                 <a:latin typeface="Arial"/>
               </a:rPr>
@@ -30175,7 +29420,7 @@
             <a:fld id="{4B0E1F8A-6C1D-4E2A-9F3B-7A5C8D2E1F60}" type="slidenum">
               <a:rPr sz="1600" b="0" i="0">
                 <a:solidFill>
-                  <a:srgbClr val="5B6B82"/>
+                  <a:srgbClr val="0A2240"/>
                 </a:solidFill>
                 <a:latin typeface="Arial"/>
               </a:rPr>
@@ -30413,7 +29658,7 @@
             <a:fld id="{4B0E1F8A-6C1D-4E2A-9F3B-7A5C8D2E1F60}" type="slidenum">
               <a:rPr sz="1600" b="0" i="0">
                 <a:solidFill>
-                  <a:srgbClr val="5B6B82"/>
+                  <a:srgbClr val="0A2240"/>
                 </a:solidFill>
                 <a:latin typeface="Arial"/>
               </a:rPr>
@@ -30651,7 +29896,7 @@
             <a:fld id="{4B0E1F8A-6C1D-4E2A-9F3B-7A5C8D2E1F60}" type="slidenum">
               <a:rPr sz="1600" b="0" i="0">
                 <a:solidFill>
-                  <a:srgbClr val="5B6B82"/>
+                  <a:srgbClr val="0A2240"/>
                 </a:solidFill>
                 <a:latin typeface="Arial"/>
               </a:rPr>
@@ -30747,7 +29992,7 @@
             <a:r>
               <a:rPr sz="3400" b="1" i="0">
                 <a:solidFill>
-                  <a:srgbClr val="123A6B"/>
+                  <a:srgbClr val="0072CE"/>
                 </a:solidFill>
                 <a:latin typeface="Arial"/>
               </a:rPr>
@@ -30782,7 +30027,7 @@
             <a:r>
               <a:rPr sz="3400" b="1" i="0">
                 <a:solidFill>
-                  <a:srgbClr val="123A6B"/>
+                  <a:srgbClr val="0072CE"/>
                 </a:solidFill>
                 <a:latin typeface="Arial"/>
               </a:rPr>
@@ -31143,7 +30388,7 @@
             <a:fld id="{4B0E1F8A-6C1D-4E2A-9F3B-7A5C8D2E1F60}" type="slidenum">
               <a:rPr sz="1600" b="0" i="0">
                 <a:solidFill>
-                  <a:srgbClr val="5B6B82"/>
+                  <a:srgbClr val="0A2240"/>
                 </a:solidFill>
                 <a:latin typeface="Arial"/>
               </a:rPr>
@@ -31381,7 +30626,7 @@
             <a:fld id="{4B0E1F8A-6C1D-4E2A-9F3B-7A5C8D2E1F60}" type="slidenum">
               <a:rPr sz="1600" b="0" i="0">
                 <a:solidFill>
-                  <a:srgbClr val="5B6B82"/>
+                  <a:srgbClr val="0A2240"/>
                 </a:solidFill>
                 <a:latin typeface="Arial"/>
               </a:rPr>
@@ -31523,7 +30768,7 @@
             <a:fld id="{4B0E1F8A-6C1D-4E2A-9F3B-7A5C8D2E1F60}" type="slidenum">
               <a:rPr sz="1600" b="0" i="0">
                 <a:solidFill>
-                  <a:srgbClr val="5B6B82"/>
+                  <a:srgbClr val="0A2240"/>
                 </a:solidFill>
                 <a:latin typeface="Arial"/>
               </a:rPr>
@@ -31665,7 +30910,7 @@
             <a:fld id="{4B0E1F8A-6C1D-4E2A-9F3B-7A5C8D2E1F60}" type="slidenum">
               <a:rPr sz="1600" b="0" i="0">
                 <a:solidFill>
-                  <a:srgbClr val="5B6B82"/>
+                  <a:srgbClr val="0A2240"/>
                 </a:solidFill>
                 <a:latin typeface="Arial"/>
               </a:rPr>
@@ -31842,7 +31087,7 @@
             <a:fld id="{4B0E1F8A-6C1D-4E2A-9F3B-7A5C8D2E1F60}" type="slidenum">
               <a:rPr sz="1600" b="0" i="0">
                 <a:solidFill>
-                  <a:srgbClr val="5B6B82"/>
+                  <a:srgbClr val="0A2240"/>
                 </a:solidFill>
                 <a:latin typeface="Arial"/>
               </a:rPr>
@@ -32080,7 +31325,7 @@
             <a:fld id="{4B0E1F8A-6C1D-4E2A-9F3B-7A5C8D2E1F60}" type="slidenum">
               <a:rPr sz="1600" b="0" i="0">
                 <a:solidFill>
-                  <a:srgbClr val="5B6B82"/>
+                  <a:srgbClr val="0A2240"/>
                 </a:solidFill>
                 <a:latin typeface="Arial"/>
               </a:rPr>
@@ -32318,7 +31563,7 @@
             <a:fld id="{4B0E1F8A-6C1D-4E2A-9F3B-7A5C8D2E1F60}" type="slidenum">
               <a:rPr sz="1600" b="0" i="0">
                 <a:solidFill>
-                  <a:srgbClr val="5B6B82"/>
+                  <a:srgbClr val="0A2240"/>
                 </a:solidFill>
                 <a:latin typeface="Arial"/>
               </a:rPr>
@@ -32414,7 +31659,7 @@
             <a:r>
               <a:rPr sz="4200" b="1" i="0">
                 <a:solidFill>
-                  <a:srgbClr val="123A6B"/>
+                  <a:srgbClr val="0072CE"/>
                 </a:solidFill>
                 <a:latin typeface="Arial"/>
               </a:rPr>
@@ -32449,7 +31694,7 @@
             <a:r>
               <a:rPr sz="4200" b="1" i="0">
                 <a:solidFill>
-                  <a:srgbClr val="123A6B"/>
+                  <a:srgbClr val="0072CE"/>
                 </a:solidFill>
                 <a:latin typeface="Arial"/>
               </a:rPr>
@@ -32519,7 +31764,7 @@
             <a:r>
               <a:rPr sz="4200" b="1" i="0">
                 <a:solidFill>
-                  <a:srgbClr val="123A6B"/>
+                  <a:srgbClr val="0072CE"/>
                 </a:solidFill>
                 <a:latin typeface="Arial"/>
               </a:rPr>
@@ -32554,7 +31799,7 @@
             <a:r>
               <a:rPr sz="4200" b="1" i="0">
                 <a:solidFill>
-                  <a:srgbClr val="123A6B"/>
+                  <a:srgbClr val="0072CE"/>
                 </a:solidFill>
                 <a:latin typeface="Arial"/>
               </a:rPr>
@@ -32624,7 +31869,7 @@
             <a:r>
               <a:rPr sz="4200" b="1" i="0">
                 <a:solidFill>
-                  <a:srgbClr val="123A6B"/>
+                  <a:srgbClr val="0072CE"/>
                 </a:solidFill>
                 <a:latin typeface="Arial"/>
               </a:rPr>
@@ -32659,7 +31904,7 @@
             <a:r>
               <a:rPr sz="4200" b="1" i="0">
                 <a:solidFill>
-                  <a:srgbClr val="123A6B"/>
+                  <a:srgbClr val="0072CE"/>
                 </a:solidFill>
                 <a:latin typeface="Arial"/>
               </a:rPr>
@@ -32731,7 +31976,7 @@
             <a:fld id="{4B0E1F8A-6C1D-4E2A-9F3B-7A5C8D2E1F60}" type="slidenum">
               <a:rPr sz="1600" b="0" i="0">
                 <a:solidFill>
-                  <a:srgbClr val="5B6B82"/>
+                  <a:srgbClr val="0A2240"/>
                 </a:solidFill>
                 <a:latin typeface="Arial"/>
               </a:rPr>
@@ -32781,7 +32026,7 @@
             <a:avLst/>
           </a:prstGeom>
           <a:solidFill>
-            <a:srgbClr val="FF5F56"/>
+            <a:srgbClr val="FFFFFF"/>
           </a:solidFill>
           <a:ln>
             <a:noFill/>
@@ -32825,7 +32070,7 @@
             <a:avLst/>
           </a:prstGeom>
           <a:solidFill>
-            <a:srgbClr val="FFBD2E"/>
+            <a:srgbClr val="FFFFFF"/>
           </a:solidFill>
           <a:ln>
             <a:noFill/>
@@ -32869,7 +32114,7 @@
             <a:avLst/>
           </a:prstGeom>
           <a:solidFill>
-            <a:srgbClr val="27C93F"/>
+            <a:srgbClr val="FFFFFF"/>
           </a:solidFill>
           <a:ln>
             <a:noFill/>
@@ -32924,7 +32169,7 @@
             <a:r>
               <a:rPr sz="4200" b="0" i="0">
                 <a:solidFill>
-                  <a:srgbClr val="D4D4D4"/>
+                  <a:srgbClr val="FFFFFF"/>
                 </a:solidFill>
                 <a:latin typeface="Arial"/>
               </a:rPr>
@@ -32959,7 +32204,7 @@
             <a:r>
               <a:rPr sz="3400" b="0" i="0">
                 <a:solidFill>
-                  <a:srgbClr val="D4D4D4"/>
+                  <a:srgbClr val="FFFFFF"/>
                 </a:solidFill>
                 <a:latin typeface="Arial"/>
               </a:rPr>
@@ -32994,7 +32239,7 @@
             <a:r>
               <a:rPr sz="3400" b="0" i="0">
                 <a:solidFill>
-                  <a:srgbClr val="D4D4D4"/>
+                  <a:srgbClr val="FFFFFF"/>
                 </a:solidFill>
                 <a:latin typeface="Arial"/>
               </a:rPr>
@@ -33012,7 +32257,7 @@
         <p:spPr>
           <a:xfrm>
             <a:off x="457200" y="3392421"/>
-            <a:ext cx="4253270" cy="518159"/>
+            <a:ext cx="10617259" cy="518159"/>
           </a:xfrm>
           <a:prstGeom prst="rect">
             <a:avLst/>
@@ -33029,11 +32274,11 @@
             <a:r>
               <a:rPr sz="3400" b="0" i="0">
                 <a:solidFill>
-                  <a:srgbClr val="D4D4D4"/>
-                </a:solidFill>
-                <a:latin typeface="Arial"/>
-              </a:rPr>
-              <a:t>create policy </a:t>
+                  <a:srgbClr val="FFFFFF"/>
+                </a:solidFill>
+                <a:latin typeface="Arial"/>
+              </a:rPr>
+              <a:t>create policy "visitors may submit"</a:t>
             </a:r>
           </a:p>
         </p:txBody>
@@ -33041,41 +32286,6 @@
       <p:sp>
         <p:nvSpPr>
           <p:cNvPr id="9" name="TextBox 8"/>
-          <p:cNvSpPr txBox="1"/>
-          <p:nvPr/>
-        </p:nvSpPr>
-        <p:spPr>
-          <a:xfrm>
-            <a:off x="3001194" y="3392421"/>
-            <a:ext cx="6546870" cy="518159"/>
-          </a:xfrm>
-          <a:prstGeom prst="rect">
-            <a:avLst/>
-          </a:prstGeom>
-          <a:noFill/>
-        </p:spPr>
-        <p:txBody>
-          <a:bodyPr wrap="none" lIns="0" rIns="0">
-            <a:noAutofit/>
-          </a:bodyPr>
-          <a:lstStyle/>
-          <a:p>
-            <a:pPr algn="l"/>
-            <a:r>
-              <a:rPr sz="3400" b="0" i="0">
-                <a:solidFill>
-                  <a:srgbClr val="CE9178"/>
-                </a:solidFill>
-                <a:latin typeface="Arial"/>
-              </a:rPr>
-              <a:t>"visitors may submit"</a:t>
-            </a:r>
-          </a:p>
-        </p:txBody>
-      </p:sp>
-      <p:sp>
-        <p:nvSpPr>
-          <p:cNvPr id="10" name="TextBox 9"/>
           <p:cNvSpPr txBox="1"/>
           <p:nvPr/>
         </p:nvSpPr>
@@ -33099,7 +32309,7 @@
             <a:r>
               <a:rPr sz="3400" b="0" i="0">
                 <a:solidFill>
-                  <a:srgbClr val="D4D4D4"/>
+                  <a:srgbClr val="FFFFFF"/>
                 </a:solidFill>
                 <a:latin typeface="Arial"/>
               </a:rPr>
@@ -33110,7 +32320,7 @@
       </p:sp>
       <p:sp>
         <p:nvSpPr>
-          <p:cNvPr id="11" name="TextBox 10"/>
+          <p:cNvPr id="10" name="TextBox 9"/>
           <p:cNvSpPr txBox="1"/>
           <p:nvPr/>
         </p:nvSpPr>
@@ -33134,7 +32344,7 @@
             <a:r>
               <a:rPr sz="3400" b="0" i="0">
                 <a:solidFill>
-                  <a:srgbClr val="C586C0"/>
+                  <a:srgbClr val="569CD6"/>
                 </a:solidFill>
                 <a:latin typeface="Arial"/>
               </a:rPr>
@@ -33145,7 +32355,7 @@
       </p:sp>
       <p:sp>
         <p:nvSpPr>
-          <p:cNvPr id="12" name="TextBox 11"/>
+          <p:cNvPr id="11" name="TextBox 10"/>
           <p:cNvSpPr txBox="1"/>
           <p:nvPr/>
         </p:nvSpPr>
@@ -33169,7 +32379,7 @@
             <a:r>
               <a:rPr sz="3400" b="0" i="0">
                 <a:solidFill>
-                  <a:srgbClr val="D4D4D4"/>
+                  <a:srgbClr val="FFFFFF"/>
                 </a:solidFill>
                 <a:latin typeface="Arial"/>
               </a:rPr>
@@ -33180,7 +32390,7 @@
       </p:sp>
       <p:sp>
         <p:nvSpPr>
-          <p:cNvPr id="13" name="TextBox 12"/>
+          <p:cNvPr id="12" name="TextBox 11"/>
           <p:cNvSpPr txBox="1"/>
           <p:nvPr/>
         </p:nvSpPr>
@@ -33204,7 +32414,7 @@
             <a:r>
               <a:rPr sz="3400" b="0" i="0">
                 <a:solidFill>
-                  <a:srgbClr val="D4D4D4"/>
+                  <a:srgbClr val="FFFFFF"/>
                 </a:solidFill>
                 <a:latin typeface="Arial"/>
               </a:rPr>
@@ -33215,7 +32425,7 @@
       </p:sp>
       <p:sp>
         <p:nvSpPr>
-          <p:cNvPr id="14" name="TextBox 13"/>
+          <p:cNvPr id="13" name="TextBox 12"/>
           <p:cNvSpPr txBox="1"/>
           <p:nvPr/>
         </p:nvSpPr>
@@ -33239,7 +32449,7 @@
             <a:r>
               <a:rPr sz="3400" b="0" i="0">
                 <a:solidFill>
-                  <a:srgbClr val="C586C0"/>
+                  <a:srgbClr val="569CD6"/>
                 </a:solidFill>
                 <a:latin typeface="Arial"/>
               </a:rPr>
@@ -33250,7 +32460,7 @@
       </p:sp>
       <p:sp>
         <p:nvSpPr>
-          <p:cNvPr id="15" name="TextBox 14"/>
+          <p:cNvPr id="14" name="TextBox 13"/>
           <p:cNvSpPr txBox="1"/>
           <p:nvPr/>
         </p:nvSpPr>
@@ -33274,7 +32484,7 @@
             <a:r>
               <a:rPr sz="3400" b="0" i="0">
                 <a:solidFill>
-                  <a:srgbClr val="D4D4D4"/>
+                  <a:srgbClr val="FFFFFF"/>
                 </a:solidFill>
                 <a:latin typeface="Arial"/>
               </a:rPr>
@@ -33285,7 +32495,7 @@
       </p:sp>
       <p:sp>
         <p:nvSpPr>
-          <p:cNvPr id="16" name="TextBox 15"/>
+          <p:cNvPr id="15" name="TextBox 14"/>
           <p:cNvSpPr txBox="1"/>
           <p:nvPr/>
         </p:nvSpPr>
@@ -33309,7 +32519,7 @@
             <a:r>
               <a:rPr sz="3400" b="0" i="0">
                 <a:solidFill>
-                  <a:srgbClr val="D4D4D4"/>
+                  <a:srgbClr val="FFFFFF"/>
                 </a:solidFill>
                 <a:latin typeface="Arial"/>
               </a:rPr>
@@ -33320,7 +32530,7 @@
       </p:sp>
       <p:sp>
         <p:nvSpPr>
-          <p:cNvPr id="17" name="TextBox 16"/>
+          <p:cNvPr id="16" name="TextBox 15"/>
           <p:cNvSpPr/>
           <p:nvPr>
             <p:ph type="sldNum" idx="12"/>
@@ -33346,7 +32556,7 @@
             <a:fld id="{4B0E1F8A-6C1D-4E2A-9F3B-7A5C8D2E1F60}" type="slidenum">
               <a:rPr sz="1600" b="0" i="0">
                 <a:solidFill>
-                  <a:srgbClr val="5B6B82"/>
+                  <a:srgbClr val="0A2240"/>
                 </a:solidFill>
                 <a:latin typeface="Arial"/>
               </a:rPr>
@@ -33584,7 +32794,7 @@
             <a:fld id="{4B0E1F8A-6C1D-4E2A-9F3B-7A5C8D2E1F60}" type="slidenum">
               <a:rPr sz="1600" b="0" i="0">
                 <a:solidFill>
-                  <a:srgbClr val="5B6B82"/>
+                  <a:srgbClr val="0A2240"/>
                 </a:solidFill>
                 <a:latin typeface="Arial"/>
               </a:rPr>
@@ -33680,7 +32890,7 @@
             <a:r>
               <a:rPr sz="4200" b="1" i="0">
                 <a:solidFill>
-                  <a:srgbClr val="123A6B"/>
+                  <a:srgbClr val="0072CE"/>
                 </a:solidFill>
                 <a:latin typeface="Arial"/>
               </a:rPr>
@@ -33715,7 +32925,7 @@
             <a:r>
               <a:rPr sz="4200" b="1" i="0">
                 <a:solidFill>
-                  <a:srgbClr val="123A6B"/>
+                  <a:srgbClr val="0072CE"/>
                 </a:solidFill>
                 <a:latin typeface="Arial"/>
               </a:rPr>
@@ -33785,7 +32995,7 @@
             <a:r>
               <a:rPr sz="4200" b="1" i="0">
                 <a:solidFill>
-                  <a:srgbClr val="123A6B"/>
+                  <a:srgbClr val="0072CE"/>
                 </a:solidFill>
                 <a:latin typeface="Arial"/>
               </a:rPr>
@@ -33820,7 +33030,7 @@
             <a:r>
               <a:rPr sz="4200" b="1" i="0">
                 <a:solidFill>
-                  <a:srgbClr val="123A6B"/>
+                  <a:srgbClr val="0072CE"/>
                 </a:solidFill>
                 <a:latin typeface="Arial"/>
               </a:rPr>
@@ -33890,7 +33100,7 @@
             <a:r>
               <a:rPr sz="4200" b="1" i="0">
                 <a:solidFill>
-                  <a:srgbClr val="123A6B"/>
+                  <a:srgbClr val="0072CE"/>
                 </a:solidFill>
                 <a:latin typeface="Arial"/>
               </a:rPr>
@@ -33925,7 +33135,7 @@
             <a:r>
               <a:rPr sz="4200" b="1" i="0">
                 <a:solidFill>
-                  <a:srgbClr val="123A6B"/>
+                  <a:srgbClr val="0072CE"/>
                 </a:solidFill>
                 <a:latin typeface="Arial"/>
               </a:rPr>
@@ -33997,7 +33207,7 @@
             <a:fld id="{4B0E1F8A-6C1D-4E2A-9F3B-7A5C8D2E1F60}" type="slidenum">
               <a:rPr sz="1600" b="0" i="0">
                 <a:solidFill>
-                  <a:srgbClr val="5B6B82"/>
+                  <a:srgbClr val="0A2240"/>
                 </a:solidFill>
                 <a:latin typeface="Arial"/>
               </a:rPr>
@@ -34093,7 +33303,7 @@
             <a:r>
               <a:rPr sz="4200" b="1" i="0">
                 <a:solidFill>
-                  <a:srgbClr val="123A6B"/>
+                  <a:srgbClr val="0072CE"/>
                 </a:solidFill>
                 <a:latin typeface="Arial"/>
               </a:rPr>
@@ -34128,7 +33338,7 @@
             <a:r>
               <a:rPr sz="4200" b="1" i="0">
                 <a:solidFill>
-                  <a:srgbClr val="123A6B"/>
+                  <a:srgbClr val="0072CE"/>
                 </a:solidFill>
                 <a:latin typeface="Arial"/>
               </a:rPr>
@@ -34198,7 +33408,7 @@
             <a:r>
               <a:rPr sz="4200" b="1" i="0">
                 <a:solidFill>
-                  <a:srgbClr val="123A6B"/>
+                  <a:srgbClr val="0072CE"/>
                 </a:solidFill>
                 <a:latin typeface="Arial"/>
               </a:rPr>
@@ -34233,7 +33443,7 @@
             <a:r>
               <a:rPr sz="4200" b="1" i="0">
                 <a:solidFill>
-                  <a:srgbClr val="123A6B"/>
+                  <a:srgbClr val="0072CE"/>
                 </a:solidFill>
                 <a:latin typeface="Arial"/>
               </a:rPr>
@@ -34303,7 +33513,7 @@
             <a:r>
               <a:rPr sz="4200" b="1" i="0">
                 <a:solidFill>
-                  <a:srgbClr val="123A6B"/>
+                  <a:srgbClr val="0072CE"/>
                 </a:solidFill>
                 <a:latin typeface="Arial"/>
               </a:rPr>
@@ -34338,7 +33548,7 @@
             <a:r>
               <a:rPr sz="4200" b="1" i="0">
                 <a:solidFill>
-                  <a:srgbClr val="123A6B"/>
+                  <a:srgbClr val="0072CE"/>
                 </a:solidFill>
                 <a:latin typeface="Arial"/>
               </a:rPr>
@@ -34410,7 +33620,7 @@
             <a:fld id="{4B0E1F8A-6C1D-4E2A-9F3B-7A5C8D2E1F60}" type="slidenum">
               <a:rPr sz="1600" b="0" i="0">
                 <a:solidFill>
-                  <a:srgbClr val="5B6B82"/>
+                  <a:srgbClr val="0A2240"/>
                 </a:solidFill>
                 <a:latin typeface="Arial"/>
               </a:rPr>
@@ -34506,7 +33716,7 @@
             <a:r>
               <a:rPr sz="3400" b="1" i="0">
                 <a:solidFill>
-                  <a:srgbClr val="123A6B"/>
+                  <a:srgbClr val="0072CE"/>
                 </a:solidFill>
                 <a:latin typeface="Arial"/>
               </a:rPr>
@@ -34541,7 +33751,7 @@
             <a:r>
               <a:rPr sz="3400" b="1" i="0">
                 <a:solidFill>
-                  <a:srgbClr val="123A6B"/>
+                  <a:srgbClr val="0072CE"/>
                 </a:solidFill>
                 <a:latin typeface="Arial"/>
               </a:rPr>
@@ -34902,7 +34112,7 @@
             <a:fld id="{4B0E1F8A-6C1D-4E2A-9F3B-7A5C8D2E1F60}" type="slidenum">
               <a:rPr sz="1600" b="0" i="0">
                 <a:solidFill>
-                  <a:srgbClr val="5B6B82"/>
+                  <a:srgbClr val="0A2240"/>
                 </a:solidFill>
                 <a:latin typeface="Arial"/>
               </a:rPr>
@@ -35138,7 +34348,7 @@
             <a:r>
               <a:rPr sz="4200" b="1" i="0">
                 <a:solidFill>
-                  <a:srgbClr val="5B6B82"/>
+                  <a:srgbClr val="0A2240"/>
                 </a:solidFill>
                 <a:latin typeface="Arial"/>
               </a:rPr>
@@ -35175,7 +34385,7 @@
             <a:fld id="{4B0E1F8A-6C1D-4E2A-9F3B-7A5C8D2E1F60}" type="slidenum">
               <a:rPr sz="1600" b="0" i="0">
                 <a:solidFill>
-                  <a:srgbClr val="5B6B82"/>
+                  <a:srgbClr val="0A2240"/>
                 </a:solidFill>
                 <a:latin typeface="Arial"/>
               </a:rPr>
@@ -35315,7 +34525,7 @@
             <a:r>
               <a:rPr sz="3400" b="0" i="0">
                 <a:solidFill>
-                  <a:srgbClr val="5B6B82"/>
+                  <a:srgbClr val="0A2240"/>
                 </a:solidFill>
                 <a:latin typeface="Arial"/>
               </a:rPr>
@@ -35352,7 +34562,7 @@
             <a:fld id="{4B0E1F8A-6C1D-4E2A-9F3B-7A5C8D2E1F60}" type="slidenum">
               <a:rPr sz="1600" b="0" i="0">
                 <a:solidFill>
-                  <a:srgbClr val="5B6B82"/>
+                  <a:srgbClr val="0A2240"/>
                 </a:solidFill>
                 <a:latin typeface="Arial"/>
               </a:rPr>
@@ -35529,7 +34739,7 @@
             <a:fld id="{4B0E1F8A-6C1D-4E2A-9F3B-7A5C8D2E1F60}" type="slidenum">
               <a:rPr sz="1600" b="0" i="0">
                 <a:solidFill>
-                  <a:srgbClr val="5B6B82"/>
+                  <a:srgbClr val="0A2240"/>
                 </a:solidFill>
                 <a:latin typeface="Arial"/>
               </a:rPr>
@@ -35706,7 +34916,7 @@
             <a:fld id="{4B0E1F8A-6C1D-4E2A-9F3B-7A5C8D2E1F60}" type="slidenum">
               <a:rPr sz="1600" b="0" i="0">
                 <a:solidFill>
-                  <a:srgbClr val="5B6B82"/>
+                  <a:srgbClr val="0A2240"/>
                 </a:solidFill>
                 <a:latin typeface="Arial"/>
               </a:rPr>
@@ -35802,7 +35012,7 @@
             <a:r>
               <a:rPr sz="3400" b="1" i="0">
                 <a:solidFill>
-                  <a:srgbClr val="123A6B"/>
+                  <a:srgbClr val="0072CE"/>
                 </a:solidFill>
                 <a:latin typeface="Arial"/>
               </a:rPr>
@@ -35837,7 +35047,7 @@
             <a:r>
               <a:rPr sz="3400" b="1" i="0">
                 <a:solidFill>
-                  <a:srgbClr val="123A6B"/>
+                  <a:srgbClr val="0072CE"/>
                 </a:solidFill>
                 <a:latin typeface="Arial"/>
               </a:rPr>
@@ -36198,7 +35408,7 @@
             <a:fld id="{4B0E1F8A-6C1D-4E2A-9F3B-7A5C8D2E1F60}" type="slidenum">
               <a:rPr sz="1600" b="0" i="0">
                 <a:solidFill>
-                  <a:srgbClr val="5B6B82"/>
+                  <a:srgbClr val="0A2240"/>
                 </a:solidFill>
                 <a:latin typeface="Arial"/>
               </a:rPr>
@@ -36436,7 +35646,7 @@
             <a:fld id="{4B0E1F8A-6C1D-4E2A-9F3B-7A5C8D2E1F60}" type="slidenum">
               <a:rPr sz="1600" b="0" i="0">
                 <a:solidFill>
-                  <a:srgbClr val="5B6B82"/>
+                  <a:srgbClr val="0A2240"/>
                 </a:solidFill>
                 <a:latin typeface="Arial"/>
               </a:rPr>
@@ -36674,7 +35884,7 @@
             <a:fld id="{4B0E1F8A-6C1D-4E2A-9F3B-7A5C8D2E1F60}" type="slidenum">
               <a:rPr sz="1600" b="0" i="0">
                 <a:solidFill>
-                  <a:srgbClr val="5B6B82"/>
+                  <a:srgbClr val="0A2240"/>
                 </a:solidFill>
                 <a:latin typeface="Arial"/>
               </a:rPr>
@@ -36770,7 +35980,7 @@
             <a:r>
               <a:rPr sz="4200" b="1" i="0">
                 <a:solidFill>
-                  <a:srgbClr val="123A6B"/>
+                  <a:srgbClr val="0072CE"/>
                 </a:solidFill>
                 <a:latin typeface="Arial"/>
               </a:rPr>
@@ -36805,7 +36015,7 @@
             <a:r>
               <a:rPr sz="4200" b="1" i="0">
                 <a:solidFill>
-                  <a:srgbClr val="123A6B"/>
+                  <a:srgbClr val="0072CE"/>
                 </a:solidFill>
                 <a:latin typeface="Arial"/>
               </a:rPr>
@@ -36875,7 +36085,7 @@
             <a:r>
               <a:rPr sz="4200" b="1" i="0">
                 <a:solidFill>
-                  <a:srgbClr val="123A6B"/>
+                  <a:srgbClr val="0072CE"/>
                 </a:solidFill>
                 <a:latin typeface="Arial"/>
               </a:rPr>
@@ -36910,7 +36120,7 @@
             <a:r>
               <a:rPr sz="4200" b="1" i="0">
                 <a:solidFill>
-                  <a:srgbClr val="123A6B"/>
+                  <a:srgbClr val="0072CE"/>
                 </a:solidFill>
                 <a:latin typeface="Arial"/>
               </a:rPr>
@@ -36980,7 +36190,7 @@
             <a:r>
               <a:rPr sz="4200" b="1" i="0">
                 <a:solidFill>
-                  <a:srgbClr val="123A6B"/>
+                  <a:srgbClr val="0072CE"/>
                 </a:solidFill>
                 <a:latin typeface="Arial"/>
               </a:rPr>
@@ -37015,7 +36225,7 @@
             <a:r>
               <a:rPr sz="4200" b="1" i="0">
                 <a:solidFill>
-                  <a:srgbClr val="123A6B"/>
+                  <a:srgbClr val="0072CE"/>
                 </a:solidFill>
                 <a:latin typeface="Arial"/>
               </a:rPr>
@@ -37087,7 +36297,7 @@
             <a:fld id="{4B0E1F8A-6C1D-4E2A-9F3B-7A5C8D2E1F60}" type="slidenum">
               <a:rPr sz="1600" b="0" i="0">
                 <a:solidFill>
-                  <a:srgbClr val="5B6B82"/>
+                  <a:srgbClr val="0A2240"/>
                 </a:solidFill>
                 <a:latin typeface="Arial"/>
               </a:rPr>
@@ -37264,7 +36474,7 @@
             <a:fld id="{4B0E1F8A-6C1D-4E2A-9F3B-7A5C8D2E1F60}" type="slidenum">
               <a:rPr sz="1600" b="0" i="0">
                 <a:solidFill>
-                  <a:srgbClr val="5B6B82"/>
+                  <a:srgbClr val="0A2240"/>
                 </a:solidFill>
                 <a:latin typeface="Arial"/>
               </a:rPr>
@@ -37502,7 +36712,7 @@
             <a:fld id="{4B0E1F8A-6C1D-4E2A-9F3B-7A5C8D2E1F60}" type="slidenum">
               <a:rPr sz="1600" b="0" i="0">
                 <a:solidFill>
-                  <a:srgbClr val="5B6B82"/>
+                  <a:srgbClr val="0A2240"/>
                 </a:solidFill>
                 <a:latin typeface="Arial"/>
               </a:rPr>
@@ -37598,7 +36808,7 @@
             <a:r>
               <a:rPr sz="3400" b="1" i="0">
                 <a:solidFill>
-                  <a:srgbClr val="123A6B"/>
+                  <a:srgbClr val="0072CE"/>
                 </a:solidFill>
                 <a:latin typeface="Arial"/>
               </a:rPr>
@@ -37633,7 +36843,7 @@
             <a:r>
               <a:rPr sz="3400" b="1" i="0">
                 <a:solidFill>
-                  <a:srgbClr val="123A6B"/>
+                  <a:srgbClr val="0072CE"/>
                 </a:solidFill>
                 <a:latin typeface="Arial"/>
               </a:rPr>
@@ -37994,7 +37204,7 @@
             <a:fld id="{4B0E1F8A-6C1D-4E2A-9F3B-7A5C8D2E1F60}" type="slidenum">
               <a:rPr sz="1600" b="0" i="0">
                 <a:solidFill>
-                  <a:srgbClr val="5B6B82"/>
+                  <a:srgbClr val="0A2240"/>
                 </a:solidFill>
                 <a:latin typeface="Arial"/>
               </a:rPr>
@@ -38090,7 +37300,7 @@
             <a:r>
               <a:rPr sz="4200" b="1" i="0">
                 <a:solidFill>
-                  <a:srgbClr val="123A6B"/>
+                  <a:srgbClr val="0072CE"/>
                 </a:solidFill>
                 <a:latin typeface="Arial"/>
               </a:rPr>
@@ -38108,13 +37318,13 @@
         <p:spPr>
           <a:xfrm>
             <a:off x="457200" y="2194560"/>
-            <a:ext cx="784098" cy="54864"/>
+            <a:ext cx="593303" cy="54864"/>
           </a:xfrm>
           <a:prstGeom prst="rect">
             <a:avLst/>
           </a:prstGeom>
           <a:solidFill>
-            <a:srgbClr val="123A6B"/>
+            <a:srgbClr val="0072CE"/>
           </a:solidFill>
           <a:ln>
             <a:noFill/>
@@ -38169,7 +37379,7 @@
             <a:r>
               <a:rPr sz="3400" b="1" i="0">
                 <a:solidFill>
-                  <a:srgbClr val="123A6B"/>
+                  <a:srgbClr val="0072CE"/>
                 </a:solidFill>
                 <a:latin typeface="Arial"/>
               </a:rPr>
@@ -38239,7 +37449,7 @@
             <a:r>
               <a:rPr sz="4200" b="1" i="0">
                 <a:solidFill>
-                  <a:srgbClr val="123A6B"/>
+                  <a:srgbClr val="0072CE"/>
                 </a:solidFill>
                 <a:latin typeface="Arial"/>
               </a:rPr>
@@ -38257,13 +37467,13 @@
         <p:spPr>
           <a:xfrm>
             <a:off x="3345180" y="2194560"/>
-            <a:ext cx="784098" cy="54864"/>
+            <a:ext cx="593303" cy="54864"/>
           </a:xfrm>
           <a:prstGeom prst="rect">
             <a:avLst/>
           </a:prstGeom>
           <a:solidFill>
-            <a:srgbClr val="123A6B"/>
+            <a:srgbClr val="0072CE"/>
           </a:solidFill>
           <a:ln>
             <a:noFill/>
@@ -38318,7 +37528,7 @@
             <a:r>
               <a:rPr sz="3400" b="1" i="0">
                 <a:solidFill>
-                  <a:srgbClr val="123A6B"/>
+                  <a:srgbClr val="0072CE"/>
                 </a:solidFill>
                 <a:latin typeface="Arial"/>
               </a:rPr>
@@ -38388,7 +37598,7 @@
             <a:r>
               <a:rPr sz="4200" b="1" i="0">
                 <a:solidFill>
-                  <a:srgbClr val="123A6B"/>
+                  <a:srgbClr val="0072CE"/>
                 </a:solidFill>
                 <a:latin typeface="Arial"/>
               </a:rPr>
@@ -38406,13 +37616,13 @@
         <p:spPr>
           <a:xfrm>
             <a:off x="6233160" y="2194560"/>
-            <a:ext cx="784098" cy="54864"/>
+            <a:ext cx="593303" cy="54864"/>
           </a:xfrm>
           <a:prstGeom prst="rect">
             <a:avLst/>
           </a:prstGeom>
           <a:solidFill>
-            <a:srgbClr val="123A6B"/>
+            <a:srgbClr val="0072CE"/>
           </a:solidFill>
           <a:ln>
             <a:noFill/>
@@ -38467,7 +37677,7 @@
             <a:r>
               <a:rPr sz="3400" b="1" i="0">
                 <a:solidFill>
-                  <a:srgbClr val="123A6B"/>
+                  <a:srgbClr val="0072CE"/>
                 </a:solidFill>
                 <a:latin typeface="Arial"/>
               </a:rPr>
@@ -38537,7 +37747,7 @@
             <a:r>
               <a:rPr sz="4200" b="1" i="0">
                 <a:solidFill>
-                  <a:srgbClr val="123A6B"/>
+                  <a:srgbClr val="0072CE"/>
                 </a:solidFill>
                 <a:latin typeface="Arial"/>
               </a:rPr>
@@ -38555,13 +37765,13 @@
         <p:spPr>
           <a:xfrm>
             <a:off x="9121140" y="2194560"/>
-            <a:ext cx="784098" cy="54864"/>
+            <a:ext cx="593303" cy="54864"/>
           </a:xfrm>
           <a:prstGeom prst="rect">
             <a:avLst/>
           </a:prstGeom>
           <a:solidFill>
-            <a:srgbClr val="123A6B"/>
+            <a:srgbClr val="0072CE"/>
           </a:solidFill>
           <a:ln>
             <a:noFill/>
@@ -38616,7 +37826,7 @@
             <a:r>
               <a:rPr sz="3400" b="1" i="0">
                 <a:solidFill>
-                  <a:srgbClr val="123A6B"/>
+                  <a:srgbClr val="0072CE"/>
                 </a:solidFill>
                 <a:latin typeface="Arial"/>
               </a:rPr>
@@ -38688,7 +37898,7 @@
             <a:fld id="{4B0E1F8A-6C1D-4E2A-9F3B-7A5C8D2E1F60}" type="slidenum">
               <a:rPr sz="1600" b="0" i="0">
                 <a:solidFill>
-                  <a:srgbClr val="5B6B82"/>
+                  <a:srgbClr val="0A2240"/>
                 </a:solidFill>
                 <a:latin typeface="Arial"/>
               </a:rPr>
@@ -38738,7 +37948,7 @@
             <a:avLst/>
           </a:prstGeom>
           <a:solidFill>
-            <a:srgbClr val="FF5F56"/>
+            <a:srgbClr val="FFFFFF"/>
           </a:solidFill>
           <a:ln>
             <a:noFill/>
@@ -38782,7 +37992,7 @@
             <a:avLst/>
           </a:prstGeom>
           <a:solidFill>
-            <a:srgbClr val="FFBD2E"/>
+            <a:srgbClr val="FFFFFF"/>
           </a:solidFill>
           <a:ln>
             <a:noFill/>
@@ -38826,7 +38036,7 @@
             <a:avLst/>
           </a:prstGeom>
           <a:solidFill>
-            <a:srgbClr val="27C93F"/>
+            <a:srgbClr val="FFFFFF"/>
           </a:solidFill>
           <a:ln>
             <a:noFill/>
@@ -38881,7 +38091,7 @@
             <a:r>
               <a:rPr sz="4200" b="0" i="0">
                 <a:solidFill>
-                  <a:srgbClr val="D4D4D4"/>
+                  <a:srgbClr val="FFFFFF"/>
                 </a:solidFill>
                 <a:latin typeface="Arial"/>
               </a:rPr>
@@ -38916,7 +38126,7 @@
             <a:r>
               <a:rPr sz="3400" b="0" i="0">
                 <a:solidFill>
-                  <a:srgbClr val="6A9955"/>
+                  <a:srgbClr val="FFFFFF"/>
                 </a:solidFill>
                 <a:latin typeface="Arial"/>
               </a:rPr>
@@ -38934,7 +38144,7 @@
         <p:spPr>
           <a:xfrm>
             <a:off x="457200" y="2356103"/>
-            <a:ext cx="9361328" cy="518159"/>
+            <a:ext cx="11004529" cy="518159"/>
           </a:xfrm>
           <a:prstGeom prst="rect">
             <a:avLst/>
@@ -38951,11 +38161,11 @@
             <a:r>
               <a:rPr sz="3400" b="0" i="0">
                 <a:solidFill>
-                  <a:srgbClr val="D4D4D4"/>
-                </a:solidFill>
-                <a:latin typeface="Arial"/>
-              </a:rPr>
-              <a:t>- Login: stubbed, always user </a:t>
+                  <a:srgbClr val="FFFFFF"/>
+                </a:solidFill>
+                <a:latin typeface="Arial"/>
+              </a:rPr>
+              <a:t>- Login: stubbed, always user "ana"</a:t>
             </a:r>
           </a:p>
         </p:txBody>
@@ -38963,41 +38173,6 @@
       <p:sp>
         <p:nvSpPr>
           <p:cNvPr id="8" name="TextBox 7"/>
-          <p:cNvSpPr txBox="1"/>
-          <p:nvPr/>
-        </p:nvSpPr>
-        <p:spPr>
-          <a:xfrm>
-            <a:off x="6193730" y="2356103"/>
-            <a:ext cx="1826081" cy="518159"/>
-          </a:xfrm>
-          <a:prstGeom prst="rect">
-            <a:avLst/>
-          </a:prstGeom>
-          <a:noFill/>
-        </p:spPr>
-        <p:txBody>
-          <a:bodyPr wrap="none" lIns="0" rIns="0">
-            <a:noAutofit/>
-          </a:bodyPr>
-          <a:lstStyle/>
-          <a:p>
-            <a:pPr algn="l"/>
-            <a:r>
-              <a:rPr sz="3400" b="0" i="0">
-                <a:solidFill>
-                  <a:srgbClr val="CE9178"/>
-                </a:solidFill>
-                <a:latin typeface="Arial"/>
-              </a:rPr>
-              <a:t>"ana"</a:t>
-            </a:r>
-          </a:p>
-        </p:txBody>
-      </p:sp>
-      <p:sp>
-        <p:nvSpPr>
-          <p:cNvPr id="9" name="TextBox 8"/>
           <p:cNvSpPr txBox="1"/>
           <p:nvPr/>
         </p:nvSpPr>
@@ -39021,7 +38196,7 @@
             <a:r>
               <a:rPr sz="3400" b="0" i="0">
                 <a:solidFill>
-                  <a:srgbClr val="D4D4D4"/>
+                  <a:srgbClr val="FFFFFF"/>
                 </a:solidFill>
                 <a:latin typeface="Arial"/>
               </a:rPr>
@@ -39032,112 +38207,42 @@
       </p:sp>
       <p:sp>
         <p:nvSpPr>
+          <p:cNvPr id="9" name="TextBox 8"/>
+          <p:cNvSpPr txBox="1"/>
+          <p:nvPr/>
+        </p:nvSpPr>
+        <p:spPr>
+          <a:xfrm>
+            <a:off x="457200" y="3392421"/>
+            <a:ext cx="8400574" cy="518159"/>
+          </a:xfrm>
+          <a:prstGeom prst="rect">
+            <a:avLst/>
+          </a:prstGeom>
+          <a:noFill/>
+        </p:spPr>
+        <p:txBody>
+          <a:bodyPr wrap="none" lIns="0" rIns="0">
+            <a:noAutofit/>
+          </a:bodyPr>
+          <a:lstStyle/>
+          <a:p>
+            <a:pPr algn="l"/>
+            <a:r>
+              <a:rPr sz="3400" b="0" i="0">
+                <a:solidFill>
+                  <a:srgbClr val="FFFFFF"/>
+                </a:solidFill>
+                <a:latin typeface="Arial"/>
+              </a:rPr>
+              <a:t>- Retrieval: 4 docs, pasted </a:t>
+            </a:r>
+          </a:p>
+        </p:txBody>
+      </p:sp>
+      <p:sp>
+        <p:nvSpPr>
           <p:cNvPr id="10" name="TextBox 9"/>
-          <p:cNvSpPr txBox="1"/>
-          <p:nvPr/>
-        </p:nvSpPr>
-        <p:spPr>
-          <a:xfrm>
-            <a:off x="457200" y="3392421"/>
-            <a:ext cx="3714868" cy="518159"/>
-          </a:xfrm>
-          <a:prstGeom prst="rect">
-            <a:avLst/>
-          </a:prstGeom>
-          <a:noFill/>
-        </p:spPr>
-        <p:txBody>
-          <a:bodyPr wrap="none" lIns="0" rIns="0">
-            <a:noAutofit/>
-          </a:bodyPr>
-          <a:lstStyle/>
-          <a:p>
-            <a:pPr algn="l"/>
-            <a:r>
-              <a:rPr sz="3400" b="0" i="0">
-                <a:solidFill>
-                  <a:srgbClr val="D4D4D4"/>
-                </a:solidFill>
-                <a:latin typeface="Arial"/>
-              </a:rPr>
-              <a:t>- Retrieval: </a:t>
-            </a:r>
-          </a:p>
-        </p:txBody>
-      </p:sp>
-      <p:sp>
-        <p:nvSpPr>
-          <p:cNvPr id="11" name="TextBox 10"/>
-          <p:cNvSpPr txBox="1"/>
-          <p:nvPr/>
-        </p:nvSpPr>
-        <p:spPr>
-          <a:xfrm>
-            <a:off x="2664693" y="3392421"/>
-            <a:ext cx="567115" cy="518159"/>
-          </a:xfrm>
-          <a:prstGeom prst="rect">
-            <a:avLst/>
-          </a:prstGeom>
-          <a:noFill/>
-        </p:spPr>
-        <p:txBody>
-          <a:bodyPr wrap="none" lIns="0" rIns="0">
-            <a:noAutofit/>
-          </a:bodyPr>
-          <a:lstStyle/>
-          <a:p>
-            <a:pPr algn="l"/>
-            <a:r>
-              <a:rPr sz="3400" b="0" i="0">
-                <a:solidFill>
-                  <a:srgbClr val="B5CEA8"/>
-                </a:solidFill>
-                <a:latin typeface="Arial"/>
-              </a:rPr>
-              <a:t>4</a:t>
-            </a:r>
-          </a:p>
-        </p:txBody>
-      </p:sp>
-      <p:sp>
-        <p:nvSpPr>
-          <p:cNvPr id="12" name="TextBox 11"/>
-          <p:cNvSpPr txBox="1"/>
-          <p:nvPr/>
-        </p:nvSpPr>
-        <p:spPr>
-          <a:xfrm>
-            <a:off x="2904840" y="3392421"/>
-            <a:ext cx="4484350" cy="518159"/>
-          </a:xfrm>
-          <a:prstGeom prst="rect">
-            <a:avLst/>
-          </a:prstGeom>
-          <a:noFill/>
-        </p:spPr>
-        <p:txBody>
-          <a:bodyPr wrap="none" lIns="0" rIns="0">
-            <a:noAutofit/>
-          </a:bodyPr>
-          <a:lstStyle/>
-          <a:p>
-            <a:pPr algn="l"/>
-            <a:r>
-              <a:rPr sz="3400" b="0" i="0">
-                <a:solidFill>
-                  <a:srgbClr val="D4D4D4"/>
-                </a:solidFill>
-                <a:latin typeface="Arial"/>
-              </a:rPr>
-              <a:t> docs, pasted </a:t>
-            </a:r>
-          </a:p>
-        </p:txBody>
-      </p:sp>
-      <p:sp>
-        <p:nvSpPr>
-          <p:cNvPr id="13" name="TextBox 12"/>
           <p:cNvSpPr txBox="1"/>
           <p:nvPr/>
         </p:nvSpPr>
@@ -39172,7 +38277,7 @@
       </p:sp>
       <p:sp>
         <p:nvSpPr>
-          <p:cNvPr id="14" name="TextBox 13"/>
+          <p:cNvPr id="11" name="TextBox 10"/>
           <p:cNvSpPr txBox="1"/>
           <p:nvPr/>
         </p:nvSpPr>
@@ -39196,7 +38301,7 @@
             <a:r>
               <a:rPr sz="3400" b="0" i="0">
                 <a:solidFill>
-                  <a:srgbClr val="D4D4D4"/>
+                  <a:srgbClr val="FFFFFF"/>
                 </a:solidFill>
                 <a:latin typeface="Arial"/>
               </a:rPr>
@@ -39207,14 +38312,14 @@
       </p:sp>
       <p:sp>
         <p:nvSpPr>
-          <p:cNvPr id="15" name="TextBox 14"/>
+          <p:cNvPr id="12" name="TextBox 11"/>
           <p:cNvSpPr txBox="1"/>
           <p:nvPr/>
         </p:nvSpPr>
         <p:spPr>
           <a:xfrm>
             <a:off x="457200" y="3910580"/>
-            <a:ext cx="7382808" cy="518159"/>
+            <a:ext cx="10225603" cy="518159"/>
           </a:xfrm>
           <a:prstGeom prst="rect">
             <a:avLst/>
@@ -39231,88 +38336,18 @@
             <a:r>
               <a:rPr sz="3400" b="0" i="0">
                 <a:solidFill>
-                  <a:srgbClr val="D4D4D4"/>
-                </a:solidFill>
-                <a:latin typeface="Arial"/>
-              </a:rPr>
-              <a:t>- Fails on: inputs over ~</a:t>
-            </a:r>
-          </a:p>
-        </p:txBody>
-      </p:sp>
-      <p:sp>
-        <p:nvSpPr>
-          <p:cNvPr id="16" name="TextBox 15"/>
-          <p:cNvSpPr txBox="1"/>
-          <p:nvPr/>
-        </p:nvSpPr>
-        <p:spPr>
-          <a:xfrm>
-            <a:off x="4957155" y="3910580"/>
-            <a:ext cx="951348" cy="518159"/>
-          </a:xfrm>
-          <a:prstGeom prst="rect">
-            <a:avLst/>
-          </a:prstGeom>
-          <a:noFill/>
-        </p:spPr>
-        <p:txBody>
-          <a:bodyPr wrap="none" lIns="0" rIns="0">
-            <a:noAutofit/>
-          </a:bodyPr>
-          <a:lstStyle/>
-          <a:p>
-            <a:pPr algn="l"/>
-            <a:r>
-              <a:rPr sz="3400" b="0" i="0">
-                <a:solidFill>
-                  <a:srgbClr val="B5CEA8"/>
-                </a:solidFill>
-                <a:latin typeface="Arial"/>
-              </a:rPr>
-              <a:t>20</a:t>
-            </a:r>
-          </a:p>
-        </p:txBody>
-      </p:sp>
-      <p:sp>
-        <p:nvSpPr>
-          <p:cNvPr id="17" name="TextBox 16"/>
-          <p:cNvSpPr txBox="1"/>
-          <p:nvPr/>
-        </p:nvSpPr>
-        <p:spPr>
-          <a:xfrm>
-            <a:off x="5437448" y="3910580"/>
-            <a:ext cx="2257206" cy="518159"/>
-          </a:xfrm>
-          <a:prstGeom prst="rect">
-            <a:avLst/>
-          </a:prstGeom>
-          <a:noFill/>
-        </p:spPr>
-        <p:txBody>
-          <a:bodyPr wrap="none" lIns="0" rIns="0">
-            <a:noAutofit/>
-          </a:bodyPr>
-          <a:lstStyle/>
-          <a:p>
-            <a:pPr algn="l"/>
-            <a:r>
-              <a:rPr sz="3400" b="0" i="0">
-                <a:solidFill>
-                  <a:srgbClr val="D4D4D4"/>
-                </a:solidFill>
-                <a:latin typeface="Arial"/>
-              </a:rPr>
-              <a:t> pages</a:t>
-            </a:r>
-          </a:p>
-        </p:txBody>
-      </p:sp>
-      <p:sp>
-        <p:nvSpPr>
-          <p:cNvPr id="18" name="TextBox 17"/>
+                  <a:srgbClr val="FFFFFF"/>
+                </a:solidFill>
+                <a:latin typeface="Arial"/>
+              </a:rPr>
+              <a:t>- Fails on: inputs over ~20 pages</a:t>
+            </a:r>
+          </a:p>
+        </p:txBody>
+      </p:sp>
+      <p:sp>
+        <p:nvSpPr>
+          <p:cNvPr id="13" name="TextBox 12"/>
           <p:cNvSpPr/>
           <p:nvPr>
             <p:ph type="sldNum" idx="12"/>
@@ -39338,7 +38373,7 @@
             <a:fld id="{4B0E1F8A-6C1D-4E2A-9F3B-7A5C8D2E1F60}" type="slidenum">
               <a:rPr sz="1600" b="0" i="0">
                 <a:solidFill>
-                  <a:srgbClr val="5B6B82"/>
+                  <a:srgbClr val="0A2240"/>
                 </a:solidFill>
                 <a:latin typeface="Arial"/>
               </a:rPr>
@@ -39425,7 +38460,7 @@
             </a:avLst>
           </a:prstGeom>
           <a:solidFill>
-            <a:srgbClr val="0C1A1C"/>
+            <a:srgbClr val="0A2240"/>
           </a:solidFill>
           <a:ln>
             <a:noFill/>
@@ -39480,7 +38515,7 @@
             <a:r>
               <a:rPr sz="2600" b="1" i="0">
                 <a:solidFill>
-                  <a:srgbClr val="569CD6"/>
+                  <a:srgbClr val="0072CE"/>
                 </a:solidFill>
                 <a:latin typeface="Courier New"/>
               </a:rPr>
@@ -39515,7 +38550,7 @@
             <a:r>
               <a:rPr sz="2600" b="0" i="0">
                 <a:solidFill>
-                  <a:srgbClr val="55707A"/>
+                  <a:srgbClr val="0072CE"/>
                 </a:solidFill>
                 <a:latin typeface="Courier New"/>
               </a:rPr>
@@ -39550,7 +38585,7 @@
             <a:r>
               <a:rPr sz="2600" b="1" i="0">
                 <a:solidFill>
-                  <a:srgbClr val="569CD6"/>
+                  <a:srgbClr val="0072CE"/>
                 </a:solidFill>
                 <a:latin typeface="Courier New"/>
               </a:rPr>
@@ -39585,7 +38620,7 @@
             <a:r>
               <a:rPr sz="2600" b="0" i="0">
                 <a:solidFill>
-                  <a:srgbClr val="55707A"/>
+                  <a:srgbClr val="0072CE"/>
                 </a:solidFill>
                 <a:latin typeface="Courier New"/>
               </a:rPr>
@@ -39620,7 +38655,7 @@
             <a:r>
               <a:rPr sz="2600" b="0" i="0">
                 <a:solidFill>
-                  <a:srgbClr val="D4D4D4"/>
+                  <a:srgbClr val="FFFFFF"/>
                 </a:solidFill>
                 <a:latin typeface="Courier New"/>
               </a:rPr>
@@ -39655,7 +38690,7 @@
             <a:r>
               <a:rPr sz="2600" b="0" i="0">
                 <a:solidFill>
-                  <a:srgbClr val="55707A"/>
+                  <a:srgbClr val="0072CE"/>
                 </a:solidFill>
                 <a:latin typeface="Courier New"/>
               </a:rPr>
@@ -39690,7 +38725,7 @@
             <a:r>
               <a:rPr sz="2600" b="1" i="0">
                 <a:solidFill>
-                  <a:srgbClr val="569CD6"/>
+                  <a:srgbClr val="0072CE"/>
                 </a:solidFill>
                 <a:latin typeface="Courier New"/>
               </a:rPr>
@@ -39725,7 +38760,7 @@
             <a:r>
               <a:rPr sz="2600" b="0" i="0">
                 <a:solidFill>
-                  <a:srgbClr val="55707A"/>
+                  <a:srgbClr val="0072CE"/>
                 </a:solidFill>
                 <a:latin typeface="Courier New"/>
               </a:rPr>
@@ -39760,7 +38795,7 @@
             <a:r>
               <a:rPr sz="2600" b="1" i="0">
                 <a:solidFill>
-                  <a:srgbClr val="569CD6"/>
+                  <a:srgbClr val="0072CE"/>
                 </a:solidFill>
                 <a:latin typeface="Courier New"/>
               </a:rPr>
@@ -39795,7 +38830,7 @@
             <a:r>
               <a:rPr sz="2600" b="0" i="0">
                 <a:solidFill>
-                  <a:srgbClr val="55707A"/>
+                  <a:srgbClr val="0072CE"/>
                 </a:solidFill>
                 <a:latin typeface="Courier New"/>
               </a:rPr>
@@ -39830,7 +38865,7 @@
             <a:r>
               <a:rPr sz="2600" b="0" i="0">
                 <a:solidFill>
-                  <a:srgbClr val="D4D4D4"/>
+                  <a:srgbClr val="FFFFFF"/>
                 </a:solidFill>
                 <a:latin typeface="Courier New"/>
               </a:rPr>
@@ -39865,7 +38900,7 @@
             <a:r>
               <a:rPr sz="2600" b="0" i="0">
                 <a:solidFill>
-                  <a:srgbClr val="55707A"/>
+                  <a:srgbClr val="0072CE"/>
                 </a:solidFill>
                 <a:latin typeface="Courier New"/>
               </a:rPr>
@@ -39900,7 +38935,7 @@
             <a:r>
               <a:rPr sz="2600" b="0" i="0">
                 <a:solidFill>
-                  <a:srgbClr val="D4D4D4"/>
+                  <a:srgbClr val="FFFFFF"/>
                 </a:solidFill>
                 <a:latin typeface="Courier New"/>
               </a:rPr>
@@ -39935,7 +38970,7 @@
             <a:r>
               <a:rPr sz="2600" b="0" i="0">
                 <a:solidFill>
-                  <a:srgbClr val="55707A"/>
+                  <a:srgbClr val="0072CE"/>
                 </a:solidFill>
                 <a:latin typeface="Courier New"/>
               </a:rPr>
@@ -39970,7 +39005,7 @@
             <a:r>
               <a:rPr sz="2600" b="0" i="0">
                 <a:solidFill>
-                  <a:srgbClr val="D4D4D4"/>
+                  <a:srgbClr val="FFFFFF"/>
                 </a:solidFill>
                 <a:latin typeface="Courier New"/>
               </a:rPr>
@@ -40007,7 +39042,7 @@
             <a:fld id="{4B0E1F8A-6C1D-4E2A-9F3B-7A5C8D2E1F60}" type="slidenum">
               <a:rPr sz="1600" b="0" i="0">
                 <a:solidFill>
-                  <a:srgbClr val="5B6B82"/>
+                  <a:srgbClr val="0A2240"/>
                 </a:solidFill>
                 <a:latin typeface="Arial"/>
               </a:rPr>
@@ -40103,7 +39138,7 @@
             <a:r>
               <a:rPr sz="3400" b="1" i="0">
                 <a:solidFill>
-                  <a:srgbClr val="5B6B82"/>
+                  <a:srgbClr val="0A2240"/>
                 </a:solidFill>
                 <a:latin typeface="Arial"/>
               </a:rPr>
@@ -40120,14 +39155,14 @@
         </p:nvSpPr>
         <p:spPr>
           <a:xfrm>
-            <a:off x="548640" y="2176271"/>
-            <a:ext cx="1650492" cy="54864"/>
+            <a:off x="457200" y="2176271"/>
+            <a:ext cx="2710768" cy="54864"/>
           </a:xfrm>
           <a:prstGeom prst="rect">
             <a:avLst/>
           </a:prstGeom>
           <a:solidFill>
-            <a:srgbClr val="5B6B82"/>
+            <a:srgbClr val="0A2240"/>
           </a:solidFill>
           <a:ln>
             <a:noFill/>
@@ -40199,8 +39234,8 @@
         </p:nvSpPr>
         <p:spPr>
           <a:xfrm>
-            <a:off x="6324600" y="2176271"/>
-            <a:ext cx="1650492" cy="54864"/>
+            <a:off x="6233160" y="2176271"/>
+            <a:ext cx="2951125" cy="54864"/>
           </a:xfrm>
           <a:prstGeom prst="rect">
             <a:avLst/>
@@ -40473,7 +39508,7 @@
             <a:fld id="{4B0E1F8A-6C1D-4E2A-9F3B-7A5C8D2E1F60}" type="slidenum">
               <a:rPr sz="1600" b="0" i="0">
                 <a:solidFill>
-                  <a:srgbClr val="5B6B82"/>
+                  <a:srgbClr val="0A2240"/>
                 </a:solidFill>
                 <a:latin typeface="Arial"/>
               </a:rPr>
@@ -40781,7 +39816,7 @@
             <a:fld id="{4B0E1F8A-6C1D-4E2A-9F3B-7A5C8D2E1F60}" type="slidenum">
               <a:rPr sz="1600" b="0" i="0">
                 <a:solidFill>
-                  <a:srgbClr val="5B6B82"/>
+                  <a:srgbClr val="0A2240"/>
                 </a:solidFill>
                 <a:latin typeface="Arial"/>
               </a:rPr>
@@ -41019,7 +40054,7 @@
             <a:fld id="{4B0E1F8A-6C1D-4E2A-9F3B-7A5C8D2E1F60}" type="slidenum">
               <a:rPr sz="1600" b="0" i="0">
                 <a:solidFill>
-                  <a:srgbClr val="5B6B82"/>
+                  <a:srgbClr val="0A2240"/>
                 </a:solidFill>
                 <a:latin typeface="Arial"/>
               </a:rPr>
@@ -41115,7 +40150,7 @@
             <a:r>
               <a:rPr sz="3400" b="1" i="0">
                 <a:solidFill>
-                  <a:srgbClr val="123A6B"/>
+                  <a:srgbClr val="0072CE"/>
                 </a:solidFill>
                 <a:latin typeface="Arial"/>
               </a:rPr>
@@ -41150,7 +40185,7 @@
             <a:r>
               <a:rPr sz="3400" b="1" i="0">
                 <a:solidFill>
-                  <a:srgbClr val="123A6B"/>
+                  <a:srgbClr val="0072CE"/>
                 </a:solidFill>
                 <a:latin typeface="Arial"/>
               </a:rPr>
@@ -41511,7 +40546,7 @@
             <a:fld id="{4B0E1F8A-6C1D-4E2A-9F3B-7A5C8D2E1F60}" type="slidenum">
               <a:rPr sz="1600" b="0" i="0">
                 <a:solidFill>
-                  <a:srgbClr val="5B6B82"/>
+                  <a:srgbClr val="0A2240"/>
                 </a:solidFill>
                 <a:latin typeface="Arial"/>
               </a:rPr>
@@ -41749,7 +40784,7 @@
             <a:fld id="{4B0E1F8A-6C1D-4E2A-9F3B-7A5C8D2E1F60}" type="slidenum">
               <a:rPr sz="1600" b="0" i="0">
                 <a:solidFill>
-                  <a:srgbClr val="5B6B82"/>
+                  <a:srgbClr val="0A2240"/>
                 </a:solidFill>
                 <a:latin typeface="Arial"/>
               </a:rPr>
@@ -41891,7 +40926,7 @@
             <a:fld id="{4B0E1F8A-6C1D-4E2A-9F3B-7A5C8D2E1F60}" type="slidenum">
               <a:rPr sz="1600" b="0" i="0">
                 <a:solidFill>
-                  <a:srgbClr val="5B6B82"/>
+                  <a:srgbClr val="0A2240"/>
                 </a:solidFill>
                 <a:latin typeface="Arial"/>
               </a:rPr>
@@ -42129,7 +41164,7 @@
             <a:fld id="{4B0E1F8A-6C1D-4E2A-9F3B-7A5C8D2E1F60}" type="slidenum">
               <a:rPr sz="1600" b="0" i="0">
                 <a:solidFill>
-                  <a:srgbClr val="5B6B82"/>
+                  <a:srgbClr val="0A2240"/>
                 </a:solidFill>
                 <a:latin typeface="Arial"/>
               </a:rPr>
@@ -42647,7 +41682,7 @@
             <a:fld id="{4B0E1F8A-6C1D-4E2A-9F3B-7A5C8D2E1F60}" type="slidenum">
               <a:rPr sz="1600" b="0" i="0">
                 <a:solidFill>
-                  <a:srgbClr val="5B6B82"/>
+                  <a:srgbClr val="0A2240"/>
                 </a:solidFill>
                 <a:latin typeface="Arial"/>
               </a:rPr>
@@ -42787,7 +41822,7 @@
             <a:r>
               <a:rPr sz="3400" b="0" i="0">
                 <a:solidFill>
-                  <a:srgbClr val="5B6B82"/>
+                  <a:srgbClr val="0A2240"/>
                 </a:solidFill>
                 <a:latin typeface="Arial"/>
               </a:rPr>
@@ -42824,7 +41859,7 @@
             <a:fld id="{4B0E1F8A-6C1D-4E2A-9F3B-7A5C8D2E1F60}" type="slidenum">
               <a:rPr sz="1600" b="0" i="0">
                 <a:solidFill>
-                  <a:srgbClr val="5B6B82"/>
+                  <a:srgbClr val="0A2240"/>
                 </a:solidFill>
                 <a:latin typeface="Arial"/>
               </a:rPr>
@@ -43001,7 +42036,7 @@
             <a:fld id="{4B0E1F8A-6C1D-4E2A-9F3B-7A5C8D2E1F60}" type="slidenum">
               <a:rPr sz="1600" b="0" i="0">
                 <a:solidFill>
-                  <a:srgbClr val="5B6B82"/>
+                  <a:srgbClr val="0A2240"/>
                 </a:solidFill>
                 <a:latin typeface="Arial"/>
               </a:rPr>
